--- a/docs/pitch/Beetle-pitch.pptx
+++ b/docs/pitch/Beetle-pitch.pptx
@@ -112,7 +112,7 @@
   <p:extLst>
     <p:ext uri="{521415D9-36F7-43E2-AB2F-B90AF26B5E84}">
       <p14:sectionLst xmlns:p14="http://schemas.microsoft.com/office/powerpoint/2010/main">
-        <p14:section name="Beetle pitch" id="{298fa67b-bd4d-4905-6626-094fe9ffba75}">
+        <p14:section name="Beetle pitch" id="{619f5f1b-d9ed-eeea-12a4-72fc5db922cd}">
           <p14:sldIdLst>
             <p14:sldId id="256"/>
             <p14:sldId id="257"/>
@@ -702,7 +702,7 @@
           <a:p>
             <a:r>
               <a:rPr lang="en-US" dirty="0"/>
-              <a:t>Play the recording here. Captions follow the storyboard; shots that cannot be produced honestly are cut, not faked.</a:t>
+              <a:t>Play the recording here. Captions follow docs/STORYBOARD.md; the mode caption is set to whichever agent mode was green at recording time. Rehearsal timings: brief 14 s on a quiet GPU, edits 2 to 14 s, DISCONNECTED_GOAL refused and repaired in 3.0 s. Shots that cannot be produced honestly are cut, not faked.</a:t>
             </a:r>
             <a:endParaRPr lang="en-US" dirty="0"/>
           </a:p>
@@ -878,7 +878,7 @@
           <a:p>
             <a:r>
               <a:rPr lang="en-US" dirty="0"/>
-              <a:t>Read the measured numbers from the filled cards. If a card is still bracketed, say that the measurement is pending rather than guessing.</a:t>
+              <a:t>Read the cards. Say out loud: the 10 s brief target is not met; a valid brief takes 24 to 28 s warm on a quiet GPU and 14 s was seen once after normalization. Edits commit in 2 to 14 s. Session continuity and the offline proof are covered by tests or procedure but not yet measured live; say so rather than guessing. The 27b was never benchmarked.</a:t>
             </a:r>
             <a:endParaRPr lang="en-US" dirty="0"/>
           </a:p>
@@ -4400,7 +4400,7 @@
                   <a:schemeClr val="tx2"/>
                 </a:solidFill>
               </a:rPr>
-              <a:t>90 to 120 second demo recording, dropped in after rehearsal</a:t>
+              <a:t>Insert the rehearsal recording here (90 to 120 s). Not yet recorded at 13:40 CDT.</a:t>
             </a:r>
             <a:endParaRPr lang="en-US" sz="1400" dirty="0"/>
           </a:p>
@@ -4414,7 +4414,7 @@
                   <a:schemeClr val="tx2"/>
                 </a:solidFill>
               </a:rPr>
-              <a:t>Any time compression is labelled on screen</a:t>
+              <a:t>The caption names the agent mode used; any time compression is labelled on screen</a:t>
             </a:r>
             <a:endParaRPr lang="en-US" sz="1400" dirty="0"/>
           </a:p>
@@ -4648,7 +4648,7 @@
                   <a:schemeClr val="tx1"/>
                 </a:solidFill>
               </a:rPr>
-              <a:t>The validator refuses a world nobody can finish. The agent repairs it and commits only a passing version.</a:t>
+              <a:t>The validator refuses a world nobody can finish (DISCONNECTED_GOAL). The agent repairs it and commits only a passing version.</a:t>
             </a:r>
             <a:endParaRPr lang="en-US" sz="1000" dirty="0"/>
           </a:p>
@@ -4676,7 +4676,7 @@
                   <a:schemeClr val="tx1"/>
                 </a:solidFill>
               </a:rPr>
-              <a:t>Measured on one GB10. Local model, local agent, no cloud.</a:t>
+              <a:t>Measured on one GB10. Local model, local agent in [direct or OpenClaw] mode, no cloud.</a:t>
             </a:r>
             <a:endParaRPr lang="en-US" sz="1000" dirty="0"/>
           </a:p>
@@ -5802,7 +5802,7 @@
                   <a:schemeClr val="accent1"/>
                 </a:solidFill>
               </a:rPr>
-              <a:t>validation issues go back for repair, at most [max attempts] attempts, then the request fails honestly</a:t>
+              <a:t>validation issues go back for repair, at most 2 attempts, then the request fails honestly</a:t>
             </a:r>
             <a:endParaRPr lang="en-US" sz="900" dirty="0"/>
           </a:p>
@@ -6495,12 +6495,12 @@
         </p:nvSpPr>
         <p:spPr>
           <a:xfrm>
-            <a:off x="457200" y="1188720"/>
-            <a:ext cx="2651760" cy="1325880"/>
+            <a:off x="457200" y="1115568"/>
+            <a:ext cx="2651760" cy="987552"/>
           </a:xfrm>
           <a:prstGeom prst="roundRect">
             <a:avLst>
-              <a:gd name="adj" fmla="val 5517"/>
+              <a:gd name="adj" fmla="val 7407"/>
             </a:avLst>
           </a:prstGeom>
           <a:solidFill>
@@ -6522,8 +6522,8 @@
         </p:nvSpPr>
         <p:spPr>
           <a:xfrm>
-            <a:off x="621792" y="1316736"/>
-            <a:ext cx="2322576" cy="228600"/>
+            <a:off x="603504" y="1188720"/>
+            <a:ext cx="2359152" cy="182880"/>
           </a:xfrm>
           <a:prstGeom prst="rect">
             <a:avLst/>
@@ -6539,14 +6539,14 @@
               <a:buNone/>
             </a:pPr>
             <a:r>
-              <a:rPr lang="en-US" sz="1000" b="1" spc="200" kern="0" dirty="0">
+              <a:rPr lang="en-US" sz="900" b="1" spc="200" kern="0" dirty="0">
                 <a:solidFill>
                   <a:schemeClr val="accent1"/>
                 </a:solidFill>
               </a:rPr>
               <a:t>MODEL</a:t>
             </a:r>
-            <a:endParaRPr lang="en-US" sz="1000" dirty="0"/>
+            <a:endParaRPr lang="en-US" sz="900" dirty="0"/>
           </a:p>
         </p:txBody>
       </p:sp>
@@ -6558,8 +6558,8 @@
         </p:nvSpPr>
         <p:spPr>
           <a:xfrm>
-            <a:off x="621792" y="1572768"/>
-            <a:ext cx="2322576" cy="548640"/>
+            <a:off x="603504" y="1362456"/>
+            <a:ext cx="2359152" cy="274320"/>
           </a:xfrm>
           <a:prstGeom prst="rect">
             <a:avLst/>
@@ -6575,14 +6575,14 @@
               <a:buNone/>
             </a:pPr>
             <a:r>
-              <a:rPr lang="en-US" sz="1500" b="1" dirty="0">
+              <a:rPr lang="en-US" sz="1250" b="1" dirty="0">
                 <a:solidFill>
                   <a:schemeClr val="accent1"/>
                 </a:solidFill>
               </a:rPr>
-              <a:t>[model tag], [quantization]</a:t>
-            </a:r>
-            <a:endParaRPr lang="en-US" sz="1500" dirty="0"/>
+              <a:t>qwen3.5:4b, Q4_K_M</a:t>
+            </a:r>
+            <a:endParaRPr lang="en-US" sz="1250" dirty="0"/>
           </a:p>
         </p:txBody>
       </p:sp>
@@ -6594,8 +6594,8 @@
         </p:nvSpPr>
         <p:spPr>
           <a:xfrm>
-            <a:off x="621792" y="2157984"/>
-            <a:ext cx="2322576" cy="347472"/>
+            <a:off x="603504" y="1645920"/>
+            <a:ext cx="2359152" cy="438912"/>
           </a:xfrm>
           <a:prstGeom prst="rect">
             <a:avLst/>
@@ -6611,31 +6611,31 @@
               <a:buNone/>
             </a:pPr>
             <a:r>
-              <a:rPr lang="en-US" sz="1000" dirty="0">
+              <a:rPr lang="en-US" sz="750" dirty="0">
                 <a:solidFill>
                   <a:schemeClr val="tx2"/>
                 </a:solidFill>
               </a:rPr>
-              <a:t>on the GB10 via Ollama on loopback</a:t>
-            </a:r>
-            <a:endParaRPr lang="en-US" sz="1000" dirty="0"/>
-          </a:p>
-        </p:txBody>
-      </p:sp>
-      <p:sp>
-        <p:nvSpPr>
-          <p:cNvPr id="19" name="result card BRIEF TO PLAYABLE"/>
-          <p:cNvSpPr/>
-          <p:nvPr/>
-        </p:nvSpPr>
-        <p:spPr>
-          <a:xfrm>
-            <a:off x="3246120" y="1188720"/>
-            <a:ext cx="2651760" cy="1325880"/>
+              <a:t>4.7B, 3.4 GB, Ollama 0.35.1 on loopback. qwen3.8:27b not benchmarked: pull failed once, re-downloading. docs/MODEL_SELECTION.md</a:t>
+            </a:r>
+            <a:endParaRPr lang="en-US" sz="750" dirty="0"/>
+          </a:p>
+        </p:txBody>
+      </p:sp>
+      <p:sp>
+        <p:nvSpPr>
+          <p:cNvPr id="19" name="result card BRIEF, WARM, QUIET GPU"/>
+          <p:cNvSpPr/>
+          <p:nvPr/>
+        </p:nvSpPr>
+        <p:spPr>
+          <a:xfrm>
+            <a:off x="3246120" y="1115568"/>
+            <a:ext cx="2651760" cy="987552"/>
           </a:xfrm>
           <a:prstGeom prst="roundRect">
             <a:avLst>
-              <a:gd name="adj" fmla="val 5517"/>
+              <a:gd name="adj" fmla="val 7407"/>
             </a:avLst>
           </a:prstGeom>
           <a:solidFill>
@@ -6651,14 +6651,14 @@
       </p:sp>
       <p:sp>
         <p:nvSpPr>
-          <p:cNvPr id="20" name="label BRIEF TO PLAYABLE"/>
+          <p:cNvPr id="20" name="label BRIEF, WARM, QUIET GPU"/>
           <p:cNvSpPr txBox="1"/>
           <p:nvPr/>
         </p:nvSpPr>
         <p:spPr>
           <a:xfrm>
-            <a:off x="3410712" y="1316736"/>
-            <a:ext cx="2322576" cy="228600"/>
+            <a:off x="3392424" y="1188720"/>
+            <a:ext cx="2359152" cy="182880"/>
           </a:xfrm>
           <a:prstGeom prst="rect">
             <a:avLst/>
@@ -6674,27 +6674,27 @@
               <a:buNone/>
             </a:pPr>
             <a:r>
-              <a:rPr lang="en-US" sz="1000" b="1" spc="200" kern="0" dirty="0">
+              <a:rPr lang="en-US" sz="900" b="1" spc="200" kern="0" dirty="0">
                 <a:solidFill>
                   <a:schemeClr val="accent1"/>
                 </a:solidFill>
               </a:rPr>
-              <a:t>BRIEF TO PLAYABLE</a:t>
-            </a:r>
-            <a:endParaRPr lang="en-US" sz="1000" dirty="0"/>
-          </a:p>
-        </p:txBody>
-      </p:sp>
-      <p:sp>
-        <p:nvSpPr>
-          <p:cNvPr id="21" name="result value BRIEF TO PLAYABLE"/>
+              <a:t>BRIEF, WARM, QUIET GPU</a:t>
+            </a:r>
+            <a:endParaRPr lang="en-US" sz="900" dirty="0"/>
+          </a:p>
+        </p:txBody>
+      </p:sp>
+      <p:sp>
+        <p:nvSpPr>
+          <p:cNvPr id="21" name="result value BRIEF, WARM, QUIET GPU"/>
           <p:cNvSpPr txBox="1"/>
           <p:nvPr/>
         </p:nvSpPr>
         <p:spPr>
           <a:xfrm>
-            <a:off x="3410712" y="1572768"/>
-            <a:ext cx="2322576" cy="548640"/>
+            <a:off x="3392424" y="1362456"/>
+            <a:ext cx="2359152" cy="274320"/>
           </a:xfrm>
           <a:prstGeom prst="rect">
             <a:avLst/>
@@ -6710,27 +6710,27 @@
               <a:buNone/>
             </a:pPr>
             <a:r>
-              <a:rPr lang="en-US" sz="1500" b="1" dirty="0">
+              <a:rPr lang="en-US" sz="1250" b="1" dirty="0">
                 <a:solidFill>
                   <a:schemeClr val="accent1"/>
                 </a:solidFill>
               </a:rPr>
-              <a:t>[min] / [p50] / [max] s</a:t>
-            </a:r>
-            <a:endParaRPr lang="en-US" sz="1500" dirty="0"/>
-          </a:p>
-        </p:txBody>
-      </p:sp>
-      <p:sp>
-        <p:nvSpPr>
-          <p:cNvPr id="22" name="result sub BRIEF TO PLAYABLE"/>
+              <a:t>26.2 / 26.5 / 27.7 s</a:t>
+            </a:r>
+            <a:endParaRPr lang="en-US" sz="1250" dirty="0"/>
+          </a:p>
+        </p:txBody>
+      </p:sp>
+      <p:sp>
+        <p:nvSpPr>
+          <p:cNvPr id="22" name="result sub BRIEF, WARM, QUIET GPU"/>
           <p:cNvSpPr txBox="1"/>
           <p:nvPr/>
         </p:nvSpPr>
         <p:spPr>
           <a:xfrm>
-            <a:off x="3410712" y="2157984"/>
-            <a:ext cx="2322576" cy="347472"/>
+            <a:off x="3392424" y="1645920"/>
+            <a:ext cx="2359152" cy="438912"/>
           </a:xfrm>
           <a:prstGeom prst="rect">
             <a:avLst/>
@@ -6746,31 +6746,31 @@
               <a:buNone/>
             </a:pPr>
             <a:r>
-              <a:rPr lang="en-US" sz="1000" dirty="0">
+              <a:rPr lang="en-US" sz="750" dirty="0">
                 <a:solidFill>
                   <a:schemeClr val="tx2"/>
                 </a:solidFill>
               </a:rPr>
-              <a:t>over [N] runs, cold load [cold s] reported separately</a:t>
-            </a:r>
-            <a:endParaRPr lang="en-US" sz="1000" dirty="0"/>
-          </a:p>
-        </p:txBody>
-      </p:sp>
-      <p:sp>
-        <p:nvSpPr>
-          <p:cNvPr id="23" name="result card EDIT TO COMMIT"/>
-          <p:cNvSpPr/>
-          <p:nvPr/>
-        </p:nvSpPr>
-        <p:spPr>
-          <a:xfrm>
-            <a:off x="6035040" y="1188720"/>
-            <a:ext cx="2651760" cy="1325880"/>
+              <a:t>min / p50 / max, 3 runs, first draft valid (bench-qwen3.5_4b-1791049348895.json). 10 s target not met. 14 s once after normalization (RESULTS.md run 3).</a:t>
+            </a:r>
+            <a:endParaRPr lang="en-US" sz="750" dirty="0"/>
+          </a:p>
+        </p:txBody>
+      </p:sp>
+      <p:sp>
+        <p:nvSpPr>
+          <p:cNvPr id="23" name="result card COLD / CONTENDED GPU"/>
+          <p:cNvSpPr/>
+          <p:nvPr/>
+        </p:nvSpPr>
+        <p:spPr>
+          <a:xfrm>
+            <a:off x="6035040" y="1115568"/>
+            <a:ext cx="2651760" cy="987552"/>
           </a:xfrm>
           <a:prstGeom prst="roundRect">
             <a:avLst>
-              <a:gd name="adj" fmla="val 5517"/>
+              <a:gd name="adj" fmla="val 7407"/>
             </a:avLst>
           </a:prstGeom>
           <a:solidFill>
@@ -6786,14 +6786,14 @@
       </p:sp>
       <p:sp>
         <p:nvSpPr>
-          <p:cNvPr id="24" name="label EDIT TO COMMIT"/>
+          <p:cNvPr id="24" name="label COLD / CONTENDED GPU"/>
           <p:cNvSpPr txBox="1"/>
           <p:nvPr/>
         </p:nvSpPr>
         <p:spPr>
           <a:xfrm>
-            <a:off x="6199632" y="1316736"/>
-            <a:ext cx="2322576" cy="228600"/>
+            <a:off x="6181344" y="1188720"/>
+            <a:ext cx="2359152" cy="182880"/>
           </a:xfrm>
           <a:prstGeom prst="rect">
             <a:avLst/>
@@ -6809,27 +6809,27 @@
               <a:buNone/>
             </a:pPr>
             <a:r>
-              <a:rPr lang="en-US" sz="1000" b="1" spc="200" kern="0" dirty="0">
+              <a:rPr lang="en-US" sz="900" b="1" spc="200" kern="0" dirty="0">
                 <a:solidFill>
                   <a:schemeClr val="accent1"/>
                 </a:solidFill>
               </a:rPr>
-              <a:t>EDIT TO COMMIT</a:t>
-            </a:r>
-            <a:endParaRPr lang="en-US" sz="1000" dirty="0"/>
-          </a:p>
-        </p:txBody>
-      </p:sp>
-      <p:sp>
-        <p:nvSpPr>
-          <p:cNvPr id="25" name="result value EDIT TO COMMIT"/>
+              <a:t>COLD / CONTENDED GPU</a:t>
+            </a:r>
+            <a:endParaRPr lang="en-US" sz="900" dirty="0"/>
+          </a:p>
+        </p:txBody>
+      </p:sp>
+      <p:sp>
+        <p:nvSpPr>
+          <p:cNvPr id="25" name="result value COLD / CONTENDED GPU"/>
           <p:cNvSpPr txBox="1"/>
           <p:nvPr/>
         </p:nvSpPr>
         <p:spPr>
           <a:xfrm>
-            <a:off x="6199632" y="1572768"/>
-            <a:ext cx="2322576" cy="548640"/>
+            <a:off x="6181344" y="1362456"/>
+            <a:ext cx="2359152" cy="274320"/>
           </a:xfrm>
           <a:prstGeom prst="rect">
             <a:avLst/>
@@ -6845,27 +6845,27 @@
               <a:buNone/>
             </a:pPr>
             <a:r>
-              <a:rPr lang="en-US" sz="1500" b="1" dirty="0">
+              <a:rPr lang="en-US" sz="1250" b="1" dirty="0">
                 <a:solidFill>
                   <a:schemeClr val="accent1"/>
                 </a:solidFill>
               </a:rPr>
-              <a:t>[min] / [p50] / [max] s</a:t>
-            </a:r>
-            <a:endParaRPr lang="en-US" sz="1500" dirty="0"/>
-          </a:p>
-        </p:txBody>
-      </p:sp>
-      <p:sp>
-        <p:nvSpPr>
-          <p:cNvPr id="26" name="result sub EDIT TO COMMIT"/>
+              <a:t>23.1 s load; 58 to 214 s</a:t>
+            </a:r>
+            <a:endParaRPr lang="en-US" sz="1250" dirty="0"/>
+          </a:p>
+        </p:txBody>
+      </p:sp>
+      <p:sp>
+        <p:nvSpPr>
+          <p:cNvPr id="26" name="result sub COLD / CONTENDED GPU"/>
           <p:cNvSpPr txBox="1"/>
           <p:nvPr/>
         </p:nvSpPr>
         <p:spPr>
           <a:xfrm>
-            <a:off x="6199632" y="2157984"/>
-            <a:ext cx="2322576" cy="347472"/>
+            <a:off x="6181344" y="1645920"/>
+            <a:ext cx="2359152" cy="438912"/>
           </a:xfrm>
           <a:prstGeom prst="rect">
             <a:avLst/>
@@ -6881,31 +6881,31 @@
               <a:buNone/>
             </a:pPr>
             <a:r>
-              <a:rPr lang="en-US" sz="1000" dirty="0">
+              <a:rPr lang="en-US" sz="750" dirty="0">
                 <a:solidFill>
                   <a:schemeClr val="tx2"/>
                 </a:solidFill>
               </a:rPr>
-              <a:t>edit request to committed version</a:t>
-            </a:r>
-            <a:endParaRPr lang="en-US" sz="1000" dirty="0"/>
-          </a:p>
-        </p:txBody>
-      </p:sp>
-      <p:sp>
-        <p:nvSpPr>
-          <p:cNvPr id="27" name="result card INVALID EDITS CAUGHT"/>
-          <p:cNvSpPr/>
-          <p:nvPr/>
-        </p:nvSpPr>
-        <p:spPr>
-          <a:xfrm>
-            <a:off x="457200" y="2679192"/>
-            <a:ext cx="2651760" cy="1325880"/>
+              <a:t>cold: 23.1 s model load in a 54.4 s first draft (probe-run.log). Contended: drafts 58.8 to 214.1 s, one edit 45.1 s (bench-qwen3.5_4b-1791050596040.json).</a:t>
+            </a:r>
+            <a:endParaRPr lang="en-US" sz="750" dirty="0"/>
+          </a:p>
+        </p:txBody>
+      </p:sp>
+      <p:sp>
+        <p:nvSpPr>
+          <p:cNvPr id="27" name="result card EDIT TO COMMIT"/>
+          <p:cNvSpPr/>
+          <p:nvPr/>
+        </p:nvSpPr>
+        <p:spPr>
+          <a:xfrm>
+            <a:off x="457200" y="2157984"/>
+            <a:ext cx="2651760" cy="987552"/>
           </a:xfrm>
           <a:prstGeom prst="roundRect">
             <a:avLst>
-              <a:gd name="adj" fmla="val 5517"/>
+              <a:gd name="adj" fmla="val 7407"/>
             </a:avLst>
           </a:prstGeom>
           <a:solidFill>
@@ -6921,14 +6921,14 @@
       </p:sp>
       <p:sp>
         <p:nvSpPr>
-          <p:cNvPr id="28" name="label INVALID EDITS CAUGHT"/>
+          <p:cNvPr id="28" name="label EDIT TO COMMIT"/>
           <p:cNvSpPr txBox="1"/>
           <p:nvPr/>
         </p:nvSpPr>
         <p:spPr>
           <a:xfrm>
-            <a:off x="621792" y="2807208"/>
-            <a:ext cx="2322576" cy="228600"/>
+            <a:off x="603504" y="2231136"/>
+            <a:ext cx="2359152" cy="182880"/>
           </a:xfrm>
           <a:prstGeom prst="rect">
             <a:avLst/>
@@ -6944,27 +6944,27 @@
               <a:buNone/>
             </a:pPr>
             <a:r>
-              <a:rPr lang="en-US" sz="1000" b="1" spc="200" kern="0" dirty="0">
+              <a:rPr lang="en-US" sz="900" b="1" spc="200" kern="0" dirty="0">
                 <a:solidFill>
                   <a:schemeClr val="accent1"/>
                 </a:solidFill>
               </a:rPr>
-              <a:t>INVALID EDITS CAUGHT</a:t>
-            </a:r>
-            <a:endParaRPr lang="en-US" sz="1000" dirty="0"/>
-          </a:p>
-        </p:txBody>
-      </p:sp>
-      <p:sp>
-        <p:nvSpPr>
-          <p:cNvPr id="29" name="result value INVALID EDITS CAUGHT"/>
+              <a:t>EDIT TO COMMIT</a:t>
+            </a:r>
+            <a:endParaRPr lang="en-US" sz="900" dirty="0"/>
+          </a:p>
+        </p:txBody>
+      </p:sp>
+      <p:sp>
+        <p:nvSpPr>
+          <p:cNvPr id="29" name="result value EDIT TO COMMIT"/>
           <p:cNvSpPr txBox="1"/>
           <p:nvPr/>
         </p:nvSpPr>
         <p:spPr>
           <a:xfrm>
-            <a:off x="621792" y="3063240"/>
-            <a:ext cx="2322576" cy="548640"/>
+            <a:off x="603504" y="2404872"/>
+            <a:ext cx="2359152" cy="274320"/>
           </a:xfrm>
           <a:prstGeom prst="rect">
             <a:avLst/>
@@ -6980,27 +6980,27 @@
               <a:buNone/>
             </a:pPr>
             <a:r>
-              <a:rPr lang="en-US" sz="1500" b="1" dirty="0">
+              <a:rPr lang="en-US" sz="1250" b="1" dirty="0">
                 <a:solidFill>
                   <a:schemeClr val="accent1"/>
                 </a:solidFill>
               </a:rPr>
-              <a:t>[caught] of [attempts]</a:t>
-            </a:r>
-            <a:endParaRPr lang="en-US" sz="1500" dirty="0"/>
-          </a:p>
-        </p:txBody>
-      </p:sp>
-      <p:sp>
-        <p:nvSpPr>
-          <p:cNvPr id="30" name="result sub INVALID EDITS CAUGHT"/>
+              <a:t>2.0 / 8.0 / 14.0 s</a:t>
+            </a:r>
+            <a:endParaRPr lang="en-US" sz="1250" dirty="0"/>
+          </a:p>
+        </p:txBody>
+      </p:sp>
+      <p:sp>
+        <p:nvSpPr>
+          <p:cNvPr id="30" name="result sub EDIT TO COMMIT"/>
           <p:cNvSpPr txBox="1"/>
           <p:nvPr/>
         </p:nvSpPr>
         <p:spPr>
           <a:xfrm>
-            <a:off x="621792" y="3648456"/>
-            <a:ext cx="2322576" cy="347472"/>
+            <a:off x="603504" y="2688336"/>
+            <a:ext cx="2359152" cy="438912"/>
           </a:xfrm>
           <a:prstGeom prst="rect">
             <a:avLst/>
@@ -7016,31 +7016,31 @@
               <a:buNone/>
             </a:pPr>
             <a:r>
-              <a:rPr lang="en-US" sz="1000" dirty="0">
+              <a:rPr lang="en-US" sz="750" dirty="0">
                 <a:solidFill>
                   <a:schemeClr val="tx2"/>
                 </a:solidFill>
               </a:rPr>
-              <a:t>repairs that succeeded: [repaired]</a:t>
-            </a:r>
-            <a:endParaRPr lang="en-US" sz="1000" dirty="0"/>
-          </a:p>
-        </p:txBody>
-      </p:sp>
-      <p:sp>
-        <p:nvSpPr>
-          <p:cNvPr id="31" name="result card SESSION CONTINUITY"/>
-          <p:cNvSpPr/>
-          <p:nvPr/>
-        </p:nvSpPr>
-        <p:spPr>
-          <a:xfrm>
-            <a:off x="3246120" y="2679192"/>
-            <a:ext cx="2651760" cy="1325880"/>
+              <a:t>min / p50 / max, 6 edits, 5 of 6 committed; run 3 after normalization, quiet GPU, direct mode (run-1791052136845.json). Run 2 before: 2 of 6, 3.0 s each.</a:t>
+            </a:r>
+            <a:endParaRPr lang="en-US" sz="750" dirty="0"/>
+          </a:p>
+        </p:txBody>
+      </p:sp>
+      <p:sp>
+        <p:nvSpPr>
+          <p:cNvPr id="31" name="result card INVALID EDITS CAUGHT"/>
+          <p:cNvSpPr/>
+          <p:nvPr/>
+        </p:nvSpPr>
+        <p:spPr>
+          <a:xfrm>
+            <a:off x="3246120" y="2157984"/>
+            <a:ext cx="2651760" cy="987552"/>
           </a:xfrm>
           <a:prstGeom prst="roundRect">
             <a:avLst>
-              <a:gd name="adj" fmla="val 5517"/>
+              <a:gd name="adj" fmla="val 7407"/>
             </a:avLst>
           </a:prstGeom>
           <a:solidFill>
@@ -7056,14 +7056,14 @@
       </p:sp>
       <p:sp>
         <p:nvSpPr>
-          <p:cNvPr id="32" name="label SESSION CONTINUITY"/>
+          <p:cNvPr id="32" name="label INVALID EDITS CAUGHT"/>
           <p:cNvSpPr txBox="1"/>
           <p:nvPr/>
         </p:nvSpPr>
         <p:spPr>
           <a:xfrm>
-            <a:off x="3410712" y="2807208"/>
-            <a:ext cx="2322576" cy="228600"/>
+            <a:off x="3392424" y="2231136"/>
+            <a:ext cx="2359152" cy="182880"/>
           </a:xfrm>
           <a:prstGeom prst="rect">
             <a:avLst/>
@@ -7079,27 +7079,27 @@
               <a:buNone/>
             </a:pPr>
             <a:r>
-              <a:rPr lang="en-US" sz="1000" b="1" spc="200" kern="0" dirty="0">
+              <a:rPr lang="en-US" sz="900" b="1" spc="200" kern="0" dirty="0">
                 <a:solidFill>
                   <a:schemeClr val="accent1"/>
                 </a:solidFill>
               </a:rPr>
-              <a:t>SESSION CONTINUITY</a:t>
-            </a:r>
-            <a:endParaRPr lang="en-US" sz="1000" dirty="0"/>
-          </a:p>
-        </p:txBody>
-      </p:sp>
-      <p:sp>
-        <p:nvSpPr>
-          <p:cNvPr id="33" name="result value SESSION CONTINUITY"/>
+              <a:t>INVALID EDITS CAUGHT</a:t>
+            </a:r>
+            <a:endParaRPr lang="en-US" sz="900" dirty="0"/>
+          </a:p>
+        </p:txBody>
+      </p:sp>
+      <p:sp>
+        <p:nvSpPr>
+          <p:cNvPr id="33" name="result value INVALID EDITS CAUGHT"/>
           <p:cNvSpPr txBox="1"/>
           <p:nvPr/>
         </p:nvSpPr>
         <p:spPr>
           <a:xfrm>
-            <a:off x="3410712" y="3063240"/>
-            <a:ext cx="2322576" cy="548640"/>
+            <a:off x="3392424" y="2404872"/>
+            <a:ext cx="2359152" cy="274320"/>
           </a:xfrm>
           <a:prstGeom prst="rect">
             <a:avLst/>
@@ -7115,27 +7115,27 @@
               <a:buNone/>
             </a:pPr>
             <a:r>
-              <a:rPr lang="en-US" sz="1500" b="1" dirty="0">
+              <a:rPr lang="en-US" sz="1250" b="1" dirty="0">
                 <a:solidFill>
                   <a:schemeClr val="accent1"/>
                 </a:solidFill>
               </a:rPr>
-              <a:t>[players kept] players, [relics kept] relics</a:t>
-            </a:r>
-            <a:endParaRPr lang="en-US" sz="1500" dirty="0"/>
-          </a:p>
-        </p:txBody>
-      </p:sp>
-      <p:sp>
-        <p:nvSpPr>
-          <p:cNvPr id="34" name="result sub SESSION CONTINUITY"/>
+              <a:t>6 of 12 refused</a:t>
+            </a:r>
+            <a:endParaRPr lang="en-US" sz="1250" dirty="0"/>
+          </a:p>
+        </p:txBody>
+      </p:sp>
+      <p:sp>
+        <p:nvSpPr>
+          <p:cNvPr id="34" name="result sub INVALID EDITS CAUGHT"/>
           <p:cNvSpPr txBox="1"/>
           <p:nvPr/>
         </p:nvSpPr>
         <p:spPr>
           <a:xfrm>
-            <a:off x="3410712" y="3648456"/>
-            <a:ext cx="2322576" cy="347472"/>
+            <a:off x="3392424" y="2688336"/>
+            <a:ext cx="2359152" cy="438912"/>
           </a:xfrm>
           <a:prstGeom prst="rect">
             <a:avLst/>
@@ -7151,31 +7151,31 @@
               <a:buNone/>
             </a:pPr>
             <a:r>
-              <a:rPr lang="en-US" sz="1000" dirty="0">
+              <a:rPr lang="en-US" sz="750" dirty="0">
                 <a:solidFill>
                   <a:schemeClr val="tx2"/>
                 </a:solidFill>
               </a:rPr>
-              <a:t>[reconnects] reconnects across [N commits] commits</a:t>
-            </a:r>
-            <a:endParaRPr lang="en-US" sz="1000" dirty="0"/>
-          </a:p>
-        </p:txBody>
-      </p:sp>
-      <p:sp>
-        <p:nvSpPr>
-          <p:cNvPr id="35" name="result card OFFLINE PROOF"/>
-          <p:cNvSpPr/>
-          <p:nvPr/>
-        </p:nvSpPr>
-        <p:spPr>
-          <a:xfrm>
-            <a:off x="6035040" y="2679192"/>
-            <a:ext cx="2651760" cy="1325880"/>
+              <a:t>runs 2 and 3 (RESULTS.md); repairs that then committed: 1 (run 3 E6); invalid worlds committed: 0. On garden5 a DISCONNECTED_GOAL refusal was repaired and committed in 3.0 s.</a:t>
+            </a:r>
+            <a:endParaRPr lang="en-US" sz="750" dirty="0"/>
+          </a:p>
+        </p:txBody>
+      </p:sp>
+      <p:sp>
+        <p:nvSpPr>
+          <p:cNvPr id="35" name="result card NORMALIZATION EFFECT"/>
+          <p:cNvSpPr/>
+          <p:nvPr/>
+        </p:nvSpPr>
+        <p:spPr>
+          <a:xfrm>
+            <a:off x="6035040" y="2157984"/>
+            <a:ext cx="2651760" cy="987552"/>
           </a:xfrm>
           <a:prstGeom prst="roundRect">
             <a:avLst>
-              <a:gd name="adj" fmla="val 5517"/>
+              <a:gd name="adj" fmla="val 7407"/>
             </a:avLst>
           </a:prstGeom>
           <a:solidFill>
@@ -7191,14 +7191,14 @@
       </p:sp>
       <p:sp>
         <p:nvSpPr>
-          <p:cNvPr id="36" name="label OFFLINE PROOF"/>
+          <p:cNvPr id="36" name="label NORMALIZATION EFFECT"/>
           <p:cNvSpPr txBox="1"/>
           <p:nvPr/>
         </p:nvSpPr>
         <p:spPr>
           <a:xfrm>
-            <a:off x="6199632" y="2807208"/>
-            <a:ext cx="2322576" cy="228600"/>
+            <a:off x="6181344" y="2231136"/>
+            <a:ext cx="2359152" cy="182880"/>
           </a:xfrm>
           <a:prstGeom prst="rect">
             <a:avLst/>
@@ -7214,27 +7214,432 @@
               <a:buNone/>
             </a:pPr>
             <a:r>
-              <a:rPr lang="en-US" sz="1000" b="1" spc="200" kern="0" dirty="0">
+              <a:rPr lang="en-US" sz="900" b="1" spc="200" kern="0" dirty="0">
                 <a:solidFill>
                   <a:schemeClr val="accent1"/>
                 </a:solidFill>
               </a:rPr>
+              <a:t>NORMALIZATION EFFECT</a:t>
+            </a:r>
+            <a:endParaRPr lang="en-US" sz="900" dirty="0"/>
+          </a:p>
+        </p:txBody>
+      </p:sp>
+      <p:sp>
+        <p:nvSpPr>
+          <p:cNvPr id="37" name="result value NORMALIZATION EFFECT"/>
+          <p:cNvSpPr txBox="1"/>
+          <p:nvPr/>
+        </p:nvSpPr>
+        <p:spPr>
+          <a:xfrm>
+            <a:off x="6181344" y="2404872"/>
+            <a:ext cx="2359152" cy="274320"/>
+          </a:xfrm>
+          <a:prstGeom prst="rect">
+            <a:avLst/>
+          </a:prstGeom>
+          <a:noFill/>
+          <a:ln/>
+        </p:spPr>
+        <p:txBody>
+          <a:bodyPr wrap="square" lIns="0" tIns="0" rIns="0" bIns="0" rtlCol="0" anchor="ctr"/>
+          <a:lstStyle/>
+          <a:p>
+            <a:pPr indent="0" marL="0">
+              <a:buNone/>
+            </a:pPr>
+            <a:r>
+              <a:rPr lang="en-US" sz="1250" b="1" dirty="0">
+                <a:solidFill>
+                  <a:schemeClr val="accent1"/>
+                </a:solidFill>
+              </a:rPr>
+              <a:t>2 of 30 to 13 of 30</a:t>
+            </a:r>
+            <a:endParaRPr lang="en-US" sz="1250" dirty="0"/>
+          </a:p>
+        </p:txBody>
+      </p:sp>
+      <p:sp>
+        <p:nvSpPr>
+          <p:cNvPr id="38" name="result sub NORMALIZATION EFFECT"/>
+          <p:cNvSpPr txBox="1"/>
+          <p:nvPr/>
+        </p:nvSpPr>
+        <p:spPr>
+          <a:xfrm>
+            <a:off x="6181344" y="2688336"/>
+            <a:ext cx="2359152" cy="438912"/>
+          </a:xfrm>
+          <a:prstGeom prst="rect">
+            <a:avLst/>
+          </a:prstGeom>
+          <a:noFill/>
+          <a:ln/>
+        </p:spPr>
+        <p:txBody>
+          <a:bodyPr wrap="square" lIns="0" tIns="0" rIns="0" bIns="0" rtlCol="0" anchor="t"/>
+          <a:lstStyle/>
+          <a:p>
+            <a:pPr indent="0" marL="0">
+              <a:buNone/>
+            </a:pPr>
+            <a:r>
+              <a:rPr lang="en-US" sz="750" dirty="0">
+                <a:solidFill>
+                  <a:schemeClr val="tx2"/>
+                </a:solidFill>
+              </a:rPr>
+              <a:t>corpus validity without vs with the deterministic normalizer (MODEL_FAILURE_MODES.md, corpus/summary.json). Live edits committed: 2 of 6 to 5 of 6.</a:t>
+            </a:r>
+            <a:endParaRPr lang="en-US" sz="750" dirty="0"/>
+          </a:p>
+        </p:txBody>
+      </p:sp>
+      <p:sp>
+        <p:nvSpPr>
+          <p:cNvPr id="39" name="result card LATENCY, LOOPBACK"/>
+          <p:cNvSpPr/>
+          <p:nvPr/>
+        </p:nvSpPr>
+        <p:spPr>
+          <a:xfrm>
+            <a:off x="457200" y="3200400"/>
+            <a:ext cx="2651760" cy="987552"/>
+          </a:xfrm>
+          <a:prstGeom prst="roundRect">
+            <a:avLst>
+              <a:gd name="adj" fmla="val 7407"/>
+            </a:avLst>
+          </a:prstGeom>
+          <a:solidFill>
+            <a:schemeClr val="bg2"/>
+          </a:solidFill>
+          <a:ln w="9525">
+            <a:solidFill>
+              <a:schemeClr val="accent4"/>
+            </a:solidFill>
+            <a:prstDash val="solid"/>
+          </a:ln>
+        </p:spPr>
+      </p:sp>
+      <p:sp>
+        <p:nvSpPr>
+          <p:cNvPr id="40" name="label LATENCY, LOOPBACK"/>
+          <p:cNvSpPr txBox="1"/>
+          <p:nvPr/>
+        </p:nvSpPr>
+        <p:spPr>
+          <a:xfrm>
+            <a:off x="603504" y="3273552"/>
+            <a:ext cx="2359152" cy="182880"/>
+          </a:xfrm>
+          <a:prstGeom prst="rect">
+            <a:avLst/>
+          </a:prstGeom>
+          <a:noFill/>
+          <a:ln/>
+        </p:spPr>
+        <p:txBody>
+          <a:bodyPr wrap="square" lIns="0" tIns="0" rIns="0" bIns="0" rtlCol="0" anchor="ctr"/>
+          <a:lstStyle/>
+          <a:p>
+            <a:pPr indent="0" marL="0">
+              <a:buNone/>
+            </a:pPr>
+            <a:r>
+              <a:rPr lang="en-US" sz="900" b="1" spc="200" kern="0" dirty="0">
+                <a:solidFill>
+                  <a:schemeClr val="accent1"/>
+                </a:solidFill>
+              </a:rPr>
+              <a:t>LATENCY, LOOPBACK</a:t>
+            </a:r>
+            <a:endParaRPr lang="en-US" sz="900" dirty="0"/>
+          </a:p>
+        </p:txBody>
+      </p:sp>
+      <p:sp>
+        <p:nvSpPr>
+          <p:cNvPr id="41" name="result value LATENCY, LOOPBACK"/>
+          <p:cNvSpPr txBox="1"/>
+          <p:nvPr/>
+        </p:nvSpPr>
+        <p:spPr>
+          <a:xfrm>
+            <a:off x="603504" y="3447288"/>
+            <a:ext cx="2359152" cy="274320"/>
+          </a:xfrm>
+          <a:prstGeom prst="rect">
+            <a:avLst/>
+          </a:prstGeom>
+          <a:noFill/>
+          <a:ln/>
+        </p:spPr>
+        <p:txBody>
+          <a:bodyPr wrap="square" lIns="0" tIns="0" rIns="0" bIns="0" rtlCol="0" anchor="ctr"/>
+          <a:lstStyle/>
+          <a:p>
+            <a:pPr indent="0" marL="0">
+              <a:buNone/>
+            </a:pPr>
+            <a:r>
+              <a:rPr lang="en-US" sz="1250" b="1" dirty="0">
+                <a:solidFill>
+                  <a:schemeClr val="accent1"/>
+                </a:solidFill>
+              </a:rPr>
+              <a:t>0.48 ms RTT, 18.8 ms tick</a:t>
+            </a:r>
+            <a:endParaRPr lang="en-US" sz="1250" dirty="0"/>
+          </a:p>
+        </p:txBody>
+      </p:sp>
+      <p:sp>
+        <p:nvSpPr>
+          <p:cNvPr id="42" name="result sub LATENCY, LOOPBACK"/>
+          <p:cNvSpPr txBox="1"/>
+          <p:nvPr/>
+        </p:nvSpPr>
+        <p:spPr>
+          <a:xfrm>
+            <a:off x="603504" y="3730752"/>
+            <a:ext cx="2359152" cy="438912"/>
+          </a:xfrm>
+          <a:prstGeom prst="rect">
+            <a:avLst/>
+          </a:prstGeom>
+          <a:noFill/>
+          <a:ln/>
+        </p:spPr>
+        <p:txBody>
+          <a:bodyPr wrap="square" lIns="0" tIns="0" rIns="0" bIns="0" rtlCol="0" anchor="t"/>
+          <a:lstStyle/>
+          <a:p>
+            <a:pPr indent="0" marL="0">
+              <a:buNone/>
+            </a:pPr>
+            <a:r>
+              <a:rPr lang="en-US" sz="750" dirty="0">
+                <a:solidFill>
+                  <a:schemeClr val="tx2"/>
+                </a:solidFill>
+              </a:rPr>
+              <a:t>p50, scripted controllers (p95 0.81 and 33.1 ms; LATENCY.md). Not input to photon: no phone, Wi-Fi, browser or display included.</a:t>
+            </a:r>
+            <a:endParaRPr lang="en-US" sz="750" dirty="0"/>
+          </a:p>
+        </p:txBody>
+      </p:sp>
+      <p:sp>
+        <p:nvSpPr>
+          <p:cNvPr id="43" name="result card SESSION CONTINUITY"/>
+          <p:cNvSpPr/>
+          <p:nvPr/>
+        </p:nvSpPr>
+        <p:spPr>
+          <a:xfrm>
+            <a:off x="3246120" y="3200400"/>
+            <a:ext cx="2651760" cy="987552"/>
+          </a:xfrm>
+          <a:prstGeom prst="roundRect">
+            <a:avLst>
+              <a:gd name="adj" fmla="val 7407"/>
+            </a:avLst>
+          </a:prstGeom>
+          <a:solidFill>
+            <a:schemeClr val="bg2"/>
+          </a:solidFill>
+          <a:ln w="9525">
+            <a:solidFill>
+              <a:schemeClr val="accent4"/>
+            </a:solidFill>
+            <a:prstDash val="solid"/>
+          </a:ln>
+        </p:spPr>
+      </p:sp>
+      <p:sp>
+        <p:nvSpPr>
+          <p:cNvPr id="44" name="label SESSION CONTINUITY"/>
+          <p:cNvSpPr txBox="1"/>
+          <p:nvPr/>
+        </p:nvSpPr>
+        <p:spPr>
+          <a:xfrm>
+            <a:off x="3392424" y="3273552"/>
+            <a:ext cx="2359152" cy="182880"/>
+          </a:xfrm>
+          <a:prstGeom prst="rect">
+            <a:avLst/>
+          </a:prstGeom>
+          <a:noFill/>
+          <a:ln/>
+        </p:spPr>
+        <p:txBody>
+          <a:bodyPr wrap="square" lIns="0" tIns="0" rIns="0" bIns="0" rtlCol="0" anchor="ctr"/>
+          <a:lstStyle/>
+          <a:p>
+            <a:pPr indent="0" marL="0">
+              <a:buNone/>
+            </a:pPr>
+            <a:r>
+              <a:rPr lang="en-US" sz="900" b="1" spc="200" kern="0" dirty="0">
+                <a:solidFill>
+                  <a:schemeClr val="accent1"/>
+                </a:solidFill>
+              </a:rPr>
+              <a:t>SESSION CONTINUITY</a:t>
+            </a:r>
+            <a:endParaRPr lang="en-US" sz="900" dirty="0"/>
+          </a:p>
+        </p:txBody>
+      </p:sp>
+      <p:sp>
+        <p:nvSpPr>
+          <p:cNvPr id="45" name="result value SESSION CONTINUITY"/>
+          <p:cNvSpPr txBox="1"/>
+          <p:nvPr/>
+        </p:nvSpPr>
+        <p:spPr>
+          <a:xfrm>
+            <a:off x="3392424" y="3447288"/>
+            <a:ext cx="2359152" cy="274320"/>
+          </a:xfrm>
+          <a:prstGeom prst="rect">
+            <a:avLst/>
+          </a:prstGeom>
+          <a:noFill/>
+          <a:ln/>
+        </p:spPr>
+        <p:txBody>
+          <a:bodyPr wrap="square" lIns="0" tIns="0" rIns="0" bIns="0" rtlCol="0" anchor="ctr"/>
+          <a:lstStyle/>
+          <a:p>
+            <a:pPr indent="0" marL="0">
+              <a:buNone/>
+            </a:pPr>
+            <a:r>
+              <a:rPr lang="en-US" sz="1250" b="1" dirty="0">
+                <a:solidFill>
+                  <a:schemeClr val="accent1"/>
+                </a:solidFill>
+              </a:rPr>
+              <a:t>not measured live</a:t>
+            </a:r>
+            <a:endParaRPr lang="en-US" sz="1250" dirty="0"/>
+          </a:p>
+        </p:txBody>
+      </p:sp>
+      <p:sp>
+        <p:nvSpPr>
+          <p:cNvPr id="46" name="result sub SESSION CONTINUITY"/>
+          <p:cNvSpPr txBox="1"/>
+          <p:nvPr/>
+        </p:nvSpPr>
+        <p:spPr>
+          <a:xfrm>
+            <a:off x="3392424" y="3730752"/>
+            <a:ext cx="2359152" cy="438912"/>
+          </a:xfrm>
+          <a:prstGeom prst="rect">
+            <a:avLst/>
+          </a:prstGeom>
+          <a:noFill/>
+          <a:ln/>
+        </p:spPr>
+        <p:txBody>
+          <a:bodyPr wrap="square" lIns="0" tIns="0" rIns="0" bIns="0" rtlCol="0" anchor="t"/>
+          <a:lstStyle/>
+          <a:p>
+            <a:pPr indent="0" marL="0">
+              <a:buNone/>
+            </a:pPr>
+            <a:r>
+              <a:rPr lang="en-US" sz="750" dirty="0">
+                <a:solidFill>
+                  <a:schemeClr val="tx2"/>
+                </a:solidFill>
+              </a:rPr>
+              <a:t>no player connected in runs 2 and 3. Preserved ids, relics, score and reconnect are covered by integration tests with real sockets (BUILD_STATUS.md 10, 12).</a:t>
+            </a:r>
+            <a:endParaRPr lang="en-US" sz="750" dirty="0"/>
+          </a:p>
+        </p:txBody>
+      </p:sp>
+      <p:sp>
+        <p:nvSpPr>
+          <p:cNvPr id="47" name="result card OFFLINE PROOF"/>
+          <p:cNvSpPr/>
+          <p:nvPr/>
+        </p:nvSpPr>
+        <p:spPr>
+          <a:xfrm>
+            <a:off x="6035040" y="3200400"/>
+            <a:ext cx="2651760" cy="987552"/>
+          </a:xfrm>
+          <a:prstGeom prst="roundRect">
+            <a:avLst>
+              <a:gd name="adj" fmla="val 7407"/>
+            </a:avLst>
+          </a:prstGeom>
+          <a:solidFill>
+            <a:schemeClr val="bg2"/>
+          </a:solidFill>
+          <a:ln w="9525">
+            <a:solidFill>
+              <a:schemeClr val="accent4"/>
+            </a:solidFill>
+            <a:prstDash val="solid"/>
+          </a:ln>
+        </p:spPr>
+      </p:sp>
+      <p:sp>
+        <p:nvSpPr>
+          <p:cNvPr id="48" name="label OFFLINE PROOF"/>
+          <p:cNvSpPr txBox="1"/>
+          <p:nvPr/>
+        </p:nvSpPr>
+        <p:spPr>
+          <a:xfrm>
+            <a:off x="6181344" y="3273552"/>
+            <a:ext cx="2359152" cy="182880"/>
+          </a:xfrm>
+          <a:prstGeom prst="rect">
+            <a:avLst/>
+          </a:prstGeom>
+          <a:noFill/>
+          <a:ln/>
+        </p:spPr>
+        <p:txBody>
+          <a:bodyPr wrap="square" lIns="0" tIns="0" rIns="0" bIns="0" rtlCol="0" anchor="ctr"/>
+          <a:lstStyle/>
+          <a:p>
+            <a:pPr indent="0" marL="0">
+              <a:buNone/>
+            </a:pPr>
+            <a:r>
+              <a:rPr lang="en-US" sz="900" b="1" spc="200" kern="0" dirty="0">
+                <a:solidFill>
+                  <a:schemeClr val="accent1"/>
+                </a:solidFill>
+              </a:rPr>
               <a:t>OFFLINE PROOF</a:t>
             </a:r>
-            <a:endParaRPr lang="en-US" sz="1000" dirty="0"/>
-          </a:p>
-        </p:txBody>
-      </p:sp>
-      <p:sp>
-        <p:nvSpPr>
-          <p:cNvPr id="37" name="result value OFFLINE PROOF"/>
+            <a:endParaRPr lang="en-US" sz="900" dirty="0"/>
+          </a:p>
+        </p:txBody>
+      </p:sp>
+      <p:sp>
+        <p:nvSpPr>
+          <p:cNvPr id="49" name="result value OFFLINE PROOF"/>
           <p:cNvSpPr txBox="1"/>
           <p:nvPr/>
         </p:nvSpPr>
         <p:spPr>
           <a:xfrm>
-            <a:off x="6199632" y="3063240"/>
-            <a:ext cx="2322576" cy="548640"/>
+            <a:off x="6181344" y="3447288"/>
+            <a:ext cx="2359152" cy="274320"/>
           </a:xfrm>
           <a:prstGeom prst="rect">
             <a:avLst/>
@@ -7250,27 +7655,27 @@
               <a:buNone/>
             </a:pPr>
             <a:r>
-              <a:rPr lang="en-US" sz="1500" b="1" dirty="0">
+              <a:rPr lang="en-US" sz="1250" b="1" dirty="0">
                 <a:solidFill>
                   <a:schemeClr val="accent1"/>
                 </a:solidFill>
               </a:rPr>
-              <a:t>[what was disconnected]</a:t>
-            </a:r>
-            <a:endParaRPr lang="en-US" sz="1500" dirty="0"/>
-          </a:p>
-        </p:txBody>
-      </p:sp>
-      <p:sp>
-        <p:nvSpPr>
-          <p:cNvPr id="38" name="result sub OFFLINE PROOF"/>
+              <a:t>not run</a:t>
+            </a:r>
+            <a:endParaRPr lang="en-US" sz="1250" dirty="0"/>
+          </a:p>
+        </p:txBody>
+      </p:sp>
+      <p:sp>
+        <p:nvSpPr>
+          <p:cNvPr id="50" name="result sub OFFLINE PROOF"/>
           <p:cNvSpPr txBox="1"/>
           <p:nvPr/>
         </p:nvSpPr>
         <p:spPr>
           <a:xfrm>
-            <a:off x="6199632" y="3648456"/>
-            <a:ext cx="2322576" cy="347472"/>
+            <a:off x="6181344" y="3730752"/>
+            <a:ext cx="2359152" cy="438912"/>
           </a:xfrm>
           <a:prstGeom prst="rect">
             <a:avLst/>
@@ -7286,27 +7691,27 @@
               <a:buNone/>
             </a:pPr>
             <a:r>
-              <a:rPr lang="en-US" sz="1000" dirty="0">
+              <a:rPr lang="en-US" sz="750" dirty="0">
                 <a:solidFill>
                   <a:schemeClr val="tx2"/>
                 </a:solidFill>
               </a:rPr>
-              <a:t>still worked: [what still worked]</a:t>
-            </a:r>
-            <a:endParaRPr lang="en-US" sz="1000" dirty="0"/>
-          </a:p>
-        </p:txBody>
-      </p:sp>
-      <p:sp>
-        <p:nvSpPr>
-          <p:cNvPr id="39" name="placeholder note"/>
+              <a:t>only a before record exists (data/offline-proof/1791049273707.json: egress not blocked, server not up). Procedure: docs/OFFLINE_PROOF.md. Nothing claimed.</a:t>
+            </a:r>
+            <a:endParaRPr lang="en-US" sz="750" dirty="0"/>
+          </a:p>
+        </p:txBody>
+      </p:sp>
+      <p:sp>
+        <p:nvSpPr>
+          <p:cNvPr id="51" name="sources note"/>
           <p:cNvSpPr txBox="1"/>
           <p:nvPr/>
         </p:nvSpPr>
         <p:spPr>
           <a:xfrm>
-            <a:off x="457200" y="4224528"/>
-            <a:ext cx="8229600" cy="411480"/>
+            <a:off x="457200" y="4261104"/>
+            <a:ext cx="8229600" cy="420624"/>
           </a:xfrm>
           <a:prstGeom prst="rect">
             <a:avLst/>
@@ -7322,14 +7727,14 @@
               <a:buNone/>
             </a:pPr>
             <a:r>
-              <a:rPr lang="en-US" sz="1000" i="1" dirty="0">
+              <a:rPr lang="en-US" sz="850" i="1" dirty="0">
                 <a:solidFill>
                   <a:schemeClr val="tx2"/>
                 </a:solidFill>
               </a:rPr>
-              <a:t>Every bracketed value is a placeholder. Values come only from data/benchmarks/*.json and data/reports/*.json. Nothing unmeasured goes on a slide.</a:t>
-            </a:r>
-            <a:endParaRPr lang="en-US" sz="1000" dirty="0"/>
+              <a:t>All timings are from the direct harness, labelled [direct] in every report, and each names its GPU state because the Ollama daemon was shared for most of the day. OpenClaw tool calls are proven against a fake server (packages/agent/SMOKE.md); the run against the real server times out before any model call and is being diagnosed.</a:t>
+            </a:r>
+            <a:endParaRPr lang="en-US" sz="850" dirty="0"/>
           </a:p>
         </p:txBody>
       </p:sp>

--- a/docs/pitch/Beetle-pitch.pptx
+++ b/docs/pitch/Beetle-pitch.pptx
@@ -112,7 +112,7 @@
   <p:extLst>
     <p:ext uri="{521415D9-36F7-43E2-AB2F-B90AF26B5E84}">
       <p14:sectionLst xmlns:p14="http://schemas.microsoft.com/office/powerpoint/2010/main">
-        <p14:section name="Beetle pitch" id="{619f5f1b-d9ed-eeea-12a4-72fc5db922cd}">
+        <p14:section name="Beetle pitch" id="{06e9093f-b94e-6cb6-84bc-101b2dbec484}">
           <p14:sldIdLst>
             <p14:sldId id="256"/>
             <p14:sldId id="257"/>
@@ -614,7 +614,7 @@
           <a:p>
             <a:r>
               <a:rPr lang="en-US" dirty="0"/>
-              <a:t>Walk the six steps left to right, then land on the stance: one machine, one local model, one real OpenClaw runtime, zero cloud.</a:t>
+              <a:t>Walk the four steps: any request, mapped to the closest mode and biome and named, a playable world two phones join, then keep changing it while they play. Read two rows of the mode table, not all five. Say plainly: the library is bounded and growing; the model never writes rules, it picks from the engine. Status at 14:27 CDT: contract, validator, patch ops, server rule per mode, mapping prompt and biome palettes exist in code; BUILD_STATUS.md says what is tested; mode briefs are not measured yet (slide 5).</a:t>
             </a:r>
             <a:endParaRPr lang="en-US" dirty="0"/>
           </a:p>
@@ -790,7 +790,7 @@
           <a:p>
             <a:r>
               <a:rPr lang="en-US" dirty="0"/>
-              <a:t>Left to right: director, OpenClaw agent, Beetle tools, server validator and commit, players. Only the server decides validity; the model only proposes JSON.</a:t>
+              <a:t>Left to right: director, OpenClaw agent, the mapping step (closest mode and biome, parameters from the brief, named in the summary), Beetle tools, server validator and commit, players. Structured output means only a listed mode, a listed biome and in-range parameters can come out of the model. Only the server decides validity; the model only proposes JSON.</a:t>
             </a:r>
             <a:endParaRPr lang="en-US" dirty="0"/>
           </a:p>
@@ -878,7 +878,7 @@
           <a:p>
             <a:r>
               <a:rPr lang="en-US" dirty="0"/>
-              <a:t>Read the cards. Say out loud: the 10 s brief target is not met; a valid brief takes 24 to 28 s warm on a quiet GPU and 14 s was seen once after normalization. Edits commit in 2 to 14 s. Session continuity and the offline proof are covered by tests or procedure but not yet measured live; say so rather than guessing. The 27b was never benchmarked.</a:t>
+              <a:t>Read the cards. Say out loud: the 10 s brief target is not met; a valid brief takes 24 to 28 s warm on a quiet GPU, 14 s was seen once after normalization, 33.4 s through OpenClaw. Edits commit in 2 to 14 s, and 8.0 s with two players moving and nothing reset. Game modes from one prompt are not yet measured; say so rather than guessing. Phones and the offline proof are covered by tests or procedure but not yet measured live. The 27b was never benchmarked.</a:t>
             </a:r>
             <a:endParaRPr lang="en-US" dirty="0"/>
           </a:p>
@@ -2615,7 +2615,7 @@
                   <a:schemeClr val="tx1"/>
                 </a:solidFill>
               </a:rPr>
-              <a:t>The Beetle workflow</a:t>
+              <a:t>Any game, one prompt, then keep changing it while they play</a:t>
             </a:r>
             <a:endParaRPr lang="en-US" sz="2600" dirty="0"/>
           </a:p>
@@ -2922,7 +2922,7 @@
         </p:nvSpPr>
         <p:spPr>
           <a:xfrm>
-            <a:off x="1051560" y="1965960"/>
+            <a:off x="1051560" y="1325880"/>
             <a:ext cx="7040880" cy="914"/>
           </a:xfrm>
           <a:prstGeom prst="line">
@@ -2945,8 +2945,8 @@
         </p:nvSpPr>
         <p:spPr>
           <a:xfrm>
-            <a:off x="822960" y="1737360"/>
-            <a:ext cx="457200" cy="457200"/>
+            <a:off x="850392" y="1124712"/>
+            <a:ext cx="402336" cy="402336"/>
           </a:xfrm>
           <a:prstGeom prst="ellipse">
             <a:avLst/>
@@ -2970,8 +2970,8 @@
         </p:nvSpPr>
         <p:spPr>
           <a:xfrm>
-            <a:off x="822960" y="1737360"/>
-            <a:ext cx="457200" cy="457200"/>
+            <a:off x="850392" y="1124712"/>
+            <a:ext cx="402336" cy="402336"/>
           </a:xfrm>
           <a:prstGeom prst="rect">
             <a:avLst/>
@@ -2987,14 +2987,14 @@
               <a:buNone/>
             </a:pPr>
             <a:r>
-              <a:rPr lang="en-US" sz="1400" b="1" dirty="0">
+              <a:rPr lang="en-US" sz="1300" b="1" dirty="0">
                 <a:solidFill>
                   <a:schemeClr val="bg1"/>
                 </a:solidFill>
               </a:rPr>
               <a:t>1</a:t>
             </a:r>
-            <a:endParaRPr lang="en-US" sz="1400" dirty="0"/>
+            <a:endParaRPr lang="en-US" sz="1300" dirty="0"/>
           </a:p>
         </p:txBody>
       </p:sp>
@@ -3006,8 +3006,8 @@
         </p:nvSpPr>
         <p:spPr>
           <a:xfrm>
-            <a:off x="365760" y="2331720"/>
-            <a:ext cx="1371600" cy="731520"/>
+            <a:off x="91440" y="1600200"/>
+            <a:ext cx="1920240" cy="685800"/>
           </a:xfrm>
           <a:prstGeom prst="rect">
             <a:avLst/>
@@ -3020,17 +3020,34 @@
           <a:lstStyle/>
           <a:p>
             <a:pPr algn="ctr" indent="0" marL="0">
-              <a:buNone/>
-            </a:pPr>
-            <a:r>
-              <a:rPr lang="en-US" sz="1200" dirty="0">
+              <a:spcAft>
+                <a:spcPts val="200"/>
+              </a:spcAft>
+              <a:buNone/>
+            </a:pPr>
+            <a:r>
+              <a:rPr lang="en-US" sz="1100" b="1" dirty="0">
                 <a:solidFill>
                   <a:schemeClr val="tx1"/>
                 </a:solidFill>
               </a:rPr>
-              <a:t>Brief becomes a playable world</a:t>
-            </a:r>
-            <a:endParaRPr lang="en-US" sz="1200" dirty="0"/>
+              <a:t>Any game request</a:t>
+            </a:r>
+            <a:endParaRPr lang="en-US" sz="1100" dirty="0"/>
+          </a:p>
+          <a:p>
+            <a:pPr algn="ctr" indent="0" marL="0">
+              <a:buNone/>
+            </a:pPr>
+            <a:r>
+              <a:rPr lang="en-US" sz="900" dirty="0">
+                <a:solidFill>
+                  <a:schemeClr val="tx2"/>
+                </a:solidFill>
+              </a:rPr>
+              <a:t>"king of the hill on a frozen arena, hold ten seconds"</a:t>
+            </a:r>
+            <a:endParaRPr lang="en-US" sz="1100" dirty="0"/>
           </a:p>
         </p:txBody>
       </p:sp>
@@ -3042,8 +3059,8 @@
         </p:nvSpPr>
         <p:spPr>
           <a:xfrm>
-            <a:off x="2231136" y="1737360"/>
-            <a:ext cx="457200" cy="457200"/>
+            <a:off x="3197352" y="1124712"/>
+            <a:ext cx="402336" cy="402336"/>
           </a:xfrm>
           <a:prstGeom prst="ellipse">
             <a:avLst/>
@@ -3067,8 +3084,8 @@
         </p:nvSpPr>
         <p:spPr>
           <a:xfrm>
-            <a:off x="2231136" y="1737360"/>
-            <a:ext cx="457200" cy="457200"/>
+            <a:off x="3197352" y="1124712"/>
+            <a:ext cx="402336" cy="402336"/>
           </a:xfrm>
           <a:prstGeom prst="rect">
             <a:avLst/>
@@ -3084,14 +3101,14 @@
               <a:buNone/>
             </a:pPr>
             <a:r>
-              <a:rPr lang="en-US" sz="1400" b="1" dirty="0">
+              <a:rPr lang="en-US" sz="1300" b="1" dirty="0">
                 <a:solidFill>
                   <a:schemeClr val="bg1"/>
                 </a:solidFill>
               </a:rPr>
               <a:t>2</a:t>
             </a:r>
-            <a:endParaRPr lang="en-US" sz="1400" dirty="0"/>
+            <a:endParaRPr lang="en-US" sz="1300" dirty="0"/>
           </a:p>
         </p:txBody>
       </p:sp>
@@ -3103,8 +3120,8 @@
         </p:nvSpPr>
         <p:spPr>
           <a:xfrm>
-            <a:off x="1773936" y="2331720"/>
-            <a:ext cx="1371600" cy="731520"/>
+            <a:off x="2438400" y="1600200"/>
+            <a:ext cx="1920240" cy="685800"/>
           </a:xfrm>
           <a:prstGeom prst="rect">
             <a:avLst/>
@@ -3117,17 +3134,34 @@
           <a:lstStyle/>
           <a:p>
             <a:pPr algn="ctr" indent="0" marL="0">
-              <a:buNone/>
-            </a:pPr>
-            <a:r>
-              <a:rPr lang="en-US" sz="1200" dirty="0">
+              <a:spcAft>
+                <a:spcPts val="200"/>
+              </a:spcAft>
+              <a:buNone/>
+            </a:pPr>
+            <a:r>
+              <a:rPr lang="en-US" sz="1100" b="1" dirty="0">
                 <a:solidFill>
                   <a:schemeClr val="tx1"/>
                 </a:solidFill>
               </a:rPr>
-              <a:t>Two phones join by QR</a:t>
-            </a:r>
-            <a:endParaRPr lang="en-US" sz="1200" dirty="0"/>
+              <a:t>Mapped to the closest mode and biome</a:t>
+            </a:r>
+            <a:endParaRPr lang="en-US" sz="1100" dirty="0"/>
+          </a:p>
+          <a:p>
+            <a:pPr algn="ctr" indent="0" marL="0">
+              <a:buNone/>
+            </a:pPr>
+            <a:r>
+              <a:rPr lang="en-US" sz="900" dirty="0">
+                <a:solidFill>
+                  <a:schemeClr val="tx2"/>
+                </a:solidFill>
+              </a:rPr>
+              <a:t>the agent fills the parameters and says which it chose</a:t>
+            </a:r>
+            <a:endParaRPr lang="en-US" sz="1100" dirty="0"/>
           </a:p>
         </p:txBody>
       </p:sp>
@@ -3139,8 +3173,8 @@
         </p:nvSpPr>
         <p:spPr>
           <a:xfrm>
-            <a:off x="3639312" y="1737360"/>
-            <a:ext cx="457200" cy="457200"/>
+            <a:off x="5544312" y="1124712"/>
+            <a:ext cx="402336" cy="402336"/>
           </a:xfrm>
           <a:prstGeom prst="ellipse">
             <a:avLst/>
@@ -3164,8 +3198,8 @@
         </p:nvSpPr>
         <p:spPr>
           <a:xfrm>
-            <a:off x="3639312" y="1737360"/>
-            <a:ext cx="457200" cy="457200"/>
+            <a:off x="5544312" y="1124712"/>
+            <a:ext cx="402336" cy="402336"/>
           </a:xfrm>
           <a:prstGeom prst="rect">
             <a:avLst/>
@@ -3181,14 +3215,14 @@
               <a:buNone/>
             </a:pPr>
             <a:r>
-              <a:rPr lang="en-US" sz="1400" b="1" dirty="0">
+              <a:rPr lang="en-US" sz="1300" b="1" dirty="0">
                 <a:solidFill>
                   <a:schemeClr val="bg1"/>
                 </a:solidFill>
               </a:rPr>
               <a:t>3</a:t>
             </a:r>
-            <a:endParaRPr lang="en-US" sz="1400" dirty="0"/>
+            <a:endParaRPr lang="en-US" sz="1300" dirty="0"/>
           </a:p>
         </p:txBody>
       </p:sp>
@@ -3200,8 +3234,8 @@
         </p:nvSpPr>
         <p:spPr>
           <a:xfrm>
-            <a:off x="3182112" y="2331720"/>
-            <a:ext cx="1371600" cy="731520"/>
+            <a:off x="4785360" y="1600200"/>
+            <a:ext cx="1920240" cy="685800"/>
           </a:xfrm>
           <a:prstGeom prst="rect">
             <a:avLst/>
@@ -3214,17 +3248,34 @@
           <a:lstStyle/>
           <a:p>
             <a:pPr algn="ctr" indent="0" marL="0">
-              <a:buNone/>
-            </a:pPr>
-            <a:r>
-              <a:rPr lang="en-US" sz="1200" dirty="0">
+              <a:spcAft>
+                <a:spcPts val="200"/>
+              </a:spcAft>
+              <a:buNone/>
+            </a:pPr>
+            <a:r>
+              <a:rPr lang="en-US" sz="1100" b="1" dirty="0">
                 <a:solidFill>
                   <a:schemeClr val="tx1"/>
                 </a:solidFill>
               </a:rPr>
-              <a:t>Designer edits while people play</a:t>
-            </a:r>
-            <a:endParaRPr lang="en-US" sz="1200" dirty="0"/>
+              <a:t>Playable world</a:t>
+            </a:r>
+            <a:endParaRPr lang="en-US" sz="1100" dirty="0"/>
+          </a:p>
+          <a:p>
+            <a:pPr algn="ctr" indent="0" marL="0">
+              <a:buNone/>
+            </a:pPr>
+            <a:r>
+              <a:rPr lang="en-US" sz="900" dirty="0">
+                <a:solidFill>
+                  <a:schemeClr val="tx2"/>
+                </a:solidFill>
+              </a:rPr>
+              <a:t>two phones join by QR, validated by game code first</a:t>
+            </a:r>
+            <a:endParaRPr lang="en-US" sz="1100" dirty="0"/>
           </a:p>
         </p:txBody>
       </p:sp>
@@ -3236,8 +3287,8 @@
         </p:nvSpPr>
         <p:spPr>
           <a:xfrm>
-            <a:off x="5047488" y="1737360"/>
-            <a:ext cx="457200" cy="457200"/>
+            <a:off x="7891272" y="1124712"/>
+            <a:ext cx="402336" cy="402336"/>
           </a:xfrm>
           <a:prstGeom prst="ellipse">
             <a:avLst/>
@@ -3261,8 +3312,8 @@
         </p:nvSpPr>
         <p:spPr>
           <a:xfrm>
-            <a:off x="5047488" y="1737360"/>
-            <a:ext cx="457200" cy="457200"/>
+            <a:off x="7891272" y="1124712"/>
+            <a:ext cx="402336" cy="402336"/>
           </a:xfrm>
           <a:prstGeom prst="rect">
             <a:avLst/>
@@ -3278,14 +3329,14 @@
               <a:buNone/>
             </a:pPr>
             <a:r>
-              <a:rPr lang="en-US" sz="1400" b="1" dirty="0">
+              <a:rPr lang="en-US" sz="1300" b="1" dirty="0">
                 <a:solidFill>
                   <a:schemeClr val="bg1"/>
                 </a:solidFill>
               </a:rPr>
               <a:t>4</a:t>
             </a:r>
-            <a:endParaRPr lang="en-US" sz="1400" dirty="0"/>
+            <a:endParaRPr lang="en-US" sz="1300" dirty="0"/>
           </a:p>
         </p:txBody>
       </p:sp>
@@ -3297,8 +3348,8 @@
         </p:nvSpPr>
         <p:spPr>
           <a:xfrm>
-            <a:off x="4590288" y="2331720"/>
-            <a:ext cx="1371600" cy="731520"/>
+            <a:off x="7132320" y="1600200"/>
+            <a:ext cx="1920240" cy="685800"/>
           </a:xfrm>
           <a:prstGeom prst="rect">
             <a:avLst/>
@@ -3311,55 +3362,47 @@
           <a:lstStyle/>
           <a:p>
             <a:pPr algn="ctr" indent="0" marL="0">
-              <a:buNone/>
-            </a:pPr>
-            <a:r>
-              <a:rPr lang="en-US" sz="1200" dirty="0">
+              <a:spcAft>
+                <a:spcPts val="200"/>
+              </a:spcAft>
+              <a:buNone/>
+            </a:pPr>
+            <a:r>
+              <a:rPr lang="en-US" sz="1100" b="1" dirty="0">
                 <a:solidFill>
                   <a:schemeClr val="tx1"/>
                 </a:solidFill>
               </a:rPr>
-              <a:t>Agent validates and repairs</a:t>
-            </a:r>
-            <a:endParaRPr lang="en-US" sz="1200" dirty="0"/>
-          </a:p>
-        </p:txBody>
-      </p:sp>
-      <p:sp>
-        <p:nvSpPr>
-          <p:cNvPr id="28" name="step circle 5"/>
-          <p:cNvSpPr/>
-          <p:nvPr/>
-        </p:nvSpPr>
-        <p:spPr>
-          <a:xfrm>
-            <a:off x="6455664" y="1737360"/>
-            <a:ext cx="457200" cy="457200"/>
-          </a:xfrm>
-          <a:prstGeom prst="ellipse">
-            <a:avLst/>
-          </a:prstGeom>
-          <a:solidFill>
-            <a:schemeClr val="accent1"/>
-          </a:solidFill>
-          <a:ln w="6350">
-            <a:solidFill>
-              <a:schemeClr val="accent1"/>
-            </a:solidFill>
-            <a:prstDash val="solid"/>
-          </a:ln>
-        </p:spPr>
-      </p:sp>
-      <p:sp>
-        <p:nvSpPr>
-          <p:cNvPr id="29" name="step number 5"/>
+              <a:t>Keep changing it while they play</a:t>
+            </a:r>
+            <a:endParaRPr lang="en-US" sz="1100" dirty="0"/>
+          </a:p>
+          <a:p>
+            <a:pPr algn="ctr" indent="0" marL="0">
+              <a:buNone/>
+            </a:pPr>
+            <a:r>
+              <a:rPr lang="en-US" sz="900" dirty="0">
+                <a:solidFill>
+                  <a:schemeClr val="tx2"/>
+                </a:solidFill>
+              </a:rPr>
+              <a:t>mode, biome, speed, bridges, hazard; no reset</a:t>
+            </a:r>
+            <a:endParaRPr lang="en-US" sz="1100" dirty="0"/>
+          </a:p>
+        </p:txBody>
+      </p:sp>
+      <p:sp>
+        <p:nvSpPr>
+          <p:cNvPr id="28" name="label MODE LIBRARY (ENGINE MECHANICS, NOT MODEL-WRITTEN RULES)"/>
           <p:cNvSpPr txBox="1"/>
           <p:nvPr/>
         </p:nvSpPr>
         <p:spPr>
           <a:xfrm>
-            <a:off x="6455664" y="1737360"/>
-            <a:ext cx="457200" cy="457200"/>
+            <a:off x="457200" y="2286000"/>
+            <a:ext cx="5943600" cy="182880"/>
           </a:xfrm>
           <a:prstGeom prst="rect">
             <a:avLst/>
@@ -3371,31 +3414,1707 @@
           <a:bodyPr wrap="square" lIns="0" tIns="0" rIns="0" bIns="0" rtlCol="0" anchor="ctr"/>
           <a:lstStyle/>
           <a:p>
-            <a:pPr algn="ctr" indent="0" marL="0">
-              <a:buNone/>
-            </a:pPr>
-            <a:r>
-              <a:rPr lang="en-US" sz="1400" b="1" dirty="0">
-                <a:solidFill>
-                  <a:schemeClr val="bg1"/>
-                </a:solidFill>
-              </a:rPr>
-              <a:t>5</a:t>
-            </a:r>
-            <a:endParaRPr lang="en-US" sz="1400" dirty="0"/>
-          </a:p>
-        </p:txBody>
-      </p:sp>
-      <p:sp>
-        <p:nvSpPr>
-          <p:cNvPr id="30" name="step text 5"/>
+            <a:pPr indent="0" marL="0">
+              <a:buNone/>
+            </a:pPr>
+            <a:r>
+              <a:rPr lang="en-US" sz="900" b="1" spc="200" kern="0" dirty="0">
+                <a:solidFill>
+                  <a:schemeClr val="accent1"/>
+                </a:solidFill>
+              </a:rPr>
+              <a:t>MODE LIBRARY (ENGINE MECHANICS, NOT MODEL-WRITTEN RULES)</a:t>
+            </a:r>
+            <a:endParaRPr lang="en-US" sz="900" dirty="0"/>
+          </a:p>
+        </p:txBody>
+      </p:sp>
+      <p:graphicFrame>
+        <p:nvGraphicFramePr>
+          <p:cNvPr id="3" name="mode library table"/>
+          <p:cNvGraphicFramePr>
+            <a:graphicFrameLocks noGrp="1"/>
+          </p:cNvGraphicFramePr>
+          <p:nvPr>
+            <p:extLst>
+              <p:ext uri="{D42A27DB-BD31-4B8C-83A1-F6EECF244321}">
+                <p14:modId xmlns:p14="http://schemas.microsoft.com/office/powerpoint/2010/main" val="1579011935"/>
+              </p:ext>
+            </p:extLst>
+          </p:nvPr>
+        </p:nvGraphicFramePr>
+        <p:xfrm>
+          <a:off x="457200" y="2487168"/>
+          <a:ext cx="8229600" cy="914400"/>
+        </p:xfrm>
+        <a:graphic>
+          <a:graphicData uri="http://schemas.openxmlformats.org/drawingml/2006/table">
+            <a:tbl>
+              <a:tblPr/>
+              <a:tblGrid>
+                <a:gridCol w="1188720"/>
+                <a:gridCol w="2651760"/>
+                <a:gridCol w="2377440"/>
+                <a:gridCol w="2011680"/>
+              </a:tblGrid>
+              <a:tr h="228600">
+                <a:tc>
+                  <a:txBody>
+                    <a:bodyPr/>
+                    <a:lstStyle/>
+                    <a:p>
+                      <a:pPr indent="0" marL="0">
+                        <a:buNone/>
+                      </a:pPr>
+                      <a:r>
+                        <a:rPr lang="en-US" sz="850" b="1" dirty="0">
+                          <a:solidFill>
+                            <a:srgbClr val="E8A33D"/>
+                          </a:solidFill>
+                          <a:latin typeface="Arial" pitchFamily="34" charset="0"/>
+                          <a:ea typeface="Arial" pitchFamily="34" charset="-122"/>
+                          <a:cs typeface="Arial" pitchFamily="34" charset="-120"/>
+                        </a:rPr>
+                        <a:t>Mode</a:t>
+                      </a:r>
+                      <a:endParaRPr lang="en-US" sz="850" dirty="0">
+                        <a:latin typeface="Arial" charset="0"/>
+                        <a:ea typeface="Arial" charset="0"/>
+                        <a:cs typeface="Arial" charset="0"/>
+                      </a:endParaRPr>
+                    </a:p>
+                  </a:txBody>
+                  <a:tcPr marL="27432" marR="27432" marT="27432" marB="27432" anchor="ctr">
+                    <a:lnL w="6350" cap="flat" cmpd="sng" algn="ctr">
+                      <a:solidFill>
+                        <a:srgbClr val="2E6B68"/>
+                      </a:solidFill>
+                      <a:prstDash val="solid"/>
+                      <a:round/>
+                      <a:headEnd type="none" w="med" len="med"/>
+                      <a:tailEnd type="none" w="med" len="med"/>
+                    </a:lnL>
+                    <a:lnR w="6350" cap="flat" cmpd="sng" algn="ctr">
+                      <a:solidFill>
+                        <a:srgbClr val="2E6B68"/>
+                      </a:solidFill>
+                      <a:prstDash val="solid"/>
+                      <a:round/>
+                      <a:headEnd type="none" w="med" len="med"/>
+                      <a:tailEnd type="none" w="med" len="med"/>
+                    </a:lnR>
+                    <a:lnT w="6350" cap="flat" cmpd="sng" algn="ctr">
+                      <a:solidFill>
+                        <a:srgbClr val="2E6B68"/>
+                      </a:solidFill>
+                      <a:prstDash val="solid"/>
+                      <a:round/>
+                      <a:headEnd type="none" w="med" len="med"/>
+                      <a:tailEnd type="none" w="med" len="med"/>
+                    </a:lnT>
+                    <a:lnB w="6350" cap="flat" cmpd="sng" algn="ctr">
+                      <a:solidFill>
+                        <a:srgbClr val="2E6B68"/>
+                      </a:solidFill>
+                      <a:prstDash val="solid"/>
+                      <a:round/>
+                      <a:headEnd type="none" w="med" len="med"/>
+                      <a:tailEnd type="none" w="med" len="med"/>
+                    </a:lnB>
+                    <a:solidFill>
+                      <a:srgbClr val="1B4A48"/>
+                    </a:solidFill>
+                  </a:tcPr>
+                </a:tc>
+                <a:tc>
+                  <a:txBody>
+                    <a:bodyPr/>
+                    <a:lstStyle/>
+                    <a:p>
+                      <a:pPr indent="0" marL="0">
+                        <a:buNone/>
+                      </a:pPr>
+                      <a:r>
+                        <a:rPr lang="en-US" sz="850" b="1" dirty="0">
+                          <a:solidFill>
+                            <a:srgbClr val="E8A33D"/>
+                          </a:solidFill>
+                          <a:latin typeface="Arial" pitchFamily="34" charset="0"/>
+                          <a:ea typeface="Arial" pitchFamily="34" charset="-122"/>
+                          <a:cs typeface="Arial" pitchFamily="34" charset="-120"/>
+                        </a:rPr>
+                        <a:t>What players do</a:t>
+                      </a:r>
+                      <a:endParaRPr lang="en-US" sz="850" dirty="0">
+                        <a:latin typeface="Arial" charset="0"/>
+                        <a:ea typeface="Arial" charset="0"/>
+                        <a:cs typeface="Arial" charset="0"/>
+                      </a:endParaRPr>
+                    </a:p>
+                  </a:txBody>
+                  <a:tcPr marL="27432" marR="27432" marT="27432" marB="27432" anchor="ctr">
+                    <a:lnL w="6350" cap="flat" cmpd="sng" algn="ctr">
+                      <a:solidFill>
+                        <a:srgbClr val="2E6B68"/>
+                      </a:solidFill>
+                      <a:prstDash val="solid"/>
+                      <a:round/>
+                      <a:headEnd type="none" w="med" len="med"/>
+                      <a:tailEnd type="none" w="med" len="med"/>
+                    </a:lnL>
+                    <a:lnR w="6350" cap="flat" cmpd="sng" algn="ctr">
+                      <a:solidFill>
+                        <a:srgbClr val="2E6B68"/>
+                      </a:solidFill>
+                      <a:prstDash val="solid"/>
+                      <a:round/>
+                      <a:headEnd type="none" w="med" len="med"/>
+                      <a:tailEnd type="none" w="med" len="med"/>
+                    </a:lnR>
+                    <a:lnT w="6350" cap="flat" cmpd="sng" algn="ctr">
+                      <a:solidFill>
+                        <a:srgbClr val="2E6B68"/>
+                      </a:solidFill>
+                      <a:prstDash val="solid"/>
+                      <a:round/>
+                      <a:headEnd type="none" w="med" len="med"/>
+                      <a:tailEnd type="none" w="med" len="med"/>
+                    </a:lnT>
+                    <a:lnB w="6350" cap="flat" cmpd="sng" algn="ctr">
+                      <a:solidFill>
+                        <a:srgbClr val="2E6B68"/>
+                      </a:solidFill>
+                      <a:prstDash val="solid"/>
+                      <a:round/>
+                      <a:headEnd type="none" w="med" len="med"/>
+                      <a:tailEnd type="none" w="med" len="med"/>
+                    </a:lnB>
+                    <a:solidFill>
+                      <a:srgbClr val="1B4A48"/>
+                    </a:solidFill>
+                  </a:tcPr>
+                </a:tc>
+                <a:tc>
+                  <a:txBody>
+                    <a:bodyPr/>
+                    <a:lstStyle/>
+                    <a:p>
+                      <a:pPr indent="0" marL="0">
+                        <a:buNone/>
+                      </a:pPr>
+                      <a:r>
+                        <a:rPr lang="en-US" sz="850" b="1" dirty="0">
+                          <a:solidFill>
+                            <a:srgbClr val="E8A33D"/>
+                          </a:solidFill>
+                          <a:latin typeface="Arial" pitchFamily="34" charset="0"/>
+                          <a:ea typeface="Arial" pitchFamily="34" charset="-122"/>
+                          <a:cs typeface="Arial" pitchFamily="34" charset="-120"/>
+                        </a:rPr>
+                        <a:t>Win condition</a:t>
+                      </a:r>
+                      <a:endParaRPr lang="en-US" sz="850" dirty="0">
+                        <a:latin typeface="Arial" charset="0"/>
+                        <a:ea typeface="Arial" charset="0"/>
+                        <a:cs typeface="Arial" charset="0"/>
+                      </a:endParaRPr>
+                    </a:p>
+                  </a:txBody>
+                  <a:tcPr marL="27432" marR="27432" marT="27432" marB="27432" anchor="ctr">
+                    <a:lnL w="6350" cap="flat" cmpd="sng" algn="ctr">
+                      <a:solidFill>
+                        <a:srgbClr val="2E6B68"/>
+                      </a:solidFill>
+                      <a:prstDash val="solid"/>
+                      <a:round/>
+                      <a:headEnd type="none" w="med" len="med"/>
+                      <a:tailEnd type="none" w="med" len="med"/>
+                    </a:lnL>
+                    <a:lnR w="6350" cap="flat" cmpd="sng" algn="ctr">
+                      <a:solidFill>
+                        <a:srgbClr val="2E6B68"/>
+                      </a:solidFill>
+                      <a:prstDash val="solid"/>
+                      <a:round/>
+                      <a:headEnd type="none" w="med" len="med"/>
+                      <a:tailEnd type="none" w="med" len="med"/>
+                    </a:lnR>
+                    <a:lnT w="6350" cap="flat" cmpd="sng" algn="ctr">
+                      <a:solidFill>
+                        <a:srgbClr val="2E6B68"/>
+                      </a:solidFill>
+                      <a:prstDash val="solid"/>
+                      <a:round/>
+                      <a:headEnd type="none" w="med" len="med"/>
+                      <a:tailEnd type="none" w="med" len="med"/>
+                    </a:lnT>
+                    <a:lnB w="6350" cap="flat" cmpd="sng" algn="ctr">
+                      <a:solidFill>
+                        <a:srgbClr val="2E6B68"/>
+                      </a:solidFill>
+                      <a:prstDash val="solid"/>
+                      <a:round/>
+                      <a:headEnd type="none" w="med" len="med"/>
+                      <a:tailEnd type="none" w="med" len="med"/>
+                    </a:lnB>
+                    <a:solidFill>
+                      <a:srgbClr val="1B4A48"/>
+                    </a:solidFill>
+                  </a:tcPr>
+                </a:tc>
+                <a:tc>
+                  <a:txBody>
+                    <a:bodyPr/>
+                    <a:lstStyle/>
+                    <a:p>
+                      <a:pPr indent="0" marL="0">
+                        <a:buNone/>
+                      </a:pPr>
+                      <a:r>
+                        <a:rPr lang="en-US" sz="850" b="1" dirty="0">
+                          <a:solidFill>
+                            <a:srgbClr val="E8A33D"/>
+                          </a:solidFill>
+                          <a:latin typeface="Arial" pitchFamily="34" charset="0"/>
+                          <a:ea typeface="Arial" pitchFamily="34" charset="-122"/>
+                          <a:cs typeface="Arial" pitchFamily="34" charset="-120"/>
+                        </a:rPr>
+                        <a:t>Parameters (contract ranges)</a:t>
+                      </a:r>
+                      <a:endParaRPr lang="en-US" sz="850" dirty="0">
+                        <a:latin typeface="Arial" charset="0"/>
+                        <a:ea typeface="Arial" charset="0"/>
+                        <a:cs typeface="Arial" charset="0"/>
+                      </a:endParaRPr>
+                    </a:p>
+                  </a:txBody>
+                  <a:tcPr marL="27432" marR="27432" marT="27432" marB="27432" anchor="ctr">
+                    <a:lnL w="6350" cap="flat" cmpd="sng" algn="ctr">
+                      <a:solidFill>
+                        <a:srgbClr val="2E6B68"/>
+                      </a:solidFill>
+                      <a:prstDash val="solid"/>
+                      <a:round/>
+                      <a:headEnd type="none" w="med" len="med"/>
+                      <a:tailEnd type="none" w="med" len="med"/>
+                    </a:lnL>
+                    <a:lnR w="6350" cap="flat" cmpd="sng" algn="ctr">
+                      <a:solidFill>
+                        <a:srgbClr val="2E6B68"/>
+                      </a:solidFill>
+                      <a:prstDash val="solid"/>
+                      <a:round/>
+                      <a:headEnd type="none" w="med" len="med"/>
+                      <a:tailEnd type="none" w="med" len="med"/>
+                    </a:lnR>
+                    <a:lnT w="6350" cap="flat" cmpd="sng" algn="ctr">
+                      <a:solidFill>
+                        <a:srgbClr val="2E6B68"/>
+                      </a:solidFill>
+                      <a:prstDash val="solid"/>
+                      <a:round/>
+                      <a:headEnd type="none" w="med" len="med"/>
+                      <a:tailEnd type="none" w="med" len="med"/>
+                    </a:lnT>
+                    <a:lnB w="6350" cap="flat" cmpd="sng" algn="ctr">
+                      <a:solidFill>
+                        <a:srgbClr val="2E6B68"/>
+                      </a:solidFill>
+                      <a:prstDash val="solid"/>
+                      <a:round/>
+                      <a:headEnd type="none" w="med" len="med"/>
+                      <a:tailEnd type="none" w="med" len="med"/>
+                    </a:lnB>
+                    <a:solidFill>
+                      <a:srgbClr val="1B4A48"/>
+                    </a:solidFill>
+                  </a:tcPr>
+                </a:tc>
+              </a:tr>
+              <a:tr h="228600">
+                <a:tc>
+                  <a:txBody>
+                    <a:bodyPr/>
+                    <a:lstStyle/>
+                    <a:p>
+                      <a:pPr indent="0" marL="0">
+                        <a:buNone/>
+                      </a:pPr>
+                      <a:r>
+                        <a:rPr lang="en-US" sz="800" b="1" dirty="0">
+                          <a:solidFill>
+                            <a:srgbClr val="EDE7DB"/>
+                          </a:solidFill>
+                          <a:latin typeface="Arial" pitchFamily="34" charset="0"/>
+                          <a:ea typeface="Arial" pitchFamily="34" charset="-122"/>
+                          <a:cs typeface="Arial" pitchFamily="34" charset="-120"/>
+                        </a:rPr>
+                        <a:t>relic_hunt</a:t>
+                      </a:r>
+                      <a:endParaRPr lang="en-US" sz="800" dirty="0">
+                        <a:latin typeface="Arial" charset="0"/>
+                        <a:ea typeface="Arial" charset="0"/>
+                        <a:cs typeface="Arial" charset="0"/>
+                      </a:endParaRPr>
+                    </a:p>
+                  </a:txBody>
+                  <a:tcPr marL="27432" marR="27432" marT="27432" marB="27432" anchor="ctr">
+                    <a:lnL w="6350" cap="flat" cmpd="sng" algn="ctr">
+                      <a:solidFill>
+                        <a:srgbClr val="2E6B68"/>
+                      </a:solidFill>
+                      <a:prstDash val="solid"/>
+                      <a:round/>
+                      <a:headEnd type="none" w="med" len="med"/>
+                      <a:tailEnd type="none" w="med" len="med"/>
+                    </a:lnL>
+                    <a:lnR w="6350" cap="flat" cmpd="sng" algn="ctr">
+                      <a:solidFill>
+                        <a:srgbClr val="2E6B68"/>
+                      </a:solidFill>
+                      <a:prstDash val="solid"/>
+                      <a:round/>
+                      <a:headEnd type="none" w="med" len="med"/>
+                      <a:tailEnd type="none" w="med" len="med"/>
+                    </a:lnR>
+                    <a:lnT w="6350" cap="flat" cmpd="sng" algn="ctr">
+                      <a:solidFill>
+                        <a:srgbClr val="2E6B68"/>
+                      </a:solidFill>
+                      <a:prstDash val="solid"/>
+                      <a:round/>
+                      <a:headEnd type="none" w="med" len="med"/>
+                      <a:tailEnd type="none" w="med" len="med"/>
+                    </a:lnT>
+                    <a:lnB w="6350" cap="flat" cmpd="sng" algn="ctr">
+                      <a:solidFill>
+                        <a:srgbClr val="2E6B68"/>
+                      </a:solidFill>
+                      <a:prstDash val="solid"/>
+                      <a:round/>
+                      <a:headEnd type="none" w="med" len="med"/>
+                      <a:tailEnd type="none" w="med" len="med"/>
+                    </a:lnB>
+                    <a:solidFill>
+                      <a:srgbClr val="1B4A48"/>
+                    </a:solidFill>
+                  </a:tcPr>
+                </a:tc>
+                <a:tc>
+                  <a:txBody>
+                    <a:bodyPr/>
+                    <a:lstStyle/>
+                    <a:p>
+                      <a:pPr indent="0" marL="0">
+                        <a:buNone/>
+                      </a:pPr>
+                      <a:r>
+                        <a:rPr lang="en-US" sz="800" dirty="0">
+                          <a:solidFill>
+                            <a:srgbClr val="BDB3A2"/>
+                          </a:solidFill>
+                          <a:latin typeface="Arial" pitchFamily="34" charset="0"/>
+                          <a:ea typeface="Arial" pitchFamily="34" charset="-122"/>
+                          <a:cs typeface="Arial" pitchFamily="34" charset="-120"/>
+                        </a:rPr>
+                        <a:t>collect relics over the bridges, enter the gate</a:t>
+                      </a:r>
+                      <a:endParaRPr lang="en-US" sz="800" dirty="0">
+                        <a:latin typeface="Arial" charset="0"/>
+                        <a:ea typeface="Arial" charset="0"/>
+                        <a:cs typeface="Arial" charset="0"/>
+                      </a:endParaRPr>
+                    </a:p>
+                  </a:txBody>
+                  <a:tcPr marL="27432" marR="27432" marT="27432" marB="27432" anchor="ctr">
+                    <a:lnL w="6350" cap="flat" cmpd="sng" algn="ctr">
+                      <a:solidFill>
+                        <a:srgbClr val="2E6B68"/>
+                      </a:solidFill>
+                      <a:prstDash val="solid"/>
+                      <a:round/>
+                      <a:headEnd type="none" w="med" len="med"/>
+                      <a:tailEnd type="none" w="med" len="med"/>
+                    </a:lnL>
+                    <a:lnR w="6350" cap="flat" cmpd="sng" algn="ctr">
+                      <a:solidFill>
+                        <a:srgbClr val="2E6B68"/>
+                      </a:solidFill>
+                      <a:prstDash val="solid"/>
+                      <a:round/>
+                      <a:headEnd type="none" w="med" len="med"/>
+                      <a:tailEnd type="none" w="med" len="med"/>
+                    </a:lnR>
+                    <a:lnT w="6350" cap="flat" cmpd="sng" algn="ctr">
+                      <a:solidFill>
+                        <a:srgbClr val="2E6B68"/>
+                      </a:solidFill>
+                      <a:prstDash val="solid"/>
+                      <a:round/>
+                      <a:headEnd type="none" w="med" len="med"/>
+                      <a:tailEnd type="none" w="med" len="med"/>
+                    </a:lnT>
+                    <a:lnB w="6350" cap="flat" cmpd="sng" algn="ctr">
+                      <a:solidFill>
+                        <a:srgbClr val="2E6B68"/>
+                      </a:solidFill>
+                      <a:prstDash val="solid"/>
+                      <a:round/>
+                      <a:headEnd type="none" w="med" len="med"/>
+                      <a:tailEnd type="none" w="med" len="med"/>
+                    </a:lnB>
+                    <a:solidFill>
+                      <a:srgbClr val="1B4A48"/>
+                    </a:solidFill>
+                  </a:tcPr>
+                </a:tc>
+                <a:tc>
+                  <a:txBody>
+                    <a:bodyPr/>
+                    <a:lstStyle/>
+                    <a:p>
+                      <a:pPr indent="0" marL="0">
+                        <a:buNone/>
+                      </a:pPr>
+                      <a:r>
+                        <a:rPr lang="en-US" sz="800" dirty="0">
+                          <a:solidFill>
+                            <a:srgbClr val="BDB3A2"/>
+                          </a:solidFill>
+                          <a:latin typeface="Arial" pitchFamily="34" charset="0"/>
+                          <a:ea typeface="Arial" pitchFamily="34" charset="-122"/>
+                          <a:cs typeface="Arial" pitchFamily="34" charset="-120"/>
+                        </a:rPr>
+                        <a:t>gate unlocks after relicsRequired relics; a player reaches it</a:t>
+                      </a:r>
+                      <a:endParaRPr lang="en-US" sz="800" dirty="0">
+                        <a:latin typeface="Arial" charset="0"/>
+                        <a:ea typeface="Arial" charset="0"/>
+                        <a:cs typeface="Arial" charset="0"/>
+                      </a:endParaRPr>
+                    </a:p>
+                  </a:txBody>
+                  <a:tcPr marL="27432" marR="27432" marT="27432" marB="27432" anchor="ctr">
+                    <a:lnL w="6350" cap="flat" cmpd="sng" algn="ctr">
+                      <a:solidFill>
+                        <a:srgbClr val="2E6B68"/>
+                      </a:solidFill>
+                      <a:prstDash val="solid"/>
+                      <a:round/>
+                      <a:headEnd type="none" w="med" len="med"/>
+                      <a:tailEnd type="none" w="med" len="med"/>
+                    </a:lnL>
+                    <a:lnR w="6350" cap="flat" cmpd="sng" algn="ctr">
+                      <a:solidFill>
+                        <a:srgbClr val="2E6B68"/>
+                      </a:solidFill>
+                      <a:prstDash val="solid"/>
+                      <a:round/>
+                      <a:headEnd type="none" w="med" len="med"/>
+                      <a:tailEnd type="none" w="med" len="med"/>
+                    </a:lnR>
+                    <a:lnT w="6350" cap="flat" cmpd="sng" algn="ctr">
+                      <a:solidFill>
+                        <a:srgbClr val="2E6B68"/>
+                      </a:solidFill>
+                      <a:prstDash val="solid"/>
+                      <a:round/>
+                      <a:headEnd type="none" w="med" len="med"/>
+                      <a:tailEnd type="none" w="med" len="med"/>
+                    </a:lnT>
+                    <a:lnB w="6350" cap="flat" cmpd="sng" algn="ctr">
+                      <a:solidFill>
+                        <a:srgbClr val="2E6B68"/>
+                      </a:solidFill>
+                      <a:prstDash val="solid"/>
+                      <a:round/>
+                      <a:headEnd type="none" w="med" len="med"/>
+                      <a:tailEnd type="none" w="med" len="med"/>
+                    </a:lnB>
+                    <a:solidFill>
+                      <a:srgbClr val="1B4A48"/>
+                    </a:solidFill>
+                  </a:tcPr>
+                </a:tc>
+                <a:tc>
+                  <a:txBody>
+                    <a:bodyPr/>
+                    <a:lstStyle/>
+                    <a:p>
+                      <a:pPr indent="0" marL="0">
+                        <a:buNone/>
+                      </a:pPr>
+                      <a:r>
+                        <a:rPr lang="en-US" sz="800" dirty="0">
+                          <a:solidFill>
+                            <a:srgbClr val="BDB3A2"/>
+                          </a:solidFill>
+                          <a:latin typeface="Arial" pitchFamily="34" charset="0"/>
+                          <a:ea typeface="Arial" pitchFamily="34" charset="-122"/>
+                          <a:cs typeface="Arial" pitchFamily="34" charset="-120"/>
+                        </a:rPr>
+                        <a:t>relicsRequired 1 to 3 (default all)</a:t>
+                      </a:r>
+                      <a:endParaRPr lang="en-US" sz="800" dirty="0">
+                        <a:latin typeface="Arial" charset="0"/>
+                        <a:ea typeface="Arial" charset="0"/>
+                        <a:cs typeface="Arial" charset="0"/>
+                      </a:endParaRPr>
+                    </a:p>
+                  </a:txBody>
+                  <a:tcPr marL="27432" marR="27432" marT="27432" marB="27432" anchor="ctr">
+                    <a:lnL w="6350" cap="flat" cmpd="sng" algn="ctr">
+                      <a:solidFill>
+                        <a:srgbClr val="2E6B68"/>
+                      </a:solidFill>
+                      <a:prstDash val="solid"/>
+                      <a:round/>
+                      <a:headEnd type="none" w="med" len="med"/>
+                      <a:tailEnd type="none" w="med" len="med"/>
+                    </a:lnL>
+                    <a:lnR w="6350" cap="flat" cmpd="sng" algn="ctr">
+                      <a:solidFill>
+                        <a:srgbClr val="2E6B68"/>
+                      </a:solidFill>
+                      <a:prstDash val="solid"/>
+                      <a:round/>
+                      <a:headEnd type="none" w="med" len="med"/>
+                      <a:tailEnd type="none" w="med" len="med"/>
+                    </a:lnR>
+                    <a:lnT w="6350" cap="flat" cmpd="sng" algn="ctr">
+                      <a:solidFill>
+                        <a:srgbClr val="2E6B68"/>
+                      </a:solidFill>
+                      <a:prstDash val="solid"/>
+                      <a:round/>
+                      <a:headEnd type="none" w="med" len="med"/>
+                      <a:tailEnd type="none" w="med" len="med"/>
+                    </a:lnT>
+                    <a:lnB w="6350" cap="flat" cmpd="sng" algn="ctr">
+                      <a:solidFill>
+                        <a:srgbClr val="2E6B68"/>
+                      </a:solidFill>
+                      <a:prstDash val="solid"/>
+                      <a:round/>
+                      <a:headEnd type="none" w="med" len="med"/>
+                      <a:tailEnd type="none" w="med" len="med"/>
+                    </a:lnB>
+                    <a:solidFill>
+                      <a:srgbClr val="1B4A48"/>
+                    </a:solidFill>
+                  </a:tcPr>
+                </a:tc>
+              </a:tr>
+              <a:tr h="228600">
+                <a:tc>
+                  <a:txBody>
+                    <a:bodyPr/>
+                    <a:lstStyle/>
+                    <a:p>
+                      <a:pPr indent="0" marL="0">
+                        <a:buNone/>
+                      </a:pPr>
+                      <a:r>
+                        <a:rPr lang="en-US" sz="800" b="1" dirty="0">
+                          <a:solidFill>
+                            <a:srgbClr val="EDE7DB"/>
+                          </a:solidFill>
+                          <a:latin typeface="Arial" pitchFamily="34" charset="0"/>
+                          <a:ea typeface="Arial" pitchFamily="34" charset="-122"/>
+                          <a:cs typeface="Arial" pitchFamily="34" charset="-120"/>
+                        </a:rPr>
+                        <a:t>time_trial</a:t>
+                      </a:r>
+                      <a:endParaRPr lang="en-US" sz="800" dirty="0">
+                        <a:latin typeface="Arial" charset="0"/>
+                        <a:ea typeface="Arial" charset="0"/>
+                        <a:cs typeface="Arial" charset="0"/>
+                      </a:endParaRPr>
+                    </a:p>
+                  </a:txBody>
+                  <a:tcPr marL="27432" marR="27432" marT="27432" marB="27432" anchor="ctr">
+                    <a:lnL w="6350" cap="flat" cmpd="sng" algn="ctr">
+                      <a:solidFill>
+                        <a:srgbClr val="2E6B68"/>
+                      </a:solidFill>
+                      <a:prstDash val="solid"/>
+                      <a:round/>
+                      <a:headEnd type="none" w="med" len="med"/>
+                      <a:tailEnd type="none" w="med" len="med"/>
+                    </a:lnL>
+                    <a:lnR w="6350" cap="flat" cmpd="sng" algn="ctr">
+                      <a:solidFill>
+                        <a:srgbClr val="2E6B68"/>
+                      </a:solidFill>
+                      <a:prstDash val="solid"/>
+                      <a:round/>
+                      <a:headEnd type="none" w="med" len="med"/>
+                      <a:tailEnd type="none" w="med" len="med"/>
+                    </a:lnR>
+                    <a:lnT w="6350" cap="flat" cmpd="sng" algn="ctr">
+                      <a:solidFill>
+                        <a:srgbClr val="2E6B68"/>
+                      </a:solidFill>
+                      <a:prstDash val="solid"/>
+                      <a:round/>
+                      <a:headEnd type="none" w="med" len="med"/>
+                      <a:tailEnd type="none" w="med" len="med"/>
+                    </a:lnT>
+                    <a:lnB w="6350" cap="flat" cmpd="sng" algn="ctr">
+                      <a:solidFill>
+                        <a:srgbClr val="2E6B68"/>
+                      </a:solidFill>
+                      <a:prstDash val="solid"/>
+                      <a:round/>
+                      <a:headEnd type="none" w="med" len="med"/>
+                      <a:tailEnd type="none" w="med" len="med"/>
+                    </a:lnB>
+                    <a:solidFill>
+                      <a:srgbClr val="1B4A48"/>
+                    </a:solidFill>
+                  </a:tcPr>
+                </a:tc>
+                <a:tc>
+                  <a:txBody>
+                    <a:bodyPr/>
+                    <a:lstStyle/>
+                    <a:p>
+                      <a:pPr indent="0" marL="0">
+                        <a:buNone/>
+                      </a:pPr>
+                      <a:r>
+                        <a:rPr lang="en-US" sz="800" dirty="0">
+                          <a:solidFill>
+                            <a:srgbClr val="BDB3A2"/>
+                          </a:solidFill>
+                          <a:latin typeface="Arial" pitchFamily="34" charset="0"/>
+                          <a:ea typeface="Arial" pitchFamily="34" charset="-122"/>
+                          <a:cs typeface="Arial" pitchFamily="34" charset="-120"/>
+                        </a:rPr>
+                        <a:t>the same relic hunt against a clock</a:t>
+                      </a:r>
+                      <a:endParaRPr lang="en-US" sz="800" dirty="0">
+                        <a:latin typeface="Arial" charset="0"/>
+                        <a:ea typeface="Arial" charset="0"/>
+                        <a:cs typeface="Arial" charset="0"/>
+                      </a:endParaRPr>
+                    </a:p>
+                  </a:txBody>
+                  <a:tcPr marL="27432" marR="27432" marT="27432" marB="27432" anchor="ctr">
+                    <a:lnL w="6350" cap="flat" cmpd="sng" algn="ctr">
+                      <a:solidFill>
+                        <a:srgbClr val="2E6B68"/>
+                      </a:solidFill>
+                      <a:prstDash val="solid"/>
+                      <a:round/>
+                      <a:headEnd type="none" w="med" len="med"/>
+                      <a:tailEnd type="none" w="med" len="med"/>
+                    </a:lnL>
+                    <a:lnR w="6350" cap="flat" cmpd="sng" algn="ctr">
+                      <a:solidFill>
+                        <a:srgbClr val="2E6B68"/>
+                      </a:solidFill>
+                      <a:prstDash val="solid"/>
+                      <a:round/>
+                      <a:headEnd type="none" w="med" len="med"/>
+                      <a:tailEnd type="none" w="med" len="med"/>
+                    </a:lnR>
+                    <a:lnT w="6350" cap="flat" cmpd="sng" algn="ctr">
+                      <a:solidFill>
+                        <a:srgbClr val="2E6B68"/>
+                      </a:solidFill>
+                      <a:prstDash val="solid"/>
+                      <a:round/>
+                      <a:headEnd type="none" w="med" len="med"/>
+                      <a:tailEnd type="none" w="med" len="med"/>
+                    </a:lnT>
+                    <a:lnB w="6350" cap="flat" cmpd="sng" algn="ctr">
+                      <a:solidFill>
+                        <a:srgbClr val="2E6B68"/>
+                      </a:solidFill>
+                      <a:prstDash val="solid"/>
+                      <a:round/>
+                      <a:headEnd type="none" w="med" len="med"/>
+                      <a:tailEnd type="none" w="med" len="med"/>
+                    </a:lnB>
+                    <a:solidFill>
+                      <a:srgbClr val="1B4A48"/>
+                    </a:solidFill>
+                  </a:tcPr>
+                </a:tc>
+                <a:tc>
+                  <a:txBody>
+                    <a:bodyPr/>
+                    <a:lstStyle/>
+                    <a:p>
+                      <a:pPr indent="0" marL="0">
+                        <a:buNone/>
+                      </a:pPr>
+                      <a:r>
+                        <a:rPr lang="en-US" sz="800" dirty="0">
+                          <a:solidFill>
+                            <a:srgbClr val="BDB3A2"/>
+                          </a:solidFill>
+                          <a:latin typeface="Arial" pitchFamily="34" charset="0"/>
+                          <a:ea typeface="Arial" pitchFamily="34" charset="-122"/>
+                          <a:cs typeface="Arial" pitchFamily="34" charset="-120"/>
+                        </a:rPr>
+                        <a:t>finish before timeLimitSec; lost when it expires</a:t>
+                      </a:r>
+                      <a:endParaRPr lang="en-US" sz="800" dirty="0">
+                        <a:latin typeface="Arial" charset="0"/>
+                        <a:ea typeface="Arial" charset="0"/>
+                        <a:cs typeface="Arial" charset="0"/>
+                      </a:endParaRPr>
+                    </a:p>
+                  </a:txBody>
+                  <a:tcPr marL="27432" marR="27432" marT="27432" marB="27432" anchor="ctr">
+                    <a:lnL w="6350" cap="flat" cmpd="sng" algn="ctr">
+                      <a:solidFill>
+                        <a:srgbClr val="2E6B68"/>
+                      </a:solidFill>
+                      <a:prstDash val="solid"/>
+                      <a:round/>
+                      <a:headEnd type="none" w="med" len="med"/>
+                      <a:tailEnd type="none" w="med" len="med"/>
+                    </a:lnL>
+                    <a:lnR w="6350" cap="flat" cmpd="sng" algn="ctr">
+                      <a:solidFill>
+                        <a:srgbClr val="2E6B68"/>
+                      </a:solidFill>
+                      <a:prstDash val="solid"/>
+                      <a:round/>
+                      <a:headEnd type="none" w="med" len="med"/>
+                      <a:tailEnd type="none" w="med" len="med"/>
+                    </a:lnR>
+                    <a:lnT w="6350" cap="flat" cmpd="sng" algn="ctr">
+                      <a:solidFill>
+                        <a:srgbClr val="2E6B68"/>
+                      </a:solidFill>
+                      <a:prstDash val="solid"/>
+                      <a:round/>
+                      <a:headEnd type="none" w="med" len="med"/>
+                      <a:tailEnd type="none" w="med" len="med"/>
+                    </a:lnT>
+                    <a:lnB w="6350" cap="flat" cmpd="sng" algn="ctr">
+                      <a:solidFill>
+                        <a:srgbClr val="2E6B68"/>
+                      </a:solidFill>
+                      <a:prstDash val="solid"/>
+                      <a:round/>
+                      <a:headEnd type="none" w="med" len="med"/>
+                      <a:tailEnd type="none" w="med" len="med"/>
+                    </a:lnB>
+                    <a:solidFill>
+                      <a:srgbClr val="1B4A48"/>
+                    </a:solidFill>
+                  </a:tcPr>
+                </a:tc>
+                <a:tc>
+                  <a:txBody>
+                    <a:bodyPr/>
+                    <a:lstStyle/>
+                    <a:p>
+                      <a:pPr indent="0" marL="0">
+                        <a:buNone/>
+                      </a:pPr>
+                      <a:r>
+                        <a:rPr lang="en-US" sz="800" dirty="0">
+                          <a:solidFill>
+                            <a:srgbClr val="BDB3A2"/>
+                          </a:solidFill>
+                          <a:latin typeface="Arial" pitchFamily="34" charset="0"/>
+                          <a:ea typeface="Arial" pitchFamily="34" charset="-122"/>
+                          <a:cs typeface="Arial" pitchFamily="34" charset="-120"/>
+                        </a:rPr>
+                        <a:t>timeLimitSec 20 to 600 s (default 120)</a:t>
+                      </a:r>
+                      <a:endParaRPr lang="en-US" sz="800" dirty="0">
+                        <a:latin typeface="Arial" charset="0"/>
+                        <a:ea typeface="Arial" charset="0"/>
+                        <a:cs typeface="Arial" charset="0"/>
+                      </a:endParaRPr>
+                    </a:p>
+                  </a:txBody>
+                  <a:tcPr marL="27432" marR="27432" marT="27432" marB="27432" anchor="ctr">
+                    <a:lnL w="6350" cap="flat" cmpd="sng" algn="ctr">
+                      <a:solidFill>
+                        <a:srgbClr val="2E6B68"/>
+                      </a:solidFill>
+                      <a:prstDash val="solid"/>
+                      <a:round/>
+                      <a:headEnd type="none" w="med" len="med"/>
+                      <a:tailEnd type="none" w="med" len="med"/>
+                    </a:lnL>
+                    <a:lnR w="6350" cap="flat" cmpd="sng" algn="ctr">
+                      <a:solidFill>
+                        <a:srgbClr val="2E6B68"/>
+                      </a:solidFill>
+                      <a:prstDash val="solid"/>
+                      <a:round/>
+                      <a:headEnd type="none" w="med" len="med"/>
+                      <a:tailEnd type="none" w="med" len="med"/>
+                    </a:lnR>
+                    <a:lnT w="6350" cap="flat" cmpd="sng" algn="ctr">
+                      <a:solidFill>
+                        <a:srgbClr val="2E6B68"/>
+                      </a:solidFill>
+                      <a:prstDash val="solid"/>
+                      <a:round/>
+                      <a:headEnd type="none" w="med" len="med"/>
+                      <a:tailEnd type="none" w="med" len="med"/>
+                    </a:lnT>
+                    <a:lnB w="6350" cap="flat" cmpd="sng" algn="ctr">
+                      <a:solidFill>
+                        <a:srgbClr val="2E6B68"/>
+                      </a:solidFill>
+                      <a:prstDash val="solid"/>
+                      <a:round/>
+                      <a:headEnd type="none" w="med" len="med"/>
+                      <a:tailEnd type="none" w="med" len="med"/>
+                    </a:lnB>
+                    <a:solidFill>
+                      <a:srgbClr val="1B4A48"/>
+                    </a:solidFill>
+                  </a:tcPr>
+                </a:tc>
+              </a:tr>
+              <a:tr h="228600">
+                <a:tc>
+                  <a:txBody>
+                    <a:bodyPr/>
+                    <a:lstStyle/>
+                    <a:p>
+                      <a:pPr indent="0" marL="0">
+                        <a:buNone/>
+                      </a:pPr>
+                      <a:r>
+                        <a:rPr lang="en-US" sz="800" b="1" dirty="0">
+                          <a:solidFill>
+                            <a:srgbClr val="EDE7DB"/>
+                          </a:solidFill>
+                          <a:latin typeface="Arial" pitchFamily="34" charset="0"/>
+                          <a:ea typeface="Arial" pitchFamily="34" charset="-122"/>
+                          <a:cs typeface="Arial" pitchFamily="34" charset="-120"/>
+                        </a:rPr>
+                        <a:t>king_of_the_hill</a:t>
+                      </a:r>
+                      <a:endParaRPr lang="en-US" sz="800" dirty="0">
+                        <a:latin typeface="Arial" charset="0"/>
+                        <a:ea typeface="Arial" charset="0"/>
+                        <a:cs typeface="Arial" charset="0"/>
+                      </a:endParaRPr>
+                    </a:p>
+                  </a:txBody>
+                  <a:tcPr marL="27432" marR="27432" marT="27432" marB="27432" anchor="ctr">
+                    <a:lnL w="6350" cap="flat" cmpd="sng" algn="ctr">
+                      <a:solidFill>
+                        <a:srgbClr val="2E6B68"/>
+                      </a:solidFill>
+                      <a:prstDash val="solid"/>
+                      <a:round/>
+                      <a:headEnd type="none" w="med" len="med"/>
+                      <a:tailEnd type="none" w="med" len="med"/>
+                    </a:lnL>
+                    <a:lnR w="6350" cap="flat" cmpd="sng" algn="ctr">
+                      <a:solidFill>
+                        <a:srgbClr val="2E6B68"/>
+                      </a:solidFill>
+                      <a:prstDash val="solid"/>
+                      <a:round/>
+                      <a:headEnd type="none" w="med" len="med"/>
+                      <a:tailEnd type="none" w="med" len="med"/>
+                    </a:lnR>
+                    <a:lnT w="6350" cap="flat" cmpd="sng" algn="ctr">
+                      <a:solidFill>
+                        <a:srgbClr val="2E6B68"/>
+                      </a:solidFill>
+                      <a:prstDash val="solid"/>
+                      <a:round/>
+                      <a:headEnd type="none" w="med" len="med"/>
+                      <a:tailEnd type="none" w="med" len="med"/>
+                    </a:lnT>
+                    <a:lnB w="6350" cap="flat" cmpd="sng" algn="ctr">
+                      <a:solidFill>
+                        <a:srgbClr val="2E6B68"/>
+                      </a:solidFill>
+                      <a:prstDash val="solid"/>
+                      <a:round/>
+                      <a:headEnd type="none" w="med" len="med"/>
+                      <a:tailEnd type="none" w="med" len="med"/>
+                    </a:lnB>
+                    <a:solidFill>
+                      <a:srgbClr val="1B4A48"/>
+                    </a:solidFill>
+                  </a:tcPr>
+                </a:tc>
+                <a:tc>
+                  <a:txBody>
+                    <a:bodyPr/>
+                    <a:lstStyle/>
+                    <a:p>
+                      <a:pPr indent="0" marL="0">
+                        <a:buNone/>
+                      </a:pPr>
+                      <a:r>
+                        <a:rPr lang="en-US" sz="800" dirty="0">
+                          <a:solidFill>
+                            <a:srgbClr val="BDB3A2"/>
+                          </a:solidFill>
+                          <a:latin typeface="Arial" pitchFamily="34" charset="0"/>
+                          <a:ea typeface="Arial" pitchFamily="34" charset="-122"/>
+                          <a:cs typeface="Arial" pitchFamily="34" charset="-120"/>
+                        </a:rPr>
+                        <a:t>reach the gate island (the hill) and stand in its zone</a:t>
+                      </a:r>
+                      <a:endParaRPr lang="en-US" sz="800" dirty="0">
+                        <a:latin typeface="Arial" charset="0"/>
+                        <a:ea typeface="Arial" charset="0"/>
+                        <a:cs typeface="Arial" charset="0"/>
+                      </a:endParaRPr>
+                    </a:p>
+                  </a:txBody>
+                  <a:tcPr marL="27432" marR="27432" marT="27432" marB="27432" anchor="ctr">
+                    <a:lnL w="6350" cap="flat" cmpd="sng" algn="ctr">
+                      <a:solidFill>
+                        <a:srgbClr val="2E6B68"/>
+                      </a:solidFill>
+                      <a:prstDash val="solid"/>
+                      <a:round/>
+                      <a:headEnd type="none" w="med" len="med"/>
+                      <a:tailEnd type="none" w="med" len="med"/>
+                    </a:lnL>
+                    <a:lnR w="6350" cap="flat" cmpd="sng" algn="ctr">
+                      <a:solidFill>
+                        <a:srgbClr val="2E6B68"/>
+                      </a:solidFill>
+                      <a:prstDash val="solid"/>
+                      <a:round/>
+                      <a:headEnd type="none" w="med" len="med"/>
+                      <a:tailEnd type="none" w="med" len="med"/>
+                    </a:lnR>
+                    <a:lnT w="6350" cap="flat" cmpd="sng" algn="ctr">
+                      <a:solidFill>
+                        <a:srgbClr val="2E6B68"/>
+                      </a:solidFill>
+                      <a:prstDash val="solid"/>
+                      <a:round/>
+                      <a:headEnd type="none" w="med" len="med"/>
+                      <a:tailEnd type="none" w="med" len="med"/>
+                    </a:lnT>
+                    <a:lnB w="6350" cap="flat" cmpd="sng" algn="ctr">
+                      <a:solidFill>
+                        <a:srgbClr val="2E6B68"/>
+                      </a:solidFill>
+                      <a:prstDash val="solid"/>
+                      <a:round/>
+                      <a:headEnd type="none" w="med" len="med"/>
+                      <a:tailEnd type="none" w="med" len="med"/>
+                    </a:lnB>
+                    <a:solidFill>
+                      <a:srgbClr val="1B4A48"/>
+                    </a:solidFill>
+                  </a:tcPr>
+                </a:tc>
+                <a:tc>
+                  <a:txBody>
+                    <a:bodyPr/>
+                    <a:lstStyle/>
+                    <a:p>
+                      <a:pPr indent="0" marL="0">
+                        <a:buNone/>
+                      </a:pPr>
+                      <a:r>
+                        <a:rPr lang="en-US" sz="800" dirty="0">
+                          <a:solidFill>
+                            <a:srgbClr val="BDB3A2"/>
+                          </a:solidFill>
+                          <a:latin typeface="Arial" pitchFamily="34" charset="0"/>
+                          <a:ea typeface="Arial" pitchFamily="34" charset="-122"/>
+                          <a:cs typeface="Arial" pitchFamily="34" charset="-120"/>
+                        </a:rPr>
+                        <a:t>first player whose held time reaches holdSeconds</a:t>
+                      </a:r>
+                      <a:endParaRPr lang="en-US" sz="800" dirty="0">
+                        <a:latin typeface="Arial" charset="0"/>
+                        <a:ea typeface="Arial" charset="0"/>
+                        <a:cs typeface="Arial" charset="0"/>
+                      </a:endParaRPr>
+                    </a:p>
+                  </a:txBody>
+                  <a:tcPr marL="27432" marR="27432" marT="27432" marB="27432" anchor="ctr">
+                    <a:lnL w="6350" cap="flat" cmpd="sng" algn="ctr">
+                      <a:solidFill>
+                        <a:srgbClr val="2E6B68"/>
+                      </a:solidFill>
+                      <a:prstDash val="solid"/>
+                      <a:round/>
+                      <a:headEnd type="none" w="med" len="med"/>
+                      <a:tailEnd type="none" w="med" len="med"/>
+                    </a:lnL>
+                    <a:lnR w="6350" cap="flat" cmpd="sng" algn="ctr">
+                      <a:solidFill>
+                        <a:srgbClr val="2E6B68"/>
+                      </a:solidFill>
+                      <a:prstDash val="solid"/>
+                      <a:round/>
+                      <a:headEnd type="none" w="med" len="med"/>
+                      <a:tailEnd type="none" w="med" len="med"/>
+                    </a:lnR>
+                    <a:lnT w="6350" cap="flat" cmpd="sng" algn="ctr">
+                      <a:solidFill>
+                        <a:srgbClr val="2E6B68"/>
+                      </a:solidFill>
+                      <a:prstDash val="solid"/>
+                      <a:round/>
+                      <a:headEnd type="none" w="med" len="med"/>
+                      <a:tailEnd type="none" w="med" len="med"/>
+                    </a:lnT>
+                    <a:lnB w="6350" cap="flat" cmpd="sng" algn="ctr">
+                      <a:solidFill>
+                        <a:srgbClr val="2E6B68"/>
+                      </a:solidFill>
+                      <a:prstDash val="solid"/>
+                      <a:round/>
+                      <a:headEnd type="none" w="med" len="med"/>
+                      <a:tailEnd type="none" w="med" len="med"/>
+                    </a:lnB>
+                    <a:solidFill>
+                      <a:srgbClr val="1B4A48"/>
+                    </a:solidFill>
+                  </a:tcPr>
+                </a:tc>
+                <a:tc>
+                  <a:txBody>
+                    <a:bodyPr/>
+                    <a:lstStyle/>
+                    <a:p>
+                      <a:pPr indent="0" marL="0">
+                        <a:buNone/>
+                      </a:pPr>
+                      <a:r>
+                        <a:rPr lang="en-US" sz="800" dirty="0">
+                          <a:solidFill>
+                            <a:srgbClr val="BDB3A2"/>
+                          </a:solidFill>
+                          <a:latin typeface="Arial" pitchFamily="34" charset="0"/>
+                          <a:ea typeface="Arial" pitchFamily="34" charset="-122"/>
+                          <a:cs typeface="Arial" pitchFamily="34" charset="-120"/>
+                        </a:rPr>
+                        <a:t>holdSeconds 3 to 60 s (default 10)</a:t>
+                      </a:r>
+                      <a:endParaRPr lang="en-US" sz="800" dirty="0">
+                        <a:latin typeface="Arial" charset="0"/>
+                        <a:ea typeface="Arial" charset="0"/>
+                        <a:cs typeface="Arial" charset="0"/>
+                      </a:endParaRPr>
+                    </a:p>
+                  </a:txBody>
+                  <a:tcPr marL="27432" marR="27432" marT="27432" marB="27432" anchor="ctr">
+                    <a:lnL w="6350" cap="flat" cmpd="sng" algn="ctr">
+                      <a:solidFill>
+                        <a:srgbClr val="2E6B68"/>
+                      </a:solidFill>
+                      <a:prstDash val="solid"/>
+                      <a:round/>
+                      <a:headEnd type="none" w="med" len="med"/>
+                      <a:tailEnd type="none" w="med" len="med"/>
+                    </a:lnL>
+                    <a:lnR w="6350" cap="flat" cmpd="sng" algn="ctr">
+                      <a:solidFill>
+                        <a:srgbClr val="2E6B68"/>
+                      </a:solidFill>
+                      <a:prstDash val="solid"/>
+                      <a:round/>
+                      <a:headEnd type="none" w="med" len="med"/>
+                      <a:tailEnd type="none" w="med" len="med"/>
+                    </a:lnR>
+                    <a:lnT w="6350" cap="flat" cmpd="sng" algn="ctr">
+                      <a:solidFill>
+                        <a:srgbClr val="2E6B68"/>
+                      </a:solidFill>
+                      <a:prstDash val="solid"/>
+                      <a:round/>
+                      <a:headEnd type="none" w="med" len="med"/>
+                      <a:tailEnd type="none" w="med" len="med"/>
+                    </a:lnT>
+                    <a:lnB w="6350" cap="flat" cmpd="sng" algn="ctr">
+                      <a:solidFill>
+                        <a:srgbClr val="2E6B68"/>
+                      </a:solidFill>
+                      <a:prstDash val="solid"/>
+                      <a:round/>
+                      <a:headEnd type="none" w="med" len="med"/>
+                      <a:tailEnd type="none" w="med" len="med"/>
+                    </a:lnB>
+                    <a:solidFill>
+                      <a:srgbClr val="1B4A48"/>
+                    </a:solidFill>
+                  </a:tcPr>
+                </a:tc>
+              </a:tr>
+              <a:tr h="228600">
+                <a:tc>
+                  <a:txBody>
+                    <a:bodyPr/>
+                    <a:lstStyle/>
+                    <a:p>
+                      <a:pPr indent="0" marL="0">
+                        <a:buNone/>
+                      </a:pPr>
+                      <a:r>
+                        <a:rPr lang="en-US" sz="800" b="1" dirty="0">
+                          <a:solidFill>
+                            <a:srgbClr val="EDE7DB"/>
+                          </a:solidFill>
+                          <a:latin typeface="Arial" pitchFamily="34" charset="0"/>
+                          <a:ea typeface="Arial" pitchFamily="34" charset="-122"/>
+                          <a:cs typeface="Arial" pitchFamily="34" charset="-120"/>
+                        </a:rPr>
+                        <a:t>checkpoint_race</a:t>
+                      </a:r>
+                      <a:endParaRPr lang="en-US" sz="800" dirty="0">
+                        <a:latin typeface="Arial" charset="0"/>
+                        <a:ea typeface="Arial" charset="0"/>
+                        <a:cs typeface="Arial" charset="0"/>
+                      </a:endParaRPr>
+                    </a:p>
+                  </a:txBody>
+                  <a:tcPr marL="27432" marR="27432" marT="27432" marB="27432" anchor="ctr">
+                    <a:lnL w="6350" cap="flat" cmpd="sng" algn="ctr">
+                      <a:solidFill>
+                        <a:srgbClr val="2E6B68"/>
+                      </a:solidFill>
+                      <a:prstDash val="solid"/>
+                      <a:round/>
+                      <a:headEnd type="none" w="med" len="med"/>
+                      <a:tailEnd type="none" w="med" len="med"/>
+                    </a:lnL>
+                    <a:lnR w="6350" cap="flat" cmpd="sng" algn="ctr">
+                      <a:solidFill>
+                        <a:srgbClr val="2E6B68"/>
+                      </a:solidFill>
+                      <a:prstDash val="solid"/>
+                      <a:round/>
+                      <a:headEnd type="none" w="med" len="med"/>
+                      <a:tailEnd type="none" w="med" len="med"/>
+                    </a:lnR>
+                    <a:lnT w="6350" cap="flat" cmpd="sng" algn="ctr">
+                      <a:solidFill>
+                        <a:srgbClr val="2E6B68"/>
+                      </a:solidFill>
+                      <a:prstDash val="solid"/>
+                      <a:round/>
+                      <a:headEnd type="none" w="med" len="med"/>
+                      <a:tailEnd type="none" w="med" len="med"/>
+                    </a:lnT>
+                    <a:lnB w="6350" cap="flat" cmpd="sng" algn="ctr">
+                      <a:solidFill>
+                        <a:srgbClr val="2E6B68"/>
+                      </a:solidFill>
+                      <a:prstDash val="solid"/>
+                      <a:round/>
+                      <a:headEnd type="none" w="med" len="med"/>
+                      <a:tailEnd type="none" w="med" len="med"/>
+                    </a:lnB>
+                    <a:solidFill>
+                      <a:srgbClr val="1B4A48"/>
+                    </a:solidFill>
+                  </a:tcPr>
+                </a:tc>
+                <a:tc>
+                  <a:txBody>
+                    <a:bodyPr/>
+                    <a:lstStyle/>
+                    <a:p>
+                      <a:pPr indent="0" marL="0">
+                        <a:buNone/>
+                      </a:pPr>
+                      <a:r>
+                        <a:rPr lang="en-US" sz="800" dirty="0">
+                          <a:solidFill>
+                            <a:srgbClr val="BDB3A2"/>
+                          </a:solidFill>
+                          <a:latin typeface="Arial" pitchFamily="34" charset="0"/>
+                          <a:ea typeface="Arial" pitchFamily="34" charset="-122"/>
+                          <a:cs typeface="Arial" pitchFamily="34" charset="-120"/>
+                        </a:rPr>
+                        <a:t>reach the relics as checkpoints, in order, then the gate</a:t>
+                      </a:r>
+                      <a:endParaRPr lang="en-US" sz="800" dirty="0">
+                        <a:latin typeface="Arial" charset="0"/>
+                        <a:ea typeface="Arial" charset="0"/>
+                        <a:cs typeface="Arial" charset="0"/>
+                      </a:endParaRPr>
+                    </a:p>
+                  </a:txBody>
+                  <a:tcPr marL="27432" marR="27432" marT="27432" marB="27432" anchor="ctr">
+                    <a:lnL w="6350" cap="flat" cmpd="sng" algn="ctr">
+                      <a:solidFill>
+                        <a:srgbClr val="2E6B68"/>
+                      </a:solidFill>
+                      <a:prstDash val="solid"/>
+                      <a:round/>
+                      <a:headEnd type="none" w="med" len="med"/>
+                      <a:tailEnd type="none" w="med" len="med"/>
+                    </a:lnL>
+                    <a:lnR w="6350" cap="flat" cmpd="sng" algn="ctr">
+                      <a:solidFill>
+                        <a:srgbClr val="2E6B68"/>
+                      </a:solidFill>
+                      <a:prstDash val="solid"/>
+                      <a:round/>
+                      <a:headEnd type="none" w="med" len="med"/>
+                      <a:tailEnd type="none" w="med" len="med"/>
+                    </a:lnR>
+                    <a:lnT w="6350" cap="flat" cmpd="sng" algn="ctr">
+                      <a:solidFill>
+                        <a:srgbClr val="2E6B68"/>
+                      </a:solidFill>
+                      <a:prstDash val="solid"/>
+                      <a:round/>
+                      <a:headEnd type="none" w="med" len="med"/>
+                      <a:tailEnd type="none" w="med" len="med"/>
+                    </a:lnT>
+                    <a:lnB w="6350" cap="flat" cmpd="sng" algn="ctr">
+                      <a:solidFill>
+                        <a:srgbClr val="2E6B68"/>
+                      </a:solidFill>
+                      <a:prstDash val="solid"/>
+                      <a:round/>
+                      <a:headEnd type="none" w="med" len="med"/>
+                      <a:tailEnd type="none" w="med" len="med"/>
+                    </a:lnB>
+                    <a:solidFill>
+                      <a:srgbClr val="1B4A48"/>
+                    </a:solidFill>
+                  </a:tcPr>
+                </a:tc>
+                <a:tc>
+                  <a:txBody>
+                    <a:bodyPr/>
+                    <a:lstStyle/>
+                    <a:p>
+                      <a:pPr indent="0" marL="0">
+                        <a:buNone/>
+                      </a:pPr>
+                      <a:r>
+                        <a:rPr lang="en-US" sz="800" dirty="0">
+                          <a:solidFill>
+                            <a:srgbClr val="BDB3A2"/>
+                          </a:solidFill>
+                          <a:latin typeface="Arial" pitchFamily="34" charset="0"/>
+                          <a:ea typeface="Arial" pitchFamily="34" charset="-122"/>
+                          <a:cs typeface="Arial" pitchFamily="34" charset="-120"/>
+                        </a:rPr>
+                        <a:t>every checkpoint, then the gate</a:t>
+                      </a:r>
+                      <a:endParaRPr lang="en-US" sz="800" dirty="0">
+                        <a:latin typeface="Arial" charset="0"/>
+                        <a:ea typeface="Arial" charset="0"/>
+                        <a:cs typeface="Arial" charset="0"/>
+                      </a:endParaRPr>
+                    </a:p>
+                  </a:txBody>
+                  <a:tcPr marL="27432" marR="27432" marT="27432" marB="27432" anchor="ctr">
+                    <a:lnL w="6350" cap="flat" cmpd="sng" algn="ctr">
+                      <a:solidFill>
+                        <a:srgbClr val="2E6B68"/>
+                      </a:solidFill>
+                      <a:prstDash val="solid"/>
+                      <a:round/>
+                      <a:headEnd type="none" w="med" len="med"/>
+                      <a:tailEnd type="none" w="med" len="med"/>
+                    </a:lnL>
+                    <a:lnR w="6350" cap="flat" cmpd="sng" algn="ctr">
+                      <a:solidFill>
+                        <a:srgbClr val="2E6B68"/>
+                      </a:solidFill>
+                      <a:prstDash val="solid"/>
+                      <a:round/>
+                      <a:headEnd type="none" w="med" len="med"/>
+                      <a:tailEnd type="none" w="med" len="med"/>
+                    </a:lnR>
+                    <a:lnT w="6350" cap="flat" cmpd="sng" algn="ctr">
+                      <a:solidFill>
+                        <a:srgbClr val="2E6B68"/>
+                      </a:solidFill>
+                      <a:prstDash val="solid"/>
+                      <a:round/>
+                      <a:headEnd type="none" w="med" len="med"/>
+                      <a:tailEnd type="none" w="med" len="med"/>
+                    </a:lnT>
+                    <a:lnB w="6350" cap="flat" cmpd="sng" algn="ctr">
+                      <a:solidFill>
+                        <a:srgbClr val="2E6B68"/>
+                      </a:solidFill>
+                      <a:prstDash val="solid"/>
+                      <a:round/>
+                      <a:headEnd type="none" w="med" len="med"/>
+                      <a:tailEnd type="none" w="med" len="med"/>
+                    </a:lnB>
+                    <a:solidFill>
+                      <a:srgbClr val="1B4A48"/>
+                    </a:solidFill>
+                  </a:tcPr>
+                </a:tc>
+                <a:tc>
+                  <a:txBody>
+                    <a:bodyPr/>
+                    <a:lstStyle/>
+                    <a:p>
+                      <a:pPr indent="0" marL="0">
+                        <a:buNone/>
+                      </a:pPr>
+                      <a:r>
+                        <a:rPr lang="en-US" sz="800" dirty="0">
+                          <a:solidFill>
+                            <a:srgbClr val="BDB3A2"/>
+                          </a:solidFill>
+                          <a:latin typeface="Arial" pitchFamily="34" charset="0"/>
+                          <a:ea typeface="Arial" pitchFamily="34" charset="-122"/>
+                          <a:cs typeface="Arial" pitchFamily="34" charset="-120"/>
+                        </a:rPr>
+                        <a:t>orderedCheckpoints; at least 2 relics</a:t>
+                      </a:r>
+                      <a:endParaRPr lang="en-US" sz="800" dirty="0">
+                        <a:latin typeface="Arial" charset="0"/>
+                        <a:ea typeface="Arial" charset="0"/>
+                        <a:cs typeface="Arial" charset="0"/>
+                      </a:endParaRPr>
+                    </a:p>
+                  </a:txBody>
+                  <a:tcPr marL="27432" marR="27432" marT="27432" marB="27432" anchor="ctr">
+                    <a:lnL w="6350" cap="flat" cmpd="sng" algn="ctr">
+                      <a:solidFill>
+                        <a:srgbClr val="2E6B68"/>
+                      </a:solidFill>
+                      <a:prstDash val="solid"/>
+                      <a:round/>
+                      <a:headEnd type="none" w="med" len="med"/>
+                      <a:tailEnd type="none" w="med" len="med"/>
+                    </a:lnL>
+                    <a:lnR w="6350" cap="flat" cmpd="sng" algn="ctr">
+                      <a:solidFill>
+                        <a:srgbClr val="2E6B68"/>
+                      </a:solidFill>
+                      <a:prstDash val="solid"/>
+                      <a:round/>
+                      <a:headEnd type="none" w="med" len="med"/>
+                      <a:tailEnd type="none" w="med" len="med"/>
+                    </a:lnR>
+                    <a:lnT w="6350" cap="flat" cmpd="sng" algn="ctr">
+                      <a:solidFill>
+                        <a:srgbClr val="2E6B68"/>
+                      </a:solidFill>
+                      <a:prstDash val="solid"/>
+                      <a:round/>
+                      <a:headEnd type="none" w="med" len="med"/>
+                      <a:tailEnd type="none" w="med" len="med"/>
+                    </a:lnT>
+                    <a:lnB w="6350" cap="flat" cmpd="sng" algn="ctr">
+                      <a:solidFill>
+                        <a:srgbClr val="2E6B68"/>
+                      </a:solidFill>
+                      <a:prstDash val="solid"/>
+                      <a:round/>
+                      <a:headEnd type="none" w="med" len="med"/>
+                      <a:tailEnd type="none" w="med" len="med"/>
+                    </a:lnB>
+                    <a:solidFill>
+                      <a:srgbClr val="1B4A48"/>
+                    </a:solidFill>
+                  </a:tcPr>
+                </a:tc>
+              </a:tr>
+              <a:tr h="228600">
+                <a:tc>
+                  <a:txBody>
+                    <a:bodyPr/>
+                    <a:lstStyle/>
+                    <a:p>
+                      <a:pPr indent="0" marL="0">
+                        <a:buNone/>
+                      </a:pPr>
+                      <a:r>
+                        <a:rPr lang="en-US" sz="800" b="1" dirty="0">
+                          <a:solidFill>
+                            <a:srgbClr val="EDE7DB"/>
+                          </a:solidFill>
+                          <a:latin typeface="Arial" pitchFamily="34" charset="0"/>
+                          <a:ea typeface="Arial" pitchFamily="34" charset="-122"/>
+                          <a:cs typeface="Arial" pitchFamily="34" charset="-120"/>
+                        </a:rPr>
+                        <a:t>survival</a:t>
+                      </a:r>
+                      <a:endParaRPr lang="en-US" sz="800" dirty="0">
+                        <a:latin typeface="Arial" charset="0"/>
+                        <a:ea typeface="Arial" charset="0"/>
+                        <a:cs typeface="Arial" charset="0"/>
+                      </a:endParaRPr>
+                    </a:p>
+                  </a:txBody>
+                  <a:tcPr marL="27432" marR="27432" marT="27432" marB="27432" anchor="ctr">
+                    <a:lnL w="6350" cap="flat" cmpd="sng" algn="ctr">
+                      <a:solidFill>
+                        <a:srgbClr val="2E6B68"/>
+                      </a:solidFill>
+                      <a:prstDash val="solid"/>
+                      <a:round/>
+                      <a:headEnd type="none" w="med" len="med"/>
+                      <a:tailEnd type="none" w="med" len="med"/>
+                    </a:lnL>
+                    <a:lnR w="6350" cap="flat" cmpd="sng" algn="ctr">
+                      <a:solidFill>
+                        <a:srgbClr val="2E6B68"/>
+                      </a:solidFill>
+                      <a:prstDash val="solid"/>
+                      <a:round/>
+                      <a:headEnd type="none" w="med" len="med"/>
+                      <a:tailEnd type="none" w="med" len="med"/>
+                    </a:lnR>
+                    <a:lnT w="6350" cap="flat" cmpd="sng" algn="ctr">
+                      <a:solidFill>
+                        <a:srgbClr val="2E6B68"/>
+                      </a:solidFill>
+                      <a:prstDash val="solid"/>
+                      <a:round/>
+                      <a:headEnd type="none" w="med" len="med"/>
+                      <a:tailEnd type="none" w="med" len="med"/>
+                    </a:lnT>
+                    <a:lnB w="6350" cap="flat" cmpd="sng" algn="ctr">
+                      <a:solidFill>
+                        <a:srgbClr val="2E6B68"/>
+                      </a:solidFill>
+                      <a:prstDash val="solid"/>
+                      <a:round/>
+                      <a:headEnd type="none" w="med" len="med"/>
+                      <a:tailEnd type="none" w="med" len="med"/>
+                    </a:lnB>
+                    <a:solidFill>
+                      <a:srgbClr val="1B4A48"/>
+                    </a:solidFill>
+                  </a:tcPr>
+                </a:tc>
+                <a:tc>
+                  <a:txBody>
+                    <a:bodyPr/>
+                    <a:lstStyle/>
+                    <a:p>
+                      <a:pPr indent="0" marL="0">
+                        <a:buNone/>
+                      </a:pPr>
+                      <a:r>
+                        <a:rPr lang="en-US" sz="800" dirty="0">
+                          <a:solidFill>
+                            <a:srgbClr val="BDB3A2"/>
+                          </a:solidFill>
+                          <a:latin typeface="Arial" pitchFamily="34" charset="0"/>
+                          <a:ea typeface="Arial" pitchFamily="34" charset="-122"/>
+                          <a:cs typeface="Arial" pitchFamily="34" charset="-120"/>
+                        </a:rPr>
+                        <a:t>grab a relic and reach the gate while the hazard rises and bridges submerge</a:t>
+                      </a:r>
+                      <a:endParaRPr lang="en-US" sz="800" dirty="0">
+                        <a:latin typeface="Arial" charset="0"/>
+                        <a:ea typeface="Arial" charset="0"/>
+                        <a:cs typeface="Arial" charset="0"/>
+                      </a:endParaRPr>
+                    </a:p>
+                  </a:txBody>
+                  <a:tcPr marL="27432" marR="27432" marT="27432" marB="27432" anchor="ctr">
+                    <a:lnL w="6350" cap="flat" cmpd="sng" algn="ctr">
+                      <a:solidFill>
+                        <a:srgbClr val="2E6B68"/>
+                      </a:solidFill>
+                      <a:prstDash val="solid"/>
+                      <a:round/>
+                      <a:headEnd type="none" w="med" len="med"/>
+                      <a:tailEnd type="none" w="med" len="med"/>
+                    </a:lnL>
+                    <a:lnR w="6350" cap="flat" cmpd="sng" algn="ctr">
+                      <a:solidFill>
+                        <a:srgbClr val="2E6B68"/>
+                      </a:solidFill>
+                      <a:prstDash val="solid"/>
+                      <a:round/>
+                      <a:headEnd type="none" w="med" len="med"/>
+                      <a:tailEnd type="none" w="med" len="med"/>
+                    </a:lnR>
+                    <a:lnT w="6350" cap="flat" cmpd="sng" algn="ctr">
+                      <a:solidFill>
+                        <a:srgbClr val="2E6B68"/>
+                      </a:solidFill>
+                      <a:prstDash val="solid"/>
+                      <a:round/>
+                      <a:headEnd type="none" w="med" len="med"/>
+                      <a:tailEnd type="none" w="med" len="med"/>
+                    </a:lnT>
+                    <a:lnB w="6350" cap="flat" cmpd="sng" algn="ctr">
+                      <a:solidFill>
+                        <a:srgbClr val="2E6B68"/>
+                      </a:solidFill>
+                      <a:prstDash val="solid"/>
+                      <a:round/>
+                      <a:headEnd type="none" w="med" len="med"/>
+                      <a:tailEnd type="none" w="med" len="med"/>
+                    </a:lnB>
+                    <a:solidFill>
+                      <a:srgbClr val="1B4A48"/>
+                    </a:solidFill>
+                  </a:tcPr>
+                </a:tc>
+                <a:tc>
+                  <a:txBody>
+                    <a:bodyPr/>
+                    <a:lstStyle/>
+                    <a:p>
+                      <a:pPr indent="0" marL="0">
+                        <a:buNone/>
+                      </a:pPr>
+                      <a:r>
+                        <a:rPr lang="en-US" sz="800" dirty="0">
+                          <a:solidFill>
+                            <a:srgbClr val="BDB3A2"/>
+                          </a:solidFill>
+                          <a:latin typeface="Arial" pitchFamily="34" charset="0"/>
+                          <a:ea typeface="Arial" pitchFamily="34" charset="-122"/>
+                          <a:cs typeface="Arial" pitchFamily="34" charset="-120"/>
+                        </a:rPr>
+                        <a:t>relic plus gate before timeLimitSec; lost when it expires</a:t>
+                      </a:r>
+                      <a:endParaRPr lang="en-US" sz="800" dirty="0">
+                        <a:latin typeface="Arial" charset="0"/>
+                        <a:ea typeface="Arial" charset="0"/>
+                        <a:cs typeface="Arial" charset="0"/>
+                      </a:endParaRPr>
+                    </a:p>
+                  </a:txBody>
+                  <a:tcPr marL="27432" marR="27432" marT="27432" marB="27432" anchor="ctr">
+                    <a:lnL w="6350" cap="flat" cmpd="sng" algn="ctr">
+                      <a:solidFill>
+                        <a:srgbClr val="2E6B68"/>
+                      </a:solidFill>
+                      <a:prstDash val="solid"/>
+                      <a:round/>
+                      <a:headEnd type="none" w="med" len="med"/>
+                      <a:tailEnd type="none" w="med" len="med"/>
+                    </a:lnL>
+                    <a:lnR w="6350" cap="flat" cmpd="sng" algn="ctr">
+                      <a:solidFill>
+                        <a:srgbClr val="2E6B68"/>
+                      </a:solidFill>
+                      <a:prstDash val="solid"/>
+                      <a:round/>
+                      <a:headEnd type="none" w="med" len="med"/>
+                      <a:tailEnd type="none" w="med" len="med"/>
+                    </a:lnR>
+                    <a:lnT w="6350" cap="flat" cmpd="sng" algn="ctr">
+                      <a:solidFill>
+                        <a:srgbClr val="2E6B68"/>
+                      </a:solidFill>
+                      <a:prstDash val="solid"/>
+                      <a:round/>
+                      <a:headEnd type="none" w="med" len="med"/>
+                      <a:tailEnd type="none" w="med" len="med"/>
+                    </a:lnT>
+                    <a:lnB w="6350" cap="flat" cmpd="sng" algn="ctr">
+                      <a:solidFill>
+                        <a:srgbClr val="2E6B68"/>
+                      </a:solidFill>
+                      <a:prstDash val="solid"/>
+                      <a:round/>
+                      <a:headEnd type="none" w="med" len="med"/>
+                      <a:tailEnd type="none" w="med" len="med"/>
+                    </a:lnB>
+                    <a:solidFill>
+                      <a:srgbClr val="1B4A48"/>
+                    </a:solidFill>
+                  </a:tcPr>
+                </a:tc>
+                <a:tc>
+                  <a:txBody>
+                    <a:bodyPr/>
+                    <a:lstStyle/>
+                    <a:p>
+                      <a:pPr indent="0" marL="0">
+                        <a:buNone/>
+                      </a:pPr>
+                      <a:r>
+                        <a:rPr lang="en-US" sz="800" dirty="0">
+                          <a:solidFill>
+                            <a:srgbClr val="BDB3A2"/>
+                          </a:solidFill>
+                          <a:latin typeface="Arial" pitchFamily="34" charset="0"/>
+                          <a:ea typeface="Arial" pitchFamily="34" charset="-122"/>
+                          <a:cs typeface="Arial" pitchFamily="34" charset="-120"/>
+                        </a:rPr>
+                        <a:t>hazard.rise afterSec, metersPerSec, maxElevation; timeLimitSec</a:t>
+                      </a:r>
+                      <a:endParaRPr lang="en-US" sz="800" dirty="0">
+                        <a:latin typeface="Arial" charset="0"/>
+                        <a:ea typeface="Arial" charset="0"/>
+                        <a:cs typeface="Arial" charset="0"/>
+                      </a:endParaRPr>
+                    </a:p>
+                  </a:txBody>
+                  <a:tcPr marL="27432" marR="27432" marT="27432" marB="27432" anchor="ctr">
+                    <a:lnL w="6350" cap="flat" cmpd="sng" algn="ctr">
+                      <a:solidFill>
+                        <a:srgbClr val="2E6B68"/>
+                      </a:solidFill>
+                      <a:prstDash val="solid"/>
+                      <a:round/>
+                      <a:headEnd type="none" w="med" len="med"/>
+                      <a:tailEnd type="none" w="med" len="med"/>
+                    </a:lnL>
+                    <a:lnR w="6350" cap="flat" cmpd="sng" algn="ctr">
+                      <a:solidFill>
+                        <a:srgbClr val="2E6B68"/>
+                      </a:solidFill>
+                      <a:prstDash val="solid"/>
+                      <a:round/>
+                      <a:headEnd type="none" w="med" len="med"/>
+                      <a:tailEnd type="none" w="med" len="med"/>
+                    </a:lnR>
+                    <a:lnT w="6350" cap="flat" cmpd="sng" algn="ctr">
+                      <a:solidFill>
+                        <a:srgbClr val="2E6B68"/>
+                      </a:solidFill>
+                      <a:prstDash val="solid"/>
+                      <a:round/>
+                      <a:headEnd type="none" w="med" len="med"/>
+                      <a:tailEnd type="none" w="med" len="med"/>
+                    </a:lnT>
+                    <a:lnB w="6350" cap="flat" cmpd="sng" algn="ctr">
+                      <a:solidFill>
+                        <a:srgbClr val="2E6B68"/>
+                      </a:solidFill>
+                      <a:prstDash val="solid"/>
+                      <a:round/>
+                      <a:headEnd type="none" w="med" len="med"/>
+                      <a:tailEnd type="none" w="med" len="med"/>
+                    </a:lnB>
+                    <a:solidFill>
+                      <a:srgbClr val="1B4A48"/>
+                    </a:solidFill>
+                  </a:tcPr>
+                </a:tc>
+              </a:tr>
+            </a:tbl>
+          </a:graphicData>
+        </a:graphic>
+      </p:graphicFrame>
+      <p:sp>
+        <p:nvSpPr>
+          <p:cNvPr id="30" name="library text"/>
           <p:cNvSpPr txBox="1"/>
           <p:nvPr/>
         </p:nvSpPr>
         <p:spPr>
           <a:xfrm>
-            <a:off x="5998464" y="2331720"/>
-            <a:ext cx="1371600" cy="731520"/>
+            <a:off x="457200" y="3986784"/>
+            <a:ext cx="8229600" cy="365760"/>
           </a:xfrm>
           <a:prstGeom prst="rect">
             <a:avLst/>
@@ -3407,56 +5126,86 @@
           <a:bodyPr wrap="square" lIns="0" tIns="0" rIns="0" bIns="0" rtlCol="0" anchor="t"/>
           <a:lstStyle/>
           <a:p>
-            <a:pPr algn="ctr" indent="0" marL="0">
-              <a:buNone/>
-            </a:pPr>
-            <a:r>
-              <a:rPr lang="en-US" sz="1200" dirty="0">
+            <a:pPr indent="0" marL="0">
+              <a:buNone/>
+            </a:pPr>
+            <a:r>
+              <a:rPr lang="en-US" sz="900" b="1" dirty="0">
+                <a:solidFill>
+                  <a:schemeClr val="accent1"/>
+                </a:solidFill>
+              </a:rPr>
+              <a:t>Biomes </a:t>
+            </a:r>
+            <a:pPr indent="0" marL="0">
+              <a:buNone/>
+            </a:pPr>
+            <a:r>
+              <a:rPr lang="en-US" sz="900" dirty="0">
                 <a:solidFill>
                   <a:schemeClr val="tx1"/>
                 </a:solidFill>
               </a:rPr>
-              <a:t>New version lands, no reset</a:t>
-            </a:r>
-            <a:endParaRPr lang="en-US" sz="1200" dirty="0"/>
-          </a:p>
-        </p:txBody>
-      </p:sp>
-      <p:sp>
-        <p:nvSpPr>
-          <p:cNvPr id="31" name="step circle 6"/>
-          <p:cNvSpPr/>
-          <p:nvPr/>
-        </p:nvSpPr>
-        <p:spPr>
-          <a:xfrm>
-            <a:off x="7863840" y="1737360"/>
-            <a:ext cx="457200" cy="457200"/>
-          </a:xfrm>
-          <a:prstGeom prst="ellipse">
-            <a:avLst/>
-          </a:prstGeom>
-          <a:solidFill>
-            <a:schemeClr val="accent1"/>
-          </a:solidFill>
-          <a:ln w="6350">
-            <a:solidFill>
-              <a:schemeClr val="accent1"/>
-            </a:solidFill>
-            <a:prstDash val="solid"/>
-          </a:ln>
-        </p:spPr>
-      </p:sp>
-      <p:sp>
-        <p:nvSpPr>
-          <p:cNvPr id="32" name="step number 6"/>
+              <a:t>garden, volcanic, frost, desert, night.   </a:t>
+            </a:r>
+            <a:pPr indent="0" marL="0">
+              <a:buNone/>
+            </a:pPr>
+            <a:r>
+              <a:rPr lang="en-US" sz="900" b="1" dirty="0">
+                <a:solidFill>
+                  <a:schemeClr val="accent1"/>
+                </a:solidFill>
+              </a:rPr>
+              <a:t>Hazard and pace </a:t>
+            </a:r>
+            <a:pPr indent="0" marL="0">
+              <a:buNone/>
+            </a:pPr>
+            <a:r>
+              <a:rPr lang="en-US" sz="900" dirty="0">
+                <a:solidFill>
+                  <a:schemeClr val="tx1"/>
+                </a:solidFill>
+              </a:rPr>
+              <a:t>water or lava below, a rising hazard, movement 3 to 7 m/s, 11 decoration types.   </a:t>
+            </a:r>
+            <a:pPr indent="0" marL="0">
+              <a:buNone/>
+            </a:pPr>
+            <a:r>
+              <a:rPr lang="en-US" sz="900" b="1" dirty="0">
+                <a:solidFill>
+                  <a:schemeClr val="accent1"/>
+                </a:solidFill>
+              </a:rPr>
+              <a:t>Changed live, no reset </a:t>
+            </a:r>
+            <a:pPr indent="0" marL="0">
+              <a:buNone/>
+            </a:pPr>
+            <a:r>
+              <a:rPr lang="en-US" sz="900" dirty="0">
+                <a:solidFill>
+                  <a:schemeClr val="tx1"/>
+                </a:solidFill>
+              </a:rPr>
+              <a:t>set_mode, set_biome, set_movement beside add_bridge, set_hazard and the other structural ops; every patch validated and committed as a new version.</a:t>
+            </a:r>
+            <a:endParaRPr lang="en-US" sz="900" dirty="0"/>
+          </a:p>
+        </p:txBody>
+      </p:sp>
+      <p:sp>
+        <p:nvSpPr>
+          <p:cNvPr id="31" name="category note"/>
           <p:cNvSpPr txBox="1"/>
           <p:nvPr/>
         </p:nvSpPr>
         <p:spPr>
           <a:xfrm>
-            <a:off x="7863840" y="1737360"/>
-            <a:ext cx="457200" cy="457200"/>
+            <a:off x="457200" y="4370832"/>
+            <a:ext cx="8229600" cy="347472"/>
           </a:xfrm>
           <a:prstGeom prst="rect">
             <a:avLst/>
@@ -3468,410 +5217,18 @@
           <a:bodyPr wrap="square" lIns="0" tIns="0" rIns="0" bIns="0" rtlCol="0" anchor="ctr"/>
           <a:lstStyle/>
           <a:p>
-            <a:pPr algn="ctr" indent="0" marL="0">
-              <a:buNone/>
-            </a:pPr>
-            <a:r>
-              <a:rPr lang="en-US" sz="1400" b="1" dirty="0">
-                <a:solidFill>
-                  <a:schemeClr val="bg1"/>
-                </a:solidFill>
-              </a:rPr>
-              <a:t>6</a:t>
-            </a:r>
-            <a:endParaRPr lang="en-US" sz="1400" dirty="0"/>
-          </a:p>
-        </p:txBody>
-      </p:sp>
-      <p:sp>
-        <p:nvSpPr>
-          <p:cNvPr id="33" name="step text 6"/>
-          <p:cNvSpPr txBox="1"/>
-          <p:nvPr/>
-        </p:nvSpPr>
-        <p:spPr>
-          <a:xfrm>
-            <a:off x="7406640" y="2331720"/>
-            <a:ext cx="1371600" cy="731520"/>
-          </a:xfrm>
-          <a:prstGeom prst="rect">
-            <a:avLst/>
-          </a:prstGeom>
-          <a:noFill/>
-          <a:ln/>
-        </p:spPr>
-        <p:txBody>
-          <a:bodyPr wrap="square" lIns="0" tIns="0" rIns="0" bIns="0" rtlCol="0" anchor="t"/>
-          <a:lstStyle/>
-          <a:p>
-            <a:pPr algn="ctr" indent="0" marL="0">
-              <a:buNone/>
-            </a:pPr>
-            <a:r>
-              <a:rPr lang="en-US" sz="1200" dirty="0">
-                <a:solidFill>
-                  <a:schemeClr val="tx1"/>
-                </a:solidFill>
-              </a:rPr>
-              <a:t>Version report</a:t>
-            </a:r>
-            <a:endParaRPr lang="en-US" sz="1200" dirty="0"/>
-          </a:p>
-        </p:txBody>
-      </p:sp>
-      <p:sp>
-        <p:nvSpPr>
-          <p:cNvPr id="34" name="label WHAT IT RUNS ON"/>
-          <p:cNvSpPr txBox="1"/>
-          <p:nvPr/>
-        </p:nvSpPr>
-        <p:spPr>
-          <a:xfrm>
-            <a:off x="457200" y="3246120"/>
-            <a:ext cx="3657600" cy="228600"/>
-          </a:xfrm>
-          <a:prstGeom prst="rect">
-            <a:avLst/>
-          </a:prstGeom>
-          <a:noFill/>
-          <a:ln/>
-        </p:spPr>
-        <p:txBody>
-          <a:bodyPr wrap="square" lIns="0" tIns="0" rIns="0" bIns="0" rtlCol="0" anchor="ctr"/>
-          <a:lstStyle/>
-          <a:p>
             <a:pPr indent="0" marL="0">
               <a:buNone/>
             </a:pPr>
             <a:r>
-              <a:rPr lang="en-US" sz="1000" b="1" spc="200" kern="0" dirty="0">
-                <a:solidFill>
-                  <a:schemeClr val="accent1"/>
-                </a:solidFill>
-              </a:rPr>
-              <a:t>WHAT IT RUNS ON</a:t>
-            </a:r>
-            <a:endParaRPr lang="en-US" sz="1000" dirty="0"/>
-          </a:p>
-        </p:txBody>
-      </p:sp>
-      <p:sp>
-        <p:nvSpPr>
-          <p:cNvPr id="35" name="chip One machine"/>
-          <p:cNvSpPr/>
-          <p:nvPr/>
-        </p:nvSpPr>
-        <p:spPr>
-          <a:xfrm>
-            <a:off x="457200" y="3566160"/>
-            <a:ext cx="1920240" cy="868680"/>
-          </a:xfrm>
-          <a:prstGeom prst="roundRect">
-            <a:avLst>
-              <a:gd name="adj" fmla="val 8421"/>
-            </a:avLst>
-          </a:prstGeom>
-          <a:solidFill>
-            <a:schemeClr val="bg2"/>
-          </a:solidFill>
-          <a:ln w="9525">
-            <a:solidFill>
-              <a:schemeClr val="accent4"/>
-            </a:solidFill>
-            <a:prstDash val="solid"/>
-          </a:ln>
-        </p:spPr>
-      </p:sp>
-      <p:sp>
-        <p:nvSpPr>
-          <p:cNvPr id="36" name="chip text One machine"/>
-          <p:cNvSpPr txBox="1"/>
-          <p:nvPr/>
-        </p:nvSpPr>
-        <p:spPr>
-          <a:xfrm>
-            <a:off x="594360" y="3566160"/>
-            <a:ext cx="1645920" cy="868680"/>
-          </a:xfrm>
-          <a:prstGeom prst="rect">
-            <a:avLst/>
-          </a:prstGeom>
-          <a:noFill/>
-          <a:ln/>
-        </p:spPr>
-        <p:txBody>
-          <a:bodyPr wrap="square" lIns="0" tIns="0" rIns="0" bIns="0" rtlCol="0" anchor="ctr"/>
-          <a:lstStyle/>
-          <a:p>
-            <a:pPr indent="0" marL="0">
-              <a:spcAft>
-                <a:spcPts val="300"/>
-              </a:spcAft>
-              <a:buNone/>
-            </a:pPr>
-            <a:r>
-              <a:rPr lang="en-US" sz="1300" b="1" dirty="0">
-                <a:solidFill>
-                  <a:schemeClr val="tx1"/>
-                </a:solidFill>
-              </a:rPr>
-              <a:t>One machine</a:t>
-            </a:r>
-            <a:endParaRPr lang="en-US" sz="1300" dirty="0"/>
-          </a:p>
-          <a:p>
-            <a:pPr indent="0" marL="0">
-              <a:buNone/>
-            </a:pPr>
-            <a:r>
-              <a:rPr lang="en-US" sz="1050" dirty="0">
+              <a:rPr lang="en-US" sz="800" i="1" dirty="0">
                 <a:solidFill>
                   <a:schemeClr val="tx2"/>
                 </a:solidFill>
               </a:rPr>
-              <a:t>a single GB10 on the studio LAN</a:t>
-            </a:r>
-            <a:endParaRPr lang="en-US" sz="1300" dirty="0"/>
-          </a:p>
-        </p:txBody>
-      </p:sp>
-      <p:sp>
-        <p:nvSpPr>
-          <p:cNvPr id="37" name="chip One local model"/>
-          <p:cNvSpPr/>
-          <p:nvPr/>
-        </p:nvSpPr>
-        <p:spPr>
-          <a:xfrm>
-            <a:off x="2560320" y="3566160"/>
-            <a:ext cx="1920240" cy="868680"/>
-          </a:xfrm>
-          <a:prstGeom prst="roundRect">
-            <a:avLst>
-              <a:gd name="adj" fmla="val 8421"/>
-            </a:avLst>
-          </a:prstGeom>
-          <a:solidFill>
-            <a:schemeClr val="bg2"/>
-          </a:solidFill>
-          <a:ln w="9525">
-            <a:solidFill>
-              <a:schemeClr val="accent4"/>
-            </a:solidFill>
-            <a:prstDash val="solid"/>
-          </a:ln>
-        </p:spPr>
-      </p:sp>
-      <p:sp>
-        <p:nvSpPr>
-          <p:cNvPr id="38" name="chip text One local model"/>
-          <p:cNvSpPr txBox="1"/>
-          <p:nvPr/>
-        </p:nvSpPr>
-        <p:spPr>
-          <a:xfrm>
-            <a:off x="2697480" y="3566160"/>
-            <a:ext cx="1645920" cy="868680"/>
-          </a:xfrm>
-          <a:prstGeom prst="rect">
-            <a:avLst/>
-          </a:prstGeom>
-          <a:noFill/>
-          <a:ln/>
-        </p:spPr>
-        <p:txBody>
-          <a:bodyPr wrap="square" lIns="0" tIns="0" rIns="0" bIns="0" rtlCol="0" anchor="ctr"/>
-          <a:lstStyle/>
-          <a:p>
-            <a:pPr indent="0" marL="0">
-              <a:spcAft>
-                <a:spcPts val="300"/>
-              </a:spcAft>
-              <a:buNone/>
-            </a:pPr>
-            <a:r>
-              <a:rPr lang="en-US" sz="1300" b="1" dirty="0">
-                <a:solidFill>
-                  <a:schemeClr val="tx1"/>
-                </a:solidFill>
-              </a:rPr>
-              <a:t>One local model</a:t>
-            </a:r>
-            <a:endParaRPr lang="en-US" sz="1300" dirty="0"/>
-          </a:p>
-          <a:p>
-            <a:pPr indent="0" marL="0">
-              <a:buNone/>
-            </a:pPr>
-            <a:r>
-              <a:rPr lang="en-US" sz="1050" dirty="0">
-                <a:solidFill>
-                  <a:schemeClr val="tx2"/>
-                </a:solidFill>
-              </a:rPr>
-              <a:t>Ollama on loopback</a:t>
-            </a:r>
-            <a:endParaRPr lang="en-US" sz="1300" dirty="0"/>
-          </a:p>
-        </p:txBody>
-      </p:sp>
-      <p:sp>
-        <p:nvSpPr>
-          <p:cNvPr id="39" name="chip One real agent runtime"/>
-          <p:cNvSpPr/>
-          <p:nvPr/>
-        </p:nvSpPr>
-        <p:spPr>
-          <a:xfrm>
-            <a:off x="4663440" y="3566160"/>
-            <a:ext cx="1920240" cy="868680"/>
-          </a:xfrm>
-          <a:prstGeom prst="roundRect">
-            <a:avLst>
-              <a:gd name="adj" fmla="val 8421"/>
-            </a:avLst>
-          </a:prstGeom>
-          <a:solidFill>
-            <a:schemeClr val="bg2"/>
-          </a:solidFill>
-          <a:ln w="9525">
-            <a:solidFill>
-              <a:schemeClr val="accent4"/>
-            </a:solidFill>
-            <a:prstDash val="solid"/>
-          </a:ln>
-        </p:spPr>
-      </p:sp>
-      <p:sp>
-        <p:nvSpPr>
-          <p:cNvPr id="40" name="chip text One real agent runtime"/>
-          <p:cNvSpPr txBox="1"/>
-          <p:nvPr/>
-        </p:nvSpPr>
-        <p:spPr>
-          <a:xfrm>
-            <a:off x="4800600" y="3566160"/>
-            <a:ext cx="1645920" cy="868680"/>
-          </a:xfrm>
-          <a:prstGeom prst="rect">
-            <a:avLst/>
-          </a:prstGeom>
-          <a:noFill/>
-          <a:ln/>
-        </p:spPr>
-        <p:txBody>
-          <a:bodyPr wrap="square" lIns="0" tIns="0" rIns="0" bIns="0" rtlCol="0" anchor="ctr"/>
-          <a:lstStyle/>
-          <a:p>
-            <a:pPr indent="0" marL="0">
-              <a:spcAft>
-                <a:spcPts val="300"/>
-              </a:spcAft>
-              <a:buNone/>
-            </a:pPr>
-            <a:r>
-              <a:rPr lang="en-US" sz="1300" b="1" dirty="0">
-                <a:solidFill>
-                  <a:schemeClr val="tx1"/>
-                </a:solidFill>
-              </a:rPr>
-              <a:t>One real agent runtime</a:t>
-            </a:r>
-            <a:endParaRPr lang="en-US" sz="1300" dirty="0"/>
-          </a:p>
-          <a:p>
-            <a:pPr indent="0" marL="0">
-              <a:buNone/>
-            </a:pPr>
-            <a:r>
-              <a:rPr lang="en-US" sz="1050" dirty="0">
-                <a:solidFill>
-                  <a:schemeClr val="tx2"/>
-                </a:solidFill>
-              </a:rPr>
-              <a:t>OpenClaw with Beetle tools</a:t>
-            </a:r>
-            <a:endParaRPr lang="en-US" sz="1300" dirty="0"/>
-          </a:p>
-        </p:txBody>
-      </p:sp>
-      <p:sp>
-        <p:nvSpPr>
-          <p:cNvPr id="41" name="chip Zero cloud"/>
-          <p:cNvSpPr/>
-          <p:nvPr/>
-        </p:nvSpPr>
-        <p:spPr>
-          <a:xfrm>
-            <a:off x="6766560" y="3566160"/>
-            <a:ext cx="1920240" cy="868680"/>
-          </a:xfrm>
-          <a:prstGeom prst="roundRect">
-            <a:avLst>
-              <a:gd name="adj" fmla="val 8421"/>
-            </a:avLst>
-          </a:prstGeom>
-          <a:solidFill>
-            <a:schemeClr val="bg2"/>
-          </a:solidFill>
-          <a:ln w="9525">
-            <a:solidFill>
-              <a:schemeClr val="accent4"/>
-            </a:solidFill>
-            <a:prstDash val="solid"/>
-          </a:ln>
-        </p:spPr>
-      </p:sp>
-      <p:sp>
-        <p:nvSpPr>
-          <p:cNvPr id="42" name="chip text Zero cloud"/>
-          <p:cNvSpPr txBox="1"/>
-          <p:nvPr/>
-        </p:nvSpPr>
-        <p:spPr>
-          <a:xfrm>
-            <a:off x="6903720" y="3566160"/>
-            <a:ext cx="1645920" cy="868680"/>
-          </a:xfrm>
-          <a:prstGeom prst="rect">
-            <a:avLst/>
-          </a:prstGeom>
-          <a:noFill/>
-          <a:ln/>
-        </p:spPr>
-        <p:txBody>
-          <a:bodyPr wrap="square" lIns="0" tIns="0" rIns="0" bIns="0" rtlCol="0" anchor="ctr"/>
-          <a:lstStyle/>
-          <a:p>
-            <a:pPr indent="0" marL="0">
-              <a:spcAft>
-                <a:spcPts val="300"/>
-              </a:spcAft>
-              <a:buNone/>
-            </a:pPr>
-            <a:r>
-              <a:rPr lang="en-US" sz="1300" b="1" dirty="0">
-                <a:solidFill>
-                  <a:schemeClr val="tx1"/>
-                </a:solidFill>
-              </a:rPr>
-              <a:t>Zero cloud</a:t>
-            </a:r>
-            <a:endParaRPr lang="en-US" sz="1300" dirty="0"/>
-          </a:p>
-          <a:p>
-            <a:pPr indent="0" marL="0">
-              <a:buNone/>
-            </a:pPr>
-            <a:r>
-              <a:rPr lang="en-US" sz="1050" dirty="0">
-                <a:solidFill>
-                  <a:schemeClr val="tx2"/>
-                </a:solidFill>
-              </a:rPr>
-              <a:t>no fallback exists</a:t>
-            </a:r>
-            <a:endParaRPr lang="en-US" sz="1300" dirty="0"/>
+              <a:t>Adapted from one-prompt game generators: the one-prompt front door and instant playable output. Added: live editing without a reset, deterministic validation and repair before publish, local-only inference, phones as controllers (docs/COMPETITIVE.md). A request outside the library lands on the nearest mode and the agent says so.</a:t>
+            </a:r>
+            <a:endParaRPr lang="en-US" sz="800" dirty="0"/>
           </a:p>
         </p:txBody>
       </p:sp>
@@ -5120,7 +6477,7 @@
         <p:spPr>
           <a:xfrm>
             <a:off x="457200" y="1188720"/>
-            <a:ext cx="1371600" cy="640080"/>
+            <a:ext cx="1203960" cy="640080"/>
           </a:xfrm>
           <a:prstGeom prst="roundRect">
             <a:avLst>
@@ -5147,7 +6504,7 @@
         <p:spPr>
           <a:xfrm>
             <a:off x="457200" y="1188720"/>
-            <a:ext cx="1371600" cy="640080"/>
+            <a:ext cx="1203960" cy="640080"/>
           </a:xfrm>
           <a:prstGeom prst="rect">
             <a:avLst/>
@@ -5163,14 +6520,14 @@
               <a:buNone/>
             </a:pPr>
             <a:r>
-              <a:rPr lang="en-US" sz="1150" b="1" dirty="0">
+              <a:rPr lang="en-US" sz="1050" b="1" dirty="0">
                 <a:solidFill>
                   <a:schemeClr val="tx1"/>
                 </a:solidFill>
               </a:rPr>
               <a:t>Director</a:t>
             </a:r>
-            <a:endParaRPr lang="en-US" sz="1150" dirty="0"/>
+            <a:endParaRPr lang="en-US" sz="1050" dirty="0"/>
           </a:p>
         </p:txBody>
       </p:sp>
@@ -5182,8 +6539,8 @@
         </p:nvSpPr>
         <p:spPr>
           <a:xfrm>
-            <a:off x="365760" y="1901952"/>
-            <a:ext cx="1554480" cy="548640"/>
+            <a:off x="384048" y="1883664"/>
+            <a:ext cx="1350264" cy="566928"/>
           </a:xfrm>
           <a:prstGeom prst="rect">
             <a:avLst/>
@@ -5199,14 +6556,14 @@
               <a:buNone/>
             </a:pPr>
             <a:r>
-              <a:rPr lang="en-US" sz="950" dirty="0">
+              <a:rPr lang="en-US" sz="850" dirty="0">
                 <a:solidFill>
                   <a:schemeClr val="tx2"/>
                 </a:solidFill>
               </a:rPr>
-              <a:t>brief or edit request</a:t>
-            </a:r>
-            <a:endParaRPr lang="en-US" sz="950" dirty="0"/>
+              <a:t>any game request or edit</a:t>
+            </a:r>
+            <a:endParaRPr lang="en-US" sz="850" dirty="0"/>
           </a:p>
         </p:txBody>
       </p:sp>
@@ -5218,8 +6575,8 @@
         </p:nvSpPr>
         <p:spPr>
           <a:xfrm>
-            <a:off x="1874520" y="1508760"/>
-            <a:ext cx="251460" cy="914"/>
+            <a:off x="1697736" y="1508760"/>
+            <a:ext cx="128016" cy="914"/>
           </a:xfrm>
           <a:prstGeom prst="line">
             <a:avLst/>
@@ -5242,8 +6599,8 @@
         </p:nvSpPr>
         <p:spPr>
           <a:xfrm>
-            <a:off x="2171700" y="1188720"/>
-            <a:ext cx="1371600" cy="640080"/>
+            <a:off x="1862328" y="1188720"/>
+            <a:ext cx="1203960" cy="640080"/>
           </a:xfrm>
           <a:prstGeom prst="roundRect">
             <a:avLst>
@@ -5269,8 +6626,8 @@
         </p:nvSpPr>
         <p:spPr>
           <a:xfrm>
-            <a:off x="2171700" y="1188720"/>
-            <a:ext cx="1371600" cy="640080"/>
+            <a:off x="1862328" y="1188720"/>
+            <a:ext cx="1203960" cy="640080"/>
           </a:xfrm>
           <a:prstGeom prst="rect">
             <a:avLst/>
@@ -5286,14 +6643,14 @@
               <a:buNone/>
             </a:pPr>
             <a:r>
-              <a:rPr lang="en-US" sz="1150" b="1" dirty="0">
+              <a:rPr lang="en-US" sz="1050" b="1" dirty="0">
                 <a:solidFill>
                   <a:schemeClr val="tx1"/>
                 </a:solidFill>
               </a:rPr>
               <a:t>OpenClaw agent</a:t>
             </a:r>
-            <a:endParaRPr lang="en-US" sz="1150" dirty="0"/>
+            <a:endParaRPr lang="en-US" sz="1050" dirty="0"/>
           </a:p>
         </p:txBody>
       </p:sp>
@@ -5305,8 +6662,8 @@
         </p:nvSpPr>
         <p:spPr>
           <a:xfrm>
-            <a:off x="2080260" y="1901952"/>
-            <a:ext cx="1554480" cy="548640"/>
+            <a:off x="1789176" y="1883664"/>
+            <a:ext cx="1350264" cy="566928"/>
           </a:xfrm>
           <a:prstGeom prst="rect">
             <a:avLst/>
@@ -5322,14 +6679,14 @@
               <a:buNone/>
             </a:pPr>
             <a:r>
-              <a:rPr lang="en-US" sz="950" dirty="0">
+              <a:rPr lang="en-US" sz="850" dirty="0">
                 <a:solidFill>
                   <a:schemeClr val="tx2"/>
                 </a:solidFill>
               </a:rPr>
               <a:t>reads state, proposes, repairs in a bounded budget</a:t>
             </a:r>
-            <a:endParaRPr lang="en-US" sz="950" dirty="0"/>
+            <a:endParaRPr lang="en-US" sz="850" dirty="0"/>
           </a:p>
         </p:txBody>
       </p:sp>
@@ -5341,8 +6698,8 @@
         </p:nvSpPr>
         <p:spPr>
           <a:xfrm>
-            <a:off x="3589020" y="1508760"/>
-            <a:ext cx="251460" cy="914"/>
+            <a:off x="3102864" y="1508760"/>
+            <a:ext cx="128016" cy="914"/>
           </a:xfrm>
           <a:prstGeom prst="line">
             <a:avLst/>
@@ -5359,14 +6716,14 @@
       </p:sp>
       <p:sp>
         <p:nvSpPr>
-          <p:cNvPr id="23" name="node Beetle tools"/>
-          <p:cNvSpPr/>
-          <p:nvPr/>
-        </p:nvSpPr>
-        <p:spPr>
-          <a:xfrm>
-            <a:off x="3886200" y="1188720"/>
-            <a:ext cx="1371600" cy="640080"/>
+          <p:cNvPr id="23" name="node Map to mode + biome"/>
+          <p:cNvSpPr/>
+          <p:nvPr/>
+        </p:nvSpPr>
+        <p:spPr>
+          <a:xfrm>
+            <a:off x="3267456" y="1188720"/>
+            <a:ext cx="1203960" cy="640080"/>
           </a:xfrm>
           <a:prstGeom prst="roundRect">
             <a:avLst>
@@ -5376,24 +6733,24 @@
           <a:solidFill>
             <a:schemeClr val="bg2"/>
           </a:solidFill>
-          <a:ln w="9525">
-            <a:solidFill>
-              <a:schemeClr val="accent4"/>
-            </a:solidFill>
-            <a:prstDash val="solid"/>
-          </a:ln>
-        </p:spPr>
-      </p:sp>
-      <p:sp>
-        <p:nvSpPr>
-          <p:cNvPr id="24" name="node title Beetle tools"/>
+          <a:ln w="19050">
+            <a:solidFill>
+              <a:schemeClr val="accent3"/>
+            </a:solidFill>
+            <a:prstDash val="sysDash"/>
+          </a:ln>
+        </p:spPr>
+      </p:sp>
+      <p:sp>
+        <p:nvSpPr>
+          <p:cNvPr id="24" name="node title Map to mode + biome"/>
           <p:cNvSpPr txBox="1"/>
           <p:nvPr/>
         </p:nvSpPr>
         <p:spPr>
           <a:xfrm>
-            <a:off x="3886200" y="1188720"/>
-            <a:ext cx="1371600" cy="640080"/>
+            <a:off x="3267456" y="1188720"/>
+            <a:ext cx="1203960" cy="640080"/>
           </a:xfrm>
           <a:prstGeom prst="rect">
             <a:avLst/>
@@ -5409,27 +6766,27 @@
               <a:buNone/>
             </a:pPr>
             <a:r>
-              <a:rPr lang="en-US" sz="1150" b="1" dirty="0">
+              <a:rPr lang="en-US" sz="1050" b="1" dirty="0">
                 <a:solidFill>
                   <a:schemeClr val="tx1"/>
                 </a:solidFill>
               </a:rPr>
-              <a:t>Beetle tools</a:t>
-            </a:r>
-            <a:endParaRPr lang="en-US" sz="1150" dirty="0"/>
-          </a:p>
-        </p:txBody>
-      </p:sp>
-      <p:sp>
-        <p:nvSpPr>
-          <p:cNvPr id="25" name="node sub Beetle tools"/>
+              <a:t>Map to mode + biome</a:t>
+            </a:r>
+            <a:endParaRPr lang="en-US" sz="1050" dirty="0"/>
+          </a:p>
+        </p:txBody>
+      </p:sp>
+      <p:sp>
+        <p:nvSpPr>
+          <p:cNvPr id="25" name="node sub Map to mode + biome"/>
           <p:cNvSpPr txBox="1"/>
           <p:nvPr/>
         </p:nvSpPr>
         <p:spPr>
           <a:xfrm>
-            <a:off x="3794760" y="1901952"/>
-            <a:ext cx="1554480" cy="548640"/>
+            <a:off x="3194304" y="1883664"/>
+            <a:ext cx="1350264" cy="566928"/>
           </a:xfrm>
           <a:prstGeom prst="rect">
             <a:avLst/>
@@ -5445,14 +6802,14 @@
               <a:buNone/>
             </a:pPr>
             <a:r>
-              <a:rPr lang="en-US" sz="950" dirty="0">
+              <a:rPr lang="en-US" sz="850" dirty="0">
                 <a:solidFill>
                   <a:schemeClr val="tx2"/>
                 </a:solidFill>
               </a:rPr>
-              <a:t>schema-checked JSON only, nothing executed</a:t>
-            </a:r>
-            <a:endParaRPr lang="en-US" sz="950" dirty="0"/>
+              <a:t>closest of 5 modes, 5 biomes; parameters from the brief; named in the summary</a:t>
+            </a:r>
+            <a:endParaRPr lang="en-US" sz="850" dirty="0"/>
           </a:p>
         </p:txBody>
       </p:sp>
@@ -5464,8 +6821,8 @@
         </p:nvSpPr>
         <p:spPr>
           <a:xfrm>
-            <a:off x="5303520" y="1508760"/>
-            <a:ext cx="251460" cy="914"/>
+            <a:off x="4507992" y="1508760"/>
+            <a:ext cx="128016" cy="914"/>
           </a:xfrm>
           <a:prstGeom prst="line">
             <a:avLst/>
@@ -5482,14 +6839,14 @@
       </p:sp>
       <p:sp>
         <p:nvSpPr>
-          <p:cNvPr id="27" name="node Server validator and commit"/>
-          <p:cNvSpPr/>
-          <p:nvPr/>
-        </p:nvSpPr>
-        <p:spPr>
-          <a:xfrm>
-            <a:off x="5600700" y="1188720"/>
-            <a:ext cx="1371600" cy="640080"/>
+          <p:cNvPr id="27" name="node Beetle tools"/>
+          <p:cNvSpPr/>
+          <p:nvPr/>
+        </p:nvSpPr>
+        <p:spPr>
+          <a:xfrm>
+            <a:off x="4672584" y="1188720"/>
+            <a:ext cx="1203960" cy="640080"/>
           </a:xfrm>
           <a:prstGeom prst="roundRect">
             <a:avLst>
@@ -5497,26 +6854,26 @@
             </a:avLst>
           </a:prstGeom>
           <a:solidFill>
-            <a:schemeClr val="accent1"/>
+            <a:schemeClr val="bg2"/>
           </a:solidFill>
           <a:ln w="9525">
             <a:solidFill>
-              <a:schemeClr val="accent1"/>
-            </a:solidFill>
-            <a:prstDash val="solid"/>
-          </a:ln>
-        </p:spPr>
-      </p:sp>
-      <p:sp>
-        <p:nvSpPr>
-          <p:cNvPr id="28" name="node title Server validator and commit"/>
+              <a:schemeClr val="accent4"/>
+            </a:solidFill>
+            <a:prstDash val="solid"/>
+          </a:ln>
+        </p:spPr>
+      </p:sp>
+      <p:sp>
+        <p:nvSpPr>
+          <p:cNvPr id="28" name="node title Beetle tools"/>
           <p:cNvSpPr txBox="1"/>
           <p:nvPr/>
         </p:nvSpPr>
         <p:spPr>
           <a:xfrm>
-            <a:off x="5600700" y="1188720"/>
-            <a:ext cx="1371600" cy="640080"/>
+            <a:off x="4672584" y="1188720"/>
+            <a:ext cx="1203960" cy="640080"/>
           </a:xfrm>
           <a:prstGeom prst="rect">
             <a:avLst/>
@@ -5532,27 +6889,27 @@
               <a:buNone/>
             </a:pPr>
             <a:r>
-              <a:rPr lang="en-US" sz="1150" b="1" dirty="0">
-                <a:solidFill>
-                  <a:schemeClr val="bg1"/>
-                </a:solidFill>
-              </a:rPr>
-              <a:t>Server validator and commit</a:t>
-            </a:r>
-            <a:endParaRPr lang="en-US" sz="1150" dirty="0"/>
-          </a:p>
-        </p:txBody>
-      </p:sp>
-      <p:sp>
-        <p:nvSpPr>
-          <p:cNvPr id="29" name="node sub Server validator and commit"/>
+              <a:rPr lang="en-US" sz="1050" b="1" dirty="0">
+                <a:solidFill>
+                  <a:schemeClr val="tx1"/>
+                </a:solidFill>
+              </a:rPr>
+              <a:t>Beetle tools</a:t>
+            </a:r>
+            <a:endParaRPr lang="en-US" sz="1050" dirty="0"/>
+          </a:p>
+        </p:txBody>
+      </p:sp>
+      <p:sp>
+        <p:nvSpPr>
+          <p:cNvPr id="29" name="node sub Beetle tools"/>
           <p:cNvSpPr txBox="1"/>
           <p:nvPr/>
         </p:nvSpPr>
         <p:spPr>
           <a:xfrm>
-            <a:off x="5509260" y="1901952"/>
-            <a:ext cx="1554480" cy="548640"/>
+            <a:off x="4599432" y="1883664"/>
+            <a:ext cx="1350264" cy="566928"/>
           </a:xfrm>
           <a:prstGeom prst="rect">
             <a:avLst/>
@@ -5568,14 +6925,14 @@
               <a:buNone/>
             </a:pPr>
             <a:r>
-              <a:rPr lang="en-US" sz="950" dirty="0">
+              <a:rPr lang="en-US" sz="850" dirty="0">
                 <a:solidFill>
                   <a:schemeClr val="tx2"/>
                 </a:solidFill>
               </a:rPr>
-              <a:t>deterministic game code, server-issued proof</a:t>
-            </a:r>
-            <a:endParaRPr lang="en-US" sz="950" dirty="0"/>
+              <a:t>schema-checked JSON only, nothing executed</a:t>
+            </a:r>
+            <a:endParaRPr lang="en-US" sz="850" dirty="0"/>
           </a:p>
         </p:txBody>
       </p:sp>
@@ -5587,8 +6944,8 @@
         </p:nvSpPr>
         <p:spPr>
           <a:xfrm>
-            <a:off x="7018020" y="1508760"/>
-            <a:ext cx="251460" cy="914"/>
+            <a:off x="5913120" y="1508760"/>
+            <a:ext cx="128016" cy="914"/>
           </a:xfrm>
           <a:prstGeom prst="line">
             <a:avLst/>
@@ -5605,14 +6962,14 @@
       </p:sp>
       <p:sp>
         <p:nvSpPr>
-          <p:cNvPr id="31" name="node Players"/>
-          <p:cNvSpPr/>
-          <p:nvPr/>
-        </p:nvSpPr>
-        <p:spPr>
-          <a:xfrm>
-            <a:off x="7315200" y="1188720"/>
-            <a:ext cx="1371600" cy="640080"/>
+          <p:cNvPr id="31" name="node Server validator and commit"/>
+          <p:cNvSpPr/>
+          <p:nvPr/>
+        </p:nvSpPr>
+        <p:spPr>
+          <a:xfrm>
+            <a:off x="6077712" y="1188720"/>
+            <a:ext cx="1203960" cy="640080"/>
           </a:xfrm>
           <a:prstGeom prst="roundRect">
             <a:avLst>
@@ -5620,6 +6977,129 @@
             </a:avLst>
           </a:prstGeom>
           <a:solidFill>
+            <a:schemeClr val="accent1"/>
+          </a:solidFill>
+          <a:ln w="9525">
+            <a:solidFill>
+              <a:schemeClr val="accent1"/>
+            </a:solidFill>
+            <a:prstDash val="solid"/>
+          </a:ln>
+        </p:spPr>
+      </p:sp>
+      <p:sp>
+        <p:nvSpPr>
+          <p:cNvPr id="32" name="node title Server validator and commit"/>
+          <p:cNvSpPr txBox="1"/>
+          <p:nvPr/>
+        </p:nvSpPr>
+        <p:spPr>
+          <a:xfrm>
+            <a:off x="6077712" y="1188720"/>
+            <a:ext cx="1203960" cy="640080"/>
+          </a:xfrm>
+          <a:prstGeom prst="rect">
+            <a:avLst/>
+          </a:prstGeom>
+          <a:noFill/>
+          <a:ln/>
+        </p:spPr>
+        <p:txBody>
+          <a:bodyPr wrap="square" lIns="635" tIns="635" rIns="635" bIns="635" rtlCol="0" anchor="ctr"/>
+          <a:lstStyle/>
+          <a:p>
+            <a:pPr algn="ctr" indent="0" marL="0">
+              <a:buNone/>
+            </a:pPr>
+            <a:r>
+              <a:rPr lang="en-US" sz="1050" b="1" dirty="0">
+                <a:solidFill>
+                  <a:schemeClr val="bg1"/>
+                </a:solidFill>
+              </a:rPr>
+              <a:t>Server validator and commit</a:t>
+            </a:r>
+            <a:endParaRPr lang="en-US" sz="1050" dirty="0"/>
+          </a:p>
+        </p:txBody>
+      </p:sp>
+      <p:sp>
+        <p:nvSpPr>
+          <p:cNvPr id="33" name="node sub Server validator and commit"/>
+          <p:cNvSpPr txBox="1"/>
+          <p:nvPr/>
+        </p:nvSpPr>
+        <p:spPr>
+          <a:xfrm>
+            <a:off x="6004560" y="1883664"/>
+            <a:ext cx="1350264" cy="566928"/>
+          </a:xfrm>
+          <a:prstGeom prst="rect">
+            <a:avLst/>
+          </a:prstGeom>
+          <a:noFill/>
+          <a:ln/>
+        </p:spPr>
+        <p:txBody>
+          <a:bodyPr wrap="square" lIns="0" tIns="0" rIns="0" bIns="0" rtlCol="0" anchor="t"/>
+          <a:lstStyle/>
+          <a:p>
+            <a:pPr algn="ctr" indent="0" marL="0">
+              <a:buNone/>
+            </a:pPr>
+            <a:r>
+              <a:rPr lang="en-US" sz="850" dirty="0">
+                <a:solidFill>
+                  <a:schemeClr val="tx2"/>
+                </a:solidFill>
+              </a:rPr>
+              <a:t>deterministic game code, server-issued proof</a:t>
+            </a:r>
+            <a:endParaRPr lang="en-US" sz="850" dirty="0"/>
+          </a:p>
+        </p:txBody>
+      </p:sp>
+      <p:sp>
+        <p:nvSpPr>
+          <p:cNvPr id="34" name="arrow"/>
+          <p:cNvSpPr/>
+          <p:nvPr/>
+        </p:nvSpPr>
+        <p:spPr>
+          <a:xfrm>
+            <a:off x="7318248" y="1508760"/>
+            <a:ext cx="128016" cy="914"/>
+          </a:xfrm>
+          <a:prstGeom prst="line">
+            <a:avLst/>
+          </a:prstGeom>
+          <a:noFill/>
+          <a:ln w="22225">
+            <a:solidFill>
+              <a:schemeClr val="accent3"/>
+            </a:solidFill>
+            <a:prstDash val="solid"/>
+            <a:tailEnd type="triangle"/>
+          </a:ln>
+        </p:spPr>
+      </p:sp>
+      <p:sp>
+        <p:nvSpPr>
+          <p:cNvPr id="35" name="node Players"/>
+          <p:cNvSpPr/>
+          <p:nvPr/>
+        </p:nvSpPr>
+        <p:spPr>
+          <a:xfrm>
+            <a:off x="7482840" y="1188720"/>
+            <a:ext cx="1203960" cy="640080"/>
+          </a:xfrm>
+          <a:prstGeom prst="roundRect">
+            <a:avLst>
+              <a:gd name="adj" fmla="val 11429"/>
+            </a:avLst>
+          </a:prstGeom>
+          <a:solidFill>
             <a:schemeClr val="bg2"/>
           </a:solidFill>
           <a:ln w="9525">
@@ -5632,14 +7112,14 @@
       </p:sp>
       <p:sp>
         <p:nvSpPr>
-          <p:cNvPr id="32" name="node title Players"/>
+          <p:cNvPr id="36" name="node title Players"/>
           <p:cNvSpPr txBox="1"/>
           <p:nvPr/>
         </p:nvSpPr>
         <p:spPr>
           <a:xfrm>
-            <a:off x="7315200" y="1188720"/>
-            <a:ext cx="1371600" cy="640080"/>
+            <a:off x="7482840" y="1188720"/>
+            <a:ext cx="1203960" cy="640080"/>
           </a:xfrm>
           <a:prstGeom prst="rect">
             <a:avLst/>
@@ -5655,27 +7135,27 @@
               <a:buNone/>
             </a:pPr>
             <a:r>
-              <a:rPr lang="en-US" sz="1150" b="1" dirty="0">
+              <a:rPr lang="en-US" sz="1050" b="1" dirty="0">
                 <a:solidFill>
                   <a:schemeClr val="tx1"/>
                 </a:solidFill>
               </a:rPr>
               <a:t>Players</a:t>
             </a:r>
-            <a:endParaRPr lang="en-US" sz="1150" dirty="0"/>
-          </a:p>
-        </p:txBody>
-      </p:sp>
-      <p:sp>
-        <p:nvSpPr>
-          <p:cNvPr id="33" name="node sub Players"/>
+            <a:endParaRPr lang="en-US" sz="1050" dirty="0"/>
+          </a:p>
+        </p:txBody>
+      </p:sp>
+      <p:sp>
+        <p:nvSpPr>
+          <p:cNvPr id="37" name="node sub Players"/>
           <p:cNvSpPr txBox="1"/>
           <p:nvPr/>
         </p:nvSpPr>
         <p:spPr>
           <a:xfrm>
-            <a:off x="7223760" y="1901952"/>
-            <a:ext cx="1554480" cy="548640"/>
+            <a:off x="7409688" y="1883664"/>
+            <a:ext cx="1350264" cy="566928"/>
           </a:xfrm>
           <a:prstGeom prst="rect">
             <a:avLst/>
@@ -5691,26 +7171,26 @@
               <a:buNone/>
             </a:pPr>
             <a:r>
-              <a:rPr lang="en-US" sz="950" dirty="0">
+              <a:rPr lang="en-US" sz="850" dirty="0">
                 <a:solidFill>
                   <a:schemeClr val="tx2"/>
                 </a:solidFill>
               </a:rPr>
               <a:t>same session, same progress, new version</a:t>
             </a:r>
-            <a:endParaRPr lang="en-US" sz="950" dirty="0"/>
-          </a:p>
-        </p:txBody>
-      </p:sp>
-      <p:sp>
-        <p:nvSpPr>
-          <p:cNvPr id="34" name="loop down"/>
-          <p:cNvSpPr/>
-          <p:nvPr/>
-        </p:nvSpPr>
-        <p:spPr>
-          <a:xfrm>
-            <a:off x="6286500" y="2468880"/>
+            <a:endParaRPr lang="en-US" sz="850" dirty="0"/>
+          </a:p>
+        </p:txBody>
+      </p:sp>
+      <p:sp>
+        <p:nvSpPr>
+          <p:cNvPr id="38" name="loop down"/>
+          <p:cNvSpPr/>
+          <p:nvPr/>
+        </p:nvSpPr>
+        <p:spPr>
+          <a:xfrm>
+            <a:off x="6679692" y="2468880"/>
             <a:ext cx="914" cy="182880"/>
           </a:xfrm>
           <a:prstGeom prst="line">
@@ -5727,14 +7207,14 @@
       </p:sp>
       <p:sp>
         <p:nvSpPr>
-          <p:cNvPr id="35" name="loop across"/>
-          <p:cNvSpPr/>
-          <p:nvPr/>
-        </p:nvSpPr>
-        <p:spPr>
-          <a:xfrm>
-            <a:off x="2857500" y="2651760"/>
-            <a:ext cx="3429000" cy="914"/>
+          <p:cNvPr id="39" name="loop across"/>
+          <p:cNvSpPr/>
+          <p:nvPr/>
+        </p:nvSpPr>
+        <p:spPr>
+          <a:xfrm>
+            <a:off x="2464308" y="2651760"/>
+            <a:ext cx="4215384" cy="914"/>
           </a:xfrm>
           <a:prstGeom prst="line">
             <a:avLst/>
@@ -5750,13 +7230,13 @@
       </p:sp>
       <p:sp>
         <p:nvSpPr>
-          <p:cNvPr id="36" name="arrow"/>
+          <p:cNvPr id="40" name="arrow"/>
           <p:cNvSpPr/>
           <p:nvPr/>
         </p:nvSpPr>
         <p:spPr>
           <a:xfrm flipV="1">
-            <a:off x="2857500" y="2468880"/>
+            <a:off x="2464308" y="2468880"/>
             <a:ext cx="914" cy="182880"/>
           </a:xfrm>
           <a:prstGeom prst="line">
@@ -5774,14 +7254,14 @@
       </p:sp>
       <p:sp>
         <p:nvSpPr>
-          <p:cNvPr id="37" name="loop caption"/>
+          <p:cNvPr id="41" name="loop caption"/>
           <p:cNvSpPr txBox="1"/>
           <p:nvPr/>
         </p:nvSpPr>
         <p:spPr>
           <a:xfrm>
-            <a:off x="2994660" y="2697480"/>
-            <a:ext cx="3154680" cy="274320"/>
+            <a:off x="2601468" y="2697480"/>
+            <a:ext cx="3941064" cy="274320"/>
           </a:xfrm>
           <a:prstGeom prst="rect">
             <a:avLst/>
@@ -5802,7 +7282,7 @@
                   <a:schemeClr val="accent1"/>
                 </a:solidFill>
               </a:rPr>
-              <a:t>validation issues go back for repair, at most 2 attempts, then the request fails honestly</a:t>
+              <a:t>validation issues (including MODE_INVALID) go back for repair, at most 2 attempts, then the request fails honestly</a:t>
             </a:r>
             <a:endParaRPr lang="en-US" sz="900" dirty="0"/>
           </a:p>
@@ -5810,7 +7290,7 @@
       </p:sp>
       <p:sp>
         <p:nvSpPr>
-          <p:cNvPr id="38" name="state card"/>
+          <p:cNvPr id="42" name="state card"/>
           <p:cNvSpPr/>
           <p:nvPr/>
         </p:nvSpPr>
@@ -5837,7 +7317,7 @@
       </p:sp>
       <p:sp>
         <p:nvSpPr>
-          <p:cNvPr id="39" name="label TWO KINDS OF STATE"/>
+          <p:cNvPr id="43" name="label TWO KINDS OF STATE"/>
           <p:cNvSpPr txBox="1"/>
           <p:nvPr/>
         </p:nvSpPr>
@@ -5873,7 +7353,7 @@
       </p:sp>
       <p:sp>
         <p:nvSpPr>
-          <p:cNvPr id="40" name="state bullets"/>
+          <p:cNvPr id="44" name="state bullets"/>
           <p:cNvSpPr txBox="1"/>
           <p:nvPr/>
         </p:nvSpPr>
@@ -5900,14 +7380,14 @@
               <a:buChar char="•"/>
             </a:pPr>
             <a:r>
-              <a:rPr lang="en-US" sz="1100" dirty="0">
+              <a:rPr lang="en-US" sz="1050" dirty="0">
                 <a:solidFill>
                   <a:schemeClr val="tx1"/>
                 </a:solidFill>
               </a:rPr>
-              <a:t>WorldSpec is structure. It changes only when a transaction commits, one version per commit.</a:t>
-            </a:r>
-            <a:endParaRPr lang="en-US" sz="1100" dirty="0"/>
+              <a:t>WorldSpec is structure, now with mode, biome, movement and hazard.rise. It changes only when a transaction commits, one version per commit.</a:t>
+            </a:r>
+            <a:endParaRPr lang="en-US" sz="1050" dirty="0"/>
           </a:p>
           <a:p>
             <a:pPr marL="152400" indent="-152400">
@@ -5918,14 +7398,14 @@
               <a:buChar char="•"/>
             </a:pPr>
             <a:r>
-              <a:rPr lang="en-US" sz="1100" dirty="0">
+              <a:rPr lang="en-US" sz="1050" dirty="0">
                 <a:solidFill>
                   <a:schemeClr val="tx1"/>
                 </a:solidFill>
               </a:rPr>
-              <a:t>SessionState is players, relics, score. The simulation advances it; the agent never writes it.</a:t>
-            </a:r>
-            <a:endParaRPr lang="en-US" sz="1100" dirty="0"/>
+              <a:t>SessionState is players, relics, score and the mode objective (timer, hold time, next checkpoint, hazard height). The simulation advances it; the agent never writes it.</a:t>
+            </a:r>
+            <a:endParaRPr lang="en-US" sz="1050" dirty="0"/>
           </a:p>
           <a:p>
             <a:pPr marL="152400" indent="-152400">
@@ -5936,20 +7416,20 @@
               <a:buChar char="•"/>
             </a:pPr>
             <a:r>
-              <a:rPr lang="en-US" sz="1100" dirty="0">
+              <a:rPr lang="en-US" sz="1050" dirty="0">
                 <a:solidFill>
                   <a:schemeClr val="tx1"/>
                 </a:solidFill>
               </a:rPr>
               <a:t>Commit needs a server-issued proof.</a:t>
             </a:r>
-            <a:endParaRPr lang="en-US" sz="1100" dirty="0"/>
-          </a:p>
-        </p:txBody>
-      </p:sp>
-      <p:sp>
-        <p:nvSpPr>
-          <p:cNvPr id="41" name="validation card"/>
+            <a:endParaRPr lang="en-US" sz="1050" dirty="0"/>
+          </a:p>
+        </p:txBody>
+      </p:sp>
+      <p:sp>
+        <p:nvSpPr>
+          <p:cNvPr id="45" name="validation card"/>
           <p:cNvSpPr/>
           <p:nvPr/>
         </p:nvSpPr>
@@ -5976,7 +7456,7 @@
       </p:sp>
       <p:sp>
         <p:nvSpPr>
-          <p:cNvPr id="42" name="label VALIDATION IS GAME CODE"/>
+          <p:cNvPr id="46" name="label VALIDATION IS GAME CODE"/>
           <p:cNvSpPr txBox="1"/>
           <p:nvPr/>
         </p:nvSpPr>
@@ -6012,7 +7492,7 @@
       </p:sp>
       <p:sp>
         <p:nvSpPr>
-          <p:cNvPr id="43" name="validation bullets"/>
+          <p:cNvPr id="47" name="validation bullets"/>
           <p:cNvSpPr txBox="1"/>
           <p:nvPr/>
         </p:nvSpPr>
@@ -6039,14 +7519,14 @@
               <a:buChar char="•"/>
             </a:pPr>
             <a:r>
-              <a:rPr lang="en-US" sz="1100" dirty="0">
+              <a:rPr lang="en-US" sz="1050" dirty="0">
                 <a:solidFill>
                   <a:schemeClr val="tx1"/>
                 </a:solidFill>
               </a:rPr>
               <a:t>Geometry, bridge sockets, walk field, reachability with the gate locked, occupied support at commit time.</a:t>
             </a:r>
-            <a:endParaRPr lang="en-US" sz="1100" dirty="0"/>
+            <a:endParaRPr lang="en-US" sz="1050" dirty="0"/>
           </a:p>
           <a:p>
             <a:pPr marL="152400" indent="-152400">
@@ -6057,14 +7537,14 @@
               <a:buChar char="•"/>
             </a:pPr>
             <a:r>
-              <a:rPr lang="en-US" sz="1100" dirty="0">
+              <a:rPr lang="en-US" sz="1050" dirty="0">
                 <a:solidFill>
                   <a:schemeClr val="tx1"/>
                 </a:solidFill>
               </a:rPr>
-              <a:t>An LLM saying valid is never approval.</a:t>
-            </a:r>
-            <a:endParaRPr lang="en-US" sz="1100" dirty="0"/>
+              <a:t>MODE_INVALID: relics required above the count, a race with under 2 checkpoints, survival without a rising hazard, a timer outside 20 to 600 s.</a:t>
+            </a:r>
+            <a:endParaRPr lang="en-US" sz="1050" dirty="0"/>
           </a:p>
           <a:p>
             <a:pPr marL="152400" indent="-152400">
@@ -6075,14 +7555,14 @@
               <a:buChar char="•"/>
             </a:pPr>
             <a:r>
-              <a:rPr lang="en-US" sz="1100" dirty="0">
+              <a:rPr lang="en-US" sz="1050" dirty="0">
                 <a:solidFill>
                   <a:schemeClr val="tx1"/>
                 </a:solidFill>
               </a:rPr>
-              <a:t>Nothing from the model runs. Output is schema-checked JSON only.</a:t>
-            </a:r>
-            <a:endParaRPr lang="en-US" sz="1100" dirty="0"/>
+              <a:t>The mode rule is engine code picked by an enum. An LLM saying valid is never approval. Output is schema-checked JSON only.</a:t>
+            </a:r>
+            <a:endParaRPr lang="en-US" sz="1050" dirty="0"/>
           </a:p>
         </p:txBody>
       </p:sp>
@@ -6496,7 +7976,7 @@
         <p:spPr>
           <a:xfrm>
             <a:off x="457200" y="1115568"/>
-            <a:ext cx="2651760" cy="987552"/>
+            <a:ext cx="1975104" cy="987552"/>
           </a:xfrm>
           <a:prstGeom prst="roundRect">
             <a:avLst>
@@ -6522,8 +8002,8 @@
         </p:nvSpPr>
         <p:spPr>
           <a:xfrm>
-            <a:off x="603504" y="1188720"/>
-            <a:ext cx="2359152" cy="182880"/>
+            <a:off x="566928" y="1179576"/>
+            <a:ext cx="1755648" cy="164592"/>
           </a:xfrm>
           <a:prstGeom prst="rect">
             <a:avLst/>
@@ -6539,14 +8019,14 @@
               <a:buNone/>
             </a:pPr>
             <a:r>
-              <a:rPr lang="en-US" sz="900" b="1" spc="200" kern="0" dirty="0">
+              <a:rPr lang="en-US" sz="750" b="1" spc="200" kern="0" dirty="0">
                 <a:solidFill>
                   <a:schemeClr val="accent1"/>
                 </a:solidFill>
               </a:rPr>
               <a:t>MODEL</a:t>
             </a:r>
-            <a:endParaRPr lang="en-US" sz="900" dirty="0"/>
+            <a:endParaRPr lang="en-US" sz="750" dirty="0"/>
           </a:p>
         </p:txBody>
       </p:sp>
@@ -6558,8 +8038,8 @@
         </p:nvSpPr>
         <p:spPr>
           <a:xfrm>
-            <a:off x="603504" y="1362456"/>
-            <a:ext cx="2359152" cy="274320"/>
+            <a:off x="566928" y="1344168"/>
+            <a:ext cx="1755648" cy="256032"/>
           </a:xfrm>
           <a:prstGeom prst="rect">
             <a:avLst/>
@@ -6575,14 +8055,14 @@
               <a:buNone/>
             </a:pPr>
             <a:r>
-              <a:rPr lang="en-US" sz="1250" b="1" dirty="0">
+              <a:rPr lang="en-US" sz="1100" b="1" dirty="0">
                 <a:solidFill>
                   <a:schemeClr val="accent1"/>
                 </a:solidFill>
               </a:rPr>
               <a:t>qwen3.5:4b, Q4_K_M</a:t>
             </a:r>
-            <a:endParaRPr lang="en-US" sz="1250" dirty="0"/>
+            <a:endParaRPr lang="en-US" sz="1100" dirty="0"/>
           </a:p>
         </p:txBody>
       </p:sp>
@@ -6594,8 +8074,8 @@
         </p:nvSpPr>
         <p:spPr>
           <a:xfrm>
-            <a:off x="603504" y="1645920"/>
-            <a:ext cx="2359152" cy="438912"/>
+            <a:off x="566928" y="1618488"/>
+            <a:ext cx="1755648" cy="457200"/>
           </a:xfrm>
           <a:prstGeom prst="rect">
             <a:avLst/>
@@ -6611,14 +8091,14 @@
               <a:buNone/>
             </a:pPr>
             <a:r>
-              <a:rPr lang="en-US" sz="750" dirty="0">
+              <a:rPr lang="en-US" sz="680" dirty="0">
                 <a:solidFill>
                   <a:schemeClr val="tx2"/>
                 </a:solidFill>
               </a:rPr>
-              <a:t>4.7B, 3.4 GB, Ollama 0.35.1 on loopback. qwen3.8:27b not benchmarked: pull failed once, re-downloading. docs/MODEL_SELECTION.md</a:t>
-            </a:r>
-            <a:endParaRPr lang="en-US" sz="750" dirty="0"/>
+              <a:t>4.7B, 3.4 GB, Ollama 0.35.1 on loopback. qwen3.8:27b not benchmarked: pull failed once, second pull stopped. docs/MODEL_SELECTION.md</a:t>
+            </a:r>
+            <a:endParaRPr lang="en-US" sz="680" dirty="0"/>
           </a:p>
         </p:txBody>
       </p:sp>
@@ -6630,8 +8110,8 @@
         </p:nvSpPr>
         <p:spPr>
           <a:xfrm>
-            <a:off x="3246120" y="1115568"/>
-            <a:ext cx="2651760" cy="987552"/>
+            <a:off x="2542032" y="1115568"/>
+            <a:ext cx="1975104" cy="987552"/>
           </a:xfrm>
           <a:prstGeom prst="roundRect">
             <a:avLst>
@@ -6657,8 +8137,8 @@
         </p:nvSpPr>
         <p:spPr>
           <a:xfrm>
-            <a:off x="3392424" y="1188720"/>
-            <a:ext cx="2359152" cy="182880"/>
+            <a:off x="2651760" y="1179576"/>
+            <a:ext cx="1755648" cy="164592"/>
           </a:xfrm>
           <a:prstGeom prst="rect">
             <a:avLst/>
@@ -6674,14 +8154,14 @@
               <a:buNone/>
             </a:pPr>
             <a:r>
-              <a:rPr lang="en-US" sz="900" b="1" spc="200" kern="0" dirty="0">
+              <a:rPr lang="en-US" sz="750" b="1" spc="200" kern="0" dirty="0">
                 <a:solidFill>
                   <a:schemeClr val="accent1"/>
                 </a:solidFill>
               </a:rPr>
               <a:t>BRIEF, WARM, QUIET GPU</a:t>
             </a:r>
-            <a:endParaRPr lang="en-US" sz="900" dirty="0"/>
+            <a:endParaRPr lang="en-US" sz="750" dirty="0"/>
           </a:p>
         </p:txBody>
       </p:sp>
@@ -6693,8 +8173,8 @@
         </p:nvSpPr>
         <p:spPr>
           <a:xfrm>
-            <a:off x="3392424" y="1362456"/>
-            <a:ext cx="2359152" cy="274320"/>
+            <a:off x="2651760" y="1344168"/>
+            <a:ext cx="1755648" cy="256032"/>
           </a:xfrm>
           <a:prstGeom prst="rect">
             <a:avLst/>
@@ -6710,14 +8190,14 @@
               <a:buNone/>
             </a:pPr>
             <a:r>
-              <a:rPr lang="en-US" sz="1250" b="1" dirty="0">
+              <a:rPr lang="en-US" sz="1100" b="1" dirty="0">
                 <a:solidFill>
                   <a:schemeClr val="accent1"/>
                 </a:solidFill>
               </a:rPr>
               <a:t>26.2 / 26.5 / 27.7 s</a:t>
             </a:r>
-            <a:endParaRPr lang="en-US" sz="1250" dirty="0"/>
+            <a:endParaRPr lang="en-US" sz="1100" dirty="0"/>
           </a:p>
         </p:txBody>
       </p:sp>
@@ -6729,8 +8209,8 @@
         </p:nvSpPr>
         <p:spPr>
           <a:xfrm>
-            <a:off x="3392424" y="1645920"/>
-            <a:ext cx="2359152" cy="438912"/>
+            <a:off x="2651760" y="1618488"/>
+            <a:ext cx="1755648" cy="457200"/>
           </a:xfrm>
           <a:prstGeom prst="rect">
             <a:avLst/>
@@ -6746,27 +8226,27 @@
               <a:buNone/>
             </a:pPr>
             <a:r>
-              <a:rPr lang="en-US" sz="750" dirty="0">
+              <a:rPr lang="en-US" sz="680" dirty="0">
                 <a:solidFill>
                   <a:schemeClr val="tx2"/>
                 </a:solidFill>
               </a:rPr>
-              <a:t>min / p50 / max, 3 runs, first draft valid (bench-qwen3.5_4b-1791049348895.json). 10 s target not met. 14 s once after normalization (RESULTS.md run 3).</a:t>
-            </a:r>
-            <a:endParaRPr lang="en-US" sz="750" dirty="0"/>
-          </a:p>
-        </p:txBody>
-      </p:sp>
-      <p:sp>
-        <p:nvSpPr>
-          <p:cNvPr id="23" name="result card COLD / CONTENDED GPU"/>
-          <p:cNvSpPr/>
-          <p:nvPr/>
-        </p:nvSpPr>
-        <p:spPr>
-          <a:xfrm>
-            <a:off x="6035040" y="1115568"/>
-            <a:ext cx="2651760" cy="987552"/>
+              <a:t>min / p50 / max, 3 runs, first draft valid (bench-...1791049348895.json). 10 s target not met. 14 s once after normalization (RESULTS.md run 3); 33.4 s via OpenClaw.</a:t>
+            </a:r>
+            <a:endParaRPr lang="en-US" sz="680" dirty="0"/>
+          </a:p>
+        </p:txBody>
+      </p:sp>
+      <p:sp>
+        <p:nvSpPr>
+          <p:cNvPr id="23" name="result card MODE BRIEFS, ONE PROMPT"/>
+          <p:cNvSpPr/>
+          <p:nvPr/>
+        </p:nvSpPr>
+        <p:spPr>
+          <a:xfrm>
+            <a:off x="4626864" y="1115568"/>
+            <a:ext cx="1975104" cy="987552"/>
           </a:xfrm>
           <a:prstGeom prst="roundRect">
             <a:avLst>
@@ -6786,14 +8266,14 @@
       </p:sp>
       <p:sp>
         <p:nvSpPr>
-          <p:cNvPr id="24" name="label COLD / CONTENDED GPU"/>
+          <p:cNvPr id="24" name="label MODE BRIEFS, ONE PROMPT"/>
           <p:cNvSpPr txBox="1"/>
           <p:nvPr/>
         </p:nvSpPr>
         <p:spPr>
           <a:xfrm>
-            <a:off x="6181344" y="1188720"/>
-            <a:ext cx="2359152" cy="182880"/>
+            <a:off x="4736592" y="1179576"/>
+            <a:ext cx="1755648" cy="164592"/>
           </a:xfrm>
           <a:prstGeom prst="rect">
             <a:avLst/>
@@ -6809,27 +8289,27 @@
               <a:buNone/>
             </a:pPr>
             <a:r>
-              <a:rPr lang="en-US" sz="900" b="1" spc="200" kern="0" dirty="0">
+              <a:rPr lang="en-US" sz="750" b="1" spc="200" kern="0" dirty="0">
                 <a:solidFill>
                   <a:schemeClr val="accent1"/>
                 </a:solidFill>
               </a:rPr>
-              <a:t>COLD / CONTENDED GPU</a:t>
-            </a:r>
-            <a:endParaRPr lang="en-US" sz="900" dirty="0"/>
-          </a:p>
-        </p:txBody>
-      </p:sp>
-      <p:sp>
-        <p:nvSpPr>
-          <p:cNvPr id="25" name="result value COLD / CONTENDED GPU"/>
+              <a:t>MODE BRIEFS, ONE PROMPT</a:t>
+            </a:r>
+            <a:endParaRPr lang="en-US" sz="750" dirty="0"/>
+          </a:p>
+        </p:txBody>
+      </p:sp>
+      <p:sp>
+        <p:nvSpPr>
+          <p:cNvPr id="25" name="result value MODE BRIEFS, ONE PROMPT"/>
           <p:cNvSpPr txBox="1"/>
           <p:nvPr/>
         </p:nvSpPr>
         <p:spPr>
           <a:xfrm>
-            <a:off x="6181344" y="1362456"/>
-            <a:ext cx="2359152" cy="274320"/>
+            <a:off x="4736592" y="1344168"/>
+            <a:ext cx="1755648" cy="256032"/>
           </a:xfrm>
           <a:prstGeom prst="rect">
             <a:avLst/>
@@ -6845,27 +8325,27 @@
               <a:buNone/>
             </a:pPr>
             <a:r>
-              <a:rPr lang="en-US" sz="1250" b="1" dirty="0">
+              <a:rPr lang="en-US" sz="1100" b="1" dirty="0">
                 <a:solidFill>
                   <a:schemeClr val="accent1"/>
                 </a:solidFill>
               </a:rPr>
-              <a:t>23.1 s load; 58 to 214 s</a:t>
-            </a:r>
-            <a:endParaRPr lang="en-US" sz="1250" dirty="0"/>
-          </a:p>
-        </p:txBody>
-      </p:sp>
-      <p:sp>
-        <p:nvSpPr>
-          <p:cNvPr id="26" name="result sub COLD / CONTENDED GPU"/>
+              <a:t>not yet measured</a:t>
+            </a:r>
+            <a:endParaRPr lang="en-US" sz="1100" dirty="0"/>
+          </a:p>
+        </p:txBody>
+      </p:sp>
+      <p:sp>
+        <p:nvSpPr>
+          <p:cNvPr id="26" name="result sub MODE BRIEFS, ONE PROMPT"/>
           <p:cNvSpPr txBox="1"/>
           <p:nvPr/>
         </p:nvSpPr>
         <p:spPr>
           <a:xfrm>
-            <a:off x="6181344" y="1645920"/>
-            <a:ext cx="2359152" cy="438912"/>
+            <a:off x="4736592" y="1618488"/>
+            <a:ext cx="1755648" cy="457200"/>
           </a:xfrm>
           <a:prstGeom prst="rect">
             <a:avLst/>
@@ -6881,27 +8361,27 @@
               <a:buNone/>
             </a:pPr>
             <a:r>
-              <a:rPr lang="en-US" sz="750" dirty="0">
+              <a:rPr lang="en-US" sz="680" dirty="0">
                 <a:solidFill>
                   <a:schemeClr val="tx2"/>
                 </a:solidFill>
               </a:rPr>
-              <a:t>cold: 23.1 s model load in a 54.4 s first draft (probe-run.log). Contended: drafts 58.8 to 214.1 s, one edit 45.1 s (bench-qwen3.5_4b-1791050596040.json).</a:t>
-            </a:r>
-            <a:endParaRPr lang="en-US" sz="750" dirty="0"/>
-          </a:p>
-        </p:txBody>
-      </p:sp>
-      <p:sp>
-        <p:nvSpPr>
-          <p:cNvPr id="27" name="result card EDIT TO COMMIT"/>
-          <p:cNvSpPr/>
-          <p:nvPr/>
-        </p:nvSpPr>
-        <p:spPr>
-          <a:xfrm>
-            <a:off x="457200" y="2157984"/>
-            <a:ext cx="2651760" cy="987552"/>
+              <a:t>mode, biome and brief-to-commit per request are being appended to docs/RESULTS.md 'Game modes from one prompt'; this card is rebuilt from those rows only.</a:t>
+            </a:r>
+            <a:endParaRPr lang="en-US" sz="680" dirty="0"/>
+          </a:p>
+        </p:txBody>
+      </p:sp>
+      <p:sp>
+        <p:nvSpPr>
+          <p:cNvPr id="27" name="result card COLD / CONTENDED GPU"/>
+          <p:cNvSpPr/>
+          <p:nvPr/>
+        </p:nvSpPr>
+        <p:spPr>
+          <a:xfrm>
+            <a:off x="6711696" y="1115568"/>
+            <a:ext cx="1975104" cy="987552"/>
           </a:xfrm>
           <a:prstGeom prst="roundRect">
             <a:avLst>
@@ -6921,14 +8401,14 @@
       </p:sp>
       <p:sp>
         <p:nvSpPr>
-          <p:cNvPr id="28" name="label EDIT TO COMMIT"/>
+          <p:cNvPr id="28" name="label COLD / CONTENDED GPU"/>
           <p:cNvSpPr txBox="1"/>
           <p:nvPr/>
         </p:nvSpPr>
         <p:spPr>
           <a:xfrm>
-            <a:off x="603504" y="2231136"/>
-            <a:ext cx="2359152" cy="182880"/>
+            <a:off x="6821424" y="1179576"/>
+            <a:ext cx="1755648" cy="164592"/>
           </a:xfrm>
           <a:prstGeom prst="rect">
             <a:avLst/>
@@ -6944,27 +8424,27 @@
               <a:buNone/>
             </a:pPr>
             <a:r>
-              <a:rPr lang="en-US" sz="900" b="1" spc="200" kern="0" dirty="0">
+              <a:rPr lang="en-US" sz="750" b="1" spc="200" kern="0" dirty="0">
                 <a:solidFill>
                   <a:schemeClr val="accent1"/>
                 </a:solidFill>
               </a:rPr>
-              <a:t>EDIT TO COMMIT</a:t>
-            </a:r>
-            <a:endParaRPr lang="en-US" sz="900" dirty="0"/>
-          </a:p>
-        </p:txBody>
-      </p:sp>
-      <p:sp>
-        <p:nvSpPr>
-          <p:cNvPr id="29" name="result value EDIT TO COMMIT"/>
+              <a:t>COLD / CONTENDED GPU</a:t>
+            </a:r>
+            <a:endParaRPr lang="en-US" sz="750" dirty="0"/>
+          </a:p>
+        </p:txBody>
+      </p:sp>
+      <p:sp>
+        <p:nvSpPr>
+          <p:cNvPr id="29" name="result value COLD / CONTENDED GPU"/>
           <p:cNvSpPr txBox="1"/>
           <p:nvPr/>
         </p:nvSpPr>
         <p:spPr>
           <a:xfrm>
-            <a:off x="603504" y="2404872"/>
-            <a:ext cx="2359152" cy="274320"/>
+            <a:off x="6821424" y="1344168"/>
+            <a:ext cx="1755648" cy="256032"/>
           </a:xfrm>
           <a:prstGeom prst="rect">
             <a:avLst/>
@@ -6980,27 +8460,27 @@
               <a:buNone/>
             </a:pPr>
             <a:r>
-              <a:rPr lang="en-US" sz="1250" b="1" dirty="0">
+              <a:rPr lang="en-US" sz="1100" b="1" dirty="0">
                 <a:solidFill>
                   <a:schemeClr val="accent1"/>
                 </a:solidFill>
               </a:rPr>
-              <a:t>2.0 / 8.0 / 14.0 s</a:t>
-            </a:r>
-            <a:endParaRPr lang="en-US" sz="1250" dirty="0"/>
-          </a:p>
-        </p:txBody>
-      </p:sp>
-      <p:sp>
-        <p:nvSpPr>
-          <p:cNvPr id="30" name="result sub EDIT TO COMMIT"/>
+              <a:t>23.1 s load; 58 to 214 s</a:t>
+            </a:r>
+            <a:endParaRPr lang="en-US" sz="1100" dirty="0"/>
+          </a:p>
+        </p:txBody>
+      </p:sp>
+      <p:sp>
+        <p:nvSpPr>
+          <p:cNvPr id="30" name="result sub COLD / CONTENDED GPU"/>
           <p:cNvSpPr txBox="1"/>
           <p:nvPr/>
         </p:nvSpPr>
         <p:spPr>
           <a:xfrm>
-            <a:off x="603504" y="2688336"/>
-            <a:ext cx="2359152" cy="438912"/>
+            <a:off x="6821424" y="1618488"/>
+            <a:ext cx="1755648" cy="457200"/>
           </a:xfrm>
           <a:prstGeom prst="rect">
             <a:avLst/>
@@ -7016,27 +8496,27 @@
               <a:buNone/>
             </a:pPr>
             <a:r>
-              <a:rPr lang="en-US" sz="750" dirty="0">
+              <a:rPr lang="en-US" sz="680" dirty="0">
                 <a:solidFill>
                   <a:schemeClr val="tx2"/>
                 </a:solidFill>
               </a:rPr>
-              <a:t>min / p50 / max, 6 edits, 5 of 6 committed; run 3 after normalization, quiet GPU, direct mode (run-1791052136845.json). Run 2 before: 2 of 6, 3.0 s each.</a:t>
-            </a:r>
-            <a:endParaRPr lang="en-US" sz="750" dirty="0"/>
-          </a:p>
-        </p:txBody>
-      </p:sp>
-      <p:sp>
-        <p:nvSpPr>
-          <p:cNvPr id="31" name="result card INVALID EDITS CAUGHT"/>
-          <p:cNvSpPr/>
-          <p:nvPr/>
-        </p:nvSpPr>
-        <p:spPr>
-          <a:xfrm>
-            <a:off x="3246120" y="2157984"/>
-            <a:ext cx="2651760" cy="987552"/>
+              <a:t>cold: 23.1 s load in a 54.4 s first draft (probe-run.log). Contended drafts 58.8 to 214.1 s, one edit 45.1 s (bench-...1791050596040.json).</a:t>
+            </a:r>
+            <a:endParaRPr lang="en-US" sz="680" dirty="0"/>
+          </a:p>
+        </p:txBody>
+      </p:sp>
+      <p:sp>
+        <p:nvSpPr>
+          <p:cNvPr id="31" name="result card EDIT TO COMMIT"/>
+          <p:cNvSpPr/>
+          <p:nvPr/>
+        </p:nvSpPr>
+        <p:spPr>
+          <a:xfrm>
+            <a:off x="457200" y="2157984"/>
+            <a:ext cx="1975104" cy="987552"/>
           </a:xfrm>
           <a:prstGeom prst="roundRect">
             <a:avLst>
@@ -7056,14 +8536,14 @@
       </p:sp>
       <p:sp>
         <p:nvSpPr>
-          <p:cNvPr id="32" name="label INVALID EDITS CAUGHT"/>
+          <p:cNvPr id="32" name="label EDIT TO COMMIT"/>
           <p:cNvSpPr txBox="1"/>
           <p:nvPr/>
         </p:nvSpPr>
         <p:spPr>
           <a:xfrm>
-            <a:off x="3392424" y="2231136"/>
-            <a:ext cx="2359152" cy="182880"/>
+            <a:off x="566928" y="2221992"/>
+            <a:ext cx="1755648" cy="164592"/>
           </a:xfrm>
           <a:prstGeom prst="rect">
             <a:avLst/>
@@ -7079,27 +8559,27 @@
               <a:buNone/>
             </a:pPr>
             <a:r>
-              <a:rPr lang="en-US" sz="900" b="1" spc="200" kern="0" dirty="0">
+              <a:rPr lang="en-US" sz="750" b="1" spc="200" kern="0" dirty="0">
                 <a:solidFill>
                   <a:schemeClr val="accent1"/>
                 </a:solidFill>
               </a:rPr>
-              <a:t>INVALID EDITS CAUGHT</a:t>
-            </a:r>
-            <a:endParaRPr lang="en-US" sz="900" dirty="0"/>
-          </a:p>
-        </p:txBody>
-      </p:sp>
-      <p:sp>
-        <p:nvSpPr>
-          <p:cNvPr id="33" name="result value INVALID EDITS CAUGHT"/>
+              <a:t>EDIT TO COMMIT</a:t>
+            </a:r>
+            <a:endParaRPr lang="en-US" sz="750" dirty="0"/>
+          </a:p>
+        </p:txBody>
+      </p:sp>
+      <p:sp>
+        <p:nvSpPr>
+          <p:cNvPr id="33" name="result value EDIT TO COMMIT"/>
           <p:cNvSpPr txBox="1"/>
           <p:nvPr/>
         </p:nvSpPr>
         <p:spPr>
           <a:xfrm>
-            <a:off x="3392424" y="2404872"/>
-            <a:ext cx="2359152" cy="274320"/>
+            <a:off x="566928" y="2386584"/>
+            <a:ext cx="1755648" cy="256032"/>
           </a:xfrm>
           <a:prstGeom prst="rect">
             <a:avLst/>
@@ -7115,27 +8595,27 @@
               <a:buNone/>
             </a:pPr>
             <a:r>
-              <a:rPr lang="en-US" sz="1250" b="1" dirty="0">
+              <a:rPr lang="en-US" sz="1100" b="1" dirty="0">
                 <a:solidFill>
                   <a:schemeClr val="accent1"/>
                 </a:solidFill>
               </a:rPr>
-              <a:t>6 of 12 refused</a:t>
-            </a:r>
-            <a:endParaRPr lang="en-US" sz="1250" dirty="0"/>
-          </a:p>
-        </p:txBody>
-      </p:sp>
-      <p:sp>
-        <p:nvSpPr>
-          <p:cNvPr id="34" name="result sub INVALID EDITS CAUGHT"/>
+              <a:t>2.0 / 8.0 / 14.0 s</a:t>
+            </a:r>
+            <a:endParaRPr lang="en-US" sz="1100" dirty="0"/>
+          </a:p>
+        </p:txBody>
+      </p:sp>
+      <p:sp>
+        <p:nvSpPr>
+          <p:cNvPr id="34" name="result sub EDIT TO COMMIT"/>
           <p:cNvSpPr txBox="1"/>
           <p:nvPr/>
         </p:nvSpPr>
         <p:spPr>
           <a:xfrm>
-            <a:off x="3392424" y="2688336"/>
-            <a:ext cx="2359152" cy="438912"/>
+            <a:off x="566928" y="2660904"/>
+            <a:ext cx="1755648" cy="457200"/>
           </a:xfrm>
           <a:prstGeom prst="rect">
             <a:avLst/>
@@ -7151,27 +8631,27 @@
               <a:buNone/>
             </a:pPr>
             <a:r>
-              <a:rPr lang="en-US" sz="750" dirty="0">
+              <a:rPr lang="en-US" sz="680" dirty="0">
                 <a:solidFill>
                   <a:schemeClr val="tx2"/>
                 </a:solidFill>
               </a:rPr>
-              <a:t>runs 2 and 3 (RESULTS.md); repairs that then committed: 1 (run 3 E6); invalid worlds committed: 0. On garden5 a DISCONNECTED_GOAL refusal was repaired and committed in 3.0 s.</a:t>
-            </a:r>
-            <a:endParaRPr lang="en-US" sz="750" dirty="0"/>
-          </a:p>
-        </p:txBody>
-      </p:sp>
-      <p:sp>
-        <p:nvSpPr>
-          <p:cNvPr id="35" name="result card NORMALIZATION EFFECT"/>
-          <p:cNvSpPr/>
-          <p:nvPr/>
-        </p:nvSpPr>
-        <p:spPr>
-          <a:xfrm>
-            <a:off x="6035040" y="2157984"/>
-            <a:ext cx="2651760" cy="987552"/>
+              <a:t>min / p50 / max, 6 edits, 5 of 6 committed; run 3 after normalization, quiet GPU, direct (run-1791052136845.json). Run 2 before: 2 of 6.</a:t>
+            </a:r>
+            <a:endParaRPr lang="en-US" sz="680" dirty="0"/>
+          </a:p>
+        </p:txBody>
+      </p:sp>
+      <p:sp>
+        <p:nvSpPr>
+          <p:cNvPr id="35" name="result card EDIT WHILE 2 PLAY"/>
+          <p:cNvSpPr/>
+          <p:nvPr/>
+        </p:nvSpPr>
+        <p:spPr>
+          <a:xfrm>
+            <a:off x="2542032" y="2157984"/>
+            <a:ext cx="1975104" cy="987552"/>
           </a:xfrm>
           <a:prstGeom prst="roundRect">
             <a:avLst>
@@ -7191,14 +8671,14 @@
       </p:sp>
       <p:sp>
         <p:nvSpPr>
-          <p:cNvPr id="36" name="label NORMALIZATION EFFECT"/>
+          <p:cNvPr id="36" name="label EDIT WHILE 2 PLAY"/>
           <p:cNvSpPr txBox="1"/>
           <p:nvPr/>
         </p:nvSpPr>
         <p:spPr>
           <a:xfrm>
-            <a:off x="6181344" y="2231136"/>
-            <a:ext cx="2359152" cy="182880"/>
+            <a:off x="2651760" y="2221992"/>
+            <a:ext cx="1755648" cy="164592"/>
           </a:xfrm>
           <a:prstGeom prst="rect">
             <a:avLst/>
@@ -7214,27 +8694,27 @@
               <a:buNone/>
             </a:pPr>
             <a:r>
-              <a:rPr lang="en-US" sz="900" b="1" spc="200" kern="0" dirty="0">
+              <a:rPr lang="en-US" sz="750" b="1" spc="200" kern="0" dirty="0">
                 <a:solidFill>
                   <a:schemeClr val="accent1"/>
                 </a:solidFill>
               </a:rPr>
-              <a:t>NORMALIZATION EFFECT</a:t>
-            </a:r>
-            <a:endParaRPr lang="en-US" sz="900" dirty="0"/>
-          </a:p>
-        </p:txBody>
-      </p:sp>
-      <p:sp>
-        <p:nvSpPr>
-          <p:cNvPr id="37" name="result value NORMALIZATION EFFECT"/>
+              <a:t>EDIT WHILE 2 PLAY</a:t>
+            </a:r>
+            <a:endParaRPr lang="en-US" sz="750" dirty="0"/>
+          </a:p>
+        </p:txBody>
+      </p:sp>
+      <p:sp>
+        <p:nvSpPr>
+          <p:cNvPr id="37" name="result value EDIT WHILE 2 PLAY"/>
           <p:cNvSpPr txBox="1"/>
           <p:nvPr/>
         </p:nvSpPr>
         <p:spPr>
           <a:xfrm>
-            <a:off x="6181344" y="2404872"/>
-            <a:ext cx="2359152" cy="274320"/>
+            <a:off x="2651760" y="2386584"/>
+            <a:ext cx="1755648" cy="256032"/>
           </a:xfrm>
           <a:prstGeom prst="rect">
             <a:avLst/>
@@ -7250,27 +8730,27 @@
               <a:buNone/>
             </a:pPr>
             <a:r>
-              <a:rPr lang="en-US" sz="1250" b="1" dirty="0">
+              <a:rPr lang="en-US" sz="1100" b="1" dirty="0">
                 <a:solidFill>
                   <a:schemeClr val="accent1"/>
                 </a:solidFill>
               </a:rPr>
-              <a:t>2 of 30 to 13 of 30</a:t>
-            </a:r>
-            <a:endParaRPr lang="en-US" sz="1250" dirty="0"/>
-          </a:p>
-        </p:txBody>
-      </p:sp>
-      <p:sp>
-        <p:nvSpPr>
-          <p:cNvPr id="38" name="result sub NORMALIZATION EFFECT"/>
+              <a:t>8.0 s, 15 of 15</a:t>
+            </a:r>
+            <a:endParaRPr lang="en-US" sz="1100" dirty="0"/>
+          </a:p>
+        </p:txBody>
+      </p:sp>
+      <p:sp>
+        <p:nvSpPr>
+          <p:cNvPr id="38" name="result sub EDIT WHILE 2 PLAY"/>
           <p:cNvSpPr txBox="1"/>
           <p:nvPr/>
         </p:nvSpPr>
         <p:spPr>
           <a:xfrm>
-            <a:off x="6181344" y="2688336"/>
-            <a:ext cx="2359152" cy="438912"/>
+            <a:off x="2651760" y="2660904"/>
+            <a:ext cx="1755648" cy="457200"/>
           </a:xfrm>
           <a:prstGeom prst="rect">
             <a:avLst/>
@@ -7286,27 +8766,27 @@
               <a:buNone/>
             </a:pPr>
             <a:r>
-              <a:rPr lang="en-US" sz="750" dirty="0">
+              <a:rPr lang="en-US" sz="680" dirty="0">
                 <a:solidFill>
                   <a:schemeClr val="tx2"/>
                 </a:solidFill>
               </a:rPr>
-              <a:t>corpus validity without vs with the deterministic normalizer (MODEL_FAILURE_MODES.md, corpus/summary.json). Live edits committed: 2 of 6 to 5 of 6.</a:t>
-            </a:r>
-            <a:endParaRPr lang="en-US" sz="750" dirty="0"/>
-          </a:p>
-        </p:txBody>
-      </p:sp>
-      <p:sp>
-        <p:nvSpPr>
-          <p:cNvPr id="39" name="result card LATENCY, LOOPBACK"/>
-          <p:cNvSpPr/>
-          <p:nvPr/>
-        </p:nvSpPr>
-        <p:spPr>
-          <a:xfrm>
-            <a:off x="457200" y="3200400"/>
-            <a:ext cx="2651760" cy="987552"/>
+              <a:t>acceptance run 2: both controllers walking, lava + bridge committed, relic and score unchanged, sockets open, max tick gap 67 ms (ACCEPTANCE.md).</a:t>
+            </a:r>
+            <a:endParaRPr lang="en-US" sz="680" dirty="0"/>
+          </a:p>
+        </p:txBody>
+      </p:sp>
+      <p:sp>
+        <p:nvSpPr>
+          <p:cNvPr id="39" name="result card INVALID EDITS CAUGHT"/>
+          <p:cNvSpPr/>
+          <p:nvPr/>
+        </p:nvSpPr>
+        <p:spPr>
+          <a:xfrm>
+            <a:off x="4626864" y="2157984"/>
+            <a:ext cx="1975104" cy="987552"/>
           </a:xfrm>
           <a:prstGeom prst="roundRect">
             <a:avLst>
@@ -7326,14 +8806,14 @@
       </p:sp>
       <p:sp>
         <p:nvSpPr>
-          <p:cNvPr id="40" name="label LATENCY, LOOPBACK"/>
+          <p:cNvPr id="40" name="label INVALID EDITS CAUGHT"/>
           <p:cNvSpPr txBox="1"/>
           <p:nvPr/>
         </p:nvSpPr>
         <p:spPr>
           <a:xfrm>
-            <a:off x="603504" y="3273552"/>
-            <a:ext cx="2359152" cy="182880"/>
+            <a:off x="4736592" y="2221992"/>
+            <a:ext cx="1755648" cy="164592"/>
           </a:xfrm>
           <a:prstGeom prst="rect">
             <a:avLst/>
@@ -7349,27 +8829,27 @@
               <a:buNone/>
             </a:pPr>
             <a:r>
-              <a:rPr lang="en-US" sz="900" b="1" spc="200" kern="0" dirty="0">
+              <a:rPr lang="en-US" sz="750" b="1" spc="200" kern="0" dirty="0">
                 <a:solidFill>
                   <a:schemeClr val="accent1"/>
                 </a:solidFill>
               </a:rPr>
-              <a:t>LATENCY, LOOPBACK</a:t>
-            </a:r>
-            <a:endParaRPr lang="en-US" sz="900" dirty="0"/>
-          </a:p>
-        </p:txBody>
-      </p:sp>
-      <p:sp>
-        <p:nvSpPr>
-          <p:cNvPr id="41" name="result value LATENCY, LOOPBACK"/>
+              <a:t>INVALID EDITS CAUGHT</a:t>
+            </a:r>
+            <a:endParaRPr lang="en-US" sz="750" dirty="0"/>
+          </a:p>
+        </p:txBody>
+      </p:sp>
+      <p:sp>
+        <p:nvSpPr>
+          <p:cNvPr id="41" name="result value INVALID EDITS CAUGHT"/>
           <p:cNvSpPr txBox="1"/>
           <p:nvPr/>
         </p:nvSpPr>
         <p:spPr>
           <a:xfrm>
-            <a:off x="603504" y="3447288"/>
-            <a:ext cx="2359152" cy="274320"/>
+            <a:off x="4736592" y="2386584"/>
+            <a:ext cx="1755648" cy="256032"/>
           </a:xfrm>
           <a:prstGeom prst="rect">
             <a:avLst/>
@@ -7385,27 +8865,27 @@
               <a:buNone/>
             </a:pPr>
             <a:r>
-              <a:rPr lang="en-US" sz="1250" b="1" dirty="0">
+              <a:rPr lang="en-US" sz="1100" b="1" dirty="0">
                 <a:solidFill>
                   <a:schemeClr val="accent1"/>
                 </a:solidFill>
               </a:rPr>
-              <a:t>0.48 ms RTT, 18.8 ms tick</a:t>
-            </a:r>
-            <a:endParaRPr lang="en-US" sz="1250" dirty="0"/>
-          </a:p>
-        </p:txBody>
-      </p:sp>
-      <p:sp>
-        <p:nvSpPr>
-          <p:cNvPr id="42" name="result sub LATENCY, LOOPBACK"/>
+              <a:t>6 of 12 refused</a:t>
+            </a:r>
+            <a:endParaRPr lang="en-US" sz="1100" dirty="0"/>
+          </a:p>
+        </p:txBody>
+      </p:sp>
+      <p:sp>
+        <p:nvSpPr>
+          <p:cNvPr id="42" name="result sub INVALID EDITS CAUGHT"/>
           <p:cNvSpPr txBox="1"/>
           <p:nvPr/>
         </p:nvSpPr>
         <p:spPr>
           <a:xfrm>
-            <a:off x="603504" y="3730752"/>
-            <a:ext cx="2359152" cy="438912"/>
+            <a:off x="4736592" y="2660904"/>
+            <a:ext cx="1755648" cy="457200"/>
           </a:xfrm>
           <a:prstGeom prst="rect">
             <a:avLst/>
@@ -7421,27 +8901,27 @@
               <a:buNone/>
             </a:pPr>
             <a:r>
-              <a:rPr lang="en-US" sz="750" dirty="0">
+              <a:rPr lang="en-US" sz="680" dirty="0">
                 <a:solidFill>
                   <a:schemeClr val="tx2"/>
                 </a:solidFill>
               </a:rPr>
-              <a:t>p50, scripted controllers (p95 0.81 and 33.1 ms; LATENCY.md). Not input to photon: no phone, Wi-Fi, browser or display included.</a:t>
-            </a:r>
-            <a:endParaRPr lang="en-US" sz="750" dirty="0"/>
-          </a:p>
-        </p:txBody>
-      </p:sp>
-      <p:sp>
-        <p:nvSpPr>
-          <p:cNvPr id="43" name="result card SESSION CONTINUITY"/>
-          <p:cNvSpPr/>
-          <p:nvPr/>
-        </p:nvSpPr>
-        <p:spPr>
-          <a:xfrm>
-            <a:off x="3246120" y="3200400"/>
-            <a:ext cx="2651760" cy="987552"/>
+              <a:t>runs 2 and 3 (RESULTS.md); repairs that then committed: 1; invalid worlds committed: 0. garden5: DISCONNECTED_GOAL refused 1.7 s, repaired and committed 3.0 s.</a:t>
+            </a:r>
+            <a:endParaRPr lang="en-US" sz="680" dirty="0"/>
+          </a:p>
+        </p:txBody>
+      </p:sp>
+      <p:sp>
+        <p:nvSpPr>
+          <p:cNvPr id="43" name="result card NORMALIZATION EFFECT"/>
+          <p:cNvSpPr/>
+          <p:nvPr/>
+        </p:nvSpPr>
+        <p:spPr>
+          <a:xfrm>
+            <a:off x="6711696" y="2157984"/>
+            <a:ext cx="1975104" cy="987552"/>
           </a:xfrm>
           <a:prstGeom prst="roundRect">
             <a:avLst>
@@ -7461,14 +8941,14 @@
       </p:sp>
       <p:sp>
         <p:nvSpPr>
-          <p:cNvPr id="44" name="label SESSION CONTINUITY"/>
+          <p:cNvPr id="44" name="label NORMALIZATION EFFECT"/>
           <p:cNvSpPr txBox="1"/>
           <p:nvPr/>
         </p:nvSpPr>
         <p:spPr>
           <a:xfrm>
-            <a:off x="3392424" y="3273552"/>
-            <a:ext cx="2359152" cy="182880"/>
+            <a:off x="6821424" y="2221992"/>
+            <a:ext cx="1755648" cy="164592"/>
           </a:xfrm>
           <a:prstGeom prst="rect">
             <a:avLst/>
@@ -7484,27 +8964,27 @@
               <a:buNone/>
             </a:pPr>
             <a:r>
-              <a:rPr lang="en-US" sz="900" b="1" spc="200" kern="0" dirty="0">
+              <a:rPr lang="en-US" sz="750" b="1" spc="200" kern="0" dirty="0">
                 <a:solidFill>
                   <a:schemeClr val="accent1"/>
                 </a:solidFill>
               </a:rPr>
-              <a:t>SESSION CONTINUITY</a:t>
-            </a:r>
-            <a:endParaRPr lang="en-US" sz="900" dirty="0"/>
-          </a:p>
-        </p:txBody>
-      </p:sp>
-      <p:sp>
-        <p:nvSpPr>
-          <p:cNvPr id="45" name="result value SESSION CONTINUITY"/>
+              <a:t>NORMALIZATION EFFECT</a:t>
+            </a:r>
+            <a:endParaRPr lang="en-US" sz="750" dirty="0"/>
+          </a:p>
+        </p:txBody>
+      </p:sp>
+      <p:sp>
+        <p:nvSpPr>
+          <p:cNvPr id="45" name="result value NORMALIZATION EFFECT"/>
           <p:cNvSpPr txBox="1"/>
           <p:nvPr/>
         </p:nvSpPr>
         <p:spPr>
           <a:xfrm>
-            <a:off x="3392424" y="3447288"/>
-            <a:ext cx="2359152" cy="274320"/>
+            <a:off x="6821424" y="2386584"/>
+            <a:ext cx="1755648" cy="256032"/>
           </a:xfrm>
           <a:prstGeom prst="rect">
             <a:avLst/>
@@ -7520,27 +9000,27 @@
               <a:buNone/>
             </a:pPr>
             <a:r>
-              <a:rPr lang="en-US" sz="1250" b="1" dirty="0">
+              <a:rPr lang="en-US" sz="1100" b="1" dirty="0">
                 <a:solidFill>
                   <a:schemeClr val="accent1"/>
                 </a:solidFill>
               </a:rPr>
-              <a:t>not measured live</a:t>
-            </a:r>
-            <a:endParaRPr lang="en-US" sz="1250" dirty="0"/>
-          </a:p>
-        </p:txBody>
-      </p:sp>
-      <p:sp>
-        <p:nvSpPr>
-          <p:cNvPr id="46" name="result sub SESSION CONTINUITY"/>
+              <a:t>2 of 30 to 13 of 30</a:t>
+            </a:r>
+            <a:endParaRPr lang="en-US" sz="1100" dirty="0"/>
+          </a:p>
+        </p:txBody>
+      </p:sp>
+      <p:sp>
+        <p:nvSpPr>
+          <p:cNvPr id="46" name="result sub NORMALIZATION EFFECT"/>
           <p:cNvSpPr txBox="1"/>
           <p:nvPr/>
         </p:nvSpPr>
         <p:spPr>
           <a:xfrm>
-            <a:off x="3392424" y="3730752"/>
-            <a:ext cx="2359152" cy="438912"/>
+            <a:off x="6821424" y="2660904"/>
+            <a:ext cx="1755648" cy="457200"/>
           </a:xfrm>
           <a:prstGeom prst="rect">
             <a:avLst/>
@@ -7556,27 +9036,27 @@
               <a:buNone/>
             </a:pPr>
             <a:r>
-              <a:rPr lang="en-US" sz="750" dirty="0">
+              <a:rPr lang="en-US" sz="680" dirty="0">
                 <a:solidFill>
                   <a:schemeClr val="tx2"/>
                 </a:solidFill>
               </a:rPr>
-              <a:t>no player connected in runs 2 and 3. Preserved ids, relics, score and reconnect are covered by integration tests with real sockets (BUILD_STATUS.md 10, 12).</a:t>
-            </a:r>
-            <a:endParaRPr lang="en-US" sz="750" dirty="0"/>
-          </a:p>
-        </p:txBody>
-      </p:sp>
-      <p:sp>
-        <p:nvSpPr>
-          <p:cNvPr id="47" name="result card OFFLINE PROOF"/>
-          <p:cNvSpPr/>
-          <p:nvPr/>
-        </p:nvSpPr>
-        <p:spPr>
-          <a:xfrm>
-            <a:off x="6035040" y="3200400"/>
-            <a:ext cx="2651760" cy="987552"/>
+              <a:t>corpus validity without vs with the deterministic normalizer (MODEL_FAILURE_MODES.md). Live edits committed: 2 of 6 to 5 of 6.</a:t>
+            </a:r>
+            <a:endParaRPr lang="en-US" sz="680" dirty="0"/>
+          </a:p>
+        </p:txBody>
+      </p:sp>
+      <p:sp>
+        <p:nvSpPr>
+          <p:cNvPr id="47" name="result card OPENCLAW LIVE"/>
+          <p:cNvSpPr/>
+          <p:nvPr/>
+        </p:nvSpPr>
+        <p:spPr>
+          <a:xfrm>
+            <a:off x="457200" y="3200400"/>
+            <a:ext cx="1975104" cy="987552"/>
           </a:xfrm>
           <a:prstGeom prst="roundRect">
             <a:avLst>
@@ -7596,14 +9076,14 @@
       </p:sp>
       <p:sp>
         <p:nvSpPr>
-          <p:cNvPr id="48" name="label OFFLINE PROOF"/>
+          <p:cNvPr id="48" name="label OPENCLAW LIVE"/>
           <p:cNvSpPr txBox="1"/>
           <p:nvPr/>
         </p:nvSpPr>
         <p:spPr>
           <a:xfrm>
-            <a:off x="6181344" y="3273552"/>
-            <a:ext cx="2359152" cy="182880"/>
+            <a:off x="566928" y="3264408"/>
+            <a:ext cx="1755648" cy="164592"/>
           </a:xfrm>
           <a:prstGeom prst="rect">
             <a:avLst/>
@@ -7619,27 +9099,432 @@
               <a:buNone/>
             </a:pPr>
             <a:r>
-              <a:rPr lang="en-US" sz="900" b="1" spc="200" kern="0" dirty="0">
+              <a:rPr lang="en-US" sz="750" b="1" spc="200" kern="0" dirty="0">
                 <a:solidFill>
                   <a:schemeClr val="accent1"/>
                 </a:solidFill>
               </a:rPr>
+              <a:t>OPENCLAW LIVE</a:t>
+            </a:r>
+            <a:endParaRPr lang="en-US" sz="750" dirty="0"/>
+          </a:p>
+        </p:txBody>
+      </p:sp>
+      <p:sp>
+        <p:nvSpPr>
+          <p:cNvPr id="49" name="result value OPENCLAW LIVE"/>
+          <p:cNvSpPr txBox="1"/>
+          <p:nvPr/>
+        </p:nvSpPr>
+        <p:spPr>
+          <a:xfrm>
+            <a:off x="566928" y="3429000"/>
+            <a:ext cx="1755648" cy="256032"/>
+          </a:xfrm>
+          <a:prstGeom prst="rect">
+            <a:avLst/>
+          </a:prstGeom>
+          <a:noFill/>
+          <a:ln/>
+        </p:spPr>
+        <p:txBody>
+          <a:bodyPr wrap="square" lIns="0" tIns="0" rIns="0" bIns="0" rtlCol="0" anchor="ctr"/>
+          <a:lstStyle/>
+          <a:p>
+            <a:pPr indent="0" marL="0">
+              <a:buNone/>
+            </a:pPr>
+            <a:r>
+              <a:rPr lang="en-US" sz="1100" b="1" dirty="0">
+                <a:solidFill>
+                  <a:schemeClr val="accent1"/>
+                </a:solidFill>
+              </a:rPr>
+              <a:t>20.0 s edit, 33.4 s brief</a:t>
+            </a:r>
+            <a:endParaRPr lang="en-US" sz="1100" dirty="0"/>
+          </a:p>
+        </p:txBody>
+      </p:sp>
+      <p:sp>
+        <p:nvSpPr>
+          <p:cNvPr id="50" name="result sub OPENCLAW LIVE"/>
+          <p:cNvSpPr txBox="1"/>
+          <p:nvPr/>
+        </p:nvSpPr>
+        <p:spPr>
+          <a:xfrm>
+            <a:off x="566928" y="3703320"/>
+            <a:ext cx="1755648" cy="457200"/>
+          </a:xfrm>
+          <a:prstGeom prst="rect">
+            <a:avLst/>
+          </a:prstGeom>
+          <a:noFill/>
+          <a:ln/>
+        </p:spPr>
+        <p:txBody>
+          <a:bodyPr wrap="square" lIns="0" tIns="0" rIns="0" bIns="0" rtlCol="0" anchor="t"/>
+          <a:lstStyle/>
+          <a:p>
+            <a:pPr indent="0" marL="0">
+              <a:buNone/>
+            </a:pPr>
+            <a:r>
+              <a:rPr lang="en-US" sz="680" dirty="0">
+                <a:solidFill>
+                  <a:schemeClr val="tx2"/>
+                </a:solidFill>
+              </a:rPr>
+              <a:t>real tool calls, v2 at 13:43 CDT; brief to v1 at 14:08 CDT; gated test 38.9 s, 7 tool calls (RESULTS.md, BUILD_STATUS.md 17).</a:t>
+            </a:r>
+            <a:endParaRPr lang="en-US" sz="680" dirty="0"/>
+          </a:p>
+        </p:txBody>
+      </p:sp>
+      <p:sp>
+        <p:nvSpPr>
+          <p:cNvPr id="51" name="result card LATENCY, LOOPBACK"/>
+          <p:cNvSpPr/>
+          <p:nvPr/>
+        </p:nvSpPr>
+        <p:spPr>
+          <a:xfrm>
+            <a:off x="2542032" y="3200400"/>
+            <a:ext cx="1975104" cy="987552"/>
+          </a:xfrm>
+          <a:prstGeom prst="roundRect">
+            <a:avLst>
+              <a:gd name="adj" fmla="val 7407"/>
+            </a:avLst>
+          </a:prstGeom>
+          <a:solidFill>
+            <a:schemeClr val="bg2"/>
+          </a:solidFill>
+          <a:ln w="9525">
+            <a:solidFill>
+              <a:schemeClr val="accent4"/>
+            </a:solidFill>
+            <a:prstDash val="solid"/>
+          </a:ln>
+        </p:spPr>
+      </p:sp>
+      <p:sp>
+        <p:nvSpPr>
+          <p:cNvPr id="52" name="label LATENCY, LOOPBACK"/>
+          <p:cNvSpPr txBox="1"/>
+          <p:nvPr/>
+        </p:nvSpPr>
+        <p:spPr>
+          <a:xfrm>
+            <a:off x="2651760" y="3264408"/>
+            <a:ext cx="1755648" cy="164592"/>
+          </a:xfrm>
+          <a:prstGeom prst="rect">
+            <a:avLst/>
+          </a:prstGeom>
+          <a:noFill/>
+          <a:ln/>
+        </p:spPr>
+        <p:txBody>
+          <a:bodyPr wrap="square" lIns="0" tIns="0" rIns="0" bIns="0" rtlCol="0" anchor="ctr"/>
+          <a:lstStyle/>
+          <a:p>
+            <a:pPr indent="0" marL="0">
+              <a:buNone/>
+            </a:pPr>
+            <a:r>
+              <a:rPr lang="en-US" sz="750" b="1" spc="200" kern="0" dirty="0">
+                <a:solidFill>
+                  <a:schemeClr val="accent1"/>
+                </a:solidFill>
+              </a:rPr>
+              <a:t>LATENCY, LOOPBACK</a:t>
+            </a:r>
+            <a:endParaRPr lang="en-US" sz="750" dirty="0"/>
+          </a:p>
+        </p:txBody>
+      </p:sp>
+      <p:sp>
+        <p:nvSpPr>
+          <p:cNvPr id="53" name="result value LATENCY, LOOPBACK"/>
+          <p:cNvSpPr txBox="1"/>
+          <p:nvPr/>
+        </p:nvSpPr>
+        <p:spPr>
+          <a:xfrm>
+            <a:off x="2651760" y="3429000"/>
+            <a:ext cx="1755648" cy="256032"/>
+          </a:xfrm>
+          <a:prstGeom prst="rect">
+            <a:avLst/>
+          </a:prstGeom>
+          <a:noFill/>
+          <a:ln/>
+        </p:spPr>
+        <p:txBody>
+          <a:bodyPr wrap="square" lIns="0" tIns="0" rIns="0" bIns="0" rtlCol="0" anchor="ctr"/>
+          <a:lstStyle/>
+          <a:p>
+            <a:pPr indent="0" marL="0">
+              <a:buNone/>
+            </a:pPr>
+            <a:r>
+              <a:rPr lang="en-US" sz="1100" b="1" dirty="0">
+                <a:solidFill>
+                  <a:schemeClr val="accent1"/>
+                </a:solidFill>
+              </a:rPr>
+              <a:t>0.48 ms RTT, 18.8 ms tick</a:t>
+            </a:r>
+            <a:endParaRPr lang="en-US" sz="1100" dirty="0"/>
+          </a:p>
+        </p:txBody>
+      </p:sp>
+      <p:sp>
+        <p:nvSpPr>
+          <p:cNvPr id="54" name="result sub LATENCY, LOOPBACK"/>
+          <p:cNvSpPr txBox="1"/>
+          <p:nvPr/>
+        </p:nvSpPr>
+        <p:spPr>
+          <a:xfrm>
+            <a:off x="2651760" y="3703320"/>
+            <a:ext cx="1755648" cy="457200"/>
+          </a:xfrm>
+          <a:prstGeom prst="rect">
+            <a:avLst/>
+          </a:prstGeom>
+          <a:noFill/>
+          <a:ln/>
+        </p:spPr>
+        <p:txBody>
+          <a:bodyPr wrap="square" lIns="0" tIns="0" rIns="0" bIns="0" rtlCol="0" anchor="t"/>
+          <a:lstStyle/>
+          <a:p>
+            <a:pPr indent="0" marL="0">
+              <a:buNone/>
+            </a:pPr>
+            <a:r>
+              <a:rPr lang="en-US" sz="680" dirty="0">
+                <a:solidFill>
+                  <a:schemeClr val="tx2"/>
+                </a:solidFill>
+              </a:rPr>
+              <a:t>p50, scripted controllers (p95 0.81 and 33.1 ms; LATENCY.md). Not input to photon: no phone, Wi-Fi, browser or display.</a:t>
+            </a:r>
+            <a:endParaRPr lang="en-US" sz="680" dirty="0"/>
+          </a:p>
+        </p:txBody>
+      </p:sp>
+      <p:sp>
+        <p:nvSpPr>
+          <p:cNvPr id="55" name="result card PHONES"/>
+          <p:cNvSpPr/>
+          <p:nvPr/>
+        </p:nvSpPr>
+        <p:spPr>
+          <a:xfrm>
+            <a:off x="4626864" y="3200400"/>
+            <a:ext cx="1975104" cy="987552"/>
+          </a:xfrm>
+          <a:prstGeom prst="roundRect">
+            <a:avLst>
+              <a:gd name="adj" fmla="val 7407"/>
+            </a:avLst>
+          </a:prstGeom>
+          <a:solidFill>
+            <a:schemeClr val="bg2"/>
+          </a:solidFill>
+          <a:ln w="9525">
+            <a:solidFill>
+              <a:schemeClr val="accent4"/>
+            </a:solidFill>
+            <a:prstDash val="solid"/>
+          </a:ln>
+        </p:spPr>
+      </p:sp>
+      <p:sp>
+        <p:nvSpPr>
+          <p:cNvPr id="56" name="label PHONES"/>
+          <p:cNvSpPr txBox="1"/>
+          <p:nvPr/>
+        </p:nvSpPr>
+        <p:spPr>
+          <a:xfrm>
+            <a:off x="4736592" y="3264408"/>
+            <a:ext cx="1755648" cy="164592"/>
+          </a:xfrm>
+          <a:prstGeom prst="rect">
+            <a:avLst/>
+          </a:prstGeom>
+          <a:noFill/>
+          <a:ln/>
+        </p:spPr>
+        <p:txBody>
+          <a:bodyPr wrap="square" lIns="0" tIns="0" rIns="0" bIns="0" rtlCol="0" anchor="ctr"/>
+          <a:lstStyle/>
+          <a:p>
+            <a:pPr indent="0" marL="0">
+              <a:buNone/>
+            </a:pPr>
+            <a:r>
+              <a:rPr lang="en-US" sz="750" b="1" spc="200" kern="0" dirty="0">
+                <a:solidFill>
+                  <a:schemeClr val="accent1"/>
+                </a:solidFill>
+              </a:rPr>
+              <a:t>PHONES</a:t>
+            </a:r>
+            <a:endParaRPr lang="en-US" sz="750" dirty="0"/>
+          </a:p>
+        </p:txBody>
+      </p:sp>
+      <p:sp>
+        <p:nvSpPr>
+          <p:cNvPr id="57" name="result value PHONES"/>
+          <p:cNvSpPr txBox="1"/>
+          <p:nvPr/>
+        </p:nvSpPr>
+        <p:spPr>
+          <a:xfrm>
+            <a:off x="4736592" y="3429000"/>
+            <a:ext cx="1755648" cy="256032"/>
+          </a:xfrm>
+          <a:prstGeom prst="rect">
+            <a:avLst/>
+          </a:prstGeom>
+          <a:noFill/>
+          <a:ln/>
+        </p:spPr>
+        <p:txBody>
+          <a:bodyPr wrap="square" lIns="0" tIns="0" rIns="0" bIns="0" rtlCol="0" anchor="ctr"/>
+          <a:lstStyle/>
+          <a:p>
+            <a:pPr indent="0" marL="0">
+              <a:buNone/>
+            </a:pPr>
+            <a:r>
+              <a:rPr lang="en-US" sz="1100" b="1" dirty="0">
+                <a:solidFill>
+                  <a:schemeClr val="accent1"/>
+                </a:solidFill>
+              </a:rPr>
+              <a:t>not yet with devices</a:t>
+            </a:r>
+            <a:endParaRPr lang="en-US" sz="1100" dirty="0"/>
+          </a:p>
+        </p:txBody>
+      </p:sp>
+      <p:sp>
+        <p:nvSpPr>
+          <p:cNvPr id="58" name="result sub PHONES"/>
+          <p:cNvSpPr txBox="1"/>
+          <p:nvPr/>
+        </p:nvSpPr>
+        <p:spPr>
+          <a:xfrm>
+            <a:off x="4736592" y="3703320"/>
+            <a:ext cx="1755648" cy="457200"/>
+          </a:xfrm>
+          <a:prstGeom prst="rect">
+            <a:avLst/>
+          </a:prstGeom>
+          <a:noFill/>
+          <a:ln/>
+        </p:spPr>
+        <p:txBody>
+          <a:bodyPr wrap="square" lIns="0" tIns="0" rIns="0" bIns="0" rtlCol="0" anchor="t"/>
+          <a:lstStyle/>
+          <a:p>
+            <a:pPr indent="0" marL="0">
+              <a:buNone/>
+            </a:pPr>
+            <a:r>
+              <a:rPr lang="en-US" sz="680" dirty="0">
+                <a:solidFill>
+                  <a:schemeClr val="tx2"/>
+                </a:solidFill>
+              </a:rPr>
+              <a:t>controller page under mobile emulation and 23 integration tests with real sockets pass (BUILD_STATUS.md 12); no physical phone joined today.</a:t>
+            </a:r>
+            <a:endParaRPr lang="en-US" sz="680" dirty="0"/>
+          </a:p>
+        </p:txBody>
+      </p:sp>
+      <p:sp>
+        <p:nvSpPr>
+          <p:cNvPr id="59" name="result card OFFLINE PROOF"/>
+          <p:cNvSpPr/>
+          <p:nvPr/>
+        </p:nvSpPr>
+        <p:spPr>
+          <a:xfrm>
+            <a:off x="6711696" y="3200400"/>
+            <a:ext cx="1975104" cy="987552"/>
+          </a:xfrm>
+          <a:prstGeom prst="roundRect">
+            <a:avLst>
+              <a:gd name="adj" fmla="val 7407"/>
+            </a:avLst>
+          </a:prstGeom>
+          <a:solidFill>
+            <a:schemeClr val="bg2"/>
+          </a:solidFill>
+          <a:ln w="9525">
+            <a:solidFill>
+              <a:schemeClr val="accent4"/>
+            </a:solidFill>
+            <a:prstDash val="solid"/>
+          </a:ln>
+        </p:spPr>
+      </p:sp>
+      <p:sp>
+        <p:nvSpPr>
+          <p:cNvPr id="60" name="label OFFLINE PROOF"/>
+          <p:cNvSpPr txBox="1"/>
+          <p:nvPr/>
+        </p:nvSpPr>
+        <p:spPr>
+          <a:xfrm>
+            <a:off x="6821424" y="3264408"/>
+            <a:ext cx="1755648" cy="164592"/>
+          </a:xfrm>
+          <a:prstGeom prst="rect">
+            <a:avLst/>
+          </a:prstGeom>
+          <a:noFill/>
+          <a:ln/>
+        </p:spPr>
+        <p:txBody>
+          <a:bodyPr wrap="square" lIns="0" tIns="0" rIns="0" bIns="0" rtlCol="0" anchor="ctr"/>
+          <a:lstStyle/>
+          <a:p>
+            <a:pPr indent="0" marL="0">
+              <a:buNone/>
+            </a:pPr>
+            <a:r>
+              <a:rPr lang="en-US" sz="750" b="1" spc="200" kern="0" dirty="0">
+                <a:solidFill>
+                  <a:schemeClr val="accent1"/>
+                </a:solidFill>
+              </a:rPr>
               <a:t>OFFLINE PROOF</a:t>
             </a:r>
-            <a:endParaRPr lang="en-US" sz="900" dirty="0"/>
-          </a:p>
-        </p:txBody>
-      </p:sp>
-      <p:sp>
-        <p:nvSpPr>
-          <p:cNvPr id="49" name="result value OFFLINE PROOF"/>
+            <a:endParaRPr lang="en-US" sz="750" dirty="0"/>
+          </a:p>
+        </p:txBody>
+      </p:sp>
+      <p:sp>
+        <p:nvSpPr>
+          <p:cNvPr id="61" name="result value OFFLINE PROOF"/>
           <p:cNvSpPr txBox="1"/>
           <p:nvPr/>
         </p:nvSpPr>
         <p:spPr>
           <a:xfrm>
-            <a:off x="6181344" y="3447288"/>
-            <a:ext cx="2359152" cy="274320"/>
+            <a:off x="6821424" y="3429000"/>
+            <a:ext cx="1755648" cy="256032"/>
           </a:xfrm>
           <a:prstGeom prst="rect">
             <a:avLst/>
@@ -7655,27 +9540,27 @@
               <a:buNone/>
             </a:pPr>
             <a:r>
-              <a:rPr lang="en-US" sz="1250" b="1" dirty="0">
+              <a:rPr lang="en-US" sz="1100" b="1" dirty="0">
                 <a:solidFill>
                   <a:schemeClr val="accent1"/>
                 </a:solidFill>
               </a:rPr>
               <a:t>not run</a:t>
             </a:r>
-            <a:endParaRPr lang="en-US" sz="1250" dirty="0"/>
-          </a:p>
-        </p:txBody>
-      </p:sp>
-      <p:sp>
-        <p:nvSpPr>
-          <p:cNvPr id="50" name="result sub OFFLINE PROOF"/>
+            <a:endParaRPr lang="en-US" sz="1100" dirty="0"/>
+          </a:p>
+        </p:txBody>
+      </p:sp>
+      <p:sp>
+        <p:nvSpPr>
+          <p:cNvPr id="62" name="result sub OFFLINE PROOF"/>
           <p:cNvSpPr txBox="1"/>
           <p:nvPr/>
         </p:nvSpPr>
         <p:spPr>
           <a:xfrm>
-            <a:off x="6181344" y="3730752"/>
-            <a:ext cx="2359152" cy="438912"/>
+            <a:off x="6821424" y="3703320"/>
+            <a:ext cx="1755648" cy="457200"/>
           </a:xfrm>
           <a:prstGeom prst="rect">
             <a:avLst/>
@@ -7691,20 +9576,20 @@
               <a:buNone/>
             </a:pPr>
             <a:r>
-              <a:rPr lang="en-US" sz="750" dirty="0">
+              <a:rPr lang="en-US" sz="680" dirty="0">
                 <a:solidFill>
                   <a:schemeClr val="tx2"/>
                 </a:solidFill>
               </a:rPr>
-              <a:t>only a before record exists (data/offline-proof/1791049273707.json: egress not blocked, server not up). Procedure: docs/OFFLINE_PROOF.md. Nothing claimed.</a:t>
-            </a:r>
-            <a:endParaRPr lang="en-US" sz="750" dirty="0"/>
-          </a:p>
-        </p:txBody>
-      </p:sp>
-      <p:sp>
-        <p:nvSpPr>
-          <p:cNvPr id="51" name="sources note"/>
+              <a:t>only a before record exists (offline-proof/1791049273707.json: egress not blocked, server not up). Procedure: docs/OFFLINE_PROOF.md. Nothing claimed.</a:t>
+            </a:r>
+            <a:endParaRPr lang="en-US" sz="680" dirty="0"/>
+          </a:p>
+        </p:txBody>
+      </p:sp>
+      <p:sp>
+        <p:nvSpPr>
+          <p:cNvPr id="63" name="sources note"/>
           <p:cNvSpPr txBox="1"/>
           <p:nvPr/>
         </p:nvSpPr>
@@ -7727,14 +9612,14 @@
               <a:buNone/>
             </a:pPr>
             <a:r>
-              <a:rPr lang="en-US" sz="850" i="1" dirty="0">
+              <a:rPr lang="en-US" sz="800" i="1" dirty="0">
                 <a:solidFill>
                   <a:schemeClr val="tx2"/>
                 </a:solidFill>
               </a:rPr>
-              <a:t>All timings are from the direct harness, labelled [direct] in every report, and each names its GPU state because the Ollama daemon was shared for most of the day. OpenClaw tool calls are proven against a fake server (packages/agent/SMOKE.md); the run against the real server times out before any model call and is being diagnosed.</a:t>
-            </a:r>
-            <a:endParaRPr lang="en-US" sz="850" dirty="0"/>
+              <a:t>Direct-harness timings are labelled [direct] in every report; OpenClaw timings are from the real server after the Ollama daemon restart at 13:43 CDT. Each card names its GPU state because the daemon was shared for most of the day. Mode briefs: not yet measured; the card is filled only from docs/RESULTS.md.</a:t>
+            </a:r>
+            <a:endParaRPr lang="en-US" sz="800" dirty="0"/>
           </a:p>
         </p:txBody>
       </p:sp>

--- a/docs/pitch/Beetle-pitch.pptx
+++ b/docs/pitch/Beetle-pitch.pptx
@@ -112,7 +112,7 @@
   <p:extLst>
     <p:ext uri="{521415D9-36F7-43E2-AB2F-B90AF26B5E84}">
       <p14:sectionLst xmlns:p14="http://schemas.microsoft.com/office/powerpoint/2010/main">
-        <p14:section name="Beetle pitch" id="{06e9093f-b94e-6cb6-84bc-101b2dbec484}">
+        <p14:section name="Beetle pitch" id="{3394f850-dde4-6cf3-fb0c-626576b26631}">
           <p14:sldIdLst>
             <p14:sldId id="256"/>
             <p14:sldId id="257"/>
@@ -614,7 +614,7 @@
           <a:p>
             <a:r>
               <a:rPr lang="en-US" dirty="0"/>
-              <a:t>Walk the four steps: any request, mapped to the closest mode and biome and named, a playable world two phones join, then keep changing it while they play. Read two rows of the mode table, not all five. Say plainly: the library is bounded and growing; the model never writes rules, it picks from the engine. Status at 14:27 CDT: contract, validator, patch ops, server rule per mode, mapping prompt and biome palettes exist in code; BUILD_STATUS.md says what is tested; mode briefs are not measured yet (slide 5).</a:t>
+              <a:t>Walk the four steps: any request, mapped to the closest mode and biome and named, a playable world two phones join, then keep changing it while they play. Read two rows of the mode table, not all five. Say plainly: the library is bounded and growing; the model never writes rules, it picks from the engine. Status at 14:27 CDT: contract, validator, patch ops, server rule per mode, mapping prompt and biome palettes exist in code; BUILD_STATUS.md says what is tested; mode briefs measured 14:25 to 14:42 CDT, 18 of 18 sensible modes (slide 5).</a:t>
             </a:r>
             <a:endParaRPr lang="en-US" dirty="0"/>
           </a:p>
@@ -878,7 +878,7 @@
           <a:p>
             <a:r>
               <a:rPr lang="en-US" dirty="0"/>
-              <a:t>Read the cards. Say out loud: the 10 s brief target is not met; a valid brief takes 24 to 28 s warm on a quiet GPU, 14 s was seen once after normalization, 33.4 s through OpenClaw. Edits commit in 2 to 14 s, and 8.0 s with two players moving and nothing reset. Game modes from one prompt are not yet measured; say so rather than guessing. Phones and the offline proof are covered by tests or procedure but not yet measured live. The 27b was never benchmarked.</a:t>
+              <a:t>Read the cards. Say out loud: the 10 s brief target is not met; a valid brief takes 24 to 28 s warm on a quiet GPU, 14 s was seen once after normalization, 33.4 s through OpenClaw. Edits commit in 2 to 14 s, and 8.0 s with two players moving and nothing reset. Game modes from one prompt: the mode was sensible on 18 of 18 briefs and the exact mode was missed twice; committed mode briefs took 13 to 44 s and the failures were geometry, never the mode rule; mode and biome edits on a running world took 3.0 s. Phones and the offline proof are covered by tests or procedure but not yet measured live. The 27b was never benchmarked.</a:t>
             </a:r>
             <a:endParaRPr lang="en-US" dirty="0"/>
           </a:p>
@@ -8239,7 +8239,7 @@
       </p:sp>
       <p:sp>
         <p:nvSpPr>
-          <p:cNvPr id="23" name="result card MODE BRIEFS, ONE PROMPT"/>
+          <p:cNvPr id="23" name="result card MODE BRIEFS"/>
           <p:cNvSpPr/>
           <p:nvPr/>
         </p:nvSpPr>
@@ -8266,7 +8266,7 @@
       </p:sp>
       <p:sp>
         <p:nvSpPr>
-          <p:cNvPr id="24" name="label MODE BRIEFS, ONE PROMPT"/>
+          <p:cNvPr id="24" name="label MODE BRIEFS"/>
           <p:cNvSpPr txBox="1"/>
           <p:nvPr/>
         </p:nvSpPr>
@@ -8294,7 +8294,7 @@
                   <a:schemeClr val="accent1"/>
                 </a:solidFill>
               </a:rPr>
-              <a:t>MODE BRIEFS, ONE PROMPT</a:t>
+              <a:t>MODE BRIEFS</a:t>
             </a:r>
             <a:endParaRPr lang="en-US" sz="750" dirty="0"/>
           </a:p>
@@ -8302,7 +8302,7 @@
       </p:sp>
       <p:sp>
         <p:nvSpPr>
-          <p:cNvPr id="25" name="result value MODE BRIEFS, ONE PROMPT"/>
+          <p:cNvPr id="25" name="result value MODE BRIEFS"/>
           <p:cNvSpPr txBox="1"/>
           <p:nvPr/>
         </p:nvSpPr>
@@ -8330,7 +8330,7 @@
                   <a:schemeClr val="accent1"/>
                 </a:solidFill>
               </a:rPr>
-              <a:t>not yet measured</a:t>
+              <a:t>18 of 18 right mode</a:t>
             </a:r>
             <a:endParaRPr lang="en-US" sz="1100" dirty="0"/>
           </a:p>
@@ -8338,7 +8338,7 @@
       </p:sp>
       <p:sp>
         <p:nvSpPr>
-          <p:cNvPr id="26" name="result sub MODE BRIEFS, ONE PROMPT"/>
+          <p:cNvPr id="26" name="result sub MODE BRIEFS"/>
           <p:cNvSpPr txBox="1"/>
           <p:nvPr/>
         </p:nvSpPr>
@@ -8366,7 +8366,7 @@
                   <a:schemeClr val="tx2"/>
                 </a:solidFill>
               </a:rPr>
-              <a:t>mode, biome and brief-to-commit per request are being appended to docs/RESULTS.md 'Game modes from one prompt'; this card is rebuilt from those rows only.</a:t>
+              <a:t>committed briefs 13.0 to 44.1 s; exact mode missed twice; 8 of 14 final-prompt attempts committed, failures all geometry; mode and biome edits 3.0 s (RESULTS.md 'Game modes from one prompt', direct).</a:t>
             </a:r>
             <a:endParaRPr lang="en-US" sz="680" dirty="0"/>
           </a:p>
@@ -9617,7 +9617,7 @@
                   <a:schemeClr val="tx2"/>
                 </a:solidFill>
               </a:rPr>
-              <a:t>Direct-harness timings are labelled [direct] in every report; OpenClaw timings are from the real server after the Ollama daemon restart at 13:43 CDT. Each card names its GPU state because the daemon was shared for most of the day. Mode briefs: not yet measured; the card is filled only from docs/RESULTS.md.</a:t>
+              <a:t>Direct-harness timings are labelled [direct] in every report; OpenClaw timings are from the real server after the Ollama daemon restart at 13:43 CDT. Each card names its GPU state because the daemon was shared for most of the day. Mode briefs were measured at 14:25 to 14:42 CDT in direct mode with no controllers connected (docs/RESULTS.md).</a:t>
             </a:r>
             <a:endParaRPr lang="en-US" sz="800" dirty="0"/>
           </a:p>

--- a/docs/pitch/Beetle-pitch.pptx
+++ b/docs/pitch/Beetle-pitch.pptx
@@ -112,7 +112,7 @@
   <p:extLst>
     <p:ext uri="{521415D9-36F7-43E2-AB2F-B90AF26B5E84}">
       <p14:sectionLst xmlns:p14="http://schemas.microsoft.com/office/powerpoint/2010/main">
-        <p14:section name="Beetle pitch" id="{3394f850-dde4-6cf3-fb0c-626576b26631}">
+        <p14:section name="Beetle pitch" id="{7efa93a3-c713-133a-0a0f-69940126bcf4}">
           <p14:sldIdLst>
             <p14:sldId id="256"/>
             <p14:sldId id="257"/>
@@ -614,7 +614,7 @@
           <a:p>
             <a:r>
               <a:rPr lang="en-US" dirty="0"/>
-              <a:t>Walk the four steps: any request, mapped to the closest mode and biome and named, a playable world two phones join, then keep changing it while they play. Read two rows of the mode table, not all five. Say plainly: the library is bounded and growing; the model never writes rules, it picks from the engine. Status at 14:27 CDT: contract, validator, patch ops, server rule per mode, mapping prompt and biome palettes exist in code; BUILD_STATUS.md says what is tested; mode briefs measured 14:25 to 14:42 CDT, 18 of 18 sensible modes (slide 5).</a:t>
+              <a:t>Walk the five steps: any request, mapped to the closest mode and biome and named; the world starts where the players are (the brief builds the zone around the spawn); it grows as they move, every extension a small patch validated before it lands; then keep changing it while they play. Read two rows of the mode table, not all five. Say plainly: the library is bounded and growing; the model never writes rules, it picks from the engine. Streaming was measured once: an automatic extension (two islands) committed 9.5 s after the frontier trigger with the player preserved (docs/RESULTS.md 15:16 CDT, direct, quiet GPU). Say 'measured once'; the spawn-zone brief time is not measured. Mode briefs measured 14:25 to 14:42 CDT, 18 of 18 sensible modes (slide 5).</a:t>
             </a:r>
             <a:endParaRPr lang="en-US" dirty="0"/>
           </a:p>
@@ -702,7 +702,7 @@
           <a:p>
             <a:r>
               <a:rPr lang="en-US" dirty="0"/>
-              <a:t>Play the recording here. Captions follow docs/STORYBOARD.md; the mode caption is set to whichever agent mode was green at recording time. Rehearsal timings: brief 14 s on a quiet GPU, edits 2 to 14 s, DISCONNECTED_GOAL refused and repaired in 3.0 s. Shots that cannot be produced honestly are cut, not faked.</a:t>
+              <a:t>Play the recording here. Captions follow docs/STORYBOARD.md; the mode caption is set to whichever agent mode was green at recording time. Rehearsal timings: brief 14 s on a quiet GPU, edits 2 to 14 s, DISCONNECTED_GOAL refused and repaired in 3.0 s. Shots that cannot be produced honestly are cut, not faked. Optional shot 'the world grows' (docs/STORYBOARD.md 6c): a player walks toward an edge, 'Beetle is building ahead' appears and the new island assembles; one live run committed an extension 9.5 s after the trigger (docs/RESULTS.md 15:16 CDT), not yet rehearsed on camera, so it is shown only from a real take, never compressed without a label.</a:t>
             </a:r>
             <a:endParaRPr lang="en-US" dirty="0"/>
           </a:p>
@@ -790,7 +790,7 @@
           <a:p>
             <a:r>
               <a:rPr lang="en-US" dirty="0"/>
-              <a:t>Left to right: director, OpenClaw agent, the mapping step (closest mode and biome, parameters from the brief, named in the summary), Beetle tools, server validator and commit, players. Structured output means only a listed mode, a listed biome and in-range parameters can come out of the model. Only the server decides validity; the model only proposes JSON.</a:t>
+              <a:t>Left to right: director or the frontier trigger, OpenClaw agent, the mapping step (closest mode and biome, parameters from the brief, named in the summary), Beetle tools, server validator and commit, players. Streaming uses the same path: when a player walks within 4 m of an island rim with no crossing beyond, Beetle opens an extension request itself, the agent proposes add_island (1 to 2 islands, each bridged from an anchor), and the same validator decides; growth stops at 24 islands and 48 bridges, and the director can switch it off. Structured output means only a listed mode, a listed biome and in-range parameters can come out of the model. Only the server decides validity; the model only proposes JSON.</a:t>
             </a:r>
             <a:endParaRPr lang="en-US" dirty="0"/>
           </a:p>
@@ -878,7 +878,7 @@
           <a:p>
             <a:r>
               <a:rPr lang="en-US" dirty="0"/>
-              <a:t>Read the cards. Say out loud: the 10 s brief target is not met; a valid brief takes 24 to 28 s warm on a quiet GPU, 14 s was seen once after normalization, 33.4 s through OpenClaw. Edits commit in 2 to 14 s, and 8.0 s with two players moving and nothing reset. Game modes from one prompt: the mode was sensible on 18 of 18 briefs and the exact mode was missed twice; committed mode briefs took 13 to 44 s and the failures were geometry, never the mode rule; mode and biome edits on a running world took 3.0 s. Phones and the offline proof are covered by tests or procedure but not yet measured live. The 27b was never benchmarked.</a:t>
+              <a:t>Read the cards. Say out loud: the 10 s brief target is not met; a valid brief takes 24 to 28 s warm on a quiet GPU, 14 s was seen once after normalization, 33.4 s through OpenClaw. Edits commit in 2 to 14 s, and 8.0 s with two players moving and nothing reset. Game modes from one prompt: the mode was sensible on 18 of 18 briefs and the exact mode was missed twice; committed mode briefs took 13 to 44 s and the failures were geometry, never the mode rule; mode and biome edits on a running world took 3.0 s. Phones and the offline proof are covered by tests or procedure but not yet measured live. Streaming generation is implemented and was measured once live: extension committed 9.5 s after the frontier trigger, player preserved (docs/RESULTS.md 15:16 CDT); say 'one run, acceptance numbers to follow'. No spawn-zone build time is quoted. The 27b was never benchmarked.</a:t>
             </a:r>
             <a:endParaRPr lang="en-US" dirty="0"/>
           </a:p>
@@ -3006,8 +3006,8 @@
         </p:nvSpPr>
         <p:spPr>
           <a:xfrm>
-            <a:off x="91440" y="1600200"/>
-            <a:ext cx="1920240" cy="685800"/>
+            <a:off x="228600" y="1600200"/>
+            <a:ext cx="1645920" cy="685800"/>
           </a:xfrm>
           <a:prstGeom prst="rect">
             <a:avLst/>
@@ -3059,7 +3059,7 @@
         </p:nvSpPr>
         <p:spPr>
           <a:xfrm>
-            <a:off x="3197352" y="1124712"/>
+            <a:off x="2610612" y="1124712"/>
             <a:ext cx="402336" cy="402336"/>
           </a:xfrm>
           <a:prstGeom prst="ellipse">
@@ -3084,7 +3084,7 @@
         </p:nvSpPr>
         <p:spPr>
           <a:xfrm>
-            <a:off x="3197352" y="1124712"/>
+            <a:off x="2610612" y="1124712"/>
             <a:ext cx="402336" cy="402336"/>
           </a:xfrm>
           <a:prstGeom prst="rect">
@@ -3120,8 +3120,8 @@
         </p:nvSpPr>
         <p:spPr>
           <a:xfrm>
-            <a:off x="2438400" y="1600200"/>
-            <a:ext cx="1920240" cy="685800"/>
+            <a:off x="1988820" y="1600200"/>
+            <a:ext cx="1645920" cy="685800"/>
           </a:xfrm>
           <a:prstGeom prst="rect">
             <a:avLst/>
@@ -3173,7 +3173,7 @@
         </p:nvSpPr>
         <p:spPr>
           <a:xfrm>
-            <a:off x="5544312" y="1124712"/>
+            <a:off x="4370832" y="1124712"/>
             <a:ext cx="402336" cy="402336"/>
           </a:xfrm>
           <a:prstGeom prst="ellipse">
@@ -3198,7 +3198,7 @@
         </p:nvSpPr>
         <p:spPr>
           <a:xfrm>
-            <a:off x="5544312" y="1124712"/>
+            <a:off x="4370832" y="1124712"/>
             <a:ext cx="402336" cy="402336"/>
           </a:xfrm>
           <a:prstGeom prst="rect">
@@ -3234,8 +3234,8 @@
         </p:nvSpPr>
         <p:spPr>
           <a:xfrm>
-            <a:off x="4785360" y="1600200"/>
-            <a:ext cx="1920240" cy="685800"/>
+            <a:off x="3749040" y="1600200"/>
+            <a:ext cx="1645920" cy="685800"/>
           </a:xfrm>
           <a:prstGeom prst="rect">
             <a:avLst/>
@@ -3259,7 +3259,7 @@
                   <a:schemeClr val="tx1"/>
                 </a:solidFill>
               </a:rPr>
-              <a:t>Playable world</a:t>
+              <a:t>Starts where the players are</a:t>
             </a:r>
             <a:endParaRPr lang="en-US" sz="1100" dirty="0"/>
           </a:p>
@@ -3273,7 +3273,7 @@
                   <a:schemeClr val="tx2"/>
                 </a:solidFill>
               </a:rPr>
-              <a:t>two phones join by QR, validated by game code first</a:t>
+              <a:t>the brief builds the spawn zone</a:t>
             </a:r>
             <a:endParaRPr lang="en-US" sz="1100" dirty="0"/>
           </a:p>
@@ -3287,7 +3287,7 @@
         </p:nvSpPr>
         <p:spPr>
           <a:xfrm>
-            <a:off x="7891272" y="1124712"/>
+            <a:off x="6131052" y="1124712"/>
             <a:ext cx="402336" cy="402336"/>
           </a:xfrm>
           <a:prstGeom prst="ellipse">
@@ -3312,7 +3312,7 @@
         </p:nvSpPr>
         <p:spPr>
           <a:xfrm>
-            <a:off x="7891272" y="1124712"/>
+            <a:off x="6131052" y="1124712"/>
             <a:ext cx="402336" cy="402336"/>
           </a:xfrm>
           <a:prstGeom prst="rect">
@@ -3348,8 +3348,8 @@
         </p:nvSpPr>
         <p:spPr>
           <a:xfrm>
-            <a:off x="7132320" y="1600200"/>
-            <a:ext cx="1920240" cy="685800"/>
+            <a:off x="5509260" y="1600200"/>
+            <a:ext cx="1645920" cy="685800"/>
           </a:xfrm>
           <a:prstGeom prst="rect">
             <a:avLst/>
@@ -3373,6 +3373,120 @@
                   <a:schemeClr val="tx1"/>
                 </a:solidFill>
               </a:rPr>
+              <a:t>Grows as they move</a:t>
+            </a:r>
+            <a:endParaRPr lang="en-US" sz="1100" dirty="0"/>
+          </a:p>
+          <a:p>
+            <a:pPr algn="ctr" indent="0" marL="0">
+              <a:buNone/>
+            </a:pPr>
+            <a:r>
+              <a:rPr lang="en-US" sz="900" dirty="0">
+                <a:solidFill>
+                  <a:schemeClr val="tx2"/>
+                </a:solidFill>
+              </a:rPr>
+              <a:t>every extension a small patch, validated before it lands</a:t>
+            </a:r>
+            <a:endParaRPr lang="en-US" sz="1100" dirty="0"/>
+          </a:p>
+        </p:txBody>
+      </p:sp>
+      <p:sp>
+        <p:nvSpPr>
+          <p:cNvPr id="28" name="step circle 5"/>
+          <p:cNvSpPr/>
+          <p:nvPr/>
+        </p:nvSpPr>
+        <p:spPr>
+          <a:xfrm>
+            <a:off x="7891272" y="1124712"/>
+            <a:ext cx="402336" cy="402336"/>
+          </a:xfrm>
+          <a:prstGeom prst="ellipse">
+            <a:avLst/>
+          </a:prstGeom>
+          <a:solidFill>
+            <a:schemeClr val="accent1"/>
+          </a:solidFill>
+          <a:ln w="6350">
+            <a:solidFill>
+              <a:schemeClr val="accent1"/>
+            </a:solidFill>
+            <a:prstDash val="solid"/>
+          </a:ln>
+        </p:spPr>
+      </p:sp>
+      <p:sp>
+        <p:nvSpPr>
+          <p:cNvPr id="29" name="step number 5"/>
+          <p:cNvSpPr txBox="1"/>
+          <p:nvPr/>
+        </p:nvSpPr>
+        <p:spPr>
+          <a:xfrm>
+            <a:off x="7891272" y="1124712"/>
+            <a:ext cx="402336" cy="402336"/>
+          </a:xfrm>
+          <a:prstGeom prst="rect">
+            <a:avLst/>
+          </a:prstGeom>
+          <a:noFill/>
+          <a:ln/>
+        </p:spPr>
+        <p:txBody>
+          <a:bodyPr wrap="square" lIns="0" tIns="0" rIns="0" bIns="0" rtlCol="0" anchor="ctr"/>
+          <a:lstStyle/>
+          <a:p>
+            <a:pPr algn="ctr" indent="0" marL="0">
+              <a:buNone/>
+            </a:pPr>
+            <a:r>
+              <a:rPr lang="en-US" sz="1300" b="1" dirty="0">
+                <a:solidFill>
+                  <a:schemeClr val="bg1"/>
+                </a:solidFill>
+              </a:rPr>
+              <a:t>5</a:t>
+            </a:r>
+            <a:endParaRPr lang="en-US" sz="1300" dirty="0"/>
+          </a:p>
+        </p:txBody>
+      </p:sp>
+      <p:sp>
+        <p:nvSpPr>
+          <p:cNvPr id="30" name="step text 5"/>
+          <p:cNvSpPr txBox="1"/>
+          <p:nvPr/>
+        </p:nvSpPr>
+        <p:spPr>
+          <a:xfrm>
+            <a:off x="7269480" y="1600200"/>
+            <a:ext cx="1645920" cy="685800"/>
+          </a:xfrm>
+          <a:prstGeom prst="rect">
+            <a:avLst/>
+          </a:prstGeom>
+          <a:noFill/>
+          <a:ln/>
+        </p:spPr>
+        <p:txBody>
+          <a:bodyPr wrap="square" lIns="0" tIns="0" rIns="0" bIns="0" rtlCol="0" anchor="t"/>
+          <a:lstStyle/>
+          <a:p>
+            <a:pPr algn="ctr" indent="0" marL="0">
+              <a:spcAft>
+                <a:spcPts val="200"/>
+              </a:spcAft>
+              <a:buNone/>
+            </a:pPr>
+            <a:r>
+              <a:rPr lang="en-US" sz="1100" b="1" dirty="0">
+                <a:solidFill>
+                  <a:schemeClr val="tx1"/>
+                </a:solidFill>
+              </a:rPr>
               <a:t>Keep changing it while they play</a:t>
             </a:r>
             <a:endParaRPr lang="en-US" sz="1100" dirty="0"/>
@@ -3395,13 +3509,13 @@
       </p:sp>
       <p:sp>
         <p:nvSpPr>
-          <p:cNvPr id="28" name="label MODE LIBRARY (ENGINE MECHANICS, NOT MODEL-WRITTEN RULES)"/>
+          <p:cNvPr id="31" name="label MODE LIBRARY (ENGINE MECHANICS, NOT MODEL-WRITTEN RULES)"/>
           <p:cNvSpPr txBox="1"/>
           <p:nvPr/>
         </p:nvSpPr>
         <p:spPr>
           <a:xfrm>
-            <a:off x="457200" y="2286000"/>
+            <a:off x="457200" y="2258568"/>
             <a:ext cx="5943600" cy="182880"/>
           </a:xfrm>
           <a:prstGeom prst="rect">
@@ -3444,7 +3558,7 @@
           </p:nvPr>
         </p:nvGraphicFramePr>
         <p:xfrm>
-          <a:off x="457200" y="2487168"/>
+          <a:off x="457200" y="2432304"/>
           <a:ext cx="8229600" cy="914400"/>
         </p:xfrm>
         <a:graphic>
@@ -5107,14 +5221,14 @@
       </p:graphicFrame>
       <p:sp>
         <p:nvSpPr>
-          <p:cNvPr id="30" name="library text"/>
+          <p:cNvPr id="33" name="library text"/>
           <p:cNvSpPr txBox="1"/>
           <p:nvPr/>
         </p:nvSpPr>
         <p:spPr>
           <a:xfrm>
-            <a:off x="457200" y="3986784"/>
-            <a:ext cx="8229600" cy="365760"/>
+            <a:off x="457200" y="3959352"/>
+            <a:ext cx="8229600" cy="402336"/>
           </a:xfrm>
           <a:prstGeom prst="rect">
             <a:avLst/>
@@ -5168,7 +5282,7 @@
                   <a:schemeClr val="tx1"/>
                 </a:solidFill>
               </a:rPr>
-              <a:t>water or lava below, a rising hazard, movement 3 to 7 m/s, 11 decoration types.   </a:t>
+              <a:t>water or lava, a rising hazard, 3 to 7 m/s, 11 decoration types.   </a:t>
             </a:r>
             <a:pPr indent="0" marL="0">
               <a:buNone/>
@@ -5190,7 +5304,29 @@
                   <a:schemeClr val="tx1"/>
                 </a:solidFill>
               </a:rPr>
-              <a:t>set_mode, set_biome, set_movement beside add_bridge, set_hazard and the other structural ops; every patch validated and committed as a new version.</a:t>
+              <a:t>set_mode, set_biome, set_movement and the structural ops, each validated and committed as a new version.   </a:t>
+            </a:r>
+            <a:pPr indent="0" marL="0">
+              <a:buNone/>
+            </a:pPr>
+            <a:r>
+              <a:rPr lang="en-US" sz="900" b="1" dirty="0">
+                <a:solidFill>
+                  <a:schemeClr val="accent1"/>
+                </a:solidFill>
+              </a:rPr>
+              <a:t>Streaming </a:t>
+            </a:r>
+            <a:pPr indent="0" marL="0">
+              <a:buNone/>
+            </a:pPr>
+            <a:r>
+              <a:rPr lang="en-US" sz="900" dirty="0">
+                <a:solidFill>
+                  <a:schemeClr val="tx1"/>
+                </a:solidFill>
+              </a:rPr>
+              <a:t>extends the world ahead of players near an edge, up to 24 islands and 48 bridges; the director can switch it off.</a:t>
             </a:r>
             <a:endParaRPr lang="en-US" sz="900" dirty="0"/>
           </a:p>
@@ -5198,14 +5334,14 @@
       </p:sp>
       <p:sp>
         <p:nvSpPr>
-          <p:cNvPr id="31" name="category note"/>
+          <p:cNvPr id="34" name="category note"/>
           <p:cNvSpPr txBox="1"/>
           <p:nvPr/>
         </p:nvSpPr>
         <p:spPr>
           <a:xfrm>
-            <a:off x="457200" y="4370832"/>
-            <a:ext cx="8229600" cy="347472"/>
+            <a:off x="457200" y="4425696"/>
+            <a:ext cx="8229600" cy="310896"/>
           </a:xfrm>
           <a:prstGeom prst="rect">
             <a:avLst/>
@@ -5221,14 +5357,14 @@
               <a:buNone/>
             </a:pPr>
             <a:r>
-              <a:rPr lang="en-US" sz="800" i="1" dirty="0">
+              <a:rPr lang="en-US" sz="750" i="1" dirty="0">
                 <a:solidFill>
                   <a:schemeClr val="tx2"/>
                 </a:solidFill>
               </a:rPr>
               <a:t>Adapted from one-prompt game generators: the one-prompt front door and instant playable output. Added: live editing without a reset, deterministic validation and repair before publish, local-only inference, phones as controllers (docs/COMPETITIVE.md). A request outside the library lands on the nearest mode and the agent says so.</a:t>
             </a:r>
-            <a:endParaRPr lang="en-US" sz="800" dirty="0"/>
+            <a:endParaRPr lang="en-US" sz="750" dirty="0"/>
           </a:p>
         </p:txBody>
       </p:sp>
@@ -6470,7 +6606,7 @@
       </p:sp>
       <p:sp>
         <p:nvSpPr>
-          <p:cNvPr id="15" name="node Director"/>
+          <p:cNvPr id="15" name="node Director or frontier"/>
           <p:cNvSpPr/>
           <p:nvPr/>
         </p:nvSpPr>
@@ -6497,7 +6633,7 @@
       </p:sp>
       <p:sp>
         <p:nvSpPr>
-          <p:cNvPr id="16" name="node title Director"/>
+          <p:cNvPr id="16" name="node title Director or frontier"/>
           <p:cNvSpPr txBox="1"/>
           <p:nvPr/>
         </p:nvSpPr>
@@ -6525,7 +6661,7 @@
                   <a:schemeClr val="tx1"/>
                 </a:solidFill>
               </a:rPr>
-              <a:t>Director</a:t>
+              <a:t>Director or frontier</a:t>
             </a:r>
             <a:endParaRPr lang="en-US" sz="1050" dirty="0"/>
           </a:p>
@@ -6533,7 +6669,7 @@
       </p:sp>
       <p:sp>
         <p:nvSpPr>
-          <p:cNvPr id="17" name="node sub Director"/>
+          <p:cNvPr id="17" name="node sub Director or frontier"/>
           <p:cNvSpPr txBox="1"/>
           <p:nvPr/>
         </p:nvSpPr>
@@ -6561,7 +6697,7 @@
                   <a:schemeClr val="tx2"/>
                 </a:solidFill>
               </a:rPr>
-              <a:t>any game request or edit</a:t>
+              <a:t>a request or edit; or a player 4 m from a rim with no crossing beyond</a:t>
             </a:r>
             <a:endParaRPr lang="en-US" sz="850" dirty="0"/>
           </a:p>
@@ -6930,7 +7066,7 @@
                   <a:schemeClr val="tx2"/>
                 </a:solidFill>
               </a:rPr>
-              <a:t>schema-checked JSON only, nothing executed</a:t>
+              <a:t>schema-checked JSON only, nothing executed; add_island for extensions</a:t>
             </a:r>
             <a:endParaRPr lang="en-US" sz="850" dirty="0"/>
           </a:p>
@@ -7290,18 +7426,18 @@
       </p:sp>
       <p:sp>
         <p:nvSpPr>
-          <p:cNvPr id="42" name="state card"/>
+          <p:cNvPr id="42" name="lower card 1"/>
           <p:cNvSpPr/>
           <p:nvPr/>
         </p:nvSpPr>
         <p:spPr>
           <a:xfrm>
             <a:off x="457200" y="3017520"/>
-            <a:ext cx="3977640" cy="1600200"/>
+            <a:ext cx="2651760" cy="1645920"/>
           </a:xfrm>
           <a:prstGeom prst="roundRect">
             <a:avLst>
-              <a:gd name="adj" fmla="val 4571"/>
+              <a:gd name="adj" fmla="val 4444"/>
             </a:avLst>
           </a:prstGeom>
           <a:solidFill>
@@ -7323,8 +7459,8 @@
         </p:nvSpPr>
         <p:spPr>
           <a:xfrm>
-            <a:off x="640080" y="3154680"/>
-            <a:ext cx="3657600" cy="228600"/>
+            <a:off x="594360" y="3127248"/>
+            <a:ext cx="2377440" cy="228600"/>
           </a:xfrm>
           <a:prstGeom prst="rect">
             <a:avLst/>
@@ -7340,27 +7476,27 @@
               <a:buNone/>
             </a:pPr>
             <a:r>
-              <a:rPr lang="en-US" sz="1000" b="1" spc="200" kern="0" dirty="0">
+              <a:rPr lang="en-US" sz="850" b="1" spc="200" kern="0" dirty="0">
                 <a:solidFill>
                   <a:schemeClr val="accent1"/>
                 </a:solidFill>
               </a:rPr>
               <a:t>TWO KINDS OF STATE</a:t>
             </a:r>
-            <a:endParaRPr lang="en-US" sz="1000" dirty="0"/>
-          </a:p>
-        </p:txBody>
-      </p:sp>
-      <p:sp>
-        <p:nvSpPr>
-          <p:cNvPr id="44" name="state bullets"/>
+            <a:endParaRPr lang="en-US" sz="850" dirty="0"/>
+          </a:p>
+        </p:txBody>
+      </p:sp>
+      <p:sp>
+        <p:nvSpPr>
+          <p:cNvPr id="44" name="lower card bullets 1"/>
           <p:cNvSpPr txBox="1"/>
           <p:nvPr/>
         </p:nvSpPr>
         <p:spPr>
           <a:xfrm>
-            <a:off x="640080" y="3401568"/>
-            <a:ext cx="3657600" cy="1143000"/>
+            <a:off x="594360" y="3364992"/>
+            <a:ext cx="2377440" cy="1234440"/>
           </a:xfrm>
           <a:prstGeom prst="rect">
             <a:avLst/>
@@ -7380,14 +7516,14 @@
               <a:buChar char="•"/>
             </a:pPr>
             <a:r>
-              <a:rPr lang="en-US" sz="1050" dirty="0">
+              <a:rPr lang="en-US" sz="850" dirty="0">
                 <a:solidFill>
                   <a:schemeClr val="tx1"/>
                 </a:solidFill>
               </a:rPr>
-              <a:t>WorldSpec is structure, now with mode, biome, movement and hazard.rise. It changes only when a transaction commits, one version per commit.</a:t>
-            </a:r>
-            <a:endParaRPr lang="en-US" sz="1050" dirty="0"/>
+              <a:t>WorldSpec is structure: islands, bridges, mode, biome, movement, hazard. One version per committed transaction.</a:t>
+            </a:r>
+            <a:endParaRPr lang="en-US" sz="850" dirty="0"/>
           </a:p>
           <a:p>
             <a:pPr marL="152400" indent="-152400">
@@ -7398,14 +7534,14 @@
               <a:buChar char="•"/>
             </a:pPr>
             <a:r>
-              <a:rPr lang="en-US" sz="1050" dirty="0">
+              <a:rPr lang="en-US" sz="850" dirty="0">
                 <a:solidFill>
                   <a:schemeClr val="tx1"/>
                 </a:solidFill>
               </a:rPr>
-              <a:t>SessionState is players, relics, score and the mode objective (timer, hold time, next checkpoint, hazard height). The simulation advances it; the agent never writes it.</a:t>
-            </a:r>
-            <a:endParaRPr lang="en-US" sz="1050" dirty="0"/>
+              <a:t>SessionState is players, relics, score and the mode objective. The simulation advances it; the agent never writes it.</a:t>
+            </a:r>
+            <a:endParaRPr lang="en-US" sz="850" dirty="0"/>
           </a:p>
           <a:p>
             <a:pPr marL="152400" indent="-152400">
@@ -7416,31 +7552,31 @@
               <a:buChar char="•"/>
             </a:pPr>
             <a:r>
-              <a:rPr lang="en-US" sz="1050" dirty="0">
+              <a:rPr lang="en-US" sz="850" dirty="0">
                 <a:solidFill>
                   <a:schemeClr val="tx1"/>
                 </a:solidFill>
               </a:rPr>
               <a:t>Commit needs a server-issued proof.</a:t>
             </a:r>
-            <a:endParaRPr lang="en-US" sz="1050" dirty="0"/>
-          </a:p>
-        </p:txBody>
-      </p:sp>
-      <p:sp>
-        <p:nvSpPr>
-          <p:cNvPr id="45" name="validation card"/>
-          <p:cNvSpPr/>
-          <p:nvPr/>
-        </p:nvSpPr>
-        <p:spPr>
-          <a:xfrm>
-            <a:off x="4709160" y="3017520"/>
-            <a:ext cx="3977640" cy="1600200"/>
+            <a:endParaRPr lang="en-US" sz="850" dirty="0"/>
+          </a:p>
+        </p:txBody>
+      </p:sp>
+      <p:sp>
+        <p:nvSpPr>
+          <p:cNvPr id="45" name="lower card 2"/>
+          <p:cNvSpPr/>
+          <p:nvPr/>
+        </p:nvSpPr>
+        <p:spPr>
+          <a:xfrm>
+            <a:off x="3246120" y="3017520"/>
+            <a:ext cx="2651760" cy="1645920"/>
           </a:xfrm>
           <a:prstGeom prst="roundRect">
             <a:avLst>
-              <a:gd name="adj" fmla="val 4571"/>
+              <a:gd name="adj" fmla="val 4444"/>
             </a:avLst>
           </a:prstGeom>
           <a:solidFill>
@@ -7462,8 +7598,8 @@
         </p:nvSpPr>
         <p:spPr>
           <a:xfrm>
-            <a:off x="4892040" y="3154680"/>
-            <a:ext cx="3657600" cy="228600"/>
+            <a:off x="3383280" y="3127248"/>
+            <a:ext cx="2377440" cy="228600"/>
           </a:xfrm>
           <a:prstGeom prst="rect">
             <a:avLst/>
@@ -7479,27 +7615,27 @@
               <a:buNone/>
             </a:pPr>
             <a:r>
-              <a:rPr lang="en-US" sz="1000" b="1" spc="200" kern="0" dirty="0">
+              <a:rPr lang="en-US" sz="850" b="1" spc="200" kern="0" dirty="0">
                 <a:solidFill>
                   <a:schemeClr val="accent1"/>
                 </a:solidFill>
               </a:rPr>
               <a:t>VALIDATION IS GAME CODE</a:t>
             </a:r>
-            <a:endParaRPr lang="en-US" sz="1000" dirty="0"/>
-          </a:p>
-        </p:txBody>
-      </p:sp>
-      <p:sp>
-        <p:nvSpPr>
-          <p:cNvPr id="47" name="validation bullets"/>
+            <a:endParaRPr lang="en-US" sz="850" dirty="0"/>
+          </a:p>
+        </p:txBody>
+      </p:sp>
+      <p:sp>
+        <p:nvSpPr>
+          <p:cNvPr id="47" name="lower card bullets 2"/>
           <p:cNvSpPr txBox="1"/>
           <p:nvPr/>
         </p:nvSpPr>
         <p:spPr>
           <a:xfrm>
-            <a:off x="4892040" y="3401568"/>
-            <a:ext cx="3657600" cy="1143000"/>
+            <a:off x="3383280" y="3364992"/>
+            <a:ext cx="2377440" cy="1234440"/>
           </a:xfrm>
           <a:prstGeom prst="rect">
             <a:avLst/>
@@ -7519,14 +7655,14 @@
               <a:buChar char="•"/>
             </a:pPr>
             <a:r>
-              <a:rPr lang="en-US" sz="1050" dirty="0">
+              <a:rPr lang="en-US" sz="850" dirty="0">
                 <a:solidFill>
                   <a:schemeClr val="tx1"/>
                 </a:solidFill>
               </a:rPr>
               <a:t>Geometry, bridge sockets, walk field, reachability with the gate locked, occupied support at commit time.</a:t>
             </a:r>
-            <a:endParaRPr lang="en-US" sz="1050" dirty="0"/>
+            <a:endParaRPr lang="en-US" sz="850" dirty="0"/>
           </a:p>
           <a:p>
             <a:pPr marL="152400" indent="-152400">
@@ -7537,14 +7673,14 @@
               <a:buChar char="•"/>
             </a:pPr>
             <a:r>
-              <a:rPr lang="en-US" sz="1050" dirty="0">
+              <a:rPr lang="en-US" sz="850" dirty="0">
                 <a:solidFill>
                   <a:schemeClr val="tx1"/>
                 </a:solidFill>
               </a:rPr>
               <a:t>MODE_INVALID: relics required above the count, a race with under 2 checkpoints, survival without a rising hazard, a timer outside 20 to 600 s.</a:t>
             </a:r>
-            <a:endParaRPr lang="en-US" sz="1050" dirty="0"/>
+            <a:endParaRPr lang="en-US" sz="850" dirty="0"/>
           </a:p>
           <a:p>
             <a:pPr marL="152400" indent="-152400">
@@ -7555,14 +7691,153 @@
               <a:buChar char="•"/>
             </a:pPr>
             <a:r>
-              <a:rPr lang="en-US" sz="1050" dirty="0">
+              <a:rPr lang="en-US" sz="850" dirty="0">
                 <a:solidFill>
                   <a:schemeClr val="tx1"/>
                 </a:solidFill>
               </a:rPr>
-              <a:t>The mode rule is engine code picked by an enum. An LLM saying valid is never approval. Output is schema-checked JSON only.</a:t>
-            </a:r>
-            <a:endParaRPr lang="en-US" sz="1050" dirty="0"/>
+              <a:t>An LLM saying valid is never approval.</a:t>
+            </a:r>
+            <a:endParaRPr lang="en-US" sz="850" dirty="0"/>
+          </a:p>
+        </p:txBody>
+      </p:sp>
+      <p:sp>
+        <p:nvSpPr>
+          <p:cNvPr id="48" name="lower card 3"/>
+          <p:cNvSpPr/>
+          <p:nvPr/>
+        </p:nvSpPr>
+        <p:spPr>
+          <a:xfrm>
+            <a:off x="6035040" y="3017520"/>
+            <a:ext cx="2651760" cy="1645920"/>
+          </a:xfrm>
+          <a:prstGeom prst="roundRect">
+            <a:avLst>
+              <a:gd name="adj" fmla="val 4444"/>
+            </a:avLst>
+          </a:prstGeom>
+          <a:solidFill>
+            <a:schemeClr val="bg2"/>
+          </a:solidFill>
+          <a:ln w="9525">
+            <a:solidFill>
+              <a:schemeClr val="accent4"/>
+            </a:solidFill>
+            <a:prstDash val="solid"/>
+          </a:ln>
+        </p:spPr>
+      </p:sp>
+      <p:sp>
+        <p:nvSpPr>
+          <p:cNvPr id="49" name="label GROWS AHEAD OF PLAYERS"/>
+          <p:cNvSpPr txBox="1"/>
+          <p:nvPr/>
+        </p:nvSpPr>
+        <p:spPr>
+          <a:xfrm>
+            <a:off x="6172200" y="3127248"/>
+            <a:ext cx="2377440" cy="228600"/>
+          </a:xfrm>
+          <a:prstGeom prst="rect">
+            <a:avLst/>
+          </a:prstGeom>
+          <a:noFill/>
+          <a:ln/>
+        </p:spPr>
+        <p:txBody>
+          <a:bodyPr wrap="square" lIns="0" tIns="0" rIns="0" bIns="0" rtlCol="0" anchor="ctr"/>
+          <a:lstStyle/>
+          <a:p>
+            <a:pPr indent="0" marL="0">
+              <a:buNone/>
+            </a:pPr>
+            <a:r>
+              <a:rPr lang="en-US" sz="850" b="1" spc="200" kern="0" dirty="0">
+                <a:solidFill>
+                  <a:schemeClr val="accent1"/>
+                </a:solidFill>
+              </a:rPr>
+              <a:t>GROWS AHEAD OF PLAYERS</a:t>
+            </a:r>
+            <a:endParaRPr lang="en-US" sz="850" dirty="0"/>
+          </a:p>
+        </p:txBody>
+      </p:sp>
+      <p:sp>
+        <p:nvSpPr>
+          <p:cNvPr id="50" name="lower card bullets 3"/>
+          <p:cNvSpPr txBox="1"/>
+          <p:nvPr/>
+        </p:nvSpPr>
+        <p:spPr>
+          <a:xfrm>
+            <a:off x="6172200" y="3364992"/>
+            <a:ext cx="2377440" cy="1234440"/>
+          </a:xfrm>
+          <a:prstGeom prst="rect">
+            <a:avLst/>
+          </a:prstGeom>
+          <a:noFill/>
+          <a:ln/>
+        </p:spPr>
+        <p:txBody>
+          <a:bodyPr wrap="square" lIns="0" tIns="0" rIns="0" bIns="0" rtlCol="0" anchor="t"/>
+          <a:lstStyle/>
+          <a:p>
+            <a:pPr marL="152400" indent="-152400">
+              <a:spcAft>
+                <a:spcPts val="500"/>
+              </a:spcAft>
+              <a:buSzPct val="100000"/>
+              <a:buChar char="•"/>
+            </a:pPr>
+            <a:r>
+              <a:rPr lang="en-US" sz="850" dirty="0">
+                <a:solidFill>
+                  <a:schemeClr val="tx1"/>
+                </a:solidFill>
+              </a:rPr>
+              <a:t>Frontier trigger: a player within 4 m of a rim with no crossing beyond; at least 12 s between extensions.</a:t>
+            </a:r>
+            <a:endParaRPr lang="en-US" sz="850" dirty="0"/>
+          </a:p>
+          <a:p>
+            <a:pPr marL="152400" indent="-152400">
+              <a:spcAft>
+                <a:spcPts val="500"/>
+              </a:spcAft>
+              <a:buSzPct val="100000"/>
+              <a:buChar char="•"/>
+            </a:pPr>
+            <a:r>
+              <a:rPr lang="en-US" sz="850" dirty="0">
+                <a:solidFill>
+                  <a:schemeClr val="tx1"/>
+                </a:solidFill>
+              </a:rPr>
+              <a:t>Beetle opens the request itself (marked auto); the agent answers with add_island, 1 to 2 islands, each bridged from an anchor.</a:t>
+            </a:r>
+            <a:endParaRPr lang="en-US" sz="850" dirty="0"/>
+          </a:p>
+          <a:p>
+            <a:pPr marL="152400" indent="-152400">
+              <a:spcAft>
+                <a:spcPts val="500"/>
+              </a:spcAft>
+              <a:buSzPct val="100000"/>
+              <a:buChar char="•"/>
+            </a:pPr>
+            <a:r>
+              <a:rPr lang="en-US" sz="850" dirty="0">
+                <a:solidFill>
+                  <a:schemeClr val="tx1"/>
+                </a:solidFill>
+              </a:rPr>
+              <a:t>Same validator and commit. Stops at 24 islands, 48 bridges; director toggle.</a:t>
+            </a:r>
+            <a:endParaRPr lang="en-US" sz="850" dirty="0"/>
           </a:p>
         </p:txBody>
       </p:sp>
@@ -9275,7 +9550,7 @@
                   <a:schemeClr val="accent1"/>
                 </a:solidFill>
               </a:rPr>
-              <a:t>0.48 ms RTT, 18.8 ms tick</a:t>
+              <a:t>0.56 ms RTT, 0.80 ms tick</a:t>
             </a:r>
             <a:endParaRPr lang="en-US" sz="1100" dirty="0"/>
           </a:p>
@@ -9311,7 +9586,7 @@
                   <a:schemeClr val="tx2"/>
                 </a:solidFill>
               </a:rPr>
-              <a:t>p50, scripted controllers (p95 0.81 and 33.1 ms; LATENCY.md). Not input to photon: no phone, Wi-Fi, browser or display.</a:t>
+              <a:t>p50 idle, scripted controllers (p95 1.01 and 1.10 ms; under 2 x 30 inputs/s tick p95 50.2 ms; LATENCY.md 20:10Z). Not input to photon.</a:t>
             </a:r>
             <a:endParaRPr lang="en-US" sz="680" dirty="0"/>
           </a:p>
@@ -9589,14 +9864,14 @@
       </p:sp>
       <p:sp>
         <p:nvSpPr>
-          <p:cNvPr id="63" name="sources note"/>
+          <p:cNvPr id="63" name="streaming status"/>
           <p:cNvSpPr txBox="1"/>
           <p:nvPr/>
         </p:nvSpPr>
         <p:spPr>
           <a:xfrm>
-            <a:off x="457200" y="4261104"/>
-            <a:ext cx="8229600" cy="420624"/>
+            <a:off x="457200" y="4206240"/>
+            <a:ext cx="8229600" cy="274320"/>
           </a:xfrm>
           <a:prstGeom prst="rect">
             <a:avLst/>
@@ -9612,14 +9887,50 @@
               <a:buNone/>
             </a:pPr>
             <a:r>
-              <a:rPr lang="en-US" sz="800" i="1" dirty="0">
+              <a:rPr lang="en-US" sz="800" b="1" dirty="0">
+                <a:solidFill>
+                  <a:schemeClr val="accent1"/>
+                </a:solidFill>
+              </a:rPr>
+              <a:t>Streaming generation: implemented. One live run: extension committed 9.5 s after the frontier trigger, player preserved (RESULTS.md 15:16 CDT, direct, quiet GPU). Acceptance numbers to follow.</a:t>
+            </a:r>
+            <a:endParaRPr lang="en-US" sz="800" dirty="0"/>
+          </a:p>
+        </p:txBody>
+      </p:sp>
+      <p:sp>
+        <p:nvSpPr>
+          <p:cNvPr id="64" name="sources note"/>
+          <p:cNvSpPr txBox="1"/>
+          <p:nvPr/>
+        </p:nvSpPr>
+        <p:spPr>
+          <a:xfrm>
+            <a:off x="457200" y="4498848"/>
+            <a:ext cx="8229600" cy="237744"/>
+          </a:xfrm>
+          <a:prstGeom prst="rect">
+            <a:avLst/>
+          </a:prstGeom>
+          <a:noFill/>
+          <a:ln/>
+        </p:spPr>
+        <p:txBody>
+          <a:bodyPr wrap="square" lIns="0" tIns="0" rIns="0" bIns="0" rtlCol="0" anchor="ctr"/>
+          <a:lstStyle/>
+          <a:p>
+            <a:pPr indent="0" marL="0">
+              <a:buNone/>
+            </a:pPr>
+            <a:r>
+              <a:rPr lang="en-US" sz="700" i="1" dirty="0">
                 <a:solidFill>
                   <a:schemeClr val="tx2"/>
                 </a:solidFill>
               </a:rPr>
               <a:t>Direct-harness timings are labelled [direct] in every report; OpenClaw timings are from the real server after the Ollama daemon restart at 13:43 CDT. Each card names its GPU state because the daemon was shared for most of the day. Mode briefs were measured at 14:25 to 14:42 CDT in direct mode with no controllers connected (docs/RESULTS.md).</a:t>
             </a:r>
-            <a:endParaRPr lang="en-US" sz="800" dirty="0"/>
+            <a:endParaRPr lang="en-US" sz="700" dirty="0"/>
           </a:p>
         </p:txBody>
       </p:sp>

--- a/docs/pitch/Beetle-pitch.pptx
+++ b/docs/pitch/Beetle-pitch.pptx
@@ -112,7 +112,7 @@
   <p:extLst>
     <p:ext uri="{521415D9-36F7-43E2-AB2F-B90AF26B5E84}">
       <p14:sectionLst xmlns:p14="http://schemas.microsoft.com/office/powerpoint/2010/main">
-        <p14:section name="Beetle pitch" id="{7efa93a3-c713-133a-0a0f-69940126bcf4}">
+        <p14:section name="Beetle pitch" id="{1a24690c-802f-7b5c-bc4e-7519a5cbf1b5}">
           <p14:sldIdLst>
             <p14:sldId id="256"/>
             <p14:sldId id="257"/>
@@ -614,7 +614,7 @@
           <a:p>
             <a:r>
               <a:rPr lang="en-US" dirty="0"/>
-              <a:t>Walk the five steps: any request, mapped to the closest mode and biome and named; the world starts where the players are (the brief builds the zone around the spawn); it grows as they move, every extension a small patch validated before it lands; then keep changing it while they play. Read two rows of the mode table, not all five. Say plainly: the library is bounded and growing; the model never writes rules, it picks from the engine. Streaming was measured once: an automatic extension (two islands) committed 9.5 s after the frontier trigger with the player preserved (docs/RESULTS.md 15:16 CDT, direct, quiet GPU). Say 'measured once'; the spawn-zone brief time is not measured. Mode briefs measured 14:25 to 14:42 CDT, 18 of 18 sensible modes (slide 5).</a:t>
+              <a:t>Walk the five steps: any request, mapped to the closest mode and biome and named; the world starts where the players are (the brief builds the zone around the spawn); it grows as they move, every extension a small patch validated before it lands; then keep changing it while they play. Read two rows of the mode table, not all five. Say plainly: the library is bounded and growing; the model never writes rules, it picks from the engine. Streaming is measured: in the acceptance runs (contended GPU) 4 of 6 automatic extensions committed in 10.6 to 65.9 s, and one quiet-GPU run committed in 9.5 s (slide 5). The spawn-zone brief time is not measured. Mode briefs measured 14:25 to 14:42 CDT, 18 of 18 sensible modes (slide 5).</a:t>
             </a:r>
             <a:endParaRPr lang="en-US" dirty="0"/>
           </a:p>
@@ -702,7 +702,7 @@
           <a:p>
             <a:r>
               <a:rPr lang="en-US" dirty="0"/>
-              <a:t>Play the recording here. Captions follow docs/STORYBOARD.md; the mode caption is set to whichever agent mode was green at recording time. Rehearsal timings: brief 14 s on a quiet GPU, edits 2 to 14 s, DISCONNECTED_GOAL refused and repaired in 3.0 s. Shots that cannot be produced honestly are cut, not faked. Optional shot 'the world grows' (docs/STORYBOARD.md 6c): a player walks toward an edge, 'Beetle is building ahead' appears and the new island assembles; one live run committed an extension 9.5 s after the trigger (docs/RESULTS.md 15:16 CDT), not yet rehearsed on camera, so it is shown only from a real take, never compressed without a label.</a:t>
+              <a:t>Play the recording here. Captions follow docs/STORYBOARD.md; the mode caption is set to whichever agent mode was green at recording time. Rehearsal timings: brief 14 s on a quiet GPU, edits 2 to 14 s, DISCONNECTED_GOAL refused and repaired in 3.0 s. Shots that cannot be produced honestly are cut, not faked. Optional shot 'the world grows' (docs/STORYBOARD.md 6c): a player walks toward an edge, 'Beetle is building ahead' appears and the new island assembles; measured 10.6 to 65.9 s request to commit on a contended GPU (docs/ACCEPTANCE.md) and 9.5 s once on a quiet GPU (docs/RESULTS.md), not yet rehearsed on camera, so it is shown only from a real take, never compressed without a label.</a:t>
             </a:r>
             <a:endParaRPr lang="en-US" dirty="0"/>
           </a:p>
@@ -878,7 +878,7 @@
           <a:p>
             <a:r>
               <a:rPr lang="en-US" dirty="0"/>
-              <a:t>Read the cards. Say out loud: the 10 s brief target is not met; a valid brief takes 24 to 28 s warm on a quiet GPU, 14 s was seen once after normalization, 33.4 s through OpenClaw. Edits commit in 2 to 14 s, and 8.0 s with two players moving and nothing reset. Game modes from one prompt: the mode was sensible on 18 of 18 briefs and the exact mode was missed twice; committed mode briefs took 13 to 44 s and the failures were geometry, never the mode rule; mode and biome edits on a running world took 3.0 s. Phones and the offline proof are covered by tests or procedure but not yet measured live. Streaming generation is implemented and was measured once live: extension committed 9.5 s after the frontier trigger, player preserved (docs/RESULTS.md 15:16 CDT); say 'one run, acceptance numbers to follow'. No spawn-zone build time is quoted. The 27b was never benchmarked.</a:t>
+              <a:t>Read the cards. Say out loud: the 10 s brief target is not met; a valid brief takes 24 to 28 s warm on a quiet GPU, 14 s was seen once after normalization, 33.4 s through OpenClaw. Edits commit in 2 to 14 s, and 8.0 s with two players moving and nothing reset. Game modes from one prompt: the mode was sensible on 18 of 18 briefs and the exact mode was missed twice; committed mode briefs took 13 to 44 s and the failures were geometry, never the mode rule; mode and biome edits on a running world took 3.0 s. Phones and the offline proof are covered by tests or procedure but not yet measured live. Streaming: the frontier trigger opens the request within 0.3 s; the model is the slow part. Acceptance runs on a contended GPU: 4 of 6 extensions committed in 10.6 to 65.9 s, one failed schema validation, one hit the 80 s model timeout, and each failure left the world untouched; run 3 passed 21 of 21 with player, relic and score kept and the player walking onto both new islands. Quiet GPU, once: 9.5 s. No spawn-zone build time is quoted. The 27b was never benchmarked.</a:t>
             </a:r>
             <a:endParaRPr lang="en-US" dirty="0"/>
           </a:p>
@@ -9550,7 +9550,7 @@
                   <a:schemeClr val="accent1"/>
                 </a:solidFill>
               </a:rPr>
-              <a:t>0.56 ms RTT, 0.80 ms tick</a:t>
+              <a:t>0.46 ms RTT, 0.78 ms tick</a:t>
             </a:r>
             <a:endParaRPr lang="en-US" sz="1100" dirty="0"/>
           </a:p>
@@ -9586,7 +9586,7 @@
                   <a:schemeClr val="tx2"/>
                 </a:solidFill>
               </a:rPr>
-              <a:t>p50 idle, scripted controllers (p95 1.01 and 1.10 ms; under 2 x 30 inputs/s tick p95 50.2 ms; LATENCY.md 20:10Z). Not input to photon.</a:t>
+              <a:t>p50 idle, scripted controllers (p95 0.74 and 1.15 ms; under 2 x 30 inputs/s tick p95 12.3 ms; LATENCY.md 20:26Z). Not input to photon.</a:t>
             </a:r>
             <a:endParaRPr lang="en-US" sz="680" dirty="0"/>
           </a:p>
@@ -9892,7 +9892,7 @@
                   <a:schemeClr val="accent1"/>
                 </a:solidFill>
               </a:rPr>
-              <a:t>Streaming generation: implemented. One live run: extension committed 9.5 s after the frontier trigger, player preserved (RESULTS.md 15:16 CDT, direct, quiet GPU). Acceptance numbers to follow.</a:t>
+              <a:t>Streaming, extension request to commit: 10.6 to 65.9 s, 4 of 6 committed, GPU contended (ACCEPTANCE.md, run 3 PASS 21 of 21: 56.0 s and 10.6 s); 9.5 s once on a quiet GPU (RESULTS.md). Trigger to request under 0.3 s; player, relic and score kept.</a:t>
             </a:r>
             <a:endParaRPr lang="en-US" sz="800" dirty="0"/>
           </a:p>

--- a/docs/pitch/Beetle-pitch.pptx
+++ b/docs/pitch/Beetle-pitch.pptx
@@ -112,7 +112,7 @@
   <p:extLst>
     <p:ext uri="{521415D9-36F7-43E2-AB2F-B90AF26B5E84}">
       <p14:sectionLst xmlns:p14="http://schemas.microsoft.com/office/powerpoint/2010/main">
-        <p14:section name="Beetle pitch" id="{1a24690c-802f-7b5c-bc4e-7519a5cbf1b5}">
+        <p14:section name="Beetle pitch" id="{c123f19b-b94d-3c1b-f6ea-2ec397ecb771}">
           <p14:sldIdLst>
             <p14:sldId id="256"/>
             <p14:sldId id="257"/>
@@ -614,7 +614,7 @@
           <a:p>
             <a:r>
               <a:rPr lang="en-US" dirty="0"/>
-              <a:t>Walk the five steps: any request, mapped to the closest mode and biome and named; the world starts where the players are (the brief builds the zone around the spawn); it grows as they move, every extension a small patch validated before it lands; then keep changing it while they play. Read two rows of the mode table, not all five. Say plainly: the library is bounded and growing; the model never writes rules, it picks from the engine. Streaming is measured: in the acceptance runs (contended GPU) 4 of 6 automatic extensions committed in 10.6 to 65.9 s, and one quiet-GPU run committed in 9.5 s (slide 5). The spawn-zone brief time is not measured. Mode briefs measured 14:25 to 14:42 CDT, 18 of 18 sensible modes (slide 5).</a:t>
+              <a:t>One product, two engines. Walk the five steps: describe any game; Beetle maps it to a 2D genre or a 3D mode and biome and names the choice; it is playable at once (in 3D the world starts where the players are and grows as they move, in 2D the studio makes sprites, tiles, sound and music for the game); game code checks every spec and patch before it lands; then keep changing it in plain words. Left card: the 3D pipeline, measured all day (slide 5). Right card: the 2D studio at /2d, same local model through the server's loopback endpoint, single-file HTML export. Say plainly: the 3D numbers are measured all day; the 2D number is one run of six prompts (slide 5): every prompt reached a validated, bot-playtested spec on the first model call in 10.7 to 16.9 s, in a Node harness against the local model, without asset painting or the browser. Streaming is measured: in the acceptance runs (contended GPU) 4 of 6 automatic extensions committed in 10.6 to 65.9 s, and one quiet-GPU run committed in 9.5 s. Mode briefs measured 14:25 to 14:42 CDT, 18 of 18 sensible modes.</a:t>
             </a:r>
             <a:endParaRPr lang="en-US" dirty="0"/>
           </a:p>
@@ -702,7 +702,7 @@
           <a:p>
             <a:r>
               <a:rPr lang="en-US" dirty="0"/>
-              <a:t>Play the recording here. Captions follow docs/STORYBOARD.md; the mode caption is set to whichever agent mode was green at recording time. Rehearsal timings: brief 14 s on a quiet GPU, edits 2 to 14 s, DISCONNECTED_GOAL refused and repaired in 3.0 s. Shots that cannot be produced honestly are cut, not faked. Optional shot 'the world grows' (docs/STORYBOARD.md 6c): a player walks toward an edge, 'Beetle is building ahead' appears and the new island assembles; measured 10.6 to 65.9 s request to commit on a contended GPU (docs/ACCEPTANCE.md) and 9.5 s once on a quiet GPU (docs/RESULTS.md), not yet rehearsed on camera, so it is shown only from a real take, never compressed without a label.</a:t>
+              <a:t>Play the recording here. Captions follow docs/STORYBOARD.md; the mode caption is set to whichever agent mode was green at recording time. Rehearsal timings: brief 14 s on a quiet GPU, edits 2 to 14 s, DISCONNECTED_GOAL refused and repaired in 3.0 s. Shots that cannot be produced honestly are cut, not faked. Optional shot 'the world grows' (docs/STORYBOARD.md 6c): a player walks toward an edge, 'Beetle is building ahead' appears and the new island assembles; measured 10.6 to 65.9 s request to commit on a contended GPU (docs/ACCEPTANCE.md) and 9.5 s once on a quiet GPU (docs/RESULTS.md), not yet rehearsed on camera, so it is shown only from a real take, never compressed without a label. Optional shot 'the 2D studio' (docs/STORYBOARD.md 6d): an idea typed at /2d becomes a playable pixel game with its own sprites, tiles, sound and music, one edit in plain words, then the single-file HTML export; shown only from a real take, with the take's own time on screen; measured 10.7 to 16.9 s prompt to validated spec in a Node harness (docs/RESULTS.md 16:04 CDT), not on camera.</a:t>
             </a:r>
             <a:endParaRPr lang="en-US" dirty="0"/>
           </a:p>
@@ -790,7 +790,7 @@
           <a:p>
             <a:r>
               <a:rPr lang="en-US" dirty="0"/>
-              <a:t>Left to right: director or the frontier trigger, OpenClaw agent, the mapping step (closest mode and biome, parameters from the brief, named in the summary), Beetle tools, server validator and commit, players. Streaming uses the same path: when a player walks within 4 m of an island rim with no crossing beyond, Beetle opens an extension request itself, the agent proposes add_island (1 to 2 islands, each bridged from an anchor), and the same validator decides; growth stops at 24 islands and 48 bridges, and the director can switch it off. Structured output means only a listed mode, a listed biome and in-range parameters can come out of the model. Only the server decides validity; the model only proposes JSON.</a:t>
+              <a:t>Two engines, one local model, one validation discipline. Top row, 3D: director or the frontier trigger, OpenClaw agent, the mapping step (closest mode and biome, named in the summary), Beetle tools, server validator and commit, players. Validation issues including MODE_INVALID go back for repair, at most 2 attempts, then the request fails honestly and the world is untouched. Streaming uses the same path: add_island, 1 to 2 islands, the same validator; growth stops at 24 islands and 48 bridges and the director can switch it off. Second row, 2D: the idea becomes a design doc written by the same local model through a schema, then a Game Spec with procedural pixel sprites, tiles, sound and music; the spec is validated by game code and either repaired or refused with the exact list of what could not be fixed; then play, edit in words and export a single-file HTML game. Same rule in both engines: the model proposes JSON, game code decides.</a:t>
             </a:r>
             <a:endParaRPr lang="en-US" dirty="0"/>
           </a:p>
@@ -878,7 +878,7 @@
           <a:p>
             <a:r>
               <a:rPr lang="en-US" dirty="0"/>
-              <a:t>Read the cards. Say out loud: the 10 s brief target is not met; a valid brief takes 24 to 28 s warm on a quiet GPU, 14 s was seen once after normalization, 33.4 s through OpenClaw. Edits commit in 2 to 14 s, and 8.0 s with two players moving and nothing reset. Game modes from one prompt: the mode was sensible on 18 of 18 briefs and the exact mode was missed twice; committed mode briefs took 13 to 44 s and the failures were geometry, never the mode rule; mode and biome edits on a running world took 3.0 s. Phones and the offline proof are covered by tests or procedure but not yet measured live. Streaming: the frontier trigger opens the request within 0.3 s; the model is the slow part. Acceptance runs on a contended GPU: 4 of 6 extensions committed in 10.6 to 65.9 s, one failed schema validation, one hit the 80 s model timeout, and each failure left the world untouched; run 3 passed 21 of 21 with player, relic and score kept and the player walking onto both new islands. Quiet GPU, once: 9.5 s. No spawn-zone build time is quoted. The 27b was never benchmarked.</a:t>
+              <a:t>Read the cards. Say out loud: the 10 s brief target is not met; a valid brief takes 24 to 28 s warm on a quiet GPU, 14 s was seen once after normalization, 33.4 s through OpenClaw. Edits commit in 2 to 14 s, and 8.0 s with two players moving and nothing reset. Game modes from one prompt: the mode was sensible on 18 of 18 briefs and the exact mode was missed twice; committed mode briefs took 13 to 44 s and the failures were geometry, never the mode rule; mode and biome edits on a running world took 3.0 s. Phones and the offline proof are covered by tests or procedure but not yet measured live. Streaming: the frontier trigger opens the request within 0.3 s; the model is the slow part. Acceptance runs on a contended GPU: 4 of 6 extensions committed in 10.6 to 65.9 s, one failed schema validation, one hit the 80 s model timeout, and each failure left the world untouched; run 3 passed 21 of 21 with player, relic and score kept and the player walking onto both new islands. Quiet GPU, once: 9.5 s. No spawn-zone build time is quoted. The 27b was never benchmarked. Every card is the 3D engine. Beetle 2D, one run of six prompts at 16:04 to 16:06 CDT on a possibly shared GPU: all six reached a validated spec on the first model call with zero repairs, model 10.3 to 12.7 s, prompt to validated and bot-playtested spec 10.7 to 16.9 s; genres chosen platformer, top-down, defense, puzzle, runner and arena. Say what it excludes: the Web Worker hop, procedural asset painting, generated art and the browser; 2D edits in words and the HTML export are not timed.</a:t>
             </a:r>
             <a:endParaRPr lang="en-US" dirty="0"/>
           </a:p>
@@ -2610,12 +2610,12 @@
               <a:buNone/>
             </a:pPr>
             <a:r>
-              <a:rPr lang="en-US" sz="2600" b="1" dirty="0">
+              <a:rPr lang="en-US" sz="1900" b="1" dirty="0">
                 <a:solidFill>
                   <a:schemeClr val="tx1"/>
                 </a:solidFill>
               </a:rPr>
-              <a:t>Any game, one prompt, then keep changing it while they play</a:t>
+              <a:t>Describe any game: Beetle builds it in 2D or 3D, then keeps changing it while people play</a:t>
             </a:r>
             <a:endParaRPr lang="en-US" sz="2600" dirty="0"/>
           </a:p>
@@ -3007,7 +3007,7 @@
         <p:spPr>
           <a:xfrm>
             <a:off x="228600" y="1600200"/>
-            <a:ext cx="1645920" cy="685800"/>
+            <a:ext cx="1645920" cy="713232"/>
           </a:xfrm>
           <a:prstGeom prst="rect">
             <a:avLst/>
@@ -3031,7 +3031,7 @@
                   <a:schemeClr val="tx1"/>
                 </a:solidFill>
               </a:rPr>
-              <a:t>Any game request</a:t>
+              <a:t>Describe any game</a:t>
             </a:r>
             <a:endParaRPr lang="en-US" sz="1100" dirty="0"/>
           </a:p>
@@ -3040,12 +3040,12 @@
               <a:buNone/>
             </a:pPr>
             <a:r>
-              <a:rPr lang="en-US" sz="900" dirty="0">
+              <a:rPr lang="en-US" sz="850" dirty="0">
                 <a:solidFill>
                   <a:schemeClr val="tx2"/>
                 </a:solidFill>
               </a:rPr>
-              <a:t>"king of the hill on a frozen arena, hold ten seconds"</a:t>
+              <a:t>"hold the frozen hill ten seconds" or "a tower defense where bees protect a hive"</a:t>
             </a:r>
             <a:endParaRPr lang="en-US" sz="1100" dirty="0"/>
           </a:p>
@@ -3121,7 +3121,7 @@
         <p:spPr>
           <a:xfrm>
             <a:off x="1988820" y="1600200"/>
-            <a:ext cx="1645920" cy="685800"/>
+            <a:ext cx="1645920" cy="713232"/>
           </a:xfrm>
           <a:prstGeom prst="rect">
             <a:avLst/>
@@ -3145,7 +3145,7 @@
                   <a:schemeClr val="tx1"/>
                 </a:solidFill>
               </a:rPr>
-              <a:t>Mapped to the closest mode and biome</a:t>
+              <a:t>2D or 3D, and named</a:t>
             </a:r>
             <a:endParaRPr lang="en-US" sz="1100" dirty="0"/>
           </a:p>
@@ -3154,12 +3154,12 @@
               <a:buNone/>
             </a:pPr>
             <a:r>
-              <a:rPr lang="en-US" sz="900" dirty="0">
+              <a:rPr lang="en-US" sz="850" dirty="0">
                 <a:solidFill>
                   <a:schemeClr val="tx2"/>
                 </a:solidFill>
               </a:rPr>
-              <a:t>the agent fills the parameters and says which it chose</a:t>
+              <a:t>mapped to a 2D genre or a 3D mode and biome; Beetle says which it chose</a:t>
             </a:r>
             <a:endParaRPr lang="en-US" sz="1100" dirty="0"/>
           </a:p>
@@ -3235,7 +3235,7 @@
         <p:spPr>
           <a:xfrm>
             <a:off x="3749040" y="1600200"/>
-            <a:ext cx="1645920" cy="685800"/>
+            <a:ext cx="1645920" cy="713232"/>
           </a:xfrm>
           <a:prstGeom prst="rect">
             <a:avLst/>
@@ -3259,7 +3259,7 @@
                   <a:schemeClr val="tx1"/>
                 </a:solidFill>
               </a:rPr>
-              <a:t>Starts where the players are</a:t>
+              <a:t>Playable at once</a:t>
             </a:r>
             <a:endParaRPr lang="en-US" sz="1100" dirty="0"/>
           </a:p>
@@ -3268,12 +3268,12 @@
               <a:buNone/>
             </a:pPr>
             <a:r>
-              <a:rPr lang="en-US" sz="900" dirty="0">
+              <a:rPr lang="en-US" sz="850" dirty="0">
                 <a:solidFill>
                   <a:schemeClr val="tx2"/>
                 </a:solidFill>
               </a:rPr>
-              <a:t>the brief builds the spawn zone</a:t>
+              <a:t>3D: the world starts where the players are. 2D: sprites, tiles, sound and music made for it</a:t>
             </a:r>
             <a:endParaRPr lang="en-US" sz="1100" dirty="0"/>
           </a:p>
@@ -3349,7 +3349,7 @@
         <p:spPr>
           <a:xfrm>
             <a:off x="5509260" y="1600200"/>
-            <a:ext cx="1645920" cy="685800"/>
+            <a:ext cx="1645920" cy="713232"/>
           </a:xfrm>
           <a:prstGeom prst="rect">
             <a:avLst/>
@@ -3373,7 +3373,7 @@
                   <a:schemeClr val="tx1"/>
                 </a:solidFill>
               </a:rPr>
-              <a:t>Grows as they move</a:t>
+              <a:t>Checked before it lands</a:t>
             </a:r>
             <a:endParaRPr lang="en-US" sz="1100" dirty="0"/>
           </a:p>
@@ -3382,12 +3382,12 @@
               <a:buNone/>
             </a:pPr>
             <a:r>
-              <a:rPr lang="en-US" sz="900" dirty="0">
+              <a:rPr lang="en-US" sz="850" dirty="0">
                 <a:solidFill>
                   <a:schemeClr val="tx2"/>
                 </a:solidFill>
               </a:rPr>
-              <a:t>every extension a small patch, validated before it lands</a:t>
+              <a:t>game code validates every spec and patch; the model only proposes JSON</a:t>
             </a:r>
             <a:endParaRPr lang="en-US" sz="1100" dirty="0"/>
           </a:p>
@@ -3463,7 +3463,7 @@
         <p:spPr>
           <a:xfrm>
             <a:off x="7269480" y="1600200"/>
-            <a:ext cx="1645920" cy="685800"/>
+            <a:ext cx="1645920" cy="713232"/>
           </a:xfrm>
           <a:prstGeom prst="rect">
             <a:avLst/>
@@ -3496,1873 +3496,362 @@
               <a:buNone/>
             </a:pPr>
             <a:r>
+              <a:rPr lang="en-US" sz="850" dirty="0">
+                <a:solidFill>
+                  <a:schemeClr val="tx2"/>
+                </a:solidFill>
+              </a:rPr>
+              <a:t>edits in plain words; in 3D they land while players move, no reset</a:t>
+            </a:r>
+            <a:endParaRPr lang="en-US" sz="1100" dirty="0"/>
+          </a:p>
+        </p:txBody>
+      </p:sp>
+      <p:sp>
+        <p:nvSpPr>
+          <p:cNvPr id="31" name="engine card 1"/>
+          <p:cNvSpPr/>
+          <p:nvPr/>
+        </p:nvSpPr>
+        <p:spPr>
+          <a:xfrm>
+            <a:off x="457200" y="2377440"/>
+            <a:ext cx="4041648" cy="1938528"/>
+          </a:xfrm>
+          <a:prstGeom prst="roundRect">
+            <a:avLst>
+              <a:gd name="adj" fmla="val 3774"/>
+            </a:avLst>
+          </a:prstGeom>
+          <a:solidFill>
+            <a:schemeClr val="bg2"/>
+          </a:solidFill>
+          <a:ln w="9525">
+            <a:solidFill>
+              <a:schemeClr val="accent4"/>
+            </a:solidFill>
+            <a:prstDash val="solid"/>
+          </a:ln>
+        </p:spPr>
+      </p:sp>
+      <p:sp>
+        <p:nvSpPr>
+          <p:cNvPr id="32" name="label 3D WORLDS (THE EXISTING PIPELINE)"/>
+          <p:cNvSpPr txBox="1"/>
+          <p:nvPr/>
+        </p:nvSpPr>
+        <p:spPr>
+          <a:xfrm>
+            <a:off x="594360" y="2468880"/>
+            <a:ext cx="3767328" cy="201168"/>
+          </a:xfrm>
+          <a:prstGeom prst="rect">
+            <a:avLst/>
+          </a:prstGeom>
+          <a:noFill/>
+          <a:ln/>
+        </p:spPr>
+        <p:txBody>
+          <a:bodyPr wrap="square" lIns="0" tIns="0" rIns="0" bIns="0" rtlCol="0" anchor="ctr"/>
+          <a:lstStyle/>
+          <a:p>
+            <a:pPr indent="0" marL="0">
+              <a:buNone/>
+            </a:pPr>
+            <a:r>
+              <a:rPr lang="en-US" sz="900" b="1" spc="200" kern="0" dirty="0">
+                <a:solidFill>
+                  <a:schemeClr val="accent1"/>
+                </a:solidFill>
+              </a:rPr>
+              <a:t>3D WORLDS (THE EXISTING PIPELINE)</a:t>
+            </a:r>
+            <a:endParaRPr lang="en-US" sz="900" dirty="0"/>
+          </a:p>
+        </p:txBody>
+      </p:sp>
+      <p:sp>
+        <p:nvSpPr>
+          <p:cNvPr id="33" name="engine card bullets 1"/>
+          <p:cNvSpPr txBox="1"/>
+          <p:nvPr/>
+        </p:nvSpPr>
+        <p:spPr>
+          <a:xfrm>
+            <a:off x="594360" y="2724912"/>
+            <a:ext cx="3767328" cy="1527048"/>
+          </a:xfrm>
+          <a:prstGeom prst="rect">
+            <a:avLst/>
+          </a:prstGeom>
+          <a:noFill/>
+          <a:ln/>
+        </p:spPr>
+        <p:txBody>
+          <a:bodyPr wrap="square" lIns="0" tIns="0" rIns="0" bIns="0" rtlCol="0" anchor="t"/>
+          <a:lstStyle/>
+          <a:p>
+            <a:pPr marL="152400" indent="-152400">
+              <a:spcAft>
+                <a:spcPts val="500"/>
+              </a:spcAft>
+              <a:buSzPct val="100000"/>
+              <a:buChar char="•"/>
+            </a:pPr>
+            <a:r>
               <a:rPr lang="en-US" sz="900" dirty="0">
                 <a:solidFill>
+                  <a:schemeClr val="tx1"/>
+                </a:solidFill>
+              </a:rPr>
+              <a:t>5 engine modes: relic_hunt, time_trial, king_of_the_hill, checkpoint_race, survival. The model picks one and fills its parameters; it never writes rules.</a:t>
+            </a:r>
+            <a:endParaRPr lang="en-US" sz="900" dirty="0"/>
+          </a:p>
+          <a:p>
+            <a:pPr marL="152400" indent="-152400">
+              <a:spcAft>
+                <a:spcPts val="500"/>
+              </a:spcAft>
+              <a:buSzPct val="100000"/>
+              <a:buChar char="•"/>
+            </a:pPr>
+            <a:r>
+              <a:rPr lang="en-US" sz="900" dirty="0">
+                <a:solidFill>
+                  <a:schemeClr val="tx1"/>
+                </a:solidFill>
+              </a:rPr>
+              <a:t>5 biomes, 2 terrains, water or lava, a rising hazard, 3 to 7 m/s, 11 decoration types.</a:t>
+            </a:r>
+            <a:endParaRPr lang="en-US" sz="900" dirty="0"/>
+          </a:p>
+          <a:p>
+            <a:pPr marL="152400" indent="-152400">
+              <a:spcAft>
+                <a:spcPts val="500"/>
+              </a:spcAft>
+              <a:buSzPct val="100000"/>
+              <a:buChar char="•"/>
+            </a:pPr>
+            <a:r>
+              <a:rPr lang="en-US" sz="900" dirty="0">
+                <a:solidFill>
+                  <a:schemeClr val="tx1"/>
+                </a:solidFill>
+              </a:rPr>
+              <a:t>Streams ahead of players near an edge, up to 24 islands and 48 bridges; the director can switch it off.</a:t>
+            </a:r>
+            <a:endParaRPr lang="en-US" sz="900" dirty="0"/>
+          </a:p>
+          <a:p>
+            <a:pPr marL="152400" indent="-152400">
+              <a:spcAft>
+                <a:spcPts val="500"/>
+              </a:spcAft>
+              <a:buSzPct val="100000"/>
+              <a:buChar char="•"/>
+            </a:pPr>
+            <a:r>
+              <a:rPr lang="en-US" sz="900" dirty="0">
+                <a:solidFill>
+                  <a:schemeClr val="tx1"/>
+                </a:solidFill>
+              </a:rPr>
+              <a:t>Live validated edits (set_mode, set_biome, set_movement, structural ops), each a new version. Phones are the controllers.</a:t>
+            </a:r>
+            <a:endParaRPr lang="en-US" sz="900" dirty="0"/>
+          </a:p>
+        </p:txBody>
+      </p:sp>
+      <p:sp>
+        <p:nvSpPr>
+          <p:cNvPr id="34" name="engine card 2"/>
+          <p:cNvSpPr/>
+          <p:nvPr/>
+        </p:nvSpPr>
+        <p:spPr>
+          <a:xfrm>
+            <a:off x="4645152" y="2377440"/>
+            <a:ext cx="4041648" cy="1938528"/>
+          </a:xfrm>
+          <a:prstGeom prst="roundRect">
+            <a:avLst>
+              <a:gd name="adj" fmla="val 3774"/>
+            </a:avLst>
+          </a:prstGeom>
+          <a:solidFill>
+            <a:schemeClr val="bg2"/>
+          </a:solidFill>
+          <a:ln w="9525">
+            <a:solidFill>
+              <a:schemeClr val="accent4"/>
+            </a:solidFill>
+            <a:prstDash val="solid"/>
+          </a:ln>
+        </p:spPr>
+      </p:sp>
+      <p:sp>
+        <p:nvSpPr>
+          <p:cNvPr id="35" name="label BEETLE 2D STUDIO (/2d)"/>
+          <p:cNvSpPr txBox="1"/>
+          <p:nvPr/>
+        </p:nvSpPr>
+        <p:spPr>
+          <a:xfrm>
+            <a:off x="4782312" y="2468880"/>
+            <a:ext cx="3767328" cy="201168"/>
+          </a:xfrm>
+          <a:prstGeom prst="rect">
+            <a:avLst/>
+          </a:prstGeom>
+          <a:noFill/>
+          <a:ln/>
+        </p:spPr>
+        <p:txBody>
+          <a:bodyPr wrap="square" lIns="0" tIns="0" rIns="0" bIns="0" rtlCol="0" anchor="ctr"/>
+          <a:lstStyle/>
+          <a:p>
+            <a:pPr indent="0" marL="0">
+              <a:buNone/>
+            </a:pPr>
+            <a:r>
+              <a:rPr lang="en-US" sz="900" b="1" spc="200" kern="0" dirty="0">
+                <a:solidFill>
+                  <a:schemeClr val="accent1"/>
+                </a:solidFill>
+              </a:rPr>
+              <a:t>BEETLE 2D STUDIO (/2d)</a:t>
+            </a:r>
+            <a:endParaRPr lang="en-US" sz="900" dirty="0"/>
+          </a:p>
+        </p:txBody>
+      </p:sp>
+      <p:sp>
+        <p:nvSpPr>
+          <p:cNvPr id="36" name="engine card bullets 2"/>
+          <p:cNvSpPr txBox="1"/>
+          <p:nvPr/>
+        </p:nvSpPr>
+        <p:spPr>
+          <a:xfrm>
+            <a:off x="4782312" y="2724912"/>
+            <a:ext cx="3767328" cy="1527048"/>
+          </a:xfrm>
+          <a:prstGeom prst="rect">
+            <a:avLst/>
+          </a:prstGeom>
+          <a:noFill/>
+          <a:ln/>
+        </p:spPr>
+        <p:txBody>
+          <a:bodyPr wrap="square" lIns="0" tIns="0" rIns="0" bIns="0" rtlCol="0" anchor="t"/>
+          <a:lstStyle/>
+          <a:p>
+            <a:pPr marL="152400" indent="-152400">
+              <a:spcAft>
+                <a:spcPts val="500"/>
+              </a:spcAft>
+              <a:buSzPct val="100000"/>
+              <a:buChar char="•"/>
+            </a:pPr>
+            <a:r>
+              <a:rPr lang="en-US" sz="900" dirty="0">
+                <a:solidFill>
+                  <a:schemeClr val="tx1"/>
+                </a:solidFill>
+              </a:rPr>
+              <a:t>Platformer, top-down, puzzle, defense, runner, arena and other level-based games, generated by the same local model through the server's loopback endpoint.</a:t>
+            </a:r>
+            <a:endParaRPr lang="en-US" sz="900" dirty="0"/>
+          </a:p>
+          <a:p>
+            <a:pPr marL="152400" indent="-152400">
+              <a:spcAft>
+                <a:spcPts val="500"/>
+              </a:spcAft>
+              <a:buSzPct val="100000"/>
+              <a:buChar char="•"/>
+            </a:pPr>
+            <a:r>
+              <a:rPr lang="en-US" sz="900" dirty="0">
+                <a:solidFill>
+                  <a:schemeClr val="tx1"/>
+                </a:solidFill>
+              </a:rPr>
+              <a:t>Procedural pixel sprites, tiles, sound and music, made for the game; no asset pack needed.</a:t>
+            </a:r>
+            <a:endParaRPr lang="en-US" sz="900" dirty="0"/>
+          </a:p>
+          <a:p>
+            <a:pPr marL="152400" indent="-152400">
+              <a:spcAft>
+                <a:spcPts val="500"/>
+              </a:spcAft>
+              <a:buSzPct val="100000"/>
+              <a:buChar char="•"/>
+            </a:pPr>
+            <a:r>
+              <a:rPr lang="en-US" sz="900" dirty="0">
+                <a:solidFill>
+                  <a:schemeClr val="tx1"/>
+                </a:solidFill>
+              </a:rPr>
+              <a:t>Edits in plain words: known requests are patched directly, the rest are proposed by the model as patch ops.</a:t>
+            </a:r>
+            <a:endParaRPr lang="en-US" sz="900" dirty="0"/>
+          </a:p>
+          <a:p>
+            <a:pPr marL="152400" indent="-152400">
+              <a:spcAft>
+                <a:spcPts val="500"/>
+              </a:spcAft>
+              <a:buSzPct val="100000"/>
+              <a:buChar char="•"/>
+            </a:pPr>
+            <a:r>
+              <a:rPr lang="en-US" sz="900" dirty="0">
+                <a:solidFill>
+                  <a:schemeClr val="tx1"/>
+                </a:solidFill>
+              </a:rPr>
+              <a:t>The Game Spec is validated by game code and repaired or refused with the exact list. Export as a single-file HTML game.</a:t>
+            </a:r>
+            <a:endParaRPr lang="en-US" sz="900" dirty="0"/>
+          </a:p>
+        </p:txBody>
+      </p:sp>
+      <p:sp>
+        <p:nvSpPr>
+          <p:cNvPr id="37" name="category note"/>
+          <p:cNvSpPr txBox="1"/>
+          <p:nvPr/>
+        </p:nvSpPr>
+        <p:spPr>
+          <a:xfrm>
+            <a:off x="457200" y="4389120"/>
+            <a:ext cx="8229600" cy="329184"/>
+          </a:xfrm>
+          <a:prstGeom prst="rect">
+            <a:avLst/>
+          </a:prstGeom>
+          <a:noFill/>
+          <a:ln/>
+        </p:spPr>
+        <p:txBody>
+          <a:bodyPr wrap="square" lIns="0" tIns="0" rIns="0" bIns="0" rtlCol="0" anchor="ctr"/>
+          <a:lstStyle/>
+          <a:p>
+            <a:pPr indent="0" marL="0">
+              <a:buNone/>
+            </a:pPr>
+            <a:r>
+              <a:rPr lang="en-US" sz="750" i="1" dirty="0">
+                <a:solidFill>
                   <a:schemeClr val="tx2"/>
                 </a:solidFill>
               </a:rPr>
-              <a:t>mode, biome, speed, bridges, hazard; no reset</a:t>
-            </a:r>
-            <a:endParaRPr lang="en-US" sz="1100" dirty="0"/>
-          </a:p>
-        </p:txBody>
-      </p:sp>
-      <p:sp>
-        <p:nvSpPr>
-          <p:cNvPr id="31" name="label MODE LIBRARY (ENGINE MECHANICS, NOT MODEL-WRITTEN RULES)"/>
-          <p:cNvSpPr txBox="1"/>
-          <p:nvPr/>
-        </p:nvSpPr>
-        <p:spPr>
-          <a:xfrm>
-            <a:off x="457200" y="2258568"/>
-            <a:ext cx="5943600" cy="182880"/>
-          </a:xfrm>
-          <a:prstGeom prst="rect">
-            <a:avLst/>
-          </a:prstGeom>
-          <a:noFill/>
-          <a:ln/>
-        </p:spPr>
-        <p:txBody>
-          <a:bodyPr wrap="square" lIns="0" tIns="0" rIns="0" bIns="0" rtlCol="0" anchor="ctr"/>
-          <a:lstStyle/>
-          <a:p>
-            <a:pPr indent="0" marL="0">
-              <a:buNone/>
-            </a:pPr>
-            <a:r>
-              <a:rPr lang="en-US" sz="900" b="1" spc="200" kern="0" dirty="0">
-                <a:solidFill>
-                  <a:schemeClr val="accent1"/>
-                </a:solidFill>
-              </a:rPr>
-              <a:t>MODE LIBRARY (ENGINE MECHANICS, NOT MODEL-WRITTEN RULES)</a:t>
-            </a:r>
-            <a:endParaRPr lang="en-US" sz="900" dirty="0"/>
-          </a:p>
-        </p:txBody>
-      </p:sp>
-      <p:graphicFrame>
-        <p:nvGraphicFramePr>
-          <p:cNvPr id="3" name="mode library table"/>
-          <p:cNvGraphicFramePr>
-            <a:graphicFrameLocks noGrp="1"/>
-          </p:cNvGraphicFramePr>
-          <p:nvPr>
-            <p:extLst>
-              <p:ext uri="{D42A27DB-BD31-4B8C-83A1-F6EECF244321}">
-                <p14:modId xmlns:p14="http://schemas.microsoft.com/office/powerpoint/2010/main" val="1579011935"/>
-              </p:ext>
-            </p:extLst>
-          </p:nvPr>
-        </p:nvGraphicFramePr>
-        <p:xfrm>
-          <a:off x="457200" y="2432304"/>
-          <a:ext cx="8229600" cy="914400"/>
-        </p:xfrm>
-        <a:graphic>
-          <a:graphicData uri="http://schemas.openxmlformats.org/drawingml/2006/table">
-            <a:tbl>
-              <a:tblPr/>
-              <a:tblGrid>
-                <a:gridCol w="1188720"/>
-                <a:gridCol w="2651760"/>
-                <a:gridCol w="2377440"/>
-                <a:gridCol w="2011680"/>
-              </a:tblGrid>
-              <a:tr h="228600">
-                <a:tc>
-                  <a:txBody>
-                    <a:bodyPr/>
-                    <a:lstStyle/>
-                    <a:p>
-                      <a:pPr indent="0" marL="0">
-                        <a:buNone/>
-                      </a:pPr>
-                      <a:r>
-                        <a:rPr lang="en-US" sz="850" b="1" dirty="0">
-                          <a:solidFill>
-                            <a:srgbClr val="E8A33D"/>
-                          </a:solidFill>
-                          <a:latin typeface="Arial" pitchFamily="34" charset="0"/>
-                          <a:ea typeface="Arial" pitchFamily="34" charset="-122"/>
-                          <a:cs typeface="Arial" pitchFamily="34" charset="-120"/>
-                        </a:rPr>
-                        <a:t>Mode</a:t>
-                      </a:r>
-                      <a:endParaRPr lang="en-US" sz="850" dirty="0">
-                        <a:latin typeface="Arial" charset="0"/>
-                        <a:ea typeface="Arial" charset="0"/>
-                        <a:cs typeface="Arial" charset="0"/>
-                      </a:endParaRPr>
-                    </a:p>
-                  </a:txBody>
-                  <a:tcPr marL="27432" marR="27432" marT="27432" marB="27432" anchor="ctr">
-                    <a:lnL w="6350" cap="flat" cmpd="sng" algn="ctr">
-                      <a:solidFill>
-                        <a:srgbClr val="2E6B68"/>
-                      </a:solidFill>
-                      <a:prstDash val="solid"/>
-                      <a:round/>
-                      <a:headEnd type="none" w="med" len="med"/>
-                      <a:tailEnd type="none" w="med" len="med"/>
-                    </a:lnL>
-                    <a:lnR w="6350" cap="flat" cmpd="sng" algn="ctr">
-                      <a:solidFill>
-                        <a:srgbClr val="2E6B68"/>
-                      </a:solidFill>
-                      <a:prstDash val="solid"/>
-                      <a:round/>
-                      <a:headEnd type="none" w="med" len="med"/>
-                      <a:tailEnd type="none" w="med" len="med"/>
-                    </a:lnR>
-                    <a:lnT w="6350" cap="flat" cmpd="sng" algn="ctr">
-                      <a:solidFill>
-                        <a:srgbClr val="2E6B68"/>
-                      </a:solidFill>
-                      <a:prstDash val="solid"/>
-                      <a:round/>
-                      <a:headEnd type="none" w="med" len="med"/>
-                      <a:tailEnd type="none" w="med" len="med"/>
-                    </a:lnT>
-                    <a:lnB w="6350" cap="flat" cmpd="sng" algn="ctr">
-                      <a:solidFill>
-                        <a:srgbClr val="2E6B68"/>
-                      </a:solidFill>
-                      <a:prstDash val="solid"/>
-                      <a:round/>
-                      <a:headEnd type="none" w="med" len="med"/>
-                      <a:tailEnd type="none" w="med" len="med"/>
-                    </a:lnB>
-                    <a:solidFill>
-                      <a:srgbClr val="1B4A48"/>
-                    </a:solidFill>
-                  </a:tcPr>
-                </a:tc>
-                <a:tc>
-                  <a:txBody>
-                    <a:bodyPr/>
-                    <a:lstStyle/>
-                    <a:p>
-                      <a:pPr indent="0" marL="0">
-                        <a:buNone/>
-                      </a:pPr>
-                      <a:r>
-                        <a:rPr lang="en-US" sz="850" b="1" dirty="0">
-                          <a:solidFill>
-                            <a:srgbClr val="E8A33D"/>
-                          </a:solidFill>
-                          <a:latin typeface="Arial" pitchFamily="34" charset="0"/>
-                          <a:ea typeface="Arial" pitchFamily="34" charset="-122"/>
-                          <a:cs typeface="Arial" pitchFamily="34" charset="-120"/>
-                        </a:rPr>
-                        <a:t>What players do</a:t>
-                      </a:r>
-                      <a:endParaRPr lang="en-US" sz="850" dirty="0">
-                        <a:latin typeface="Arial" charset="0"/>
-                        <a:ea typeface="Arial" charset="0"/>
-                        <a:cs typeface="Arial" charset="0"/>
-                      </a:endParaRPr>
-                    </a:p>
-                  </a:txBody>
-                  <a:tcPr marL="27432" marR="27432" marT="27432" marB="27432" anchor="ctr">
-                    <a:lnL w="6350" cap="flat" cmpd="sng" algn="ctr">
-                      <a:solidFill>
-                        <a:srgbClr val="2E6B68"/>
-                      </a:solidFill>
-                      <a:prstDash val="solid"/>
-                      <a:round/>
-                      <a:headEnd type="none" w="med" len="med"/>
-                      <a:tailEnd type="none" w="med" len="med"/>
-                    </a:lnL>
-                    <a:lnR w="6350" cap="flat" cmpd="sng" algn="ctr">
-                      <a:solidFill>
-                        <a:srgbClr val="2E6B68"/>
-                      </a:solidFill>
-                      <a:prstDash val="solid"/>
-                      <a:round/>
-                      <a:headEnd type="none" w="med" len="med"/>
-                      <a:tailEnd type="none" w="med" len="med"/>
-                    </a:lnR>
-                    <a:lnT w="6350" cap="flat" cmpd="sng" algn="ctr">
-                      <a:solidFill>
-                        <a:srgbClr val="2E6B68"/>
-                      </a:solidFill>
-                      <a:prstDash val="solid"/>
-                      <a:round/>
-                      <a:headEnd type="none" w="med" len="med"/>
-                      <a:tailEnd type="none" w="med" len="med"/>
-                    </a:lnT>
-                    <a:lnB w="6350" cap="flat" cmpd="sng" algn="ctr">
-                      <a:solidFill>
-                        <a:srgbClr val="2E6B68"/>
-                      </a:solidFill>
-                      <a:prstDash val="solid"/>
-                      <a:round/>
-                      <a:headEnd type="none" w="med" len="med"/>
-                      <a:tailEnd type="none" w="med" len="med"/>
-                    </a:lnB>
-                    <a:solidFill>
-                      <a:srgbClr val="1B4A48"/>
-                    </a:solidFill>
-                  </a:tcPr>
-                </a:tc>
-                <a:tc>
-                  <a:txBody>
-                    <a:bodyPr/>
-                    <a:lstStyle/>
-                    <a:p>
-                      <a:pPr indent="0" marL="0">
-                        <a:buNone/>
-                      </a:pPr>
-                      <a:r>
-                        <a:rPr lang="en-US" sz="850" b="1" dirty="0">
-                          <a:solidFill>
-                            <a:srgbClr val="E8A33D"/>
-                          </a:solidFill>
-                          <a:latin typeface="Arial" pitchFamily="34" charset="0"/>
-                          <a:ea typeface="Arial" pitchFamily="34" charset="-122"/>
-                          <a:cs typeface="Arial" pitchFamily="34" charset="-120"/>
-                        </a:rPr>
-                        <a:t>Win condition</a:t>
-                      </a:r>
-                      <a:endParaRPr lang="en-US" sz="850" dirty="0">
-                        <a:latin typeface="Arial" charset="0"/>
-                        <a:ea typeface="Arial" charset="0"/>
-                        <a:cs typeface="Arial" charset="0"/>
-                      </a:endParaRPr>
-                    </a:p>
-                  </a:txBody>
-                  <a:tcPr marL="27432" marR="27432" marT="27432" marB="27432" anchor="ctr">
-                    <a:lnL w="6350" cap="flat" cmpd="sng" algn="ctr">
-                      <a:solidFill>
-                        <a:srgbClr val="2E6B68"/>
-                      </a:solidFill>
-                      <a:prstDash val="solid"/>
-                      <a:round/>
-                      <a:headEnd type="none" w="med" len="med"/>
-                      <a:tailEnd type="none" w="med" len="med"/>
-                    </a:lnL>
-                    <a:lnR w="6350" cap="flat" cmpd="sng" algn="ctr">
-                      <a:solidFill>
-                        <a:srgbClr val="2E6B68"/>
-                      </a:solidFill>
-                      <a:prstDash val="solid"/>
-                      <a:round/>
-                      <a:headEnd type="none" w="med" len="med"/>
-                      <a:tailEnd type="none" w="med" len="med"/>
-                    </a:lnR>
-                    <a:lnT w="6350" cap="flat" cmpd="sng" algn="ctr">
-                      <a:solidFill>
-                        <a:srgbClr val="2E6B68"/>
-                      </a:solidFill>
-                      <a:prstDash val="solid"/>
-                      <a:round/>
-                      <a:headEnd type="none" w="med" len="med"/>
-                      <a:tailEnd type="none" w="med" len="med"/>
-                    </a:lnT>
-                    <a:lnB w="6350" cap="flat" cmpd="sng" algn="ctr">
-                      <a:solidFill>
-                        <a:srgbClr val="2E6B68"/>
-                      </a:solidFill>
-                      <a:prstDash val="solid"/>
-                      <a:round/>
-                      <a:headEnd type="none" w="med" len="med"/>
-                      <a:tailEnd type="none" w="med" len="med"/>
-                    </a:lnB>
-                    <a:solidFill>
-                      <a:srgbClr val="1B4A48"/>
-                    </a:solidFill>
-                  </a:tcPr>
-                </a:tc>
-                <a:tc>
-                  <a:txBody>
-                    <a:bodyPr/>
-                    <a:lstStyle/>
-                    <a:p>
-                      <a:pPr indent="0" marL="0">
-                        <a:buNone/>
-                      </a:pPr>
-                      <a:r>
-                        <a:rPr lang="en-US" sz="850" b="1" dirty="0">
-                          <a:solidFill>
-                            <a:srgbClr val="E8A33D"/>
-                          </a:solidFill>
-                          <a:latin typeface="Arial" pitchFamily="34" charset="0"/>
-                          <a:ea typeface="Arial" pitchFamily="34" charset="-122"/>
-                          <a:cs typeface="Arial" pitchFamily="34" charset="-120"/>
-                        </a:rPr>
-                        <a:t>Parameters (contract ranges)</a:t>
-                      </a:r>
-                      <a:endParaRPr lang="en-US" sz="850" dirty="0">
-                        <a:latin typeface="Arial" charset="0"/>
-                        <a:ea typeface="Arial" charset="0"/>
-                        <a:cs typeface="Arial" charset="0"/>
-                      </a:endParaRPr>
-                    </a:p>
-                  </a:txBody>
-                  <a:tcPr marL="27432" marR="27432" marT="27432" marB="27432" anchor="ctr">
-                    <a:lnL w="6350" cap="flat" cmpd="sng" algn="ctr">
-                      <a:solidFill>
-                        <a:srgbClr val="2E6B68"/>
-                      </a:solidFill>
-                      <a:prstDash val="solid"/>
-                      <a:round/>
-                      <a:headEnd type="none" w="med" len="med"/>
-                      <a:tailEnd type="none" w="med" len="med"/>
-                    </a:lnL>
-                    <a:lnR w="6350" cap="flat" cmpd="sng" algn="ctr">
-                      <a:solidFill>
-                        <a:srgbClr val="2E6B68"/>
-                      </a:solidFill>
-                      <a:prstDash val="solid"/>
-                      <a:round/>
-                      <a:headEnd type="none" w="med" len="med"/>
-                      <a:tailEnd type="none" w="med" len="med"/>
-                    </a:lnR>
-                    <a:lnT w="6350" cap="flat" cmpd="sng" algn="ctr">
-                      <a:solidFill>
-                        <a:srgbClr val="2E6B68"/>
-                      </a:solidFill>
-                      <a:prstDash val="solid"/>
-                      <a:round/>
-                      <a:headEnd type="none" w="med" len="med"/>
-                      <a:tailEnd type="none" w="med" len="med"/>
-                    </a:lnT>
-                    <a:lnB w="6350" cap="flat" cmpd="sng" algn="ctr">
-                      <a:solidFill>
-                        <a:srgbClr val="2E6B68"/>
-                      </a:solidFill>
-                      <a:prstDash val="solid"/>
-                      <a:round/>
-                      <a:headEnd type="none" w="med" len="med"/>
-                      <a:tailEnd type="none" w="med" len="med"/>
-                    </a:lnB>
-                    <a:solidFill>
-                      <a:srgbClr val="1B4A48"/>
-                    </a:solidFill>
-                  </a:tcPr>
-                </a:tc>
-              </a:tr>
-              <a:tr h="228600">
-                <a:tc>
-                  <a:txBody>
-                    <a:bodyPr/>
-                    <a:lstStyle/>
-                    <a:p>
-                      <a:pPr indent="0" marL="0">
-                        <a:buNone/>
-                      </a:pPr>
-                      <a:r>
-                        <a:rPr lang="en-US" sz="800" b="1" dirty="0">
-                          <a:solidFill>
-                            <a:srgbClr val="EDE7DB"/>
-                          </a:solidFill>
-                          <a:latin typeface="Arial" pitchFamily="34" charset="0"/>
-                          <a:ea typeface="Arial" pitchFamily="34" charset="-122"/>
-                          <a:cs typeface="Arial" pitchFamily="34" charset="-120"/>
-                        </a:rPr>
-                        <a:t>relic_hunt</a:t>
-                      </a:r>
-                      <a:endParaRPr lang="en-US" sz="800" dirty="0">
-                        <a:latin typeface="Arial" charset="0"/>
-                        <a:ea typeface="Arial" charset="0"/>
-                        <a:cs typeface="Arial" charset="0"/>
-                      </a:endParaRPr>
-                    </a:p>
-                  </a:txBody>
-                  <a:tcPr marL="27432" marR="27432" marT="27432" marB="27432" anchor="ctr">
-                    <a:lnL w="6350" cap="flat" cmpd="sng" algn="ctr">
-                      <a:solidFill>
-                        <a:srgbClr val="2E6B68"/>
-                      </a:solidFill>
-                      <a:prstDash val="solid"/>
-                      <a:round/>
-                      <a:headEnd type="none" w="med" len="med"/>
-                      <a:tailEnd type="none" w="med" len="med"/>
-                    </a:lnL>
-                    <a:lnR w="6350" cap="flat" cmpd="sng" algn="ctr">
-                      <a:solidFill>
-                        <a:srgbClr val="2E6B68"/>
-                      </a:solidFill>
-                      <a:prstDash val="solid"/>
-                      <a:round/>
-                      <a:headEnd type="none" w="med" len="med"/>
-                      <a:tailEnd type="none" w="med" len="med"/>
-                    </a:lnR>
-                    <a:lnT w="6350" cap="flat" cmpd="sng" algn="ctr">
-                      <a:solidFill>
-                        <a:srgbClr val="2E6B68"/>
-                      </a:solidFill>
-                      <a:prstDash val="solid"/>
-                      <a:round/>
-                      <a:headEnd type="none" w="med" len="med"/>
-                      <a:tailEnd type="none" w="med" len="med"/>
-                    </a:lnT>
-                    <a:lnB w="6350" cap="flat" cmpd="sng" algn="ctr">
-                      <a:solidFill>
-                        <a:srgbClr val="2E6B68"/>
-                      </a:solidFill>
-                      <a:prstDash val="solid"/>
-                      <a:round/>
-                      <a:headEnd type="none" w="med" len="med"/>
-                      <a:tailEnd type="none" w="med" len="med"/>
-                    </a:lnB>
-                    <a:solidFill>
-                      <a:srgbClr val="1B4A48"/>
-                    </a:solidFill>
-                  </a:tcPr>
-                </a:tc>
-                <a:tc>
-                  <a:txBody>
-                    <a:bodyPr/>
-                    <a:lstStyle/>
-                    <a:p>
-                      <a:pPr indent="0" marL="0">
-                        <a:buNone/>
-                      </a:pPr>
-                      <a:r>
-                        <a:rPr lang="en-US" sz="800" dirty="0">
-                          <a:solidFill>
-                            <a:srgbClr val="BDB3A2"/>
-                          </a:solidFill>
-                          <a:latin typeface="Arial" pitchFamily="34" charset="0"/>
-                          <a:ea typeface="Arial" pitchFamily="34" charset="-122"/>
-                          <a:cs typeface="Arial" pitchFamily="34" charset="-120"/>
-                        </a:rPr>
-                        <a:t>collect relics over the bridges, enter the gate</a:t>
-                      </a:r>
-                      <a:endParaRPr lang="en-US" sz="800" dirty="0">
-                        <a:latin typeface="Arial" charset="0"/>
-                        <a:ea typeface="Arial" charset="0"/>
-                        <a:cs typeface="Arial" charset="0"/>
-                      </a:endParaRPr>
-                    </a:p>
-                  </a:txBody>
-                  <a:tcPr marL="27432" marR="27432" marT="27432" marB="27432" anchor="ctr">
-                    <a:lnL w="6350" cap="flat" cmpd="sng" algn="ctr">
-                      <a:solidFill>
-                        <a:srgbClr val="2E6B68"/>
-                      </a:solidFill>
-                      <a:prstDash val="solid"/>
-                      <a:round/>
-                      <a:headEnd type="none" w="med" len="med"/>
-                      <a:tailEnd type="none" w="med" len="med"/>
-                    </a:lnL>
-                    <a:lnR w="6350" cap="flat" cmpd="sng" algn="ctr">
-                      <a:solidFill>
-                        <a:srgbClr val="2E6B68"/>
-                      </a:solidFill>
-                      <a:prstDash val="solid"/>
-                      <a:round/>
-                      <a:headEnd type="none" w="med" len="med"/>
-                      <a:tailEnd type="none" w="med" len="med"/>
-                    </a:lnR>
-                    <a:lnT w="6350" cap="flat" cmpd="sng" algn="ctr">
-                      <a:solidFill>
-                        <a:srgbClr val="2E6B68"/>
-                      </a:solidFill>
-                      <a:prstDash val="solid"/>
-                      <a:round/>
-                      <a:headEnd type="none" w="med" len="med"/>
-                      <a:tailEnd type="none" w="med" len="med"/>
-                    </a:lnT>
-                    <a:lnB w="6350" cap="flat" cmpd="sng" algn="ctr">
-                      <a:solidFill>
-                        <a:srgbClr val="2E6B68"/>
-                      </a:solidFill>
-                      <a:prstDash val="solid"/>
-                      <a:round/>
-                      <a:headEnd type="none" w="med" len="med"/>
-                      <a:tailEnd type="none" w="med" len="med"/>
-                    </a:lnB>
-                    <a:solidFill>
-                      <a:srgbClr val="1B4A48"/>
-                    </a:solidFill>
-                  </a:tcPr>
-                </a:tc>
-                <a:tc>
-                  <a:txBody>
-                    <a:bodyPr/>
-                    <a:lstStyle/>
-                    <a:p>
-                      <a:pPr indent="0" marL="0">
-                        <a:buNone/>
-                      </a:pPr>
-                      <a:r>
-                        <a:rPr lang="en-US" sz="800" dirty="0">
-                          <a:solidFill>
-                            <a:srgbClr val="BDB3A2"/>
-                          </a:solidFill>
-                          <a:latin typeface="Arial" pitchFamily="34" charset="0"/>
-                          <a:ea typeface="Arial" pitchFamily="34" charset="-122"/>
-                          <a:cs typeface="Arial" pitchFamily="34" charset="-120"/>
-                        </a:rPr>
-                        <a:t>gate unlocks after relicsRequired relics; a player reaches it</a:t>
-                      </a:r>
-                      <a:endParaRPr lang="en-US" sz="800" dirty="0">
-                        <a:latin typeface="Arial" charset="0"/>
-                        <a:ea typeface="Arial" charset="0"/>
-                        <a:cs typeface="Arial" charset="0"/>
-                      </a:endParaRPr>
-                    </a:p>
-                  </a:txBody>
-                  <a:tcPr marL="27432" marR="27432" marT="27432" marB="27432" anchor="ctr">
-                    <a:lnL w="6350" cap="flat" cmpd="sng" algn="ctr">
-                      <a:solidFill>
-                        <a:srgbClr val="2E6B68"/>
-                      </a:solidFill>
-                      <a:prstDash val="solid"/>
-                      <a:round/>
-                      <a:headEnd type="none" w="med" len="med"/>
-                      <a:tailEnd type="none" w="med" len="med"/>
-                    </a:lnL>
-                    <a:lnR w="6350" cap="flat" cmpd="sng" algn="ctr">
-                      <a:solidFill>
-                        <a:srgbClr val="2E6B68"/>
-                      </a:solidFill>
-                      <a:prstDash val="solid"/>
-                      <a:round/>
-                      <a:headEnd type="none" w="med" len="med"/>
-                      <a:tailEnd type="none" w="med" len="med"/>
-                    </a:lnR>
-                    <a:lnT w="6350" cap="flat" cmpd="sng" algn="ctr">
-                      <a:solidFill>
-                        <a:srgbClr val="2E6B68"/>
-                      </a:solidFill>
-                      <a:prstDash val="solid"/>
-                      <a:round/>
-                      <a:headEnd type="none" w="med" len="med"/>
-                      <a:tailEnd type="none" w="med" len="med"/>
-                    </a:lnT>
-                    <a:lnB w="6350" cap="flat" cmpd="sng" algn="ctr">
-                      <a:solidFill>
-                        <a:srgbClr val="2E6B68"/>
-                      </a:solidFill>
-                      <a:prstDash val="solid"/>
-                      <a:round/>
-                      <a:headEnd type="none" w="med" len="med"/>
-                      <a:tailEnd type="none" w="med" len="med"/>
-                    </a:lnB>
-                    <a:solidFill>
-                      <a:srgbClr val="1B4A48"/>
-                    </a:solidFill>
-                  </a:tcPr>
-                </a:tc>
-                <a:tc>
-                  <a:txBody>
-                    <a:bodyPr/>
-                    <a:lstStyle/>
-                    <a:p>
-                      <a:pPr indent="0" marL="0">
-                        <a:buNone/>
-                      </a:pPr>
-                      <a:r>
-                        <a:rPr lang="en-US" sz="800" dirty="0">
-                          <a:solidFill>
-                            <a:srgbClr val="BDB3A2"/>
-                          </a:solidFill>
-                          <a:latin typeface="Arial" pitchFamily="34" charset="0"/>
-                          <a:ea typeface="Arial" pitchFamily="34" charset="-122"/>
-                          <a:cs typeface="Arial" pitchFamily="34" charset="-120"/>
-                        </a:rPr>
-                        <a:t>relicsRequired 1 to 3 (default all)</a:t>
-                      </a:r>
-                      <a:endParaRPr lang="en-US" sz="800" dirty="0">
-                        <a:latin typeface="Arial" charset="0"/>
-                        <a:ea typeface="Arial" charset="0"/>
-                        <a:cs typeface="Arial" charset="0"/>
-                      </a:endParaRPr>
-                    </a:p>
-                  </a:txBody>
-                  <a:tcPr marL="27432" marR="27432" marT="27432" marB="27432" anchor="ctr">
-                    <a:lnL w="6350" cap="flat" cmpd="sng" algn="ctr">
-                      <a:solidFill>
-                        <a:srgbClr val="2E6B68"/>
-                      </a:solidFill>
-                      <a:prstDash val="solid"/>
-                      <a:round/>
-                      <a:headEnd type="none" w="med" len="med"/>
-                      <a:tailEnd type="none" w="med" len="med"/>
-                    </a:lnL>
-                    <a:lnR w="6350" cap="flat" cmpd="sng" algn="ctr">
-                      <a:solidFill>
-                        <a:srgbClr val="2E6B68"/>
-                      </a:solidFill>
-                      <a:prstDash val="solid"/>
-                      <a:round/>
-                      <a:headEnd type="none" w="med" len="med"/>
-                      <a:tailEnd type="none" w="med" len="med"/>
-                    </a:lnR>
-                    <a:lnT w="6350" cap="flat" cmpd="sng" algn="ctr">
-                      <a:solidFill>
-                        <a:srgbClr val="2E6B68"/>
-                      </a:solidFill>
-                      <a:prstDash val="solid"/>
-                      <a:round/>
-                      <a:headEnd type="none" w="med" len="med"/>
-                      <a:tailEnd type="none" w="med" len="med"/>
-                    </a:lnT>
-                    <a:lnB w="6350" cap="flat" cmpd="sng" algn="ctr">
-                      <a:solidFill>
-                        <a:srgbClr val="2E6B68"/>
-                      </a:solidFill>
-                      <a:prstDash val="solid"/>
-                      <a:round/>
-                      <a:headEnd type="none" w="med" len="med"/>
-                      <a:tailEnd type="none" w="med" len="med"/>
-                    </a:lnB>
-                    <a:solidFill>
-                      <a:srgbClr val="1B4A48"/>
-                    </a:solidFill>
-                  </a:tcPr>
-                </a:tc>
-              </a:tr>
-              <a:tr h="228600">
-                <a:tc>
-                  <a:txBody>
-                    <a:bodyPr/>
-                    <a:lstStyle/>
-                    <a:p>
-                      <a:pPr indent="0" marL="0">
-                        <a:buNone/>
-                      </a:pPr>
-                      <a:r>
-                        <a:rPr lang="en-US" sz="800" b="1" dirty="0">
-                          <a:solidFill>
-                            <a:srgbClr val="EDE7DB"/>
-                          </a:solidFill>
-                          <a:latin typeface="Arial" pitchFamily="34" charset="0"/>
-                          <a:ea typeface="Arial" pitchFamily="34" charset="-122"/>
-                          <a:cs typeface="Arial" pitchFamily="34" charset="-120"/>
-                        </a:rPr>
-                        <a:t>time_trial</a:t>
-                      </a:r>
-                      <a:endParaRPr lang="en-US" sz="800" dirty="0">
-                        <a:latin typeface="Arial" charset="0"/>
-                        <a:ea typeface="Arial" charset="0"/>
-                        <a:cs typeface="Arial" charset="0"/>
-                      </a:endParaRPr>
-                    </a:p>
-                  </a:txBody>
-                  <a:tcPr marL="27432" marR="27432" marT="27432" marB="27432" anchor="ctr">
-                    <a:lnL w="6350" cap="flat" cmpd="sng" algn="ctr">
-                      <a:solidFill>
-                        <a:srgbClr val="2E6B68"/>
-                      </a:solidFill>
-                      <a:prstDash val="solid"/>
-                      <a:round/>
-                      <a:headEnd type="none" w="med" len="med"/>
-                      <a:tailEnd type="none" w="med" len="med"/>
-                    </a:lnL>
-                    <a:lnR w="6350" cap="flat" cmpd="sng" algn="ctr">
-                      <a:solidFill>
-                        <a:srgbClr val="2E6B68"/>
-                      </a:solidFill>
-                      <a:prstDash val="solid"/>
-                      <a:round/>
-                      <a:headEnd type="none" w="med" len="med"/>
-                      <a:tailEnd type="none" w="med" len="med"/>
-                    </a:lnR>
-                    <a:lnT w="6350" cap="flat" cmpd="sng" algn="ctr">
-                      <a:solidFill>
-                        <a:srgbClr val="2E6B68"/>
-                      </a:solidFill>
-                      <a:prstDash val="solid"/>
-                      <a:round/>
-                      <a:headEnd type="none" w="med" len="med"/>
-                      <a:tailEnd type="none" w="med" len="med"/>
-                    </a:lnT>
-                    <a:lnB w="6350" cap="flat" cmpd="sng" algn="ctr">
-                      <a:solidFill>
-                        <a:srgbClr val="2E6B68"/>
-                      </a:solidFill>
-                      <a:prstDash val="solid"/>
-                      <a:round/>
-                      <a:headEnd type="none" w="med" len="med"/>
-                      <a:tailEnd type="none" w="med" len="med"/>
-                    </a:lnB>
-                    <a:solidFill>
-                      <a:srgbClr val="1B4A48"/>
-                    </a:solidFill>
-                  </a:tcPr>
-                </a:tc>
-                <a:tc>
-                  <a:txBody>
-                    <a:bodyPr/>
-                    <a:lstStyle/>
-                    <a:p>
-                      <a:pPr indent="0" marL="0">
-                        <a:buNone/>
-                      </a:pPr>
-                      <a:r>
-                        <a:rPr lang="en-US" sz="800" dirty="0">
-                          <a:solidFill>
-                            <a:srgbClr val="BDB3A2"/>
-                          </a:solidFill>
-                          <a:latin typeface="Arial" pitchFamily="34" charset="0"/>
-                          <a:ea typeface="Arial" pitchFamily="34" charset="-122"/>
-                          <a:cs typeface="Arial" pitchFamily="34" charset="-120"/>
-                        </a:rPr>
-                        <a:t>the same relic hunt against a clock</a:t>
-                      </a:r>
-                      <a:endParaRPr lang="en-US" sz="800" dirty="0">
-                        <a:latin typeface="Arial" charset="0"/>
-                        <a:ea typeface="Arial" charset="0"/>
-                        <a:cs typeface="Arial" charset="0"/>
-                      </a:endParaRPr>
-                    </a:p>
-                  </a:txBody>
-                  <a:tcPr marL="27432" marR="27432" marT="27432" marB="27432" anchor="ctr">
-                    <a:lnL w="6350" cap="flat" cmpd="sng" algn="ctr">
-                      <a:solidFill>
-                        <a:srgbClr val="2E6B68"/>
-                      </a:solidFill>
-                      <a:prstDash val="solid"/>
-                      <a:round/>
-                      <a:headEnd type="none" w="med" len="med"/>
-                      <a:tailEnd type="none" w="med" len="med"/>
-                    </a:lnL>
-                    <a:lnR w="6350" cap="flat" cmpd="sng" algn="ctr">
-                      <a:solidFill>
-                        <a:srgbClr val="2E6B68"/>
-                      </a:solidFill>
-                      <a:prstDash val="solid"/>
-                      <a:round/>
-                      <a:headEnd type="none" w="med" len="med"/>
-                      <a:tailEnd type="none" w="med" len="med"/>
-                    </a:lnR>
-                    <a:lnT w="6350" cap="flat" cmpd="sng" algn="ctr">
-                      <a:solidFill>
-                        <a:srgbClr val="2E6B68"/>
-                      </a:solidFill>
-                      <a:prstDash val="solid"/>
-                      <a:round/>
-                      <a:headEnd type="none" w="med" len="med"/>
-                      <a:tailEnd type="none" w="med" len="med"/>
-                    </a:lnT>
-                    <a:lnB w="6350" cap="flat" cmpd="sng" algn="ctr">
-                      <a:solidFill>
-                        <a:srgbClr val="2E6B68"/>
-                      </a:solidFill>
-                      <a:prstDash val="solid"/>
-                      <a:round/>
-                      <a:headEnd type="none" w="med" len="med"/>
-                      <a:tailEnd type="none" w="med" len="med"/>
-                    </a:lnB>
-                    <a:solidFill>
-                      <a:srgbClr val="1B4A48"/>
-                    </a:solidFill>
-                  </a:tcPr>
-                </a:tc>
-                <a:tc>
-                  <a:txBody>
-                    <a:bodyPr/>
-                    <a:lstStyle/>
-                    <a:p>
-                      <a:pPr indent="0" marL="0">
-                        <a:buNone/>
-                      </a:pPr>
-                      <a:r>
-                        <a:rPr lang="en-US" sz="800" dirty="0">
-                          <a:solidFill>
-                            <a:srgbClr val="BDB3A2"/>
-                          </a:solidFill>
-                          <a:latin typeface="Arial" pitchFamily="34" charset="0"/>
-                          <a:ea typeface="Arial" pitchFamily="34" charset="-122"/>
-                          <a:cs typeface="Arial" pitchFamily="34" charset="-120"/>
-                        </a:rPr>
-                        <a:t>finish before timeLimitSec; lost when it expires</a:t>
-                      </a:r>
-                      <a:endParaRPr lang="en-US" sz="800" dirty="0">
-                        <a:latin typeface="Arial" charset="0"/>
-                        <a:ea typeface="Arial" charset="0"/>
-                        <a:cs typeface="Arial" charset="0"/>
-                      </a:endParaRPr>
-                    </a:p>
-                  </a:txBody>
-                  <a:tcPr marL="27432" marR="27432" marT="27432" marB="27432" anchor="ctr">
-                    <a:lnL w="6350" cap="flat" cmpd="sng" algn="ctr">
-                      <a:solidFill>
-                        <a:srgbClr val="2E6B68"/>
-                      </a:solidFill>
-                      <a:prstDash val="solid"/>
-                      <a:round/>
-                      <a:headEnd type="none" w="med" len="med"/>
-                      <a:tailEnd type="none" w="med" len="med"/>
-                    </a:lnL>
-                    <a:lnR w="6350" cap="flat" cmpd="sng" algn="ctr">
-                      <a:solidFill>
-                        <a:srgbClr val="2E6B68"/>
-                      </a:solidFill>
-                      <a:prstDash val="solid"/>
-                      <a:round/>
-                      <a:headEnd type="none" w="med" len="med"/>
-                      <a:tailEnd type="none" w="med" len="med"/>
-                    </a:lnR>
-                    <a:lnT w="6350" cap="flat" cmpd="sng" algn="ctr">
-                      <a:solidFill>
-                        <a:srgbClr val="2E6B68"/>
-                      </a:solidFill>
-                      <a:prstDash val="solid"/>
-                      <a:round/>
-                      <a:headEnd type="none" w="med" len="med"/>
-                      <a:tailEnd type="none" w="med" len="med"/>
-                    </a:lnT>
-                    <a:lnB w="6350" cap="flat" cmpd="sng" algn="ctr">
-                      <a:solidFill>
-                        <a:srgbClr val="2E6B68"/>
-                      </a:solidFill>
-                      <a:prstDash val="solid"/>
-                      <a:round/>
-                      <a:headEnd type="none" w="med" len="med"/>
-                      <a:tailEnd type="none" w="med" len="med"/>
-                    </a:lnB>
-                    <a:solidFill>
-                      <a:srgbClr val="1B4A48"/>
-                    </a:solidFill>
-                  </a:tcPr>
-                </a:tc>
-                <a:tc>
-                  <a:txBody>
-                    <a:bodyPr/>
-                    <a:lstStyle/>
-                    <a:p>
-                      <a:pPr indent="0" marL="0">
-                        <a:buNone/>
-                      </a:pPr>
-                      <a:r>
-                        <a:rPr lang="en-US" sz="800" dirty="0">
-                          <a:solidFill>
-                            <a:srgbClr val="BDB3A2"/>
-                          </a:solidFill>
-                          <a:latin typeface="Arial" pitchFamily="34" charset="0"/>
-                          <a:ea typeface="Arial" pitchFamily="34" charset="-122"/>
-                          <a:cs typeface="Arial" pitchFamily="34" charset="-120"/>
-                        </a:rPr>
-                        <a:t>timeLimitSec 20 to 600 s (default 120)</a:t>
-                      </a:r>
-                      <a:endParaRPr lang="en-US" sz="800" dirty="0">
-                        <a:latin typeface="Arial" charset="0"/>
-                        <a:ea typeface="Arial" charset="0"/>
-                        <a:cs typeface="Arial" charset="0"/>
-                      </a:endParaRPr>
-                    </a:p>
-                  </a:txBody>
-                  <a:tcPr marL="27432" marR="27432" marT="27432" marB="27432" anchor="ctr">
-                    <a:lnL w="6350" cap="flat" cmpd="sng" algn="ctr">
-                      <a:solidFill>
-                        <a:srgbClr val="2E6B68"/>
-                      </a:solidFill>
-                      <a:prstDash val="solid"/>
-                      <a:round/>
-                      <a:headEnd type="none" w="med" len="med"/>
-                      <a:tailEnd type="none" w="med" len="med"/>
-                    </a:lnL>
-                    <a:lnR w="6350" cap="flat" cmpd="sng" algn="ctr">
-                      <a:solidFill>
-                        <a:srgbClr val="2E6B68"/>
-                      </a:solidFill>
-                      <a:prstDash val="solid"/>
-                      <a:round/>
-                      <a:headEnd type="none" w="med" len="med"/>
-                      <a:tailEnd type="none" w="med" len="med"/>
-                    </a:lnR>
-                    <a:lnT w="6350" cap="flat" cmpd="sng" algn="ctr">
-                      <a:solidFill>
-                        <a:srgbClr val="2E6B68"/>
-                      </a:solidFill>
-                      <a:prstDash val="solid"/>
-                      <a:round/>
-                      <a:headEnd type="none" w="med" len="med"/>
-                      <a:tailEnd type="none" w="med" len="med"/>
-                    </a:lnT>
-                    <a:lnB w="6350" cap="flat" cmpd="sng" algn="ctr">
-                      <a:solidFill>
-                        <a:srgbClr val="2E6B68"/>
-                      </a:solidFill>
-                      <a:prstDash val="solid"/>
-                      <a:round/>
-                      <a:headEnd type="none" w="med" len="med"/>
-                      <a:tailEnd type="none" w="med" len="med"/>
-                    </a:lnB>
-                    <a:solidFill>
-                      <a:srgbClr val="1B4A48"/>
-                    </a:solidFill>
-                  </a:tcPr>
-                </a:tc>
-              </a:tr>
-              <a:tr h="228600">
-                <a:tc>
-                  <a:txBody>
-                    <a:bodyPr/>
-                    <a:lstStyle/>
-                    <a:p>
-                      <a:pPr indent="0" marL="0">
-                        <a:buNone/>
-                      </a:pPr>
-                      <a:r>
-                        <a:rPr lang="en-US" sz="800" b="1" dirty="0">
-                          <a:solidFill>
-                            <a:srgbClr val="EDE7DB"/>
-                          </a:solidFill>
-                          <a:latin typeface="Arial" pitchFamily="34" charset="0"/>
-                          <a:ea typeface="Arial" pitchFamily="34" charset="-122"/>
-                          <a:cs typeface="Arial" pitchFamily="34" charset="-120"/>
-                        </a:rPr>
-                        <a:t>king_of_the_hill</a:t>
-                      </a:r>
-                      <a:endParaRPr lang="en-US" sz="800" dirty="0">
-                        <a:latin typeface="Arial" charset="0"/>
-                        <a:ea typeface="Arial" charset="0"/>
-                        <a:cs typeface="Arial" charset="0"/>
-                      </a:endParaRPr>
-                    </a:p>
-                  </a:txBody>
-                  <a:tcPr marL="27432" marR="27432" marT="27432" marB="27432" anchor="ctr">
-                    <a:lnL w="6350" cap="flat" cmpd="sng" algn="ctr">
-                      <a:solidFill>
-                        <a:srgbClr val="2E6B68"/>
-                      </a:solidFill>
-                      <a:prstDash val="solid"/>
-                      <a:round/>
-                      <a:headEnd type="none" w="med" len="med"/>
-                      <a:tailEnd type="none" w="med" len="med"/>
-                    </a:lnL>
-                    <a:lnR w="6350" cap="flat" cmpd="sng" algn="ctr">
-                      <a:solidFill>
-                        <a:srgbClr val="2E6B68"/>
-                      </a:solidFill>
-                      <a:prstDash val="solid"/>
-                      <a:round/>
-                      <a:headEnd type="none" w="med" len="med"/>
-                      <a:tailEnd type="none" w="med" len="med"/>
-                    </a:lnR>
-                    <a:lnT w="6350" cap="flat" cmpd="sng" algn="ctr">
-                      <a:solidFill>
-                        <a:srgbClr val="2E6B68"/>
-                      </a:solidFill>
-                      <a:prstDash val="solid"/>
-                      <a:round/>
-                      <a:headEnd type="none" w="med" len="med"/>
-                      <a:tailEnd type="none" w="med" len="med"/>
-                    </a:lnT>
-                    <a:lnB w="6350" cap="flat" cmpd="sng" algn="ctr">
-                      <a:solidFill>
-                        <a:srgbClr val="2E6B68"/>
-                      </a:solidFill>
-                      <a:prstDash val="solid"/>
-                      <a:round/>
-                      <a:headEnd type="none" w="med" len="med"/>
-                      <a:tailEnd type="none" w="med" len="med"/>
-                    </a:lnB>
-                    <a:solidFill>
-                      <a:srgbClr val="1B4A48"/>
-                    </a:solidFill>
-                  </a:tcPr>
-                </a:tc>
-                <a:tc>
-                  <a:txBody>
-                    <a:bodyPr/>
-                    <a:lstStyle/>
-                    <a:p>
-                      <a:pPr indent="0" marL="0">
-                        <a:buNone/>
-                      </a:pPr>
-                      <a:r>
-                        <a:rPr lang="en-US" sz="800" dirty="0">
-                          <a:solidFill>
-                            <a:srgbClr val="BDB3A2"/>
-                          </a:solidFill>
-                          <a:latin typeface="Arial" pitchFamily="34" charset="0"/>
-                          <a:ea typeface="Arial" pitchFamily="34" charset="-122"/>
-                          <a:cs typeface="Arial" pitchFamily="34" charset="-120"/>
-                        </a:rPr>
-                        <a:t>reach the gate island (the hill) and stand in its zone</a:t>
-                      </a:r>
-                      <a:endParaRPr lang="en-US" sz="800" dirty="0">
-                        <a:latin typeface="Arial" charset="0"/>
-                        <a:ea typeface="Arial" charset="0"/>
-                        <a:cs typeface="Arial" charset="0"/>
-                      </a:endParaRPr>
-                    </a:p>
-                  </a:txBody>
-                  <a:tcPr marL="27432" marR="27432" marT="27432" marB="27432" anchor="ctr">
-                    <a:lnL w="6350" cap="flat" cmpd="sng" algn="ctr">
-                      <a:solidFill>
-                        <a:srgbClr val="2E6B68"/>
-                      </a:solidFill>
-                      <a:prstDash val="solid"/>
-                      <a:round/>
-                      <a:headEnd type="none" w="med" len="med"/>
-                      <a:tailEnd type="none" w="med" len="med"/>
-                    </a:lnL>
-                    <a:lnR w="6350" cap="flat" cmpd="sng" algn="ctr">
-                      <a:solidFill>
-                        <a:srgbClr val="2E6B68"/>
-                      </a:solidFill>
-                      <a:prstDash val="solid"/>
-                      <a:round/>
-                      <a:headEnd type="none" w="med" len="med"/>
-                      <a:tailEnd type="none" w="med" len="med"/>
-                    </a:lnR>
-                    <a:lnT w="6350" cap="flat" cmpd="sng" algn="ctr">
-                      <a:solidFill>
-                        <a:srgbClr val="2E6B68"/>
-                      </a:solidFill>
-                      <a:prstDash val="solid"/>
-                      <a:round/>
-                      <a:headEnd type="none" w="med" len="med"/>
-                      <a:tailEnd type="none" w="med" len="med"/>
-                    </a:lnT>
-                    <a:lnB w="6350" cap="flat" cmpd="sng" algn="ctr">
-                      <a:solidFill>
-                        <a:srgbClr val="2E6B68"/>
-                      </a:solidFill>
-                      <a:prstDash val="solid"/>
-                      <a:round/>
-                      <a:headEnd type="none" w="med" len="med"/>
-                      <a:tailEnd type="none" w="med" len="med"/>
-                    </a:lnB>
-                    <a:solidFill>
-                      <a:srgbClr val="1B4A48"/>
-                    </a:solidFill>
-                  </a:tcPr>
-                </a:tc>
-                <a:tc>
-                  <a:txBody>
-                    <a:bodyPr/>
-                    <a:lstStyle/>
-                    <a:p>
-                      <a:pPr indent="0" marL="0">
-                        <a:buNone/>
-                      </a:pPr>
-                      <a:r>
-                        <a:rPr lang="en-US" sz="800" dirty="0">
-                          <a:solidFill>
-                            <a:srgbClr val="BDB3A2"/>
-                          </a:solidFill>
-                          <a:latin typeface="Arial" pitchFamily="34" charset="0"/>
-                          <a:ea typeface="Arial" pitchFamily="34" charset="-122"/>
-                          <a:cs typeface="Arial" pitchFamily="34" charset="-120"/>
-                        </a:rPr>
-                        <a:t>first player whose held time reaches holdSeconds</a:t>
-                      </a:r>
-                      <a:endParaRPr lang="en-US" sz="800" dirty="0">
-                        <a:latin typeface="Arial" charset="0"/>
-                        <a:ea typeface="Arial" charset="0"/>
-                        <a:cs typeface="Arial" charset="0"/>
-                      </a:endParaRPr>
-                    </a:p>
-                  </a:txBody>
-                  <a:tcPr marL="27432" marR="27432" marT="27432" marB="27432" anchor="ctr">
-                    <a:lnL w="6350" cap="flat" cmpd="sng" algn="ctr">
-                      <a:solidFill>
-                        <a:srgbClr val="2E6B68"/>
-                      </a:solidFill>
-                      <a:prstDash val="solid"/>
-                      <a:round/>
-                      <a:headEnd type="none" w="med" len="med"/>
-                      <a:tailEnd type="none" w="med" len="med"/>
-                    </a:lnL>
-                    <a:lnR w="6350" cap="flat" cmpd="sng" algn="ctr">
-                      <a:solidFill>
-                        <a:srgbClr val="2E6B68"/>
-                      </a:solidFill>
-                      <a:prstDash val="solid"/>
-                      <a:round/>
-                      <a:headEnd type="none" w="med" len="med"/>
-                      <a:tailEnd type="none" w="med" len="med"/>
-                    </a:lnR>
-                    <a:lnT w="6350" cap="flat" cmpd="sng" algn="ctr">
-                      <a:solidFill>
-                        <a:srgbClr val="2E6B68"/>
-                      </a:solidFill>
-                      <a:prstDash val="solid"/>
-                      <a:round/>
-                      <a:headEnd type="none" w="med" len="med"/>
-                      <a:tailEnd type="none" w="med" len="med"/>
-                    </a:lnT>
-                    <a:lnB w="6350" cap="flat" cmpd="sng" algn="ctr">
-                      <a:solidFill>
-                        <a:srgbClr val="2E6B68"/>
-                      </a:solidFill>
-                      <a:prstDash val="solid"/>
-                      <a:round/>
-                      <a:headEnd type="none" w="med" len="med"/>
-                      <a:tailEnd type="none" w="med" len="med"/>
-                    </a:lnB>
-                    <a:solidFill>
-                      <a:srgbClr val="1B4A48"/>
-                    </a:solidFill>
-                  </a:tcPr>
-                </a:tc>
-                <a:tc>
-                  <a:txBody>
-                    <a:bodyPr/>
-                    <a:lstStyle/>
-                    <a:p>
-                      <a:pPr indent="0" marL="0">
-                        <a:buNone/>
-                      </a:pPr>
-                      <a:r>
-                        <a:rPr lang="en-US" sz="800" dirty="0">
-                          <a:solidFill>
-                            <a:srgbClr val="BDB3A2"/>
-                          </a:solidFill>
-                          <a:latin typeface="Arial" pitchFamily="34" charset="0"/>
-                          <a:ea typeface="Arial" pitchFamily="34" charset="-122"/>
-                          <a:cs typeface="Arial" pitchFamily="34" charset="-120"/>
-                        </a:rPr>
-                        <a:t>holdSeconds 3 to 60 s (default 10)</a:t>
-                      </a:r>
-                      <a:endParaRPr lang="en-US" sz="800" dirty="0">
-                        <a:latin typeface="Arial" charset="0"/>
-                        <a:ea typeface="Arial" charset="0"/>
-                        <a:cs typeface="Arial" charset="0"/>
-                      </a:endParaRPr>
-                    </a:p>
-                  </a:txBody>
-                  <a:tcPr marL="27432" marR="27432" marT="27432" marB="27432" anchor="ctr">
-                    <a:lnL w="6350" cap="flat" cmpd="sng" algn="ctr">
-                      <a:solidFill>
-                        <a:srgbClr val="2E6B68"/>
-                      </a:solidFill>
-                      <a:prstDash val="solid"/>
-                      <a:round/>
-                      <a:headEnd type="none" w="med" len="med"/>
-                      <a:tailEnd type="none" w="med" len="med"/>
-                    </a:lnL>
-                    <a:lnR w="6350" cap="flat" cmpd="sng" algn="ctr">
-                      <a:solidFill>
-                        <a:srgbClr val="2E6B68"/>
-                      </a:solidFill>
-                      <a:prstDash val="solid"/>
-                      <a:round/>
-                      <a:headEnd type="none" w="med" len="med"/>
-                      <a:tailEnd type="none" w="med" len="med"/>
-                    </a:lnR>
-                    <a:lnT w="6350" cap="flat" cmpd="sng" algn="ctr">
-                      <a:solidFill>
-                        <a:srgbClr val="2E6B68"/>
-                      </a:solidFill>
-                      <a:prstDash val="solid"/>
-                      <a:round/>
-                      <a:headEnd type="none" w="med" len="med"/>
-                      <a:tailEnd type="none" w="med" len="med"/>
-                    </a:lnT>
-                    <a:lnB w="6350" cap="flat" cmpd="sng" algn="ctr">
-                      <a:solidFill>
-                        <a:srgbClr val="2E6B68"/>
-                      </a:solidFill>
-                      <a:prstDash val="solid"/>
-                      <a:round/>
-                      <a:headEnd type="none" w="med" len="med"/>
-                      <a:tailEnd type="none" w="med" len="med"/>
-                    </a:lnB>
-                    <a:solidFill>
-                      <a:srgbClr val="1B4A48"/>
-                    </a:solidFill>
-                  </a:tcPr>
-                </a:tc>
-              </a:tr>
-              <a:tr h="228600">
-                <a:tc>
-                  <a:txBody>
-                    <a:bodyPr/>
-                    <a:lstStyle/>
-                    <a:p>
-                      <a:pPr indent="0" marL="0">
-                        <a:buNone/>
-                      </a:pPr>
-                      <a:r>
-                        <a:rPr lang="en-US" sz="800" b="1" dirty="0">
-                          <a:solidFill>
-                            <a:srgbClr val="EDE7DB"/>
-                          </a:solidFill>
-                          <a:latin typeface="Arial" pitchFamily="34" charset="0"/>
-                          <a:ea typeface="Arial" pitchFamily="34" charset="-122"/>
-                          <a:cs typeface="Arial" pitchFamily="34" charset="-120"/>
-                        </a:rPr>
-                        <a:t>checkpoint_race</a:t>
-                      </a:r>
-                      <a:endParaRPr lang="en-US" sz="800" dirty="0">
-                        <a:latin typeface="Arial" charset="0"/>
-                        <a:ea typeface="Arial" charset="0"/>
-                        <a:cs typeface="Arial" charset="0"/>
-                      </a:endParaRPr>
-                    </a:p>
-                  </a:txBody>
-                  <a:tcPr marL="27432" marR="27432" marT="27432" marB="27432" anchor="ctr">
-                    <a:lnL w="6350" cap="flat" cmpd="sng" algn="ctr">
-                      <a:solidFill>
-                        <a:srgbClr val="2E6B68"/>
-                      </a:solidFill>
-                      <a:prstDash val="solid"/>
-                      <a:round/>
-                      <a:headEnd type="none" w="med" len="med"/>
-                      <a:tailEnd type="none" w="med" len="med"/>
-                    </a:lnL>
-                    <a:lnR w="6350" cap="flat" cmpd="sng" algn="ctr">
-                      <a:solidFill>
-                        <a:srgbClr val="2E6B68"/>
-                      </a:solidFill>
-                      <a:prstDash val="solid"/>
-                      <a:round/>
-                      <a:headEnd type="none" w="med" len="med"/>
-                      <a:tailEnd type="none" w="med" len="med"/>
-                    </a:lnR>
-                    <a:lnT w="6350" cap="flat" cmpd="sng" algn="ctr">
-                      <a:solidFill>
-                        <a:srgbClr val="2E6B68"/>
-                      </a:solidFill>
-                      <a:prstDash val="solid"/>
-                      <a:round/>
-                      <a:headEnd type="none" w="med" len="med"/>
-                      <a:tailEnd type="none" w="med" len="med"/>
-                    </a:lnT>
-                    <a:lnB w="6350" cap="flat" cmpd="sng" algn="ctr">
-                      <a:solidFill>
-                        <a:srgbClr val="2E6B68"/>
-                      </a:solidFill>
-                      <a:prstDash val="solid"/>
-                      <a:round/>
-                      <a:headEnd type="none" w="med" len="med"/>
-                      <a:tailEnd type="none" w="med" len="med"/>
-                    </a:lnB>
-                    <a:solidFill>
-                      <a:srgbClr val="1B4A48"/>
-                    </a:solidFill>
-                  </a:tcPr>
-                </a:tc>
-                <a:tc>
-                  <a:txBody>
-                    <a:bodyPr/>
-                    <a:lstStyle/>
-                    <a:p>
-                      <a:pPr indent="0" marL="0">
-                        <a:buNone/>
-                      </a:pPr>
-                      <a:r>
-                        <a:rPr lang="en-US" sz="800" dirty="0">
-                          <a:solidFill>
-                            <a:srgbClr val="BDB3A2"/>
-                          </a:solidFill>
-                          <a:latin typeface="Arial" pitchFamily="34" charset="0"/>
-                          <a:ea typeface="Arial" pitchFamily="34" charset="-122"/>
-                          <a:cs typeface="Arial" pitchFamily="34" charset="-120"/>
-                        </a:rPr>
-                        <a:t>reach the relics as checkpoints, in order, then the gate</a:t>
-                      </a:r>
-                      <a:endParaRPr lang="en-US" sz="800" dirty="0">
-                        <a:latin typeface="Arial" charset="0"/>
-                        <a:ea typeface="Arial" charset="0"/>
-                        <a:cs typeface="Arial" charset="0"/>
-                      </a:endParaRPr>
-                    </a:p>
-                  </a:txBody>
-                  <a:tcPr marL="27432" marR="27432" marT="27432" marB="27432" anchor="ctr">
-                    <a:lnL w="6350" cap="flat" cmpd="sng" algn="ctr">
-                      <a:solidFill>
-                        <a:srgbClr val="2E6B68"/>
-                      </a:solidFill>
-                      <a:prstDash val="solid"/>
-                      <a:round/>
-                      <a:headEnd type="none" w="med" len="med"/>
-                      <a:tailEnd type="none" w="med" len="med"/>
-                    </a:lnL>
-                    <a:lnR w="6350" cap="flat" cmpd="sng" algn="ctr">
-                      <a:solidFill>
-                        <a:srgbClr val="2E6B68"/>
-                      </a:solidFill>
-                      <a:prstDash val="solid"/>
-                      <a:round/>
-                      <a:headEnd type="none" w="med" len="med"/>
-                      <a:tailEnd type="none" w="med" len="med"/>
-                    </a:lnR>
-                    <a:lnT w="6350" cap="flat" cmpd="sng" algn="ctr">
-                      <a:solidFill>
-                        <a:srgbClr val="2E6B68"/>
-                      </a:solidFill>
-                      <a:prstDash val="solid"/>
-                      <a:round/>
-                      <a:headEnd type="none" w="med" len="med"/>
-                      <a:tailEnd type="none" w="med" len="med"/>
-                    </a:lnT>
-                    <a:lnB w="6350" cap="flat" cmpd="sng" algn="ctr">
-                      <a:solidFill>
-                        <a:srgbClr val="2E6B68"/>
-                      </a:solidFill>
-                      <a:prstDash val="solid"/>
-                      <a:round/>
-                      <a:headEnd type="none" w="med" len="med"/>
-                      <a:tailEnd type="none" w="med" len="med"/>
-                    </a:lnB>
-                    <a:solidFill>
-                      <a:srgbClr val="1B4A48"/>
-                    </a:solidFill>
-                  </a:tcPr>
-                </a:tc>
-                <a:tc>
-                  <a:txBody>
-                    <a:bodyPr/>
-                    <a:lstStyle/>
-                    <a:p>
-                      <a:pPr indent="0" marL="0">
-                        <a:buNone/>
-                      </a:pPr>
-                      <a:r>
-                        <a:rPr lang="en-US" sz="800" dirty="0">
-                          <a:solidFill>
-                            <a:srgbClr val="BDB3A2"/>
-                          </a:solidFill>
-                          <a:latin typeface="Arial" pitchFamily="34" charset="0"/>
-                          <a:ea typeface="Arial" pitchFamily="34" charset="-122"/>
-                          <a:cs typeface="Arial" pitchFamily="34" charset="-120"/>
-                        </a:rPr>
-                        <a:t>every checkpoint, then the gate</a:t>
-                      </a:r>
-                      <a:endParaRPr lang="en-US" sz="800" dirty="0">
-                        <a:latin typeface="Arial" charset="0"/>
-                        <a:ea typeface="Arial" charset="0"/>
-                        <a:cs typeface="Arial" charset="0"/>
-                      </a:endParaRPr>
-                    </a:p>
-                  </a:txBody>
-                  <a:tcPr marL="27432" marR="27432" marT="27432" marB="27432" anchor="ctr">
-                    <a:lnL w="6350" cap="flat" cmpd="sng" algn="ctr">
-                      <a:solidFill>
-                        <a:srgbClr val="2E6B68"/>
-                      </a:solidFill>
-                      <a:prstDash val="solid"/>
-                      <a:round/>
-                      <a:headEnd type="none" w="med" len="med"/>
-                      <a:tailEnd type="none" w="med" len="med"/>
-                    </a:lnL>
-                    <a:lnR w="6350" cap="flat" cmpd="sng" algn="ctr">
-                      <a:solidFill>
-                        <a:srgbClr val="2E6B68"/>
-                      </a:solidFill>
-                      <a:prstDash val="solid"/>
-                      <a:round/>
-                      <a:headEnd type="none" w="med" len="med"/>
-                      <a:tailEnd type="none" w="med" len="med"/>
-                    </a:lnR>
-                    <a:lnT w="6350" cap="flat" cmpd="sng" algn="ctr">
-                      <a:solidFill>
-                        <a:srgbClr val="2E6B68"/>
-                      </a:solidFill>
-                      <a:prstDash val="solid"/>
-                      <a:round/>
-                      <a:headEnd type="none" w="med" len="med"/>
-                      <a:tailEnd type="none" w="med" len="med"/>
-                    </a:lnT>
-                    <a:lnB w="6350" cap="flat" cmpd="sng" algn="ctr">
-                      <a:solidFill>
-                        <a:srgbClr val="2E6B68"/>
-                      </a:solidFill>
-                      <a:prstDash val="solid"/>
-                      <a:round/>
-                      <a:headEnd type="none" w="med" len="med"/>
-                      <a:tailEnd type="none" w="med" len="med"/>
-                    </a:lnB>
-                    <a:solidFill>
-                      <a:srgbClr val="1B4A48"/>
-                    </a:solidFill>
-                  </a:tcPr>
-                </a:tc>
-                <a:tc>
-                  <a:txBody>
-                    <a:bodyPr/>
-                    <a:lstStyle/>
-                    <a:p>
-                      <a:pPr indent="0" marL="0">
-                        <a:buNone/>
-                      </a:pPr>
-                      <a:r>
-                        <a:rPr lang="en-US" sz="800" dirty="0">
-                          <a:solidFill>
-                            <a:srgbClr val="BDB3A2"/>
-                          </a:solidFill>
-                          <a:latin typeface="Arial" pitchFamily="34" charset="0"/>
-                          <a:ea typeface="Arial" pitchFamily="34" charset="-122"/>
-                          <a:cs typeface="Arial" pitchFamily="34" charset="-120"/>
-                        </a:rPr>
-                        <a:t>orderedCheckpoints; at least 2 relics</a:t>
-                      </a:r>
-                      <a:endParaRPr lang="en-US" sz="800" dirty="0">
-                        <a:latin typeface="Arial" charset="0"/>
-                        <a:ea typeface="Arial" charset="0"/>
-                        <a:cs typeface="Arial" charset="0"/>
-                      </a:endParaRPr>
-                    </a:p>
-                  </a:txBody>
-                  <a:tcPr marL="27432" marR="27432" marT="27432" marB="27432" anchor="ctr">
-                    <a:lnL w="6350" cap="flat" cmpd="sng" algn="ctr">
-                      <a:solidFill>
-                        <a:srgbClr val="2E6B68"/>
-                      </a:solidFill>
-                      <a:prstDash val="solid"/>
-                      <a:round/>
-                      <a:headEnd type="none" w="med" len="med"/>
-                      <a:tailEnd type="none" w="med" len="med"/>
-                    </a:lnL>
-                    <a:lnR w="6350" cap="flat" cmpd="sng" algn="ctr">
-                      <a:solidFill>
-                        <a:srgbClr val="2E6B68"/>
-                      </a:solidFill>
-                      <a:prstDash val="solid"/>
-                      <a:round/>
-                      <a:headEnd type="none" w="med" len="med"/>
-                      <a:tailEnd type="none" w="med" len="med"/>
-                    </a:lnR>
-                    <a:lnT w="6350" cap="flat" cmpd="sng" algn="ctr">
-                      <a:solidFill>
-                        <a:srgbClr val="2E6B68"/>
-                      </a:solidFill>
-                      <a:prstDash val="solid"/>
-                      <a:round/>
-                      <a:headEnd type="none" w="med" len="med"/>
-                      <a:tailEnd type="none" w="med" len="med"/>
-                    </a:lnT>
-                    <a:lnB w="6350" cap="flat" cmpd="sng" algn="ctr">
-                      <a:solidFill>
-                        <a:srgbClr val="2E6B68"/>
-                      </a:solidFill>
-                      <a:prstDash val="solid"/>
-                      <a:round/>
-                      <a:headEnd type="none" w="med" len="med"/>
-                      <a:tailEnd type="none" w="med" len="med"/>
-                    </a:lnB>
-                    <a:solidFill>
-                      <a:srgbClr val="1B4A48"/>
-                    </a:solidFill>
-                  </a:tcPr>
-                </a:tc>
-              </a:tr>
-              <a:tr h="228600">
-                <a:tc>
-                  <a:txBody>
-                    <a:bodyPr/>
-                    <a:lstStyle/>
-                    <a:p>
-                      <a:pPr indent="0" marL="0">
-                        <a:buNone/>
-                      </a:pPr>
-                      <a:r>
-                        <a:rPr lang="en-US" sz="800" b="1" dirty="0">
-                          <a:solidFill>
-                            <a:srgbClr val="EDE7DB"/>
-                          </a:solidFill>
-                          <a:latin typeface="Arial" pitchFamily="34" charset="0"/>
-                          <a:ea typeface="Arial" pitchFamily="34" charset="-122"/>
-                          <a:cs typeface="Arial" pitchFamily="34" charset="-120"/>
-                        </a:rPr>
-                        <a:t>survival</a:t>
-                      </a:r>
-                      <a:endParaRPr lang="en-US" sz="800" dirty="0">
-                        <a:latin typeface="Arial" charset="0"/>
-                        <a:ea typeface="Arial" charset="0"/>
-                        <a:cs typeface="Arial" charset="0"/>
-                      </a:endParaRPr>
-                    </a:p>
-                  </a:txBody>
-                  <a:tcPr marL="27432" marR="27432" marT="27432" marB="27432" anchor="ctr">
-                    <a:lnL w="6350" cap="flat" cmpd="sng" algn="ctr">
-                      <a:solidFill>
-                        <a:srgbClr val="2E6B68"/>
-                      </a:solidFill>
-                      <a:prstDash val="solid"/>
-                      <a:round/>
-                      <a:headEnd type="none" w="med" len="med"/>
-                      <a:tailEnd type="none" w="med" len="med"/>
-                    </a:lnL>
-                    <a:lnR w="6350" cap="flat" cmpd="sng" algn="ctr">
-                      <a:solidFill>
-                        <a:srgbClr val="2E6B68"/>
-                      </a:solidFill>
-                      <a:prstDash val="solid"/>
-                      <a:round/>
-                      <a:headEnd type="none" w="med" len="med"/>
-                      <a:tailEnd type="none" w="med" len="med"/>
-                    </a:lnR>
-                    <a:lnT w="6350" cap="flat" cmpd="sng" algn="ctr">
-                      <a:solidFill>
-                        <a:srgbClr val="2E6B68"/>
-                      </a:solidFill>
-                      <a:prstDash val="solid"/>
-                      <a:round/>
-                      <a:headEnd type="none" w="med" len="med"/>
-                      <a:tailEnd type="none" w="med" len="med"/>
-                    </a:lnT>
-                    <a:lnB w="6350" cap="flat" cmpd="sng" algn="ctr">
-                      <a:solidFill>
-                        <a:srgbClr val="2E6B68"/>
-                      </a:solidFill>
-                      <a:prstDash val="solid"/>
-                      <a:round/>
-                      <a:headEnd type="none" w="med" len="med"/>
-                      <a:tailEnd type="none" w="med" len="med"/>
-                    </a:lnB>
-                    <a:solidFill>
-                      <a:srgbClr val="1B4A48"/>
-                    </a:solidFill>
-                  </a:tcPr>
-                </a:tc>
-                <a:tc>
-                  <a:txBody>
-                    <a:bodyPr/>
-                    <a:lstStyle/>
-                    <a:p>
-                      <a:pPr indent="0" marL="0">
-                        <a:buNone/>
-                      </a:pPr>
-                      <a:r>
-                        <a:rPr lang="en-US" sz="800" dirty="0">
-                          <a:solidFill>
-                            <a:srgbClr val="BDB3A2"/>
-                          </a:solidFill>
-                          <a:latin typeface="Arial" pitchFamily="34" charset="0"/>
-                          <a:ea typeface="Arial" pitchFamily="34" charset="-122"/>
-                          <a:cs typeface="Arial" pitchFamily="34" charset="-120"/>
-                        </a:rPr>
-                        <a:t>grab a relic and reach the gate while the hazard rises and bridges submerge</a:t>
-                      </a:r>
-                      <a:endParaRPr lang="en-US" sz="800" dirty="0">
-                        <a:latin typeface="Arial" charset="0"/>
-                        <a:ea typeface="Arial" charset="0"/>
-                        <a:cs typeface="Arial" charset="0"/>
-                      </a:endParaRPr>
-                    </a:p>
-                  </a:txBody>
-                  <a:tcPr marL="27432" marR="27432" marT="27432" marB="27432" anchor="ctr">
-                    <a:lnL w="6350" cap="flat" cmpd="sng" algn="ctr">
-                      <a:solidFill>
-                        <a:srgbClr val="2E6B68"/>
-                      </a:solidFill>
-                      <a:prstDash val="solid"/>
-                      <a:round/>
-                      <a:headEnd type="none" w="med" len="med"/>
-                      <a:tailEnd type="none" w="med" len="med"/>
-                    </a:lnL>
-                    <a:lnR w="6350" cap="flat" cmpd="sng" algn="ctr">
-                      <a:solidFill>
-                        <a:srgbClr val="2E6B68"/>
-                      </a:solidFill>
-                      <a:prstDash val="solid"/>
-                      <a:round/>
-                      <a:headEnd type="none" w="med" len="med"/>
-                      <a:tailEnd type="none" w="med" len="med"/>
-                    </a:lnR>
-                    <a:lnT w="6350" cap="flat" cmpd="sng" algn="ctr">
-                      <a:solidFill>
-                        <a:srgbClr val="2E6B68"/>
-                      </a:solidFill>
-                      <a:prstDash val="solid"/>
-                      <a:round/>
-                      <a:headEnd type="none" w="med" len="med"/>
-                      <a:tailEnd type="none" w="med" len="med"/>
-                    </a:lnT>
-                    <a:lnB w="6350" cap="flat" cmpd="sng" algn="ctr">
-                      <a:solidFill>
-                        <a:srgbClr val="2E6B68"/>
-                      </a:solidFill>
-                      <a:prstDash val="solid"/>
-                      <a:round/>
-                      <a:headEnd type="none" w="med" len="med"/>
-                      <a:tailEnd type="none" w="med" len="med"/>
-                    </a:lnB>
-                    <a:solidFill>
-                      <a:srgbClr val="1B4A48"/>
-                    </a:solidFill>
-                  </a:tcPr>
-                </a:tc>
-                <a:tc>
-                  <a:txBody>
-                    <a:bodyPr/>
-                    <a:lstStyle/>
-                    <a:p>
-                      <a:pPr indent="0" marL="0">
-                        <a:buNone/>
-                      </a:pPr>
-                      <a:r>
-                        <a:rPr lang="en-US" sz="800" dirty="0">
-                          <a:solidFill>
-                            <a:srgbClr val="BDB3A2"/>
-                          </a:solidFill>
-                          <a:latin typeface="Arial" pitchFamily="34" charset="0"/>
-                          <a:ea typeface="Arial" pitchFamily="34" charset="-122"/>
-                          <a:cs typeface="Arial" pitchFamily="34" charset="-120"/>
-                        </a:rPr>
-                        <a:t>relic plus gate before timeLimitSec; lost when it expires</a:t>
-                      </a:r>
-                      <a:endParaRPr lang="en-US" sz="800" dirty="0">
-                        <a:latin typeface="Arial" charset="0"/>
-                        <a:ea typeface="Arial" charset="0"/>
-                        <a:cs typeface="Arial" charset="0"/>
-                      </a:endParaRPr>
-                    </a:p>
-                  </a:txBody>
-                  <a:tcPr marL="27432" marR="27432" marT="27432" marB="27432" anchor="ctr">
-                    <a:lnL w="6350" cap="flat" cmpd="sng" algn="ctr">
-                      <a:solidFill>
-                        <a:srgbClr val="2E6B68"/>
-                      </a:solidFill>
-                      <a:prstDash val="solid"/>
-                      <a:round/>
-                      <a:headEnd type="none" w="med" len="med"/>
-                      <a:tailEnd type="none" w="med" len="med"/>
-                    </a:lnL>
-                    <a:lnR w="6350" cap="flat" cmpd="sng" algn="ctr">
-                      <a:solidFill>
-                        <a:srgbClr val="2E6B68"/>
-                      </a:solidFill>
-                      <a:prstDash val="solid"/>
-                      <a:round/>
-                      <a:headEnd type="none" w="med" len="med"/>
-                      <a:tailEnd type="none" w="med" len="med"/>
-                    </a:lnR>
-                    <a:lnT w="6350" cap="flat" cmpd="sng" algn="ctr">
-                      <a:solidFill>
-                        <a:srgbClr val="2E6B68"/>
-                      </a:solidFill>
-                      <a:prstDash val="solid"/>
-                      <a:round/>
-                      <a:headEnd type="none" w="med" len="med"/>
-                      <a:tailEnd type="none" w="med" len="med"/>
-                    </a:lnT>
-                    <a:lnB w="6350" cap="flat" cmpd="sng" algn="ctr">
-                      <a:solidFill>
-                        <a:srgbClr val="2E6B68"/>
-                      </a:solidFill>
-                      <a:prstDash val="solid"/>
-                      <a:round/>
-                      <a:headEnd type="none" w="med" len="med"/>
-                      <a:tailEnd type="none" w="med" len="med"/>
-                    </a:lnB>
-                    <a:solidFill>
-                      <a:srgbClr val="1B4A48"/>
-                    </a:solidFill>
-                  </a:tcPr>
-                </a:tc>
-                <a:tc>
-                  <a:txBody>
-                    <a:bodyPr/>
-                    <a:lstStyle/>
-                    <a:p>
-                      <a:pPr indent="0" marL="0">
-                        <a:buNone/>
-                      </a:pPr>
-                      <a:r>
-                        <a:rPr lang="en-US" sz="800" dirty="0">
-                          <a:solidFill>
-                            <a:srgbClr val="BDB3A2"/>
-                          </a:solidFill>
-                          <a:latin typeface="Arial" pitchFamily="34" charset="0"/>
-                          <a:ea typeface="Arial" pitchFamily="34" charset="-122"/>
-                          <a:cs typeface="Arial" pitchFamily="34" charset="-120"/>
-                        </a:rPr>
-                        <a:t>hazard.rise afterSec, metersPerSec, maxElevation; timeLimitSec</a:t>
-                      </a:r>
-                      <a:endParaRPr lang="en-US" sz="800" dirty="0">
-                        <a:latin typeface="Arial" charset="0"/>
-                        <a:ea typeface="Arial" charset="0"/>
-                        <a:cs typeface="Arial" charset="0"/>
-                      </a:endParaRPr>
-                    </a:p>
-                  </a:txBody>
-                  <a:tcPr marL="27432" marR="27432" marT="27432" marB="27432" anchor="ctr">
-                    <a:lnL w="6350" cap="flat" cmpd="sng" algn="ctr">
-                      <a:solidFill>
-                        <a:srgbClr val="2E6B68"/>
-                      </a:solidFill>
-                      <a:prstDash val="solid"/>
-                      <a:round/>
-                      <a:headEnd type="none" w="med" len="med"/>
-                      <a:tailEnd type="none" w="med" len="med"/>
-                    </a:lnL>
-                    <a:lnR w="6350" cap="flat" cmpd="sng" algn="ctr">
-                      <a:solidFill>
-                        <a:srgbClr val="2E6B68"/>
-                      </a:solidFill>
-                      <a:prstDash val="solid"/>
-                      <a:round/>
-                      <a:headEnd type="none" w="med" len="med"/>
-                      <a:tailEnd type="none" w="med" len="med"/>
-                    </a:lnR>
-                    <a:lnT w="6350" cap="flat" cmpd="sng" algn="ctr">
-                      <a:solidFill>
-                        <a:srgbClr val="2E6B68"/>
-                      </a:solidFill>
-                      <a:prstDash val="solid"/>
-                      <a:round/>
-                      <a:headEnd type="none" w="med" len="med"/>
-                      <a:tailEnd type="none" w="med" len="med"/>
-                    </a:lnT>
-                    <a:lnB w="6350" cap="flat" cmpd="sng" algn="ctr">
-                      <a:solidFill>
-                        <a:srgbClr val="2E6B68"/>
-                      </a:solidFill>
-                      <a:prstDash val="solid"/>
-                      <a:round/>
-                      <a:headEnd type="none" w="med" len="med"/>
-                      <a:tailEnd type="none" w="med" len="med"/>
-                    </a:lnB>
-                    <a:solidFill>
-                      <a:srgbClr val="1B4A48"/>
-                    </a:solidFill>
-                  </a:tcPr>
-                </a:tc>
-              </a:tr>
-            </a:tbl>
-          </a:graphicData>
-        </a:graphic>
-      </p:graphicFrame>
-      <p:sp>
-        <p:nvSpPr>
-          <p:cNvPr id="33" name="library text"/>
-          <p:cNvSpPr txBox="1"/>
-          <p:nvPr/>
-        </p:nvSpPr>
-        <p:spPr>
-          <a:xfrm>
-            <a:off x="457200" y="3959352"/>
-            <a:ext cx="8229600" cy="402336"/>
-          </a:xfrm>
-          <a:prstGeom prst="rect">
-            <a:avLst/>
-          </a:prstGeom>
-          <a:noFill/>
-          <a:ln/>
-        </p:spPr>
-        <p:txBody>
-          <a:bodyPr wrap="square" lIns="0" tIns="0" rIns="0" bIns="0" rtlCol="0" anchor="t"/>
-          <a:lstStyle/>
-          <a:p>
-            <a:pPr indent="0" marL="0">
-              <a:buNone/>
-            </a:pPr>
-            <a:r>
-              <a:rPr lang="en-US" sz="900" b="1" dirty="0">
-                <a:solidFill>
-                  <a:schemeClr val="accent1"/>
-                </a:solidFill>
-              </a:rPr>
-              <a:t>Biomes </a:t>
-            </a:r>
-            <a:pPr indent="0" marL="0">
-              <a:buNone/>
-            </a:pPr>
-            <a:r>
-              <a:rPr lang="en-US" sz="900" dirty="0">
-                <a:solidFill>
-                  <a:schemeClr val="tx1"/>
-                </a:solidFill>
-              </a:rPr>
-              <a:t>garden, volcanic, frost, desert, night.   </a:t>
-            </a:r>
-            <a:pPr indent="0" marL="0">
-              <a:buNone/>
-            </a:pPr>
-            <a:r>
-              <a:rPr lang="en-US" sz="900" b="1" dirty="0">
-                <a:solidFill>
-                  <a:schemeClr val="accent1"/>
-                </a:solidFill>
-              </a:rPr>
-              <a:t>Hazard and pace </a:t>
-            </a:r>
-            <a:pPr indent="0" marL="0">
-              <a:buNone/>
-            </a:pPr>
-            <a:r>
-              <a:rPr lang="en-US" sz="900" dirty="0">
-                <a:solidFill>
-                  <a:schemeClr val="tx1"/>
-                </a:solidFill>
-              </a:rPr>
-              <a:t>water or lava, a rising hazard, 3 to 7 m/s, 11 decoration types.   </a:t>
-            </a:r>
-            <a:pPr indent="0" marL="0">
-              <a:buNone/>
-            </a:pPr>
-            <a:r>
-              <a:rPr lang="en-US" sz="900" b="1" dirty="0">
-                <a:solidFill>
-                  <a:schemeClr val="accent1"/>
-                </a:solidFill>
-              </a:rPr>
-              <a:t>Changed live, no reset </a:t>
-            </a:r>
-            <a:pPr indent="0" marL="0">
-              <a:buNone/>
-            </a:pPr>
-            <a:r>
-              <a:rPr lang="en-US" sz="900" dirty="0">
-                <a:solidFill>
-                  <a:schemeClr val="tx1"/>
-                </a:solidFill>
-              </a:rPr>
-              <a:t>set_mode, set_biome, set_movement and the structural ops, each validated and committed as a new version.   </a:t>
-            </a:r>
-            <a:pPr indent="0" marL="0">
-              <a:buNone/>
-            </a:pPr>
-            <a:r>
-              <a:rPr lang="en-US" sz="900" b="1" dirty="0">
-                <a:solidFill>
-                  <a:schemeClr val="accent1"/>
-                </a:solidFill>
-              </a:rPr>
-              <a:t>Streaming </a:t>
-            </a:r>
-            <a:pPr indent="0" marL="0">
-              <a:buNone/>
-            </a:pPr>
-            <a:r>
-              <a:rPr lang="en-US" sz="900" dirty="0">
-                <a:solidFill>
-                  <a:schemeClr val="tx1"/>
-                </a:solidFill>
-              </a:rPr>
-              <a:t>extends the world ahead of players near an edge, up to 24 islands and 48 bridges; the director can switch it off.</a:t>
-            </a:r>
-            <a:endParaRPr lang="en-US" sz="900" dirty="0"/>
-          </a:p>
-        </p:txBody>
-      </p:sp>
-      <p:sp>
-        <p:nvSpPr>
-          <p:cNvPr id="34" name="category note"/>
-          <p:cNvSpPr txBox="1"/>
-          <p:nvPr/>
-        </p:nvSpPr>
-        <p:spPr>
-          <a:xfrm>
-            <a:off x="457200" y="4425696"/>
-            <a:ext cx="8229600" cy="310896"/>
-          </a:xfrm>
-          <a:prstGeom prst="rect">
-            <a:avLst/>
-          </a:prstGeom>
-          <a:noFill/>
-          <a:ln/>
-        </p:spPr>
-        <p:txBody>
-          <a:bodyPr wrap="square" lIns="0" tIns="0" rIns="0" bIns="0" rtlCol="0" anchor="ctr"/>
-          <a:lstStyle/>
-          <a:p>
-            <a:pPr indent="0" marL="0">
-              <a:buNone/>
-            </a:pPr>
-            <a:r>
-              <a:rPr lang="en-US" sz="750" i="1" dirty="0">
-                <a:solidFill>
-                  <a:schemeClr val="tx2"/>
-                </a:solidFill>
-              </a:rPr>
-              <a:t>Adapted from one-prompt game generators: the one-prompt front door and instant playable output. Added: live editing without a reset, deterministic validation and repair before publish, local-only inference, phones as controllers (docs/COMPETITIVE.md). A request outside the library lands on the nearest mode and the agent says so.</a:t>
+              <a:t>Adapted from one-prompt game generators: the one-prompt front door and instant playable output. Added: 2D and 3D from one prompt on one local model, live editing without a reset, deterministic validation and repair before publish, local-only inference, phones as controllers (docs/COMPETITIVE.md). A request outside a library lands on the nearest genre or mode and Beetle says so.</a:t>
             </a:r>
             <a:endParaRPr lang="en-US" sz="750" dirty="0"/>
           </a:p>
@@ -6300,12 +4789,12 @@
               <a:buNone/>
             </a:pPr>
             <a:r>
-              <a:rPr lang="en-US" sz="2600" b="1" dirty="0">
+              <a:rPr lang="en-US" sz="1900" b="1" dirty="0">
                 <a:solidFill>
                   <a:schemeClr val="tx1"/>
                 </a:solidFill>
               </a:rPr>
-              <a:t>Agent architecture and validation</a:t>
+              <a:t>Two engines, one local model, one validation discipline</a:t>
             </a:r>
             <a:endParaRPr lang="en-US" sz="2600" dirty="0"/>
           </a:p>
@@ -6606,18 +5095,54 @@
       </p:sp>
       <p:sp>
         <p:nvSpPr>
-          <p:cNvPr id="15" name="node Director or frontier"/>
-          <p:cNvSpPr/>
-          <p:nvPr/>
-        </p:nvSpPr>
-        <p:spPr>
-          <a:xfrm>
-            <a:off x="457200" y="1188720"/>
-            <a:ext cx="1203960" cy="640080"/>
+          <p:cNvPr id="15" name="label 3D WORLDS: REQUEST TO COMMITTED VERSION"/>
+          <p:cNvSpPr txBox="1"/>
+          <p:nvPr/>
+        </p:nvSpPr>
+        <p:spPr>
+          <a:xfrm>
+            <a:off x="457200" y="1097280"/>
+            <a:ext cx="8229600" cy="182880"/>
+          </a:xfrm>
+          <a:prstGeom prst="rect">
+            <a:avLst/>
+          </a:prstGeom>
+          <a:noFill/>
+          <a:ln/>
+        </p:spPr>
+        <p:txBody>
+          <a:bodyPr wrap="square" lIns="0" tIns="0" rIns="0" bIns="0" rtlCol="0" anchor="ctr"/>
+          <a:lstStyle/>
+          <a:p>
+            <a:pPr indent="0" marL="0">
+              <a:buNone/>
+            </a:pPr>
+            <a:r>
+              <a:rPr lang="en-US" sz="850" b="1" spc="200" kern="0" dirty="0">
+                <a:solidFill>
+                  <a:schemeClr val="accent1"/>
+                </a:solidFill>
+              </a:rPr>
+              <a:t>3D WORLDS: REQUEST TO COMMITTED VERSION</a:t>
+            </a:r>
+            <a:endParaRPr lang="en-US" sz="850" dirty="0"/>
+          </a:p>
+        </p:txBody>
+      </p:sp>
+      <p:sp>
+        <p:nvSpPr>
+          <p:cNvPr id="16" name="3D WORLDS: REQUEST TO COMMITTED VERSION node Director or frontier"/>
+          <p:cNvSpPr/>
+          <p:nvPr/>
+        </p:nvSpPr>
+        <p:spPr>
+          <a:xfrm>
+            <a:off x="457200" y="1344168"/>
+            <a:ext cx="1219200" cy="457200"/>
           </a:xfrm>
           <a:prstGeom prst="roundRect">
             <a:avLst>
-              <a:gd name="adj" fmla="val 11429"/>
+              <a:gd name="adj" fmla="val 16000"/>
             </a:avLst>
           </a:prstGeom>
           <a:solidFill>
@@ -6633,50 +5158,50 @@
       </p:sp>
       <p:sp>
         <p:nvSpPr>
-          <p:cNvPr id="16" name="node title Director or frontier"/>
-          <p:cNvSpPr txBox="1"/>
-          <p:nvPr/>
-        </p:nvSpPr>
-        <p:spPr>
-          <a:xfrm>
-            <a:off x="457200" y="1188720"/>
-            <a:ext cx="1203960" cy="640080"/>
-          </a:xfrm>
-          <a:prstGeom prst="rect">
-            <a:avLst/>
-          </a:prstGeom>
-          <a:noFill/>
-          <a:ln/>
-        </p:spPr>
-        <p:txBody>
-          <a:bodyPr wrap="square" lIns="635" tIns="635" rIns="635" bIns="635" rtlCol="0" anchor="ctr"/>
+          <p:cNvPr id="17" name="3D WORLDS: REQUEST TO COMMITTED VERSION node title Director or frontier"/>
+          <p:cNvSpPr txBox="1"/>
+          <p:nvPr/>
+        </p:nvSpPr>
+        <p:spPr>
+          <a:xfrm>
+            <a:off x="457200" y="1344168"/>
+            <a:ext cx="1219200" cy="457200"/>
+          </a:xfrm>
+          <a:prstGeom prst="rect">
+            <a:avLst/>
+          </a:prstGeom>
+          <a:noFill/>
+          <a:ln/>
+        </p:spPr>
+        <p:txBody>
+          <a:bodyPr wrap="square" lIns="508" tIns="508" rIns="508" bIns="508" rtlCol="0" anchor="ctr"/>
           <a:lstStyle/>
           <a:p>
             <a:pPr algn="ctr" indent="0" marL="0">
               <a:buNone/>
             </a:pPr>
             <a:r>
-              <a:rPr lang="en-US" sz="1050" b="1" dirty="0">
+              <a:rPr lang="en-US" sz="950" b="1" dirty="0">
                 <a:solidFill>
                   <a:schemeClr val="tx1"/>
                 </a:solidFill>
               </a:rPr>
               <a:t>Director or frontier</a:t>
             </a:r>
-            <a:endParaRPr lang="en-US" sz="1050" dirty="0"/>
-          </a:p>
-        </p:txBody>
-      </p:sp>
-      <p:sp>
-        <p:nvSpPr>
-          <p:cNvPr id="17" name="node sub Director or frontier"/>
-          <p:cNvSpPr txBox="1"/>
-          <p:nvPr/>
-        </p:nvSpPr>
-        <p:spPr>
-          <a:xfrm>
-            <a:off x="384048" y="1883664"/>
-            <a:ext cx="1350264" cy="566928"/>
+            <a:endParaRPr lang="en-US" sz="950" dirty="0"/>
+          </a:p>
+        </p:txBody>
+      </p:sp>
+      <p:sp>
+        <p:nvSpPr>
+          <p:cNvPr id="18" name="3D WORLDS: REQUEST TO COMMITTED VERSION node sub Director or frontier"/>
+          <p:cNvSpPr txBox="1"/>
+          <p:nvPr/>
+        </p:nvSpPr>
+        <p:spPr>
+          <a:xfrm>
+            <a:off x="402336" y="1837944"/>
+            <a:ext cx="1328928" cy="402336"/>
           </a:xfrm>
           <a:prstGeom prst="rect">
             <a:avLst/>
@@ -6692,33 +5217,33 @@
               <a:buNone/>
             </a:pPr>
             <a:r>
-              <a:rPr lang="en-US" sz="850" dirty="0">
+              <a:rPr lang="en-US" sz="750" dirty="0">
                 <a:solidFill>
                   <a:schemeClr val="tx2"/>
                 </a:solidFill>
               </a:rPr>
-              <a:t>a request or edit; or a player 4 m from a rim with no crossing beyond</a:t>
-            </a:r>
-            <a:endParaRPr lang="en-US" sz="850" dirty="0"/>
-          </a:p>
-        </p:txBody>
-      </p:sp>
-      <p:sp>
-        <p:nvSpPr>
-          <p:cNvPr id="18" name="arrow"/>
-          <p:cNvSpPr/>
-          <p:nvPr/>
-        </p:nvSpPr>
-        <p:spPr>
-          <a:xfrm>
-            <a:off x="1697736" y="1508760"/>
+              <a:t>a typed request, or a player near a rim with no crossing beyond</a:t>
+            </a:r>
+            <a:endParaRPr lang="en-US" sz="750" dirty="0"/>
+          </a:p>
+        </p:txBody>
+      </p:sp>
+      <p:sp>
+        <p:nvSpPr>
+          <p:cNvPr id="19" name="arrow"/>
+          <p:cNvSpPr/>
+          <p:nvPr/>
+        </p:nvSpPr>
+        <p:spPr>
+          <a:xfrm>
+            <a:off x="1703832" y="1572768"/>
             <a:ext cx="128016" cy="914"/>
           </a:xfrm>
           <a:prstGeom prst="line">
             <a:avLst/>
           </a:prstGeom>
           <a:noFill/>
-          <a:ln w="22225">
+          <a:ln w="19050">
             <a:solidFill>
               <a:schemeClr val="accent3"/>
             </a:solidFill>
@@ -6729,18 +5254,18 @@
       </p:sp>
       <p:sp>
         <p:nvSpPr>
-          <p:cNvPr id="19" name="node OpenClaw agent"/>
-          <p:cNvSpPr/>
-          <p:nvPr/>
-        </p:nvSpPr>
-        <p:spPr>
-          <a:xfrm>
-            <a:off x="1862328" y="1188720"/>
-            <a:ext cx="1203960" cy="640080"/>
+          <p:cNvPr id="20" name="3D WORLDS: REQUEST TO COMMITTED VERSION node OpenClaw agent"/>
+          <p:cNvSpPr/>
+          <p:nvPr/>
+        </p:nvSpPr>
+        <p:spPr>
+          <a:xfrm>
+            <a:off x="1859280" y="1344168"/>
+            <a:ext cx="1219200" cy="457200"/>
           </a:xfrm>
           <a:prstGeom prst="roundRect">
             <a:avLst>
-              <a:gd name="adj" fmla="val 11429"/>
+              <a:gd name="adj" fmla="val 16000"/>
             </a:avLst>
           </a:prstGeom>
           <a:solidFill>
@@ -6756,50 +5281,50 @@
       </p:sp>
       <p:sp>
         <p:nvSpPr>
-          <p:cNvPr id="20" name="node title OpenClaw agent"/>
-          <p:cNvSpPr txBox="1"/>
-          <p:nvPr/>
-        </p:nvSpPr>
-        <p:spPr>
-          <a:xfrm>
-            <a:off x="1862328" y="1188720"/>
-            <a:ext cx="1203960" cy="640080"/>
-          </a:xfrm>
-          <a:prstGeom prst="rect">
-            <a:avLst/>
-          </a:prstGeom>
-          <a:noFill/>
-          <a:ln/>
-        </p:spPr>
-        <p:txBody>
-          <a:bodyPr wrap="square" lIns="635" tIns="635" rIns="635" bIns="635" rtlCol="0" anchor="ctr"/>
+          <p:cNvPr id="21" name="3D WORLDS: REQUEST TO COMMITTED VERSION node title OpenClaw agent"/>
+          <p:cNvSpPr txBox="1"/>
+          <p:nvPr/>
+        </p:nvSpPr>
+        <p:spPr>
+          <a:xfrm>
+            <a:off x="1859280" y="1344168"/>
+            <a:ext cx="1219200" cy="457200"/>
+          </a:xfrm>
+          <a:prstGeom prst="rect">
+            <a:avLst/>
+          </a:prstGeom>
+          <a:noFill/>
+          <a:ln/>
+        </p:spPr>
+        <p:txBody>
+          <a:bodyPr wrap="square" lIns="508" tIns="508" rIns="508" bIns="508" rtlCol="0" anchor="ctr"/>
           <a:lstStyle/>
           <a:p>
             <a:pPr algn="ctr" indent="0" marL="0">
               <a:buNone/>
             </a:pPr>
             <a:r>
-              <a:rPr lang="en-US" sz="1050" b="1" dirty="0">
+              <a:rPr lang="en-US" sz="950" b="1" dirty="0">
                 <a:solidFill>
                   <a:schemeClr val="tx1"/>
                 </a:solidFill>
               </a:rPr>
               <a:t>OpenClaw agent</a:t>
             </a:r>
-            <a:endParaRPr lang="en-US" sz="1050" dirty="0"/>
-          </a:p>
-        </p:txBody>
-      </p:sp>
-      <p:sp>
-        <p:nvSpPr>
-          <p:cNvPr id="21" name="node sub OpenClaw agent"/>
-          <p:cNvSpPr txBox="1"/>
-          <p:nvPr/>
-        </p:nvSpPr>
-        <p:spPr>
-          <a:xfrm>
-            <a:off x="1789176" y="1883664"/>
-            <a:ext cx="1350264" cy="566928"/>
+            <a:endParaRPr lang="en-US" sz="950" dirty="0"/>
+          </a:p>
+        </p:txBody>
+      </p:sp>
+      <p:sp>
+        <p:nvSpPr>
+          <p:cNvPr id="22" name="3D WORLDS: REQUEST TO COMMITTED VERSION node sub OpenClaw agent"/>
+          <p:cNvSpPr txBox="1"/>
+          <p:nvPr/>
+        </p:nvSpPr>
+        <p:spPr>
+          <a:xfrm>
+            <a:off x="1804416" y="1837944"/>
+            <a:ext cx="1328928" cy="402336"/>
           </a:xfrm>
           <a:prstGeom prst="rect">
             <a:avLst/>
@@ -6815,33 +5340,33 @@
               <a:buNone/>
             </a:pPr>
             <a:r>
-              <a:rPr lang="en-US" sz="850" dirty="0">
+              <a:rPr lang="en-US" sz="750" dirty="0">
                 <a:solidFill>
                   <a:schemeClr val="tx2"/>
                 </a:solidFill>
               </a:rPr>
-              <a:t>reads state, proposes, repairs in a bounded budget</a:t>
-            </a:r>
-            <a:endParaRPr lang="en-US" sz="850" dirty="0"/>
-          </a:p>
-        </p:txBody>
-      </p:sp>
-      <p:sp>
-        <p:nvSpPr>
-          <p:cNvPr id="22" name="arrow"/>
-          <p:cNvSpPr/>
-          <p:nvPr/>
-        </p:nvSpPr>
-        <p:spPr>
-          <a:xfrm>
-            <a:off x="3102864" y="1508760"/>
+              <a:t>reads state, proposes, repairs at most 2 times, then fails honestly</a:t>
+            </a:r>
+            <a:endParaRPr lang="en-US" sz="750" dirty="0"/>
+          </a:p>
+        </p:txBody>
+      </p:sp>
+      <p:sp>
+        <p:nvSpPr>
+          <p:cNvPr id="23" name="arrow"/>
+          <p:cNvSpPr/>
+          <p:nvPr/>
+        </p:nvSpPr>
+        <p:spPr>
+          <a:xfrm>
+            <a:off x="3105912" y="1572768"/>
             <a:ext cx="128016" cy="914"/>
           </a:xfrm>
           <a:prstGeom prst="line">
             <a:avLst/>
           </a:prstGeom>
           <a:noFill/>
-          <a:ln w="22225">
+          <a:ln w="19050">
             <a:solidFill>
               <a:schemeClr val="accent3"/>
             </a:solidFill>
@@ -6852,18 +5377,18 @@
       </p:sp>
       <p:sp>
         <p:nvSpPr>
-          <p:cNvPr id="23" name="node Map to mode + biome"/>
-          <p:cNvSpPr/>
-          <p:nvPr/>
-        </p:nvSpPr>
-        <p:spPr>
-          <a:xfrm>
-            <a:off x="3267456" y="1188720"/>
-            <a:ext cx="1203960" cy="640080"/>
+          <p:cNvPr id="24" name="3D WORLDS: REQUEST TO COMMITTED VERSION node Map to mode + biome"/>
+          <p:cNvSpPr/>
+          <p:nvPr/>
+        </p:nvSpPr>
+        <p:spPr>
+          <a:xfrm>
+            <a:off x="3261360" y="1344168"/>
+            <a:ext cx="1219200" cy="457200"/>
           </a:xfrm>
           <a:prstGeom prst="roundRect">
             <a:avLst>
-              <a:gd name="adj" fmla="val 11429"/>
+              <a:gd name="adj" fmla="val 16000"/>
             </a:avLst>
           </a:prstGeom>
           <a:solidFill>
@@ -6879,50 +5404,50 @@
       </p:sp>
       <p:sp>
         <p:nvSpPr>
-          <p:cNvPr id="24" name="node title Map to mode + biome"/>
-          <p:cNvSpPr txBox="1"/>
-          <p:nvPr/>
-        </p:nvSpPr>
-        <p:spPr>
-          <a:xfrm>
-            <a:off x="3267456" y="1188720"/>
-            <a:ext cx="1203960" cy="640080"/>
-          </a:xfrm>
-          <a:prstGeom prst="rect">
-            <a:avLst/>
-          </a:prstGeom>
-          <a:noFill/>
-          <a:ln/>
-        </p:spPr>
-        <p:txBody>
-          <a:bodyPr wrap="square" lIns="635" tIns="635" rIns="635" bIns="635" rtlCol="0" anchor="ctr"/>
+          <p:cNvPr id="25" name="3D WORLDS: REQUEST TO COMMITTED VERSION node title Map to mode + biome"/>
+          <p:cNvSpPr txBox="1"/>
+          <p:nvPr/>
+        </p:nvSpPr>
+        <p:spPr>
+          <a:xfrm>
+            <a:off x="3261360" y="1344168"/>
+            <a:ext cx="1219200" cy="457200"/>
+          </a:xfrm>
+          <a:prstGeom prst="rect">
+            <a:avLst/>
+          </a:prstGeom>
+          <a:noFill/>
+          <a:ln/>
+        </p:spPr>
+        <p:txBody>
+          <a:bodyPr wrap="square" lIns="508" tIns="508" rIns="508" bIns="508" rtlCol="0" anchor="ctr"/>
           <a:lstStyle/>
           <a:p>
             <a:pPr algn="ctr" indent="0" marL="0">
               <a:buNone/>
             </a:pPr>
             <a:r>
-              <a:rPr lang="en-US" sz="1050" b="1" dirty="0">
+              <a:rPr lang="en-US" sz="950" b="1" dirty="0">
                 <a:solidFill>
                   <a:schemeClr val="tx1"/>
                 </a:solidFill>
               </a:rPr>
               <a:t>Map to mode + biome</a:t>
             </a:r>
-            <a:endParaRPr lang="en-US" sz="1050" dirty="0"/>
-          </a:p>
-        </p:txBody>
-      </p:sp>
-      <p:sp>
-        <p:nvSpPr>
-          <p:cNvPr id="25" name="node sub Map to mode + biome"/>
-          <p:cNvSpPr txBox="1"/>
-          <p:nvPr/>
-        </p:nvSpPr>
-        <p:spPr>
-          <a:xfrm>
-            <a:off x="3194304" y="1883664"/>
-            <a:ext cx="1350264" cy="566928"/>
+            <a:endParaRPr lang="en-US" sz="950" dirty="0"/>
+          </a:p>
+        </p:txBody>
+      </p:sp>
+      <p:sp>
+        <p:nvSpPr>
+          <p:cNvPr id="26" name="3D WORLDS: REQUEST TO COMMITTED VERSION node sub Map to mode + biome"/>
+          <p:cNvSpPr txBox="1"/>
+          <p:nvPr/>
+        </p:nvSpPr>
+        <p:spPr>
+          <a:xfrm>
+            <a:off x="3206496" y="1837944"/>
+            <a:ext cx="1328928" cy="402336"/>
           </a:xfrm>
           <a:prstGeom prst="rect">
             <a:avLst/>
@@ -6938,33 +5463,33 @@
               <a:buNone/>
             </a:pPr>
             <a:r>
-              <a:rPr lang="en-US" sz="850" dirty="0">
+              <a:rPr lang="en-US" sz="750" dirty="0">
                 <a:solidFill>
                   <a:schemeClr val="tx2"/>
                 </a:solidFill>
               </a:rPr>
-              <a:t>closest of 5 modes, 5 biomes; parameters from the brief; named in the summary</a:t>
-            </a:r>
-            <a:endParaRPr lang="en-US" sz="850" dirty="0"/>
-          </a:p>
-        </p:txBody>
-      </p:sp>
-      <p:sp>
-        <p:nvSpPr>
-          <p:cNvPr id="26" name="arrow"/>
-          <p:cNvSpPr/>
-          <p:nvPr/>
-        </p:nvSpPr>
-        <p:spPr>
-          <a:xfrm>
-            <a:off x="4507992" y="1508760"/>
+              <a:t>closest of 5 modes, 5 biomes; named in the summary</a:t>
+            </a:r>
+            <a:endParaRPr lang="en-US" sz="750" dirty="0"/>
+          </a:p>
+        </p:txBody>
+      </p:sp>
+      <p:sp>
+        <p:nvSpPr>
+          <p:cNvPr id="27" name="arrow"/>
+          <p:cNvSpPr/>
+          <p:nvPr/>
+        </p:nvSpPr>
+        <p:spPr>
+          <a:xfrm>
+            <a:off x="4507992" y="1572768"/>
             <a:ext cx="128016" cy="914"/>
           </a:xfrm>
           <a:prstGeom prst="line">
             <a:avLst/>
           </a:prstGeom>
           <a:noFill/>
-          <a:ln w="22225">
+          <a:ln w="19050">
             <a:solidFill>
               <a:schemeClr val="accent3"/>
             </a:solidFill>
@@ -6975,18 +5500,18 @@
       </p:sp>
       <p:sp>
         <p:nvSpPr>
-          <p:cNvPr id="27" name="node Beetle tools"/>
-          <p:cNvSpPr/>
-          <p:nvPr/>
-        </p:nvSpPr>
-        <p:spPr>
-          <a:xfrm>
-            <a:off x="4672584" y="1188720"/>
-            <a:ext cx="1203960" cy="640080"/>
+          <p:cNvPr id="28" name="3D WORLDS: REQUEST TO COMMITTED VERSION node Beetle tools"/>
+          <p:cNvSpPr/>
+          <p:nvPr/>
+        </p:nvSpPr>
+        <p:spPr>
+          <a:xfrm>
+            <a:off x="4663440" y="1344168"/>
+            <a:ext cx="1219200" cy="457200"/>
           </a:xfrm>
           <a:prstGeom prst="roundRect">
             <a:avLst>
-              <a:gd name="adj" fmla="val 11429"/>
+              <a:gd name="adj" fmla="val 16000"/>
             </a:avLst>
           </a:prstGeom>
           <a:solidFill>
@@ -7002,50 +5527,50 @@
       </p:sp>
       <p:sp>
         <p:nvSpPr>
-          <p:cNvPr id="28" name="node title Beetle tools"/>
-          <p:cNvSpPr txBox="1"/>
-          <p:nvPr/>
-        </p:nvSpPr>
-        <p:spPr>
-          <a:xfrm>
-            <a:off x="4672584" y="1188720"/>
-            <a:ext cx="1203960" cy="640080"/>
-          </a:xfrm>
-          <a:prstGeom prst="rect">
-            <a:avLst/>
-          </a:prstGeom>
-          <a:noFill/>
-          <a:ln/>
-        </p:spPr>
-        <p:txBody>
-          <a:bodyPr wrap="square" lIns="635" tIns="635" rIns="635" bIns="635" rtlCol="0" anchor="ctr"/>
+          <p:cNvPr id="29" name="3D WORLDS: REQUEST TO COMMITTED VERSION node title Beetle tools"/>
+          <p:cNvSpPr txBox="1"/>
+          <p:nvPr/>
+        </p:nvSpPr>
+        <p:spPr>
+          <a:xfrm>
+            <a:off x="4663440" y="1344168"/>
+            <a:ext cx="1219200" cy="457200"/>
+          </a:xfrm>
+          <a:prstGeom prst="rect">
+            <a:avLst/>
+          </a:prstGeom>
+          <a:noFill/>
+          <a:ln/>
+        </p:spPr>
+        <p:txBody>
+          <a:bodyPr wrap="square" lIns="508" tIns="508" rIns="508" bIns="508" rtlCol="0" anchor="ctr"/>
           <a:lstStyle/>
           <a:p>
             <a:pPr algn="ctr" indent="0" marL="0">
               <a:buNone/>
             </a:pPr>
             <a:r>
-              <a:rPr lang="en-US" sz="1050" b="1" dirty="0">
+              <a:rPr lang="en-US" sz="950" b="1" dirty="0">
                 <a:solidFill>
                   <a:schemeClr val="tx1"/>
                 </a:solidFill>
               </a:rPr>
               <a:t>Beetle tools</a:t>
             </a:r>
-            <a:endParaRPr lang="en-US" sz="1050" dirty="0"/>
-          </a:p>
-        </p:txBody>
-      </p:sp>
-      <p:sp>
-        <p:nvSpPr>
-          <p:cNvPr id="29" name="node sub Beetle tools"/>
-          <p:cNvSpPr txBox="1"/>
-          <p:nvPr/>
-        </p:nvSpPr>
-        <p:spPr>
-          <a:xfrm>
-            <a:off x="4599432" y="1883664"/>
-            <a:ext cx="1350264" cy="566928"/>
+            <a:endParaRPr lang="en-US" sz="950" dirty="0"/>
+          </a:p>
+        </p:txBody>
+      </p:sp>
+      <p:sp>
+        <p:nvSpPr>
+          <p:cNvPr id="30" name="3D WORLDS: REQUEST TO COMMITTED VERSION node sub Beetle tools"/>
+          <p:cNvSpPr txBox="1"/>
+          <p:nvPr/>
+        </p:nvSpPr>
+        <p:spPr>
+          <a:xfrm>
+            <a:off x="4608576" y="1837944"/>
+            <a:ext cx="1328928" cy="402336"/>
           </a:xfrm>
           <a:prstGeom prst="rect">
             <a:avLst/>
@@ -7061,33 +5586,33 @@
               <a:buNone/>
             </a:pPr>
             <a:r>
-              <a:rPr lang="en-US" sz="850" dirty="0">
+              <a:rPr lang="en-US" sz="750" dirty="0">
                 <a:solidFill>
                   <a:schemeClr val="tx2"/>
                 </a:solidFill>
               </a:rPr>
-              <a:t>schema-checked JSON only, nothing executed; add_island for extensions</a:t>
-            </a:r>
-            <a:endParaRPr lang="en-US" sz="850" dirty="0"/>
-          </a:p>
-        </p:txBody>
-      </p:sp>
-      <p:sp>
-        <p:nvSpPr>
-          <p:cNvPr id="30" name="arrow"/>
-          <p:cNvSpPr/>
-          <p:nvPr/>
-        </p:nvSpPr>
-        <p:spPr>
-          <a:xfrm>
-            <a:off x="5913120" y="1508760"/>
+              <a:t>schema-checked JSON only, nothing executed; add_island to grow</a:t>
+            </a:r>
+            <a:endParaRPr lang="en-US" sz="750" dirty="0"/>
+          </a:p>
+        </p:txBody>
+      </p:sp>
+      <p:sp>
+        <p:nvSpPr>
+          <p:cNvPr id="31" name="arrow"/>
+          <p:cNvSpPr/>
+          <p:nvPr/>
+        </p:nvSpPr>
+        <p:spPr>
+          <a:xfrm>
+            <a:off x="5910072" y="1572768"/>
             <a:ext cx="128016" cy="914"/>
           </a:xfrm>
           <a:prstGeom prst="line">
             <a:avLst/>
           </a:prstGeom>
           <a:noFill/>
-          <a:ln w="22225">
+          <a:ln w="19050">
             <a:solidFill>
               <a:schemeClr val="accent3"/>
             </a:solidFill>
@@ -7098,18 +5623,18 @@
       </p:sp>
       <p:sp>
         <p:nvSpPr>
-          <p:cNvPr id="31" name="node Server validator and commit"/>
-          <p:cNvSpPr/>
-          <p:nvPr/>
-        </p:nvSpPr>
-        <p:spPr>
-          <a:xfrm>
-            <a:off x="6077712" y="1188720"/>
-            <a:ext cx="1203960" cy="640080"/>
+          <p:cNvPr id="32" name="3D WORLDS: REQUEST TO COMMITTED VERSION node Server validator and commit"/>
+          <p:cNvSpPr/>
+          <p:nvPr/>
+        </p:nvSpPr>
+        <p:spPr>
+          <a:xfrm>
+            <a:off x="6065520" y="1344168"/>
+            <a:ext cx="1219200" cy="457200"/>
           </a:xfrm>
           <a:prstGeom prst="roundRect">
             <a:avLst>
-              <a:gd name="adj" fmla="val 11429"/>
+              <a:gd name="adj" fmla="val 16000"/>
             </a:avLst>
           </a:prstGeom>
           <a:solidFill>
@@ -7125,50 +5650,50 @@
       </p:sp>
       <p:sp>
         <p:nvSpPr>
-          <p:cNvPr id="32" name="node title Server validator and commit"/>
-          <p:cNvSpPr txBox="1"/>
-          <p:nvPr/>
-        </p:nvSpPr>
-        <p:spPr>
-          <a:xfrm>
-            <a:off x="6077712" y="1188720"/>
-            <a:ext cx="1203960" cy="640080"/>
-          </a:xfrm>
-          <a:prstGeom prst="rect">
-            <a:avLst/>
-          </a:prstGeom>
-          <a:noFill/>
-          <a:ln/>
-        </p:spPr>
-        <p:txBody>
-          <a:bodyPr wrap="square" lIns="635" tIns="635" rIns="635" bIns="635" rtlCol="0" anchor="ctr"/>
+          <p:cNvPr id="33" name="3D WORLDS: REQUEST TO COMMITTED VERSION node title Server validator and commit"/>
+          <p:cNvSpPr txBox="1"/>
+          <p:nvPr/>
+        </p:nvSpPr>
+        <p:spPr>
+          <a:xfrm>
+            <a:off x="6065520" y="1344168"/>
+            <a:ext cx="1219200" cy="457200"/>
+          </a:xfrm>
+          <a:prstGeom prst="rect">
+            <a:avLst/>
+          </a:prstGeom>
+          <a:noFill/>
+          <a:ln/>
+        </p:spPr>
+        <p:txBody>
+          <a:bodyPr wrap="square" lIns="508" tIns="508" rIns="508" bIns="508" rtlCol="0" anchor="ctr"/>
           <a:lstStyle/>
           <a:p>
             <a:pPr algn="ctr" indent="0" marL="0">
               <a:buNone/>
             </a:pPr>
             <a:r>
-              <a:rPr lang="en-US" sz="1050" b="1" dirty="0">
+              <a:rPr lang="en-US" sz="950" b="1" dirty="0">
                 <a:solidFill>
                   <a:schemeClr val="bg1"/>
                 </a:solidFill>
               </a:rPr>
               <a:t>Server validator and commit</a:t>
             </a:r>
-            <a:endParaRPr lang="en-US" sz="1050" dirty="0"/>
-          </a:p>
-        </p:txBody>
-      </p:sp>
-      <p:sp>
-        <p:nvSpPr>
-          <p:cNvPr id="33" name="node sub Server validator and commit"/>
-          <p:cNvSpPr txBox="1"/>
-          <p:nvPr/>
-        </p:nvSpPr>
-        <p:spPr>
-          <a:xfrm>
-            <a:off x="6004560" y="1883664"/>
-            <a:ext cx="1350264" cy="566928"/>
+            <a:endParaRPr lang="en-US" sz="950" dirty="0"/>
+          </a:p>
+        </p:txBody>
+      </p:sp>
+      <p:sp>
+        <p:nvSpPr>
+          <p:cNvPr id="34" name="3D WORLDS: REQUEST TO COMMITTED VERSION node sub Server validator and commit"/>
+          <p:cNvSpPr txBox="1"/>
+          <p:nvPr/>
+        </p:nvSpPr>
+        <p:spPr>
+          <a:xfrm>
+            <a:off x="6010656" y="1837944"/>
+            <a:ext cx="1328928" cy="402336"/>
           </a:xfrm>
           <a:prstGeom prst="rect">
             <a:avLst/>
@@ -7184,33 +5709,33 @@
               <a:buNone/>
             </a:pPr>
             <a:r>
-              <a:rPr lang="en-US" sz="850" dirty="0">
+              <a:rPr lang="en-US" sz="750" dirty="0">
                 <a:solidFill>
                   <a:schemeClr val="tx2"/>
                 </a:solidFill>
               </a:rPr>
               <a:t>deterministic game code, server-issued proof</a:t>
             </a:r>
-            <a:endParaRPr lang="en-US" sz="850" dirty="0"/>
-          </a:p>
-        </p:txBody>
-      </p:sp>
-      <p:sp>
-        <p:nvSpPr>
-          <p:cNvPr id="34" name="arrow"/>
-          <p:cNvSpPr/>
-          <p:nvPr/>
-        </p:nvSpPr>
-        <p:spPr>
-          <a:xfrm>
-            <a:off x="7318248" y="1508760"/>
+            <a:endParaRPr lang="en-US" sz="750" dirty="0"/>
+          </a:p>
+        </p:txBody>
+      </p:sp>
+      <p:sp>
+        <p:nvSpPr>
+          <p:cNvPr id="35" name="arrow"/>
+          <p:cNvSpPr/>
+          <p:nvPr/>
+        </p:nvSpPr>
+        <p:spPr>
+          <a:xfrm>
+            <a:off x="7312152" y="1572768"/>
             <a:ext cx="128016" cy="914"/>
           </a:xfrm>
           <a:prstGeom prst="line">
             <a:avLst/>
           </a:prstGeom>
           <a:noFill/>
-          <a:ln w="22225">
+          <a:ln w="19050">
             <a:solidFill>
               <a:schemeClr val="accent3"/>
             </a:solidFill>
@@ -7221,18 +5746,18 @@
       </p:sp>
       <p:sp>
         <p:nvSpPr>
-          <p:cNvPr id="35" name="node Players"/>
-          <p:cNvSpPr/>
-          <p:nvPr/>
-        </p:nvSpPr>
-        <p:spPr>
-          <a:xfrm>
-            <a:off x="7482840" y="1188720"/>
-            <a:ext cx="1203960" cy="640080"/>
+          <p:cNvPr id="36" name="3D WORLDS: REQUEST TO COMMITTED VERSION node Players"/>
+          <p:cNvSpPr/>
+          <p:nvPr/>
+        </p:nvSpPr>
+        <p:spPr>
+          <a:xfrm>
+            <a:off x="7467600" y="1344168"/>
+            <a:ext cx="1219200" cy="457200"/>
           </a:xfrm>
           <a:prstGeom prst="roundRect">
             <a:avLst>
-              <a:gd name="adj" fmla="val 11429"/>
+              <a:gd name="adj" fmla="val 16000"/>
             </a:avLst>
           </a:prstGeom>
           <a:solidFill>
@@ -7248,50 +5773,50 @@
       </p:sp>
       <p:sp>
         <p:nvSpPr>
-          <p:cNvPr id="36" name="node title Players"/>
-          <p:cNvSpPr txBox="1"/>
-          <p:nvPr/>
-        </p:nvSpPr>
-        <p:spPr>
-          <a:xfrm>
-            <a:off x="7482840" y="1188720"/>
-            <a:ext cx="1203960" cy="640080"/>
-          </a:xfrm>
-          <a:prstGeom prst="rect">
-            <a:avLst/>
-          </a:prstGeom>
-          <a:noFill/>
-          <a:ln/>
-        </p:spPr>
-        <p:txBody>
-          <a:bodyPr wrap="square" lIns="635" tIns="635" rIns="635" bIns="635" rtlCol="0" anchor="ctr"/>
+          <p:cNvPr id="37" name="3D WORLDS: REQUEST TO COMMITTED VERSION node title Players"/>
+          <p:cNvSpPr txBox="1"/>
+          <p:nvPr/>
+        </p:nvSpPr>
+        <p:spPr>
+          <a:xfrm>
+            <a:off x="7467600" y="1344168"/>
+            <a:ext cx="1219200" cy="457200"/>
+          </a:xfrm>
+          <a:prstGeom prst="rect">
+            <a:avLst/>
+          </a:prstGeom>
+          <a:noFill/>
+          <a:ln/>
+        </p:spPr>
+        <p:txBody>
+          <a:bodyPr wrap="square" lIns="508" tIns="508" rIns="508" bIns="508" rtlCol="0" anchor="ctr"/>
           <a:lstStyle/>
           <a:p>
             <a:pPr algn="ctr" indent="0" marL="0">
               <a:buNone/>
             </a:pPr>
             <a:r>
-              <a:rPr lang="en-US" sz="1050" b="1" dirty="0">
+              <a:rPr lang="en-US" sz="950" b="1" dirty="0">
                 <a:solidFill>
                   <a:schemeClr val="tx1"/>
                 </a:solidFill>
               </a:rPr>
               <a:t>Players</a:t>
             </a:r>
-            <a:endParaRPr lang="en-US" sz="1050" dirty="0"/>
-          </a:p>
-        </p:txBody>
-      </p:sp>
-      <p:sp>
-        <p:nvSpPr>
-          <p:cNvPr id="37" name="node sub Players"/>
-          <p:cNvSpPr txBox="1"/>
-          <p:nvPr/>
-        </p:nvSpPr>
-        <p:spPr>
-          <a:xfrm>
-            <a:off x="7409688" y="1883664"/>
-            <a:ext cx="1350264" cy="566928"/>
+            <a:endParaRPr lang="en-US" sz="950" dirty="0"/>
+          </a:p>
+        </p:txBody>
+      </p:sp>
+      <p:sp>
+        <p:nvSpPr>
+          <p:cNvPr id="38" name="3D WORLDS: REQUEST TO COMMITTED VERSION node sub Players"/>
+          <p:cNvSpPr txBox="1"/>
+          <p:nvPr/>
+        </p:nvSpPr>
+        <p:spPr>
+          <a:xfrm>
+            <a:off x="7412736" y="1837944"/>
+            <a:ext cx="1328928" cy="402336"/>
           </a:xfrm>
           <a:prstGeom prst="rect">
             <a:avLst/>
@@ -7307,137 +5832,67 @@
               <a:buNone/>
             </a:pPr>
             <a:r>
-              <a:rPr lang="en-US" sz="850" dirty="0">
+              <a:rPr lang="en-US" sz="750" dirty="0">
                 <a:solidFill>
                   <a:schemeClr val="tx2"/>
                 </a:solidFill>
               </a:rPr>
               <a:t>same session, same progress, new version</a:t>
             </a:r>
+            <a:endParaRPr lang="en-US" sz="750" dirty="0"/>
+          </a:p>
+        </p:txBody>
+      </p:sp>
+      <p:sp>
+        <p:nvSpPr>
+          <p:cNvPr id="39" name="label BEETLE 2D STUDIO (/2d): IDEA TO PLAYABLE GAME"/>
+          <p:cNvSpPr txBox="1"/>
+          <p:nvPr/>
+        </p:nvSpPr>
+        <p:spPr>
+          <a:xfrm>
+            <a:off x="457200" y="2331720"/>
+            <a:ext cx="8229600" cy="182880"/>
+          </a:xfrm>
+          <a:prstGeom prst="rect">
+            <a:avLst/>
+          </a:prstGeom>
+          <a:noFill/>
+          <a:ln/>
+        </p:spPr>
+        <p:txBody>
+          <a:bodyPr wrap="square" lIns="0" tIns="0" rIns="0" bIns="0" rtlCol="0" anchor="ctr"/>
+          <a:lstStyle/>
+          <a:p>
+            <a:pPr indent="0" marL="0">
+              <a:buNone/>
+            </a:pPr>
+            <a:r>
+              <a:rPr lang="en-US" sz="850" b="1" spc="200" kern="0" dirty="0">
+                <a:solidFill>
+                  <a:schemeClr val="accent1"/>
+                </a:solidFill>
+              </a:rPr>
+              <a:t>BEETLE 2D STUDIO (/2d): IDEA TO PLAYABLE GAME</a:t>
+            </a:r>
             <a:endParaRPr lang="en-US" sz="850" dirty="0"/>
           </a:p>
         </p:txBody>
       </p:sp>
       <p:sp>
         <p:nvSpPr>
-          <p:cNvPr id="38" name="loop down"/>
-          <p:cNvSpPr/>
-          <p:nvPr/>
-        </p:nvSpPr>
-        <p:spPr>
-          <a:xfrm>
-            <a:off x="6679692" y="2468880"/>
-            <a:ext cx="914" cy="182880"/>
-          </a:xfrm>
-          <a:prstGeom prst="line">
-            <a:avLst/>
-          </a:prstGeom>
-          <a:noFill/>
-          <a:ln w="15875">
-            <a:solidFill>
-              <a:schemeClr val="accent1"/>
-            </a:solidFill>
-            <a:prstDash val="sysDash"/>
-          </a:ln>
-        </p:spPr>
-      </p:sp>
-      <p:sp>
-        <p:nvSpPr>
-          <p:cNvPr id="39" name="loop across"/>
-          <p:cNvSpPr/>
-          <p:nvPr/>
-        </p:nvSpPr>
-        <p:spPr>
-          <a:xfrm>
-            <a:off x="2464308" y="2651760"/>
-            <a:ext cx="4215384" cy="914"/>
-          </a:xfrm>
-          <a:prstGeom prst="line">
-            <a:avLst/>
-          </a:prstGeom>
-          <a:noFill/>
-          <a:ln w="15875">
-            <a:solidFill>
-              <a:schemeClr val="accent1"/>
-            </a:solidFill>
-            <a:prstDash val="sysDash"/>
-          </a:ln>
-        </p:spPr>
-      </p:sp>
-      <p:sp>
-        <p:nvSpPr>
-          <p:cNvPr id="40" name="arrow"/>
-          <p:cNvSpPr/>
-          <p:nvPr/>
-        </p:nvSpPr>
-        <p:spPr>
-          <a:xfrm flipV="1">
-            <a:off x="2464308" y="2468880"/>
-            <a:ext cx="914" cy="182880"/>
-          </a:xfrm>
-          <a:prstGeom prst="line">
-            <a:avLst/>
-          </a:prstGeom>
-          <a:noFill/>
-          <a:ln w="15875">
-            <a:solidFill>
-              <a:schemeClr val="accent1"/>
-            </a:solidFill>
-            <a:prstDash val="solid"/>
-            <a:tailEnd type="triangle"/>
-          </a:ln>
-        </p:spPr>
-      </p:sp>
-      <p:sp>
-        <p:nvSpPr>
-          <p:cNvPr id="41" name="loop caption"/>
-          <p:cNvSpPr txBox="1"/>
-          <p:nvPr/>
-        </p:nvSpPr>
-        <p:spPr>
-          <a:xfrm>
-            <a:off x="2601468" y="2697480"/>
-            <a:ext cx="3941064" cy="274320"/>
-          </a:xfrm>
-          <a:prstGeom prst="rect">
-            <a:avLst/>
-          </a:prstGeom>
-          <a:noFill/>
-          <a:ln/>
-        </p:spPr>
-        <p:txBody>
-          <a:bodyPr wrap="square" lIns="0" tIns="0" rIns="0" bIns="0" rtlCol="0" anchor="t"/>
-          <a:lstStyle/>
-          <a:p>
-            <a:pPr algn="ctr" indent="0" marL="0">
-              <a:buNone/>
-            </a:pPr>
-            <a:r>
-              <a:rPr lang="en-US" sz="900" i="1" dirty="0">
-                <a:solidFill>
-                  <a:schemeClr val="accent1"/>
-                </a:solidFill>
-              </a:rPr>
-              <a:t>validation issues (including MODE_INVALID) go back for repair, at most 2 attempts, then the request fails honestly</a:t>
-            </a:r>
-            <a:endParaRPr lang="en-US" sz="900" dirty="0"/>
-          </a:p>
-        </p:txBody>
-      </p:sp>
-      <p:sp>
-        <p:nvSpPr>
-          <p:cNvPr id="42" name="lower card 1"/>
-          <p:cNvSpPr/>
-          <p:nvPr/>
-        </p:nvSpPr>
-        <p:spPr>
-          <a:xfrm>
-            <a:off x="457200" y="3017520"/>
-            <a:ext cx="2651760" cy="1645920"/>
+          <p:cNvPr id="40" name="BEETLE 2D STUDIO (/2d): IDEA TO PLAYABLE GAME node Idea in words"/>
+          <p:cNvSpPr/>
+          <p:nvPr/>
+        </p:nvSpPr>
+        <p:spPr>
+          <a:xfrm>
+            <a:off x="457200" y="2578608"/>
+            <a:ext cx="1499616" cy="457200"/>
           </a:xfrm>
           <a:prstGeom prst="roundRect">
             <a:avLst>
-              <a:gd name="adj" fmla="val 4444"/>
+              <a:gd name="adj" fmla="val 16000"/>
             </a:avLst>
           </a:prstGeom>
           <a:solidFill>
@@ -7453,14 +5908,605 @@
       </p:sp>
       <p:sp>
         <p:nvSpPr>
-          <p:cNvPr id="43" name="label TWO KINDS OF STATE"/>
-          <p:cNvSpPr txBox="1"/>
-          <p:nvPr/>
-        </p:nvSpPr>
-        <p:spPr>
-          <a:xfrm>
-            <a:off x="594360" y="3127248"/>
-            <a:ext cx="2377440" cy="228600"/>
+          <p:cNvPr id="41" name="BEETLE 2D STUDIO (/2d): IDEA TO PLAYABLE GAME node title Idea in words"/>
+          <p:cNvSpPr txBox="1"/>
+          <p:nvPr/>
+        </p:nvSpPr>
+        <p:spPr>
+          <a:xfrm>
+            <a:off x="457200" y="2578608"/>
+            <a:ext cx="1499616" cy="457200"/>
+          </a:xfrm>
+          <a:prstGeom prst="rect">
+            <a:avLst/>
+          </a:prstGeom>
+          <a:noFill/>
+          <a:ln/>
+        </p:spPr>
+        <p:txBody>
+          <a:bodyPr wrap="square" lIns="508" tIns="508" rIns="508" bIns="508" rtlCol="0" anchor="ctr"/>
+          <a:lstStyle/>
+          <a:p>
+            <a:pPr algn="ctr" indent="0" marL="0">
+              <a:buNone/>
+            </a:pPr>
+            <a:r>
+              <a:rPr lang="en-US" sz="950" b="1" dirty="0">
+                <a:solidFill>
+                  <a:schemeClr val="tx1"/>
+                </a:solidFill>
+              </a:rPr>
+              <a:t>Idea in words</a:t>
+            </a:r>
+            <a:endParaRPr lang="en-US" sz="950" dirty="0"/>
+          </a:p>
+        </p:txBody>
+      </p:sp>
+      <p:sp>
+        <p:nvSpPr>
+          <p:cNvPr id="42" name="BEETLE 2D STUDIO (/2d): IDEA TO PLAYABLE GAME node sub Idea in words"/>
+          <p:cNvSpPr txBox="1"/>
+          <p:nvPr/>
+        </p:nvSpPr>
+        <p:spPr>
+          <a:xfrm>
+            <a:off x="402336" y="3072384"/>
+            <a:ext cx="1609344" cy="402336"/>
+          </a:xfrm>
+          <a:prstGeom prst="rect">
+            <a:avLst/>
+          </a:prstGeom>
+          <a:noFill/>
+          <a:ln/>
+        </p:spPr>
+        <p:txBody>
+          <a:bodyPr wrap="square" lIns="0" tIns="0" rIns="0" bIns="0" rtlCol="0" anchor="t"/>
+          <a:lstStyle/>
+          <a:p>
+            <a:pPr algn="ctr" indent="0" marL="0">
+              <a:buNone/>
+            </a:pPr>
+            <a:r>
+              <a:rPr lang="en-US" sz="750" dirty="0">
+                <a:solidFill>
+                  <a:schemeClr val="tx2"/>
+                </a:solidFill>
+              </a:rPr>
+              <a:t>the genre the person names wins over the model's guess</a:t>
+            </a:r>
+            <a:endParaRPr lang="en-US" sz="750" dirty="0"/>
+          </a:p>
+        </p:txBody>
+      </p:sp>
+      <p:sp>
+        <p:nvSpPr>
+          <p:cNvPr id="43" name="arrow"/>
+          <p:cNvSpPr/>
+          <p:nvPr/>
+        </p:nvSpPr>
+        <p:spPr>
+          <a:xfrm>
+            <a:off x="1984248" y="2807208"/>
+            <a:ext cx="128016" cy="914"/>
+          </a:xfrm>
+          <a:prstGeom prst="line">
+            <a:avLst/>
+          </a:prstGeom>
+          <a:noFill/>
+          <a:ln w="19050">
+            <a:solidFill>
+              <a:schemeClr val="accent3"/>
+            </a:solidFill>
+            <a:prstDash val="solid"/>
+            <a:tailEnd type="triangle"/>
+          </a:ln>
+        </p:spPr>
+      </p:sp>
+      <p:sp>
+        <p:nvSpPr>
+          <p:cNvPr id="44" name="BEETLE 2D STUDIO (/2d): IDEA TO PLAYABLE GAME node Design doc"/>
+          <p:cNvSpPr/>
+          <p:nvPr/>
+        </p:nvSpPr>
+        <p:spPr>
+          <a:xfrm>
+            <a:off x="2139696" y="2578608"/>
+            <a:ext cx="1499616" cy="457200"/>
+          </a:xfrm>
+          <a:prstGeom prst="roundRect">
+            <a:avLst>
+              <a:gd name="adj" fmla="val 16000"/>
+            </a:avLst>
+          </a:prstGeom>
+          <a:solidFill>
+            <a:schemeClr val="bg2"/>
+          </a:solidFill>
+          <a:ln w="19050">
+            <a:solidFill>
+              <a:schemeClr val="accent3"/>
+            </a:solidFill>
+            <a:prstDash val="sysDash"/>
+          </a:ln>
+        </p:spPr>
+      </p:sp>
+      <p:sp>
+        <p:nvSpPr>
+          <p:cNvPr id="45" name="BEETLE 2D STUDIO (/2d): IDEA TO PLAYABLE GAME node title Design doc"/>
+          <p:cNvSpPr txBox="1"/>
+          <p:nvPr/>
+        </p:nvSpPr>
+        <p:spPr>
+          <a:xfrm>
+            <a:off x="2139696" y="2578608"/>
+            <a:ext cx="1499616" cy="457200"/>
+          </a:xfrm>
+          <a:prstGeom prst="rect">
+            <a:avLst/>
+          </a:prstGeom>
+          <a:noFill/>
+          <a:ln/>
+        </p:spPr>
+        <p:txBody>
+          <a:bodyPr wrap="square" lIns="508" tIns="508" rIns="508" bIns="508" rtlCol="0" anchor="ctr"/>
+          <a:lstStyle/>
+          <a:p>
+            <a:pPr algn="ctr" indent="0" marL="0">
+              <a:buNone/>
+            </a:pPr>
+            <a:r>
+              <a:rPr lang="en-US" sz="950" b="1" dirty="0">
+                <a:solidFill>
+                  <a:schemeClr val="tx1"/>
+                </a:solidFill>
+              </a:rPr>
+              <a:t>Design doc</a:t>
+            </a:r>
+            <a:endParaRPr lang="en-US" sz="950" dirty="0"/>
+          </a:p>
+        </p:txBody>
+      </p:sp>
+      <p:sp>
+        <p:nvSpPr>
+          <p:cNvPr id="46" name="BEETLE 2D STUDIO (/2d): IDEA TO PLAYABLE GAME node sub Design doc"/>
+          <p:cNvSpPr txBox="1"/>
+          <p:nvPr/>
+        </p:nvSpPr>
+        <p:spPr>
+          <a:xfrm>
+            <a:off x="2084832" y="3072384"/>
+            <a:ext cx="1609344" cy="402336"/>
+          </a:xfrm>
+          <a:prstGeom prst="rect">
+            <a:avLst/>
+          </a:prstGeom>
+          <a:noFill/>
+          <a:ln/>
+        </p:spPr>
+        <p:txBody>
+          <a:bodyPr wrap="square" lIns="0" tIns="0" rIns="0" bIns="0" rtlCol="0" anchor="t"/>
+          <a:lstStyle/>
+          <a:p>
+            <a:pPr algn="ctr" indent="0" marL="0">
+              <a:buNone/>
+            </a:pPr>
+            <a:r>
+              <a:rPr lang="en-US" sz="750" dirty="0">
+                <a:solidFill>
+                  <a:schemeClr val="tx2"/>
+                </a:solidFill>
+              </a:rPr>
+              <a:t>local model, schema-constrained JSON through /api/2d/llm</a:t>
+            </a:r>
+            <a:endParaRPr lang="en-US" sz="750" dirty="0"/>
+          </a:p>
+        </p:txBody>
+      </p:sp>
+      <p:sp>
+        <p:nvSpPr>
+          <p:cNvPr id="47" name="arrow"/>
+          <p:cNvSpPr/>
+          <p:nvPr/>
+        </p:nvSpPr>
+        <p:spPr>
+          <a:xfrm>
+            <a:off x="3666744" y="2807208"/>
+            <a:ext cx="128016" cy="914"/>
+          </a:xfrm>
+          <a:prstGeom prst="line">
+            <a:avLst/>
+          </a:prstGeom>
+          <a:noFill/>
+          <a:ln w="19050">
+            <a:solidFill>
+              <a:schemeClr val="accent3"/>
+            </a:solidFill>
+            <a:prstDash val="solid"/>
+            <a:tailEnd type="triangle"/>
+          </a:ln>
+        </p:spPr>
+      </p:sp>
+      <p:sp>
+        <p:nvSpPr>
+          <p:cNvPr id="48" name="BEETLE 2D STUDIO (/2d): IDEA TO PLAYABLE GAME node Game Spec and assets"/>
+          <p:cNvSpPr/>
+          <p:nvPr/>
+        </p:nvSpPr>
+        <p:spPr>
+          <a:xfrm>
+            <a:off x="3822192" y="2578608"/>
+            <a:ext cx="1499616" cy="457200"/>
+          </a:xfrm>
+          <a:prstGeom prst="roundRect">
+            <a:avLst>
+              <a:gd name="adj" fmla="val 16000"/>
+            </a:avLst>
+          </a:prstGeom>
+          <a:solidFill>
+            <a:schemeClr val="bg2"/>
+          </a:solidFill>
+          <a:ln w="9525">
+            <a:solidFill>
+              <a:schemeClr val="accent4"/>
+            </a:solidFill>
+            <a:prstDash val="solid"/>
+          </a:ln>
+        </p:spPr>
+      </p:sp>
+      <p:sp>
+        <p:nvSpPr>
+          <p:cNvPr id="49" name="BEETLE 2D STUDIO (/2d): IDEA TO PLAYABLE GAME node title Game Spec and assets"/>
+          <p:cNvSpPr txBox="1"/>
+          <p:nvPr/>
+        </p:nvSpPr>
+        <p:spPr>
+          <a:xfrm>
+            <a:off x="3822192" y="2578608"/>
+            <a:ext cx="1499616" cy="457200"/>
+          </a:xfrm>
+          <a:prstGeom prst="rect">
+            <a:avLst/>
+          </a:prstGeom>
+          <a:noFill/>
+          <a:ln/>
+        </p:spPr>
+        <p:txBody>
+          <a:bodyPr wrap="square" lIns="508" tIns="508" rIns="508" bIns="508" rtlCol="0" anchor="ctr"/>
+          <a:lstStyle/>
+          <a:p>
+            <a:pPr algn="ctr" indent="0" marL="0">
+              <a:buNone/>
+            </a:pPr>
+            <a:r>
+              <a:rPr lang="en-US" sz="950" b="1" dirty="0">
+                <a:solidFill>
+                  <a:schemeClr val="tx1"/>
+                </a:solidFill>
+              </a:rPr>
+              <a:t>Game Spec and assets</a:t>
+            </a:r>
+            <a:endParaRPr lang="en-US" sz="950" dirty="0"/>
+          </a:p>
+        </p:txBody>
+      </p:sp>
+      <p:sp>
+        <p:nvSpPr>
+          <p:cNvPr id="50" name="BEETLE 2D STUDIO (/2d): IDEA TO PLAYABLE GAME node sub Game Spec and assets"/>
+          <p:cNvSpPr txBox="1"/>
+          <p:nvPr/>
+        </p:nvSpPr>
+        <p:spPr>
+          <a:xfrm>
+            <a:off x="3767328" y="3072384"/>
+            <a:ext cx="1609344" cy="402336"/>
+          </a:xfrm>
+          <a:prstGeom prst="rect">
+            <a:avLst/>
+          </a:prstGeom>
+          <a:noFill/>
+          <a:ln/>
+        </p:spPr>
+        <p:txBody>
+          <a:bodyPr wrap="square" lIns="0" tIns="0" rIns="0" bIns="0" rtlCol="0" anchor="t"/>
+          <a:lstStyle/>
+          <a:p>
+            <a:pPr algn="ctr" indent="0" marL="0">
+              <a:buNone/>
+            </a:pPr>
+            <a:r>
+              <a:rPr lang="en-US" sz="750" dirty="0">
+                <a:solidFill>
+                  <a:schemeClr val="tx2"/>
+                </a:solidFill>
+              </a:rPr>
+              <a:t>procedural pixel sprites, tiles, sound and music</a:t>
+            </a:r>
+            <a:endParaRPr lang="en-US" sz="750" dirty="0"/>
+          </a:p>
+        </p:txBody>
+      </p:sp>
+      <p:sp>
+        <p:nvSpPr>
+          <p:cNvPr id="51" name="arrow"/>
+          <p:cNvSpPr/>
+          <p:nvPr/>
+        </p:nvSpPr>
+        <p:spPr>
+          <a:xfrm>
+            <a:off x="5349240" y="2807208"/>
+            <a:ext cx="128016" cy="914"/>
+          </a:xfrm>
+          <a:prstGeom prst="line">
+            <a:avLst/>
+          </a:prstGeom>
+          <a:noFill/>
+          <a:ln w="19050">
+            <a:solidFill>
+              <a:schemeClr val="accent3"/>
+            </a:solidFill>
+            <a:prstDash val="solid"/>
+            <a:tailEnd type="triangle"/>
+          </a:ln>
+        </p:spPr>
+      </p:sp>
+      <p:sp>
+        <p:nvSpPr>
+          <p:cNvPr id="52" name="BEETLE 2D STUDIO (/2d): IDEA TO PLAYABLE GAME node Spec validator and repair"/>
+          <p:cNvSpPr/>
+          <p:nvPr/>
+        </p:nvSpPr>
+        <p:spPr>
+          <a:xfrm>
+            <a:off x="5504688" y="2578608"/>
+            <a:ext cx="1499616" cy="457200"/>
+          </a:xfrm>
+          <a:prstGeom prst="roundRect">
+            <a:avLst>
+              <a:gd name="adj" fmla="val 16000"/>
+            </a:avLst>
+          </a:prstGeom>
+          <a:solidFill>
+            <a:schemeClr val="accent1"/>
+          </a:solidFill>
+          <a:ln w="9525">
+            <a:solidFill>
+              <a:schemeClr val="accent1"/>
+            </a:solidFill>
+            <a:prstDash val="solid"/>
+          </a:ln>
+        </p:spPr>
+      </p:sp>
+      <p:sp>
+        <p:nvSpPr>
+          <p:cNvPr id="53" name="BEETLE 2D STUDIO (/2d): IDEA TO PLAYABLE GAME node title Spec validator and repair"/>
+          <p:cNvSpPr txBox="1"/>
+          <p:nvPr/>
+        </p:nvSpPr>
+        <p:spPr>
+          <a:xfrm>
+            <a:off x="5504688" y="2578608"/>
+            <a:ext cx="1499616" cy="457200"/>
+          </a:xfrm>
+          <a:prstGeom prst="rect">
+            <a:avLst/>
+          </a:prstGeom>
+          <a:noFill/>
+          <a:ln/>
+        </p:spPr>
+        <p:txBody>
+          <a:bodyPr wrap="square" lIns="508" tIns="508" rIns="508" bIns="508" rtlCol="0" anchor="ctr"/>
+          <a:lstStyle/>
+          <a:p>
+            <a:pPr algn="ctr" indent="0" marL="0">
+              <a:buNone/>
+            </a:pPr>
+            <a:r>
+              <a:rPr lang="en-US" sz="950" b="1" dirty="0">
+                <a:solidFill>
+                  <a:schemeClr val="bg1"/>
+                </a:solidFill>
+              </a:rPr>
+              <a:t>Spec validator and repair</a:t>
+            </a:r>
+            <a:endParaRPr lang="en-US" sz="950" dirty="0"/>
+          </a:p>
+        </p:txBody>
+      </p:sp>
+      <p:sp>
+        <p:nvSpPr>
+          <p:cNvPr id="54" name="BEETLE 2D STUDIO (/2d): IDEA TO PLAYABLE GAME node sub Spec validator and repair"/>
+          <p:cNvSpPr txBox="1"/>
+          <p:nvPr/>
+        </p:nvSpPr>
+        <p:spPr>
+          <a:xfrm>
+            <a:off x="5449824" y="3072384"/>
+            <a:ext cx="1609344" cy="402336"/>
+          </a:xfrm>
+          <a:prstGeom prst="rect">
+            <a:avLst/>
+          </a:prstGeom>
+          <a:noFill/>
+          <a:ln/>
+        </p:spPr>
+        <p:txBody>
+          <a:bodyPr wrap="square" lIns="0" tIns="0" rIns="0" bIns="0" rtlCol="0" anchor="t"/>
+          <a:lstStyle/>
+          <a:p>
+            <a:pPr algn="ctr" indent="0" marL="0">
+              <a:buNone/>
+            </a:pPr>
+            <a:r>
+              <a:rPr lang="en-US" sz="750" dirty="0">
+                <a:solidFill>
+                  <a:schemeClr val="tx2"/>
+                </a:solidFill>
+              </a:rPr>
+              <a:t>game code: a valid spec, or the exact list of what could not be fixed</a:t>
+            </a:r>
+            <a:endParaRPr lang="en-US" sz="750" dirty="0"/>
+          </a:p>
+        </p:txBody>
+      </p:sp>
+      <p:sp>
+        <p:nvSpPr>
+          <p:cNvPr id="55" name="arrow"/>
+          <p:cNvSpPr/>
+          <p:nvPr/>
+        </p:nvSpPr>
+        <p:spPr>
+          <a:xfrm>
+            <a:off x="7031736" y="2807208"/>
+            <a:ext cx="128016" cy="914"/>
+          </a:xfrm>
+          <a:prstGeom prst="line">
+            <a:avLst/>
+          </a:prstGeom>
+          <a:noFill/>
+          <a:ln w="19050">
+            <a:solidFill>
+              <a:schemeClr val="accent3"/>
+            </a:solidFill>
+            <a:prstDash val="solid"/>
+            <a:tailEnd type="triangle"/>
+          </a:ln>
+        </p:spPr>
+      </p:sp>
+      <p:sp>
+        <p:nvSpPr>
+          <p:cNvPr id="56" name="BEETLE 2D STUDIO (/2d): IDEA TO PLAYABLE GAME node Play, edit in words, export"/>
+          <p:cNvSpPr/>
+          <p:nvPr/>
+        </p:nvSpPr>
+        <p:spPr>
+          <a:xfrm>
+            <a:off x="7187184" y="2578608"/>
+            <a:ext cx="1499616" cy="457200"/>
+          </a:xfrm>
+          <a:prstGeom prst="roundRect">
+            <a:avLst>
+              <a:gd name="adj" fmla="val 16000"/>
+            </a:avLst>
+          </a:prstGeom>
+          <a:solidFill>
+            <a:schemeClr val="bg2"/>
+          </a:solidFill>
+          <a:ln w="9525">
+            <a:solidFill>
+              <a:schemeClr val="accent4"/>
+            </a:solidFill>
+            <a:prstDash val="solid"/>
+          </a:ln>
+        </p:spPr>
+      </p:sp>
+      <p:sp>
+        <p:nvSpPr>
+          <p:cNvPr id="57" name="BEETLE 2D STUDIO (/2d): IDEA TO PLAYABLE GAME node title Play, edit in words, export"/>
+          <p:cNvSpPr txBox="1"/>
+          <p:nvPr/>
+        </p:nvSpPr>
+        <p:spPr>
+          <a:xfrm>
+            <a:off x="7187184" y="2578608"/>
+            <a:ext cx="1499616" cy="457200"/>
+          </a:xfrm>
+          <a:prstGeom prst="rect">
+            <a:avLst/>
+          </a:prstGeom>
+          <a:noFill/>
+          <a:ln/>
+        </p:spPr>
+        <p:txBody>
+          <a:bodyPr wrap="square" lIns="508" tIns="508" rIns="508" bIns="508" rtlCol="0" anchor="ctr"/>
+          <a:lstStyle/>
+          <a:p>
+            <a:pPr algn="ctr" indent="0" marL="0">
+              <a:buNone/>
+            </a:pPr>
+            <a:r>
+              <a:rPr lang="en-US" sz="950" b="1" dirty="0">
+                <a:solidFill>
+                  <a:schemeClr val="tx1"/>
+                </a:solidFill>
+              </a:rPr>
+              <a:t>Play, edit in words, export</a:t>
+            </a:r>
+            <a:endParaRPr lang="en-US" sz="950" dirty="0"/>
+          </a:p>
+        </p:txBody>
+      </p:sp>
+      <p:sp>
+        <p:nvSpPr>
+          <p:cNvPr id="58" name="BEETLE 2D STUDIO (/2d): IDEA TO PLAYABLE GAME node sub Play, edit in words, export"/>
+          <p:cNvSpPr txBox="1"/>
+          <p:nvPr/>
+        </p:nvSpPr>
+        <p:spPr>
+          <a:xfrm>
+            <a:off x="7132320" y="3072384"/>
+            <a:ext cx="1609344" cy="402336"/>
+          </a:xfrm>
+          <a:prstGeom prst="rect">
+            <a:avLst/>
+          </a:prstGeom>
+          <a:noFill/>
+          <a:ln/>
+        </p:spPr>
+        <p:txBody>
+          <a:bodyPr wrap="square" lIns="0" tIns="0" rIns="0" bIns="0" rtlCol="0" anchor="t"/>
+          <a:lstStyle/>
+          <a:p>
+            <a:pPr algn="ctr" indent="0" marL="0">
+              <a:buNone/>
+            </a:pPr>
+            <a:r>
+              <a:rPr lang="en-US" sz="750" dirty="0">
+                <a:solidFill>
+                  <a:schemeClr val="tx2"/>
+                </a:solidFill>
+              </a:rPr>
+              <a:t>known edits patched directly, the rest as model patch ops; single-file HTML</a:t>
+            </a:r>
+            <a:endParaRPr lang="en-US" sz="750" dirty="0"/>
+          </a:p>
+        </p:txBody>
+      </p:sp>
+      <p:sp>
+        <p:nvSpPr>
+          <p:cNvPr id="59" name="lower card 1"/>
+          <p:cNvSpPr/>
+          <p:nvPr/>
+        </p:nvSpPr>
+        <p:spPr>
+          <a:xfrm>
+            <a:off x="457200" y="3547872"/>
+            <a:ext cx="2651760" cy="1161288"/>
+          </a:xfrm>
+          <a:prstGeom prst="roundRect">
+            <a:avLst>
+              <a:gd name="adj" fmla="val 6299"/>
+            </a:avLst>
+          </a:prstGeom>
+          <a:solidFill>
+            <a:schemeClr val="bg2"/>
+          </a:solidFill>
+          <a:ln w="9525">
+            <a:solidFill>
+              <a:schemeClr val="accent4"/>
+            </a:solidFill>
+            <a:prstDash val="solid"/>
+          </a:ln>
+        </p:spPr>
+      </p:sp>
+      <p:sp>
+        <p:nvSpPr>
+          <p:cNvPr id="60" name="label ONE LOCAL MODEL"/>
+          <p:cNvSpPr txBox="1"/>
+          <p:nvPr/>
+        </p:nvSpPr>
+        <p:spPr>
+          <a:xfrm>
+            <a:off x="566928" y="3621024"/>
+            <a:ext cx="2432304" cy="182880"/>
           </a:xfrm>
           <a:prstGeom prst="rect">
             <a:avLst/>
@@ -7481,7 +6527,7 @@
                   <a:schemeClr val="accent1"/>
                 </a:solidFill>
               </a:rPr>
-              <a:t>TWO KINDS OF STATE</a:t>
+              <a:t>ONE LOCAL MODEL</a:t>
             </a:r>
             <a:endParaRPr lang="en-US" sz="850" dirty="0"/>
           </a:p>
@@ -7489,14 +6535,14 @@
       </p:sp>
       <p:sp>
         <p:nvSpPr>
-          <p:cNvPr id="44" name="lower card bullets 1"/>
-          <p:cNvSpPr txBox="1"/>
-          <p:nvPr/>
-        </p:nvSpPr>
-        <p:spPr>
-          <a:xfrm>
-            <a:off x="594360" y="3364992"/>
-            <a:ext cx="2377440" cy="1234440"/>
+          <p:cNvPr id="61" name="lower card bullets 1"/>
+          <p:cNvSpPr txBox="1"/>
+          <p:nvPr/>
+        </p:nvSpPr>
+        <p:spPr>
+          <a:xfrm>
+            <a:off x="566928" y="3840480"/>
+            <a:ext cx="2432304" cy="813816"/>
           </a:xfrm>
           <a:prstGeom prst="rect">
             <a:avLst/>
@@ -7516,14 +6562,14 @@
               <a:buChar char="•"/>
             </a:pPr>
             <a:r>
-              <a:rPr lang="en-US" sz="850" dirty="0">
+              <a:rPr lang="en-US" sz="800" dirty="0">
                 <a:solidFill>
                   <a:schemeClr val="tx1"/>
                 </a:solidFill>
               </a:rPr>
-              <a:t>WorldSpec is structure: islands, bridges, mode, biome, movement, hazard. One version per committed transaction.</a:t>
-            </a:r>
-            <a:endParaRPr lang="en-US" sz="850" dirty="0"/>
+              <a:t>Both engines call the same configured model (qwen3.5:4b) on Ollama at 127.0.0.1; no cloud fallback host exists.</a:t>
+            </a:r>
+            <a:endParaRPr lang="en-US" sz="800" dirty="0"/>
           </a:p>
           <a:p>
             <a:pPr marL="152400" indent="-152400">
@@ -7534,15 +6580,100 @@
               <a:buChar char="•"/>
             </a:pPr>
             <a:r>
-              <a:rPr lang="en-US" sz="850" dirty="0">
+              <a:rPr lang="en-US" sz="800" dirty="0">
                 <a:solidFill>
                   <a:schemeClr val="tx1"/>
                 </a:solidFill>
               </a:rPr>
-              <a:t>SessionState is players, relics, score and the mode objective. The simulation advances it; the agent never writes it.</a:t>
+              <a:t>2D model calls go through the server's loopback endpoint, director token required.</a:t>
+            </a:r>
+            <a:endParaRPr lang="en-US" sz="800" dirty="0"/>
+          </a:p>
+        </p:txBody>
+      </p:sp>
+      <p:sp>
+        <p:nvSpPr>
+          <p:cNvPr id="62" name="lower card 2"/>
+          <p:cNvSpPr/>
+          <p:nvPr/>
+        </p:nvSpPr>
+        <p:spPr>
+          <a:xfrm>
+            <a:off x="3246120" y="3547872"/>
+            <a:ext cx="2651760" cy="1161288"/>
+          </a:xfrm>
+          <a:prstGeom prst="roundRect">
+            <a:avLst>
+              <a:gd name="adj" fmla="val 6299"/>
+            </a:avLst>
+          </a:prstGeom>
+          <a:solidFill>
+            <a:schemeClr val="bg2"/>
+          </a:solidFill>
+          <a:ln w="9525">
+            <a:solidFill>
+              <a:schemeClr val="accent4"/>
+            </a:solidFill>
+            <a:prstDash val="solid"/>
+          </a:ln>
+        </p:spPr>
+      </p:sp>
+      <p:sp>
+        <p:nvSpPr>
+          <p:cNvPr id="63" name="label ONE VALIDATION DISCIPLINE"/>
+          <p:cNvSpPr txBox="1"/>
+          <p:nvPr/>
+        </p:nvSpPr>
+        <p:spPr>
+          <a:xfrm>
+            <a:off x="3355848" y="3621024"/>
+            <a:ext cx="2432304" cy="182880"/>
+          </a:xfrm>
+          <a:prstGeom prst="rect">
+            <a:avLst/>
+          </a:prstGeom>
+          <a:noFill/>
+          <a:ln/>
+        </p:spPr>
+        <p:txBody>
+          <a:bodyPr wrap="square" lIns="0" tIns="0" rIns="0" bIns="0" rtlCol="0" anchor="ctr"/>
+          <a:lstStyle/>
+          <a:p>
+            <a:pPr indent="0" marL="0">
+              <a:buNone/>
+            </a:pPr>
+            <a:r>
+              <a:rPr lang="en-US" sz="850" b="1" spc="200" kern="0" dirty="0">
+                <a:solidFill>
+                  <a:schemeClr val="accent1"/>
+                </a:solidFill>
+              </a:rPr>
+              <a:t>ONE VALIDATION DISCIPLINE</a:t>
             </a:r>
             <a:endParaRPr lang="en-US" sz="850" dirty="0"/>
           </a:p>
+        </p:txBody>
+      </p:sp>
+      <p:sp>
+        <p:nvSpPr>
+          <p:cNvPr id="64" name="lower card bullets 2"/>
+          <p:cNvSpPr txBox="1"/>
+          <p:nvPr/>
+        </p:nvSpPr>
+        <p:spPr>
+          <a:xfrm>
+            <a:off x="3355848" y="3840480"/>
+            <a:ext cx="2432304" cy="813816"/>
+          </a:xfrm>
+          <a:prstGeom prst="rect">
+            <a:avLst/>
+          </a:prstGeom>
+          <a:noFill/>
+          <a:ln/>
+        </p:spPr>
+        <p:txBody>
+          <a:bodyPr wrap="square" lIns="0" tIns="0" rIns="0" bIns="0" rtlCol="0" anchor="t"/>
+          <a:lstStyle/>
           <a:p>
             <a:pPr marL="152400" indent="-152400">
               <a:spcAft>
@@ -7552,100 +6683,15 @@
               <a:buChar char="•"/>
             </a:pPr>
             <a:r>
-              <a:rPr lang="en-US" sz="850" dirty="0">
+              <a:rPr lang="en-US" sz="800" dirty="0">
                 <a:solidFill>
                   <a:schemeClr val="tx1"/>
                 </a:solidFill>
               </a:rPr>
-              <a:t>Commit needs a server-issued proof.</a:t>
-            </a:r>
-            <a:endParaRPr lang="en-US" sz="850" dirty="0"/>
-          </a:p>
-        </p:txBody>
-      </p:sp>
-      <p:sp>
-        <p:nvSpPr>
-          <p:cNvPr id="45" name="lower card 2"/>
-          <p:cNvSpPr/>
-          <p:nvPr/>
-        </p:nvSpPr>
-        <p:spPr>
-          <a:xfrm>
-            <a:off x="3246120" y="3017520"/>
-            <a:ext cx="2651760" cy="1645920"/>
-          </a:xfrm>
-          <a:prstGeom prst="roundRect">
-            <a:avLst>
-              <a:gd name="adj" fmla="val 4444"/>
-            </a:avLst>
-          </a:prstGeom>
-          <a:solidFill>
-            <a:schemeClr val="bg2"/>
-          </a:solidFill>
-          <a:ln w="9525">
-            <a:solidFill>
-              <a:schemeClr val="accent4"/>
-            </a:solidFill>
-            <a:prstDash val="solid"/>
-          </a:ln>
-        </p:spPr>
-      </p:sp>
-      <p:sp>
-        <p:nvSpPr>
-          <p:cNvPr id="46" name="label VALIDATION IS GAME CODE"/>
-          <p:cNvSpPr txBox="1"/>
-          <p:nvPr/>
-        </p:nvSpPr>
-        <p:spPr>
-          <a:xfrm>
-            <a:off x="3383280" y="3127248"/>
-            <a:ext cx="2377440" cy="228600"/>
-          </a:xfrm>
-          <a:prstGeom prst="rect">
-            <a:avLst/>
-          </a:prstGeom>
-          <a:noFill/>
-          <a:ln/>
-        </p:spPr>
-        <p:txBody>
-          <a:bodyPr wrap="square" lIns="0" tIns="0" rIns="0" bIns="0" rtlCol="0" anchor="ctr"/>
-          <a:lstStyle/>
-          <a:p>
-            <a:pPr indent="0" marL="0">
-              <a:buNone/>
-            </a:pPr>
-            <a:r>
-              <a:rPr lang="en-US" sz="850" b="1" spc="200" kern="0" dirty="0">
-                <a:solidFill>
-                  <a:schemeClr val="accent1"/>
-                </a:solidFill>
-              </a:rPr>
-              <a:t>VALIDATION IS GAME CODE</a:t>
-            </a:r>
-            <a:endParaRPr lang="en-US" sz="850" dirty="0"/>
-          </a:p>
-        </p:txBody>
-      </p:sp>
-      <p:sp>
-        <p:nvSpPr>
-          <p:cNvPr id="47" name="lower card bullets 2"/>
-          <p:cNvSpPr txBox="1"/>
-          <p:nvPr/>
-        </p:nvSpPr>
-        <p:spPr>
-          <a:xfrm>
-            <a:off x="3383280" y="3364992"/>
-            <a:ext cx="2377440" cy="1234440"/>
-          </a:xfrm>
-          <a:prstGeom prst="rect">
-            <a:avLst/>
-          </a:prstGeom>
-          <a:noFill/>
-          <a:ln/>
-        </p:spPr>
-        <p:txBody>
-          <a:bodyPr wrap="square" lIns="0" tIns="0" rIns="0" bIns="0" rtlCol="0" anchor="t"/>
-          <a:lstStyle/>
+              <a:t>The model only proposes JSON; game code decides. An LLM saying valid is never approval.</a:t>
+            </a:r>
+            <a:endParaRPr lang="en-US" sz="800" dirty="0"/>
+          </a:p>
           <a:p>
             <a:pPr marL="152400" indent="-152400">
               <a:spcAft>
@@ -7655,15 +6701,100 @@
               <a:buChar char="•"/>
             </a:pPr>
             <a:r>
-              <a:rPr lang="en-US" sz="850" dirty="0">
+              <a:rPr lang="en-US" sz="800" dirty="0">
                 <a:solidFill>
                   <a:schemeClr val="tx1"/>
                 </a:solidFill>
               </a:rPr>
-              <a:t>Geometry, bridge sockets, walk field, reachability with the gate locked, occupied support at commit time.</a:t>
+              <a:t>3D: geometry, sockets, reachability, MODE_INVALID, commit proof. 2D: strict Game Spec checks, repair or refuse.</a:t>
+            </a:r>
+            <a:endParaRPr lang="en-US" sz="800" dirty="0"/>
+          </a:p>
+        </p:txBody>
+      </p:sp>
+      <p:sp>
+        <p:nvSpPr>
+          <p:cNvPr id="65" name="lower card 3"/>
+          <p:cNvSpPr/>
+          <p:nvPr/>
+        </p:nvSpPr>
+        <p:spPr>
+          <a:xfrm>
+            <a:off x="6035040" y="3547872"/>
+            <a:ext cx="2651760" cy="1161288"/>
+          </a:xfrm>
+          <a:prstGeom prst="roundRect">
+            <a:avLst>
+              <a:gd name="adj" fmla="val 6299"/>
+            </a:avLst>
+          </a:prstGeom>
+          <a:solidFill>
+            <a:schemeClr val="bg2"/>
+          </a:solidFill>
+          <a:ln w="9525">
+            <a:solidFill>
+              <a:schemeClr val="accent4"/>
+            </a:solidFill>
+            <a:prstDash val="solid"/>
+          </a:ln>
+        </p:spPr>
+      </p:sp>
+      <p:sp>
+        <p:nvSpPr>
+          <p:cNvPr id="66" name="label 3D STATE AND GROWTH"/>
+          <p:cNvSpPr txBox="1"/>
+          <p:nvPr/>
+        </p:nvSpPr>
+        <p:spPr>
+          <a:xfrm>
+            <a:off x="6144768" y="3621024"/>
+            <a:ext cx="2432304" cy="182880"/>
+          </a:xfrm>
+          <a:prstGeom prst="rect">
+            <a:avLst/>
+          </a:prstGeom>
+          <a:noFill/>
+          <a:ln/>
+        </p:spPr>
+        <p:txBody>
+          <a:bodyPr wrap="square" lIns="0" tIns="0" rIns="0" bIns="0" rtlCol="0" anchor="ctr"/>
+          <a:lstStyle/>
+          <a:p>
+            <a:pPr indent="0" marL="0">
+              <a:buNone/>
+            </a:pPr>
+            <a:r>
+              <a:rPr lang="en-US" sz="850" b="1" spc="200" kern="0" dirty="0">
+                <a:solidFill>
+                  <a:schemeClr val="accent1"/>
+                </a:solidFill>
+              </a:rPr>
+              <a:t>3D STATE AND GROWTH</a:t>
             </a:r>
             <a:endParaRPr lang="en-US" sz="850" dirty="0"/>
           </a:p>
+        </p:txBody>
+      </p:sp>
+      <p:sp>
+        <p:nvSpPr>
+          <p:cNvPr id="67" name="lower card bullets 3"/>
+          <p:cNvSpPr txBox="1"/>
+          <p:nvPr/>
+        </p:nvSpPr>
+        <p:spPr>
+          <a:xfrm>
+            <a:off x="6144768" y="3840480"/>
+            <a:ext cx="2432304" cy="813816"/>
+          </a:xfrm>
+          <a:prstGeom prst="rect">
+            <a:avLst/>
+          </a:prstGeom>
+          <a:noFill/>
+          <a:ln/>
+        </p:spPr>
+        <p:txBody>
+          <a:bodyPr wrap="square" lIns="0" tIns="0" rIns="0" bIns="0" rtlCol="0" anchor="t"/>
+          <a:lstStyle/>
           <a:p>
             <a:pPr marL="152400" indent="-152400">
               <a:spcAft>
@@ -7673,14 +6804,14 @@
               <a:buChar char="•"/>
             </a:pPr>
             <a:r>
-              <a:rPr lang="en-US" sz="850" dirty="0">
+              <a:rPr lang="en-US" sz="800" dirty="0">
                 <a:solidFill>
                   <a:schemeClr val="tx1"/>
                 </a:solidFill>
               </a:rPr>
-              <a:t>MODE_INVALID: relics required above the count, a race with under 2 checkpoints, survival without a rising hazard, a timer outside 20 to 600 s.</a:t>
-            </a:r>
-            <a:endParaRPr lang="en-US" sz="850" dirty="0"/>
+              <a:t>WorldSpec is structure; SessionState is players, relics, score. The agent never writes SessionState.</a:t>
+            </a:r>
+            <a:endParaRPr lang="en-US" sz="800" dirty="0"/>
           </a:p>
           <a:p>
             <a:pPr marL="152400" indent="-152400">
@@ -7691,153 +6822,14 @@
               <a:buChar char="•"/>
             </a:pPr>
             <a:r>
-              <a:rPr lang="en-US" sz="850" dirty="0">
+              <a:rPr lang="en-US" sz="800" dirty="0">
                 <a:solidFill>
                   <a:schemeClr val="tx1"/>
                 </a:solidFill>
               </a:rPr>
-              <a:t>An LLM saying valid is never approval.</a:t>
-            </a:r>
-            <a:endParaRPr lang="en-US" sz="850" dirty="0"/>
-          </a:p>
-        </p:txBody>
-      </p:sp>
-      <p:sp>
-        <p:nvSpPr>
-          <p:cNvPr id="48" name="lower card 3"/>
-          <p:cNvSpPr/>
-          <p:nvPr/>
-        </p:nvSpPr>
-        <p:spPr>
-          <a:xfrm>
-            <a:off x="6035040" y="3017520"/>
-            <a:ext cx="2651760" cy="1645920"/>
-          </a:xfrm>
-          <a:prstGeom prst="roundRect">
-            <a:avLst>
-              <a:gd name="adj" fmla="val 4444"/>
-            </a:avLst>
-          </a:prstGeom>
-          <a:solidFill>
-            <a:schemeClr val="bg2"/>
-          </a:solidFill>
-          <a:ln w="9525">
-            <a:solidFill>
-              <a:schemeClr val="accent4"/>
-            </a:solidFill>
-            <a:prstDash val="solid"/>
-          </a:ln>
-        </p:spPr>
-      </p:sp>
-      <p:sp>
-        <p:nvSpPr>
-          <p:cNvPr id="49" name="label GROWS AHEAD OF PLAYERS"/>
-          <p:cNvSpPr txBox="1"/>
-          <p:nvPr/>
-        </p:nvSpPr>
-        <p:spPr>
-          <a:xfrm>
-            <a:off x="6172200" y="3127248"/>
-            <a:ext cx="2377440" cy="228600"/>
-          </a:xfrm>
-          <a:prstGeom prst="rect">
-            <a:avLst/>
-          </a:prstGeom>
-          <a:noFill/>
-          <a:ln/>
-        </p:spPr>
-        <p:txBody>
-          <a:bodyPr wrap="square" lIns="0" tIns="0" rIns="0" bIns="0" rtlCol="0" anchor="ctr"/>
-          <a:lstStyle/>
-          <a:p>
-            <a:pPr indent="0" marL="0">
-              <a:buNone/>
-            </a:pPr>
-            <a:r>
-              <a:rPr lang="en-US" sz="850" b="1" spc="200" kern="0" dirty="0">
-                <a:solidFill>
-                  <a:schemeClr val="accent1"/>
-                </a:solidFill>
-              </a:rPr>
-              <a:t>GROWS AHEAD OF PLAYERS</a:t>
-            </a:r>
-            <a:endParaRPr lang="en-US" sz="850" dirty="0"/>
-          </a:p>
-        </p:txBody>
-      </p:sp>
-      <p:sp>
-        <p:nvSpPr>
-          <p:cNvPr id="50" name="lower card bullets 3"/>
-          <p:cNvSpPr txBox="1"/>
-          <p:nvPr/>
-        </p:nvSpPr>
-        <p:spPr>
-          <a:xfrm>
-            <a:off x="6172200" y="3364992"/>
-            <a:ext cx="2377440" cy="1234440"/>
-          </a:xfrm>
-          <a:prstGeom prst="rect">
-            <a:avLst/>
-          </a:prstGeom>
-          <a:noFill/>
-          <a:ln/>
-        </p:spPr>
-        <p:txBody>
-          <a:bodyPr wrap="square" lIns="0" tIns="0" rIns="0" bIns="0" rtlCol="0" anchor="t"/>
-          <a:lstStyle/>
-          <a:p>
-            <a:pPr marL="152400" indent="-152400">
-              <a:spcAft>
-                <a:spcPts val="500"/>
-              </a:spcAft>
-              <a:buSzPct val="100000"/>
-              <a:buChar char="•"/>
-            </a:pPr>
-            <a:r>
-              <a:rPr lang="en-US" sz="850" dirty="0">
-                <a:solidFill>
-                  <a:schemeClr val="tx1"/>
-                </a:solidFill>
-              </a:rPr>
-              <a:t>Frontier trigger: a player within 4 m of a rim with no crossing beyond; at least 12 s between extensions.</a:t>
-            </a:r>
-            <a:endParaRPr lang="en-US" sz="850" dirty="0"/>
-          </a:p>
-          <a:p>
-            <a:pPr marL="152400" indent="-152400">
-              <a:spcAft>
-                <a:spcPts val="500"/>
-              </a:spcAft>
-              <a:buSzPct val="100000"/>
-              <a:buChar char="•"/>
-            </a:pPr>
-            <a:r>
-              <a:rPr lang="en-US" sz="850" dirty="0">
-                <a:solidFill>
-                  <a:schemeClr val="tx1"/>
-                </a:solidFill>
-              </a:rPr>
-              <a:t>Beetle opens the request itself (marked auto); the agent answers with add_island, 1 to 2 islands, each bridged from an anchor.</a:t>
-            </a:r>
-            <a:endParaRPr lang="en-US" sz="850" dirty="0"/>
-          </a:p>
-          <a:p>
-            <a:pPr marL="152400" indent="-152400">
-              <a:spcAft>
-                <a:spcPts val="500"/>
-              </a:spcAft>
-              <a:buSzPct val="100000"/>
-              <a:buChar char="•"/>
-            </a:pPr>
-            <a:r>
-              <a:rPr lang="en-US" sz="850" dirty="0">
-                <a:solidFill>
-                  <a:schemeClr val="tx1"/>
-                </a:solidFill>
-              </a:rPr>
-              <a:t>Same validator and commit. Stops at 24 islands, 48 bridges; director toggle.</a:t>
-            </a:r>
-            <a:endParaRPr lang="en-US" sz="850" dirty="0"/>
+              <a:t>Extensions add 1 to 2 islands, at least 12 s apart, up to 24 islands and 48 bridges.</a:t>
+            </a:r>
+            <a:endParaRPr lang="en-US" sz="800" dirty="0"/>
           </a:p>
         </p:txBody>
       </p:sp>
@@ -8250,12 +7242,12 @@
         </p:nvSpPr>
         <p:spPr>
           <a:xfrm>
-            <a:off x="457200" y="1115568"/>
-            <a:ext cx="1975104" cy="987552"/>
+            <a:off x="457200" y="1097280"/>
+            <a:ext cx="1975104" cy="914400"/>
           </a:xfrm>
           <a:prstGeom prst="roundRect">
             <a:avLst>
-              <a:gd name="adj" fmla="val 7407"/>
+              <a:gd name="adj" fmla="val 8000"/>
             </a:avLst>
           </a:prstGeom>
           <a:solidFill>
@@ -8277,7 +7269,7 @@
         </p:nvSpPr>
         <p:spPr>
           <a:xfrm>
-            <a:off x="566928" y="1179576"/>
+            <a:off x="566928" y="1152144"/>
             <a:ext cx="1755648" cy="164592"/>
           </a:xfrm>
           <a:prstGeom prst="rect">
@@ -8313,8 +7305,8 @@
         </p:nvSpPr>
         <p:spPr>
           <a:xfrm>
-            <a:off x="566928" y="1344168"/>
-            <a:ext cx="1755648" cy="256032"/>
+            <a:off x="566928" y="1298448"/>
+            <a:ext cx="1755648" cy="237744"/>
           </a:xfrm>
           <a:prstGeom prst="rect">
             <a:avLst/>
@@ -8349,8 +7341,8 @@
         </p:nvSpPr>
         <p:spPr>
           <a:xfrm>
-            <a:off x="566928" y="1618488"/>
-            <a:ext cx="1755648" cy="457200"/>
+            <a:off x="566928" y="1545336"/>
+            <a:ext cx="1755648" cy="448056"/>
           </a:xfrm>
           <a:prstGeom prst="rect">
             <a:avLst/>
@@ -8385,12 +7377,12 @@
         </p:nvSpPr>
         <p:spPr>
           <a:xfrm>
-            <a:off x="2542032" y="1115568"/>
-            <a:ext cx="1975104" cy="987552"/>
+            <a:off x="2542032" y="1097280"/>
+            <a:ext cx="1975104" cy="914400"/>
           </a:xfrm>
           <a:prstGeom prst="roundRect">
             <a:avLst>
-              <a:gd name="adj" fmla="val 7407"/>
+              <a:gd name="adj" fmla="val 8000"/>
             </a:avLst>
           </a:prstGeom>
           <a:solidFill>
@@ -8412,7 +7404,7 @@
         </p:nvSpPr>
         <p:spPr>
           <a:xfrm>
-            <a:off x="2651760" y="1179576"/>
+            <a:off x="2651760" y="1152144"/>
             <a:ext cx="1755648" cy="164592"/>
           </a:xfrm>
           <a:prstGeom prst="rect">
@@ -8448,8 +7440,8 @@
         </p:nvSpPr>
         <p:spPr>
           <a:xfrm>
-            <a:off x="2651760" y="1344168"/>
-            <a:ext cx="1755648" cy="256032"/>
+            <a:off x="2651760" y="1298448"/>
+            <a:ext cx="1755648" cy="237744"/>
           </a:xfrm>
           <a:prstGeom prst="rect">
             <a:avLst/>
@@ -8484,8 +7476,8 @@
         </p:nvSpPr>
         <p:spPr>
           <a:xfrm>
-            <a:off x="2651760" y="1618488"/>
-            <a:ext cx="1755648" cy="457200"/>
+            <a:off x="2651760" y="1545336"/>
+            <a:ext cx="1755648" cy="448056"/>
           </a:xfrm>
           <a:prstGeom prst="rect">
             <a:avLst/>
@@ -8520,12 +7512,12 @@
         </p:nvSpPr>
         <p:spPr>
           <a:xfrm>
-            <a:off x="4626864" y="1115568"/>
-            <a:ext cx="1975104" cy="987552"/>
+            <a:off x="4626864" y="1097280"/>
+            <a:ext cx="1975104" cy="914400"/>
           </a:xfrm>
           <a:prstGeom prst="roundRect">
             <a:avLst>
-              <a:gd name="adj" fmla="val 7407"/>
+              <a:gd name="adj" fmla="val 8000"/>
             </a:avLst>
           </a:prstGeom>
           <a:solidFill>
@@ -8547,7 +7539,7 @@
         </p:nvSpPr>
         <p:spPr>
           <a:xfrm>
-            <a:off x="4736592" y="1179576"/>
+            <a:off x="4736592" y="1152144"/>
             <a:ext cx="1755648" cy="164592"/>
           </a:xfrm>
           <a:prstGeom prst="rect">
@@ -8583,8 +7575,8 @@
         </p:nvSpPr>
         <p:spPr>
           <a:xfrm>
-            <a:off x="4736592" y="1344168"/>
-            <a:ext cx="1755648" cy="256032"/>
+            <a:off x="4736592" y="1298448"/>
+            <a:ext cx="1755648" cy="237744"/>
           </a:xfrm>
           <a:prstGeom prst="rect">
             <a:avLst/>
@@ -8619,8 +7611,8 @@
         </p:nvSpPr>
         <p:spPr>
           <a:xfrm>
-            <a:off x="4736592" y="1618488"/>
-            <a:ext cx="1755648" cy="457200"/>
+            <a:off x="4736592" y="1545336"/>
+            <a:ext cx="1755648" cy="448056"/>
           </a:xfrm>
           <a:prstGeom prst="rect">
             <a:avLst/>
@@ -8655,12 +7647,12 @@
         </p:nvSpPr>
         <p:spPr>
           <a:xfrm>
-            <a:off x="6711696" y="1115568"/>
-            <a:ext cx="1975104" cy="987552"/>
+            <a:off x="6711696" y="1097280"/>
+            <a:ext cx="1975104" cy="914400"/>
           </a:xfrm>
           <a:prstGeom prst="roundRect">
             <a:avLst>
-              <a:gd name="adj" fmla="val 7407"/>
+              <a:gd name="adj" fmla="val 8000"/>
             </a:avLst>
           </a:prstGeom>
           <a:solidFill>
@@ -8682,7 +7674,7 @@
         </p:nvSpPr>
         <p:spPr>
           <a:xfrm>
-            <a:off x="6821424" y="1179576"/>
+            <a:off x="6821424" y="1152144"/>
             <a:ext cx="1755648" cy="164592"/>
           </a:xfrm>
           <a:prstGeom prst="rect">
@@ -8718,8 +7710,8 @@
         </p:nvSpPr>
         <p:spPr>
           <a:xfrm>
-            <a:off x="6821424" y="1344168"/>
-            <a:ext cx="1755648" cy="256032"/>
+            <a:off x="6821424" y="1298448"/>
+            <a:ext cx="1755648" cy="237744"/>
           </a:xfrm>
           <a:prstGeom prst="rect">
             <a:avLst/>
@@ -8754,8 +7746,8 @@
         </p:nvSpPr>
         <p:spPr>
           <a:xfrm>
-            <a:off x="6821424" y="1618488"/>
-            <a:ext cx="1755648" cy="457200"/>
+            <a:off x="6821424" y="1545336"/>
+            <a:ext cx="1755648" cy="448056"/>
           </a:xfrm>
           <a:prstGeom prst="rect">
             <a:avLst/>
@@ -8790,12 +7782,12 @@
         </p:nvSpPr>
         <p:spPr>
           <a:xfrm>
-            <a:off x="457200" y="2157984"/>
-            <a:ext cx="1975104" cy="987552"/>
+            <a:off x="457200" y="2066544"/>
+            <a:ext cx="1975104" cy="914400"/>
           </a:xfrm>
           <a:prstGeom prst="roundRect">
             <a:avLst>
-              <a:gd name="adj" fmla="val 7407"/>
+              <a:gd name="adj" fmla="val 8000"/>
             </a:avLst>
           </a:prstGeom>
           <a:solidFill>
@@ -8817,7 +7809,7 @@
         </p:nvSpPr>
         <p:spPr>
           <a:xfrm>
-            <a:off x="566928" y="2221992"/>
+            <a:off x="566928" y="2121408"/>
             <a:ext cx="1755648" cy="164592"/>
           </a:xfrm>
           <a:prstGeom prst="rect">
@@ -8853,8 +7845,8 @@
         </p:nvSpPr>
         <p:spPr>
           <a:xfrm>
-            <a:off x="566928" y="2386584"/>
-            <a:ext cx="1755648" cy="256032"/>
+            <a:off x="566928" y="2267712"/>
+            <a:ext cx="1755648" cy="237744"/>
           </a:xfrm>
           <a:prstGeom prst="rect">
             <a:avLst/>
@@ -8889,8 +7881,8 @@
         </p:nvSpPr>
         <p:spPr>
           <a:xfrm>
-            <a:off x="566928" y="2660904"/>
-            <a:ext cx="1755648" cy="457200"/>
+            <a:off x="566928" y="2514600"/>
+            <a:ext cx="1755648" cy="448056"/>
           </a:xfrm>
           <a:prstGeom prst="rect">
             <a:avLst/>
@@ -8925,12 +7917,12 @@
         </p:nvSpPr>
         <p:spPr>
           <a:xfrm>
-            <a:off x="2542032" y="2157984"/>
-            <a:ext cx="1975104" cy="987552"/>
+            <a:off x="2542032" y="2066544"/>
+            <a:ext cx="1975104" cy="914400"/>
           </a:xfrm>
           <a:prstGeom prst="roundRect">
             <a:avLst>
-              <a:gd name="adj" fmla="val 7407"/>
+              <a:gd name="adj" fmla="val 8000"/>
             </a:avLst>
           </a:prstGeom>
           <a:solidFill>
@@ -8952,7 +7944,7 @@
         </p:nvSpPr>
         <p:spPr>
           <a:xfrm>
-            <a:off x="2651760" y="2221992"/>
+            <a:off x="2651760" y="2121408"/>
             <a:ext cx="1755648" cy="164592"/>
           </a:xfrm>
           <a:prstGeom prst="rect">
@@ -8988,8 +7980,8 @@
         </p:nvSpPr>
         <p:spPr>
           <a:xfrm>
-            <a:off x="2651760" y="2386584"/>
-            <a:ext cx="1755648" cy="256032"/>
+            <a:off x="2651760" y="2267712"/>
+            <a:ext cx="1755648" cy="237744"/>
           </a:xfrm>
           <a:prstGeom prst="rect">
             <a:avLst/>
@@ -9024,8 +8016,8 @@
         </p:nvSpPr>
         <p:spPr>
           <a:xfrm>
-            <a:off x="2651760" y="2660904"/>
-            <a:ext cx="1755648" cy="457200"/>
+            <a:off x="2651760" y="2514600"/>
+            <a:ext cx="1755648" cy="448056"/>
           </a:xfrm>
           <a:prstGeom prst="rect">
             <a:avLst/>
@@ -9060,12 +8052,12 @@
         </p:nvSpPr>
         <p:spPr>
           <a:xfrm>
-            <a:off x="4626864" y="2157984"/>
-            <a:ext cx="1975104" cy="987552"/>
+            <a:off x="4626864" y="2066544"/>
+            <a:ext cx="1975104" cy="914400"/>
           </a:xfrm>
           <a:prstGeom prst="roundRect">
             <a:avLst>
-              <a:gd name="adj" fmla="val 7407"/>
+              <a:gd name="adj" fmla="val 8000"/>
             </a:avLst>
           </a:prstGeom>
           <a:solidFill>
@@ -9087,7 +8079,7 @@
         </p:nvSpPr>
         <p:spPr>
           <a:xfrm>
-            <a:off x="4736592" y="2221992"/>
+            <a:off x="4736592" y="2121408"/>
             <a:ext cx="1755648" cy="164592"/>
           </a:xfrm>
           <a:prstGeom prst="rect">
@@ -9123,8 +8115,8 @@
         </p:nvSpPr>
         <p:spPr>
           <a:xfrm>
-            <a:off x="4736592" y="2386584"/>
-            <a:ext cx="1755648" cy="256032"/>
+            <a:off x="4736592" y="2267712"/>
+            <a:ext cx="1755648" cy="237744"/>
           </a:xfrm>
           <a:prstGeom prst="rect">
             <a:avLst/>
@@ -9159,8 +8151,8 @@
         </p:nvSpPr>
         <p:spPr>
           <a:xfrm>
-            <a:off x="4736592" y="2660904"/>
-            <a:ext cx="1755648" cy="457200"/>
+            <a:off x="4736592" y="2514600"/>
+            <a:ext cx="1755648" cy="448056"/>
           </a:xfrm>
           <a:prstGeom prst="rect">
             <a:avLst/>
@@ -9195,12 +8187,12 @@
         </p:nvSpPr>
         <p:spPr>
           <a:xfrm>
-            <a:off x="6711696" y="2157984"/>
-            <a:ext cx="1975104" cy="987552"/>
+            <a:off x="6711696" y="2066544"/>
+            <a:ext cx="1975104" cy="914400"/>
           </a:xfrm>
           <a:prstGeom prst="roundRect">
             <a:avLst>
-              <a:gd name="adj" fmla="val 7407"/>
+              <a:gd name="adj" fmla="val 8000"/>
             </a:avLst>
           </a:prstGeom>
           <a:solidFill>
@@ -9222,7 +8214,7 @@
         </p:nvSpPr>
         <p:spPr>
           <a:xfrm>
-            <a:off x="6821424" y="2221992"/>
+            <a:off x="6821424" y="2121408"/>
             <a:ext cx="1755648" cy="164592"/>
           </a:xfrm>
           <a:prstGeom prst="rect">
@@ -9258,8 +8250,8 @@
         </p:nvSpPr>
         <p:spPr>
           <a:xfrm>
-            <a:off x="6821424" y="2386584"/>
-            <a:ext cx="1755648" cy="256032"/>
+            <a:off x="6821424" y="2267712"/>
+            <a:ext cx="1755648" cy="237744"/>
           </a:xfrm>
           <a:prstGeom prst="rect">
             <a:avLst/>
@@ -9294,8 +8286,8 @@
         </p:nvSpPr>
         <p:spPr>
           <a:xfrm>
-            <a:off x="6821424" y="2660904"/>
-            <a:ext cx="1755648" cy="457200"/>
+            <a:off x="6821424" y="2514600"/>
+            <a:ext cx="1755648" cy="448056"/>
           </a:xfrm>
           <a:prstGeom prst="rect">
             <a:avLst/>
@@ -9330,12 +8322,12 @@
         </p:nvSpPr>
         <p:spPr>
           <a:xfrm>
-            <a:off x="457200" y="3200400"/>
-            <a:ext cx="1975104" cy="987552"/>
+            <a:off x="457200" y="3035808"/>
+            <a:ext cx="1975104" cy="914400"/>
           </a:xfrm>
           <a:prstGeom prst="roundRect">
             <a:avLst>
-              <a:gd name="adj" fmla="val 7407"/>
+              <a:gd name="adj" fmla="val 8000"/>
             </a:avLst>
           </a:prstGeom>
           <a:solidFill>
@@ -9357,7 +8349,7 @@
         </p:nvSpPr>
         <p:spPr>
           <a:xfrm>
-            <a:off x="566928" y="3264408"/>
+            <a:off x="566928" y="3090672"/>
             <a:ext cx="1755648" cy="164592"/>
           </a:xfrm>
           <a:prstGeom prst="rect">
@@ -9393,8 +8385,8 @@
         </p:nvSpPr>
         <p:spPr>
           <a:xfrm>
-            <a:off x="566928" y="3429000"/>
-            <a:ext cx="1755648" cy="256032"/>
+            <a:off x="566928" y="3236976"/>
+            <a:ext cx="1755648" cy="237744"/>
           </a:xfrm>
           <a:prstGeom prst="rect">
             <a:avLst/>
@@ -9429,8 +8421,8 @@
         </p:nvSpPr>
         <p:spPr>
           <a:xfrm>
-            <a:off x="566928" y="3703320"/>
-            <a:ext cx="1755648" cy="457200"/>
+            <a:off x="566928" y="3483864"/>
+            <a:ext cx="1755648" cy="448056"/>
           </a:xfrm>
           <a:prstGeom prst="rect">
             <a:avLst/>
@@ -9465,12 +8457,12 @@
         </p:nvSpPr>
         <p:spPr>
           <a:xfrm>
-            <a:off x="2542032" y="3200400"/>
-            <a:ext cx="1975104" cy="987552"/>
+            <a:off x="2542032" y="3035808"/>
+            <a:ext cx="1975104" cy="914400"/>
           </a:xfrm>
           <a:prstGeom prst="roundRect">
             <a:avLst>
-              <a:gd name="adj" fmla="val 7407"/>
+              <a:gd name="adj" fmla="val 8000"/>
             </a:avLst>
           </a:prstGeom>
           <a:solidFill>
@@ -9492,7 +8484,7 @@
         </p:nvSpPr>
         <p:spPr>
           <a:xfrm>
-            <a:off x="2651760" y="3264408"/>
+            <a:off x="2651760" y="3090672"/>
             <a:ext cx="1755648" cy="164592"/>
           </a:xfrm>
           <a:prstGeom prst="rect">
@@ -9528,8 +8520,8 @@
         </p:nvSpPr>
         <p:spPr>
           <a:xfrm>
-            <a:off x="2651760" y="3429000"/>
-            <a:ext cx="1755648" cy="256032"/>
+            <a:off x="2651760" y="3236976"/>
+            <a:ext cx="1755648" cy="237744"/>
           </a:xfrm>
           <a:prstGeom prst="rect">
             <a:avLst/>
@@ -9564,8 +8556,8 @@
         </p:nvSpPr>
         <p:spPr>
           <a:xfrm>
-            <a:off x="2651760" y="3703320"/>
-            <a:ext cx="1755648" cy="457200"/>
+            <a:off x="2651760" y="3483864"/>
+            <a:ext cx="1755648" cy="448056"/>
           </a:xfrm>
           <a:prstGeom prst="rect">
             <a:avLst/>
@@ -9600,12 +8592,12 @@
         </p:nvSpPr>
         <p:spPr>
           <a:xfrm>
-            <a:off x="4626864" y="3200400"/>
-            <a:ext cx="1975104" cy="987552"/>
+            <a:off x="4626864" y="3035808"/>
+            <a:ext cx="1975104" cy="914400"/>
           </a:xfrm>
           <a:prstGeom prst="roundRect">
             <a:avLst>
-              <a:gd name="adj" fmla="val 7407"/>
+              <a:gd name="adj" fmla="val 8000"/>
             </a:avLst>
           </a:prstGeom>
           <a:solidFill>
@@ -9627,7 +8619,7 @@
         </p:nvSpPr>
         <p:spPr>
           <a:xfrm>
-            <a:off x="4736592" y="3264408"/>
+            <a:off x="4736592" y="3090672"/>
             <a:ext cx="1755648" cy="164592"/>
           </a:xfrm>
           <a:prstGeom prst="rect">
@@ -9663,8 +8655,8 @@
         </p:nvSpPr>
         <p:spPr>
           <a:xfrm>
-            <a:off x="4736592" y="3429000"/>
-            <a:ext cx="1755648" cy="256032"/>
+            <a:off x="4736592" y="3236976"/>
+            <a:ext cx="1755648" cy="237744"/>
           </a:xfrm>
           <a:prstGeom prst="rect">
             <a:avLst/>
@@ -9699,8 +8691,8 @@
         </p:nvSpPr>
         <p:spPr>
           <a:xfrm>
-            <a:off x="4736592" y="3703320"/>
-            <a:ext cx="1755648" cy="457200"/>
+            <a:off x="4736592" y="3483864"/>
+            <a:ext cx="1755648" cy="448056"/>
           </a:xfrm>
           <a:prstGeom prst="rect">
             <a:avLst/>
@@ -9735,12 +8727,12 @@
         </p:nvSpPr>
         <p:spPr>
           <a:xfrm>
-            <a:off x="6711696" y="3200400"/>
-            <a:ext cx="1975104" cy="987552"/>
+            <a:off x="6711696" y="3035808"/>
+            <a:ext cx="1975104" cy="914400"/>
           </a:xfrm>
           <a:prstGeom prst="roundRect">
             <a:avLst>
-              <a:gd name="adj" fmla="val 7407"/>
+              <a:gd name="adj" fmla="val 8000"/>
             </a:avLst>
           </a:prstGeom>
           <a:solidFill>
@@ -9762,7 +8754,7 @@
         </p:nvSpPr>
         <p:spPr>
           <a:xfrm>
-            <a:off x="6821424" y="3264408"/>
+            <a:off x="6821424" y="3090672"/>
             <a:ext cx="1755648" cy="164592"/>
           </a:xfrm>
           <a:prstGeom prst="rect">
@@ -9798,8 +8790,8 @@
         </p:nvSpPr>
         <p:spPr>
           <a:xfrm>
-            <a:off x="6821424" y="3429000"/>
-            <a:ext cx="1755648" cy="256032"/>
+            <a:off x="6821424" y="3236976"/>
+            <a:ext cx="1755648" cy="237744"/>
           </a:xfrm>
           <a:prstGeom prst="rect">
             <a:avLst/>
@@ -9834,8 +8826,8 @@
         </p:nvSpPr>
         <p:spPr>
           <a:xfrm>
-            <a:off x="6821424" y="3703320"/>
-            <a:ext cx="1755648" cy="457200"/>
+            <a:off x="6821424" y="3483864"/>
+            <a:ext cx="1755648" cy="448056"/>
           </a:xfrm>
           <a:prstGeom prst="rect">
             <a:avLst/>
@@ -9856,7 +8848,7 @@
                   <a:schemeClr val="tx2"/>
                 </a:solidFill>
               </a:rPr>
-              <a:t>only a before record exists (offline-proof/1791049273707.json: egress not blocked, server not up). Procedure: docs/OFFLINE_PROOF.md. Nothing claimed.</a:t>
+              <a:t>only a before record exists (offline-proof/1791049273707.json: egress not blocked, server not up). Procedure: docs/OFFLINE_PROOF.md.</a:t>
             </a:r>
             <a:endParaRPr lang="en-US" sz="680" dirty="0"/>
           </a:p>
@@ -9870,8 +8862,8 @@
         </p:nvSpPr>
         <p:spPr>
           <a:xfrm>
-            <a:off x="457200" y="4206240"/>
-            <a:ext cx="8229600" cy="274320"/>
+            <a:off x="457200" y="3986784"/>
+            <a:ext cx="8229600" cy="246888"/>
           </a:xfrm>
           <a:prstGeom prst="rect">
             <a:avLst/>
@@ -9900,13 +8892,60 @@
       </p:sp>
       <p:sp>
         <p:nvSpPr>
-          <p:cNvPr id="64" name="sources note"/>
-          <p:cNvSpPr txBox="1"/>
-          <p:nvPr/>
-        </p:nvSpPr>
-        <p:spPr>
-          <a:xfrm>
-            <a:off x="457200" y="4498848"/>
+          <p:cNvPr id="64" name="2d status"/>
+          <p:cNvSpPr txBox="1"/>
+          <p:nvPr/>
+        </p:nvSpPr>
+        <p:spPr>
+          <a:xfrm>
+            <a:off x="457200" y="4242816"/>
+            <a:ext cx="8229600" cy="246888"/>
+          </a:xfrm>
+          <a:prstGeom prst="rect">
+            <a:avLst/>
+          </a:prstGeom>
+          <a:noFill/>
+          <a:ln/>
+        </p:spPr>
+        <p:txBody>
+          <a:bodyPr wrap="square" lIns="0" tIns="0" rIns="0" bIns="0" rtlCol="0" anchor="t"/>
+          <a:lstStyle/>
+          <a:p>
+            <a:pPr indent="0" marL="0">
+              <a:buNone/>
+            </a:pPr>
+            <a:r>
+              <a:rPr lang="en-US" sz="800" b="1" spc="100" kern="0" dirty="0">
+                <a:solidFill>
+                  <a:schemeClr val="accent1"/>
+                </a:solidFill>
+              </a:rPr>
+              <a:t>BEETLE 2D, PROMPT TO PLAYABLE  </a:t>
+            </a:r>
+            <a:pPr indent="0" marL="0">
+              <a:buNone/>
+            </a:pPr>
+            <a:r>
+              <a:rPr lang="en-US" sz="800" b="1" dirty="0">
+                <a:solidFill>
+                  <a:schemeClr val="tx1"/>
+                </a:solidFill>
+              </a:rPr>
+              <a:t>6 of 6 prompts to a validated, bot-playtested spec in 10.7 to 16.9 s (model 10.3 to 12.7 s), first model call, 0 repairs, 6 genres. Direct Ollama, shared GPU, Node harness: asset painting, worker hop and the browser not included (RESULTS.md 16:04 CDT).</a:t>
+            </a:r>
+            <a:endParaRPr lang="en-US" sz="800" dirty="0"/>
+          </a:p>
+        </p:txBody>
+      </p:sp>
+      <p:sp>
+        <p:nvSpPr>
+          <p:cNvPr id="65" name="sources note"/>
+          <p:cNvSpPr txBox="1"/>
+          <p:nvPr/>
+        </p:nvSpPr>
+        <p:spPr>
+          <a:xfrm>
+            <a:off x="457200" y="4507992"/>
             <a:ext cx="8229600" cy="237744"/>
           </a:xfrm>
           <a:prstGeom prst="rect">
@@ -9923,14 +8962,14 @@
               <a:buNone/>
             </a:pPr>
             <a:r>
-              <a:rPr lang="en-US" sz="700" i="1" dirty="0">
+              <a:rPr lang="en-US" sz="680" i="1" dirty="0">
                 <a:solidFill>
                   <a:schemeClr val="tx2"/>
                 </a:solidFill>
               </a:rPr>
-              <a:t>Direct-harness timings are labelled [direct] in every report; OpenClaw timings are from the real server after the Ollama daemon restart at 13:43 CDT. Each card names its GPU state because the daemon was shared for most of the day. Mode briefs were measured at 14:25 to 14:42 CDT in direct mode with no controllers connected (docs/RESULTS.md).</a:t>
-            </a:r>
-            <a:endParaRPr lang="en-US" sz="700" dirty="0"/>
+              <a:t>Direct-harness timings are labelled [direct] in every report; OpenClaw timings are from the real server after the Ollama daemon restart at 13:43 CDT. Each card names its GPU state because the daemon was shared for most of the day. Mode briefs were measured at 14:25 to 14:42 CDT in direct mode with no controllers connected (docs/RESULTS.md). The 12 cards are the 3D engine; the 2D line is the 2D studio.</a:t>
+            </a:r>
+            <a:endParaRPr lang="en-US" sz="680" dirty="0"/>
           </a:p>
         </p:txBody>
       </p:sp>
